--- a/Task_2/Task2Powerpoint.pptx
+++ b/Task_2/Task2Powerpoint.pptx
@@ -5,15 +5,16 @@
     <p:sldMasterId id="2147483648" r:id="rId1"/>
   </p:sldMasterIdLst>
   <p:notesMasterIdLst>
-    <p:notesMasterId r:id="rId8"/>
+    <p:notesMasterId r:id="rId9"/>
   </p:notesMasterIdLst>
   <p:sldIdLst>
     <p:sldId id="256" r:id="rId2"/>
     <p:sldId id="257" r:id="rId3"/>
     <p:sldId id="258" r:id="rId4"/>
     <p:sldId id="261" r:id="rId5"/>
-    <p:sldId id="259" r:id="rId6"/>
-    <p:sldId id="260" r:id="rId7"/>
+    <p:sldId id="262" r:id="rId6"/>
+    <p:sldId id="259" r:id="rId7"/>
+    <p:sldId id="260" r:id="rId8"/>
   </p:sldIdLst>
   <p:sldSz cx="12192000" cy="6858000"/>
   <p:notesSz cx="9144000" cy="6858000"/>
@@ -157,6 +158,9 @@
         </p15:guide>
       </p15:sldGuideLst>
     </p:ext>
+    <p:ext uri="{2D200454-40CA-4A62-9FC3-DE9A4176ACB9}">
+      <p15:notesGuideLst xmlns:p15="http://schemas.microsoft.com/office/powerpoint/2012/main"/>
+    </p:ext>
   </p:extLst>
 </p:presentation>
 </file>
@@ -243,7 +247,7 @@
           <a:p>
             <a:fld id="{52D5829F-2F94-0B44-A96D-AE852A87AC61}" type="datetimeFigureOut">
               <a:rPr lang="de-DE" smtClean="0"/>
-              <a:t>13.06.26</a:t>
+              <a:t>15.06.26</a:t>
             </a:fld>
             <a:endParaRPr lang="de-DE"/>
           </a:p>
@@ -3811,7 +3815,22 @@
           <a:p>
             <a:r>
               <a:rPr lang="de-DE" dirty="0"/>
-              <a:t>Merkmalsanalyse</a:t>
+              <a:t>Merkmalsanalyse (Feature </a:t>
+            </a:r>
+            <a:r>
+              <a:rPr lang="de-DE" dirty="0" err="1"/>
+              <a:t>Extraction</a:t>
+            </a:r>
+            <a:r>
+              <a:rPr lang="de-DE" dirty="0"/>
+              <a:t>)</a:t>
+            </a:r>
+          </a:p>
+          <a:p>
+            <a:pPr lvl="1"/>
+            <a:r>
+              <a:rPr lang="de-DE" dirty="0"/>
+              <a:t>Betrachtete Merkmale</a:t>
             </a:r>
           </a:p>
           <a:p>
@@ -3836,7 +3855,10 @@
           </a:p>
           <a:p>
             <a:pPr lvl="1"/>
-            <a:endParaRPr lang="de-DE" dirty="0"/>
+            <a:r>
+              <a:rPr lang="de-DE" dirty="0"/>
+              <a:t>?</a:t>
+            </a:r>
           </a:p>
           <a:p>
             <a:pPr lvl="1"/>
@@ -4060,6 +4082,17 @@
               <a:rPr lang="de-DE" dirty="0" err="1"/>
               <a:t>Mekmalsanalyse</a:t>
             </a:r>
+            <a:r>
+              <a:rPr lang="de-DE" dirty="0"/>
+              <a:t>:</a:t>
+            </a:r>
+            <a:br>
+              <a:rPr lang="de-DE" dirty="0"/>
+            </a:br>
+            <a:r>
+              <a:rPr lang="de-DE" sz="2400" dirty="0"/>
+              <a:t>Betrachtete Merkmale</a:t>
+            </a:r>
             <a:endParaRPr lang="de-DE" dirty="0"/>
           </a:p>
         </p:txBody>
@@ -4087,36 +4120,90 @@
           <a:p>
             <a:r>
               <a:rPr lang="de-DE" dirty="0"/>
-              <a:t>Welche </a:t>
-            </a:r>
+              <a:t>1. Spektrale Merkmale (Frequenzbereich)</a:t>
+            </a:r>
+          </a:p>
+          <a:p>
+            <a:pPr lvl="1"/>
+            <a:r>
+              <a:rPr lang="de-DE" dirty="0"/>
+              <a:t>MFCCs (13 Koeffizienten): Bilden die Spektraleinhüllende auf der Mel-Skala ab </a:t>
+            </a:r>
+          </a:p>
+          <a:p>
+            <a:pPr lvl="1"/>
             <a:r>
               <a:rPr lang="de-DE" dirty="0" err="1"/>
-              <a:t>merkmale</a:t>
+              <a:t>Spectral</a:t>
             </a:r>
             <a:r>
               <a:rPr lang="de-DE" dirty="0"/>
-              <a:t> gibt es/haben wir </a:t>
+              <a:t> </a:t>
+            </a:r>
+            <a:r>
+              <a:rPr lang="de-DE" dirty="0" err="1"/>
+              <a:t>Centroid</a:t>
+            </a:r>
+            <a:r>
+              <a:rPr lang="de-DE" dirty="0"/>
+              <a:t> (Schwerpunkt):Gibt an, bei welcher Frequenz der "Masseschwerpunkt" des Spektrums liegt. Maß für die "Helligkeit" des Klangs.</a:t>
             </a:r>
           </a:p>
           <a:p>
             <a:pPr lvl="1"/>
             <a:r>
+              <a:rPr lang="de-DE" dirty="0" err="1"/>
+              <a:t>Spectral</a:t>
+            </a:r>
+            <a:r>
               <a:rPr lang="de-DE" dirty="0"/>
-              <a:t>-&gt; zu finden in </a:t>
+              <a:t> </a:t>
             </a:r>
             <a:r>
               <a:rPr lang="de-DE" dirty="0" err="1"/>
-              <a:t>src</a:t>
+              <a:t>Bandwidth</a:t>
             </a:r>
             <a:r>
               <a:rPr lang="de-DE" dirty="0"/>
-              <a:t>/</a:t>
-            </a:r>
+              <a:t> (Bandbreite): Beschreibt die Spreizung des Spektrums um den Schwerpunkt</a:t>
+            </a:r>
+          </a:p>
+          <a:p>
+            <a:pPr lvl="1"/>
             <a:r>
               <a:rPr lang="de-DE" dirty="0" err="1"/>
-              <a:t>gear_analysis</a:t>
-            </a:r>
-            <a:endParaRPr lang="de-DE" dirty="0"/>
+              <a:t>Spectral</a:t>
+            </a:r>
+            <a:r>
+              <a:rPr lang="de-DE" dirty="0"/>
+              <a:t> Roll-off: Die Frequenz, unter der ein bestimmter Prozentsatz (meist 85%) der Spektralenergie liegt</a:t>
+            </a:r>
+          </a:p>
+          <a:p>
+            <a:pPr lvl="1"/>
+            <a:r>
+              <a:rPr lang="de-DE" dirty="0" err="1"/>
+              <a:t>Spectral</a:t>
+            </a:r>
+            <a:r>
+              <a:rPr lang="de-DE" dirty="0"/>
+              <a:t> </a:t>
+            </a:r>
+            <a:r>
+              <a:rPr lang="de-DE" dirty="0" err="1"/>
+              <a:t>Contrast</a:t>
+            </a:r>
+            <a:r>
+              <a:rPr lang="de-DE" dirty="0"/>
+              <a:t>: Misst den Unterschied zwischen Spitzen und Tälern im Spektrum.</a:t>
+            </a:r>
+          </a:p>
+          <a:p>
+            <a:pPr lvl="1"/>
+            <a:r>
+              <a:rPr lang="de-DE" dirty="0"/>
+              <a:t>Chroma Features (STFT/CENS): Projizieren das gesamte Spektrum auf 12 Halbtonklassen</a:t>
+            </a:r>
           </a:p>
         </p:txBody>
       </p:sp>
@@ -4169,6 +4256,172 @@
 </file>
 
 <file path=ppt/slides/slide5.xml><?xml version="1.0" encoding="utf-8"?>
+<p:sld xmlns:a="http://schemas.openxmlformats.org/drawingml/2006/main" xmlns:r="http://schemas.openxmlformats.org/officeDocument/2006/relationships" xmlns:p="http://schemas.openxmlformats.org/presentationml/2006/main">
+  <p:cSld>
+    <p:spTree>
+      <p:nvGrpSpPr>
+        <p:cNvPr id="1" name="">
+          <a:extLst>
+            <a:ext uri="{FF2B5EF4-FFF2-40B4-BE49-F238E27FC236}">
+              <a16:creationId xmlns:a16="http://schemas.microsoft.com/office/drawing/2014/main" id="{0F570CD2-0EFA-C90D-FDB3-9ADFD1668184}"/>
+            </a:ext>
+          </a:extLst>
+        </p:cNvPr>
+        <p:cNvGrpSpPr/>
+        <p:nvPr/>
+      </p:nvGrpSpPr>
+      <p:grpSpPr>
+        <a:xfrm>
+          <a:off x="0" y="0"/>
+          <a:ext cx="0" cy="0"/>
+          <a:chOff x="0" y="0"/>
+          <a:chExt cx="0" cy="0"/>
+        </a:xfrm>
+      </p:grpSpPr>
+      <p:sp>
+        <p:nvSpPr>
+          <p:cNvPr id="5" name="Titel 4">
+            <a:extLst>
+              <a:ext uri="{FF2B5EF4-FFF2-40B4-BE49-F238E27FC236}">
+                <a16:creationId xmlns:a16="http://schemas.microsoft.com/office/drawing/2014/main" id="{319D2184-7ACE-A16F-5F1A-5155AEBDB03E}"/>
+              </a:ext>
+            </a:extLst>
+          </p:cNvPr>
+          <p:cNvSpPr>
+            <a:spLocks noGrp="1"/>
+          </p:cNvSpPr>
+          <p:nvPr>
+            <p:ph type="title"/>
+          </p:nvPr>
+        </p:nvSpPr>
+        <p:spPr/>
+        <p:txBody>
+          <a:bodyPr/>
+          <a:lstStyle/>
+          <a:p>
+            <a:r>
+              <a:rPr lang="de-DE" dirty="0" err="1"/>
+              <a:t>Mekmalsanalyse</a:t>
+            </a:r>
+            <a:r>
+              <a:rPr lang="de-DE" dirty="0"/>
+              <a:t>:</a:t>
+            </a:r>
+            <a:br>
+              <a:rPr lang="de-DE" dirty="0"/>
+            </a:br>
+            <a:r>
+              <a:rPr lang="de-DE" sz="2400" dirty="0"/>
+              <a:t>Betrachtete Merkmale &amp; PCA</a:t>
+            </a:r>
+            <a:endParaRPr lang="de-DE" dirty="0"/>
+          </a:p>
+        </p:txBody>
+      </p:sp>
+      <p:sp>
+        <p:nvSpPr>
+          <p:cNvPr id="10" name="Inhaltsplatzhalter 9">
+            <a:extLst>
+              <a:ext uri="{FF2B5EF4-FFF2-40B4-BE49-F238E27FC236}">
+                <a16:creationId xmlns:a16="http://schemas.microsoft.com/office/drawing/2014/main" id="{19C4C79F-28B8-72C8-A1FA-5C00426D9315}"/>
+              </a:ext>
+            </a:extLst>
+          </p:cNvPr>
+          <p:cNvSpPr>
+            <a:spLocks noGrp="1"/>
+          </p:cNvSpPr>
+          <p:nvPr>
+            <p:ph idx="1"/>
+          </p:nvPr>
+        </p:nvSpPr>
+        <p:spPr/>
+        <p:txBody>
+          <a:bodyPr/>
+          <a:lstStyle/>
+          <a:p>
+            <a:r>
+              <a:rPr lang="de-DE" dirty="0"/>
+              <a:t>2. Zeitbereichs-Merkmale</a:t>
+            </a:r>
+          </a:p>
+          <a:p>
+            <a:pPr lvl="1"/>
+            <a:r>
+              <a:rPr lang="de-DE" dirty="0"/>
+              <a:t>Zero Crossing Rate (ZCR): Die Rate, mit der das Signal die Nulllinie kreuzt. Ein Maß für die Frequenz und Impulsivität (Rauschen)</a:t>
+            </a:r>
+          </a:p>
+          <a:p>
+            <a:pPr lvl="1"/>
+            <a:r>
+              <a:rPr lang="de-DE" dirty="0"/>
+              <a:t>Frame Energy (RMS): Der quadratische Mittelwert der Amplitude.</a:t>
+            </a:r>
+          </a:p>
+          <a:p>
+            <a:r>
+              <a:rPr lang="de-DE" dirty="0"/>
+              <a:t>3. Dynamische Merkmale</a:t>
+            </a:r>
+          </a:p>
+          <a:p>
+            <a:pPr lvl="1"/>
+            <a:r>
+              <a:rPr lang="de-DE" dirty="0"/>
+              <a:t>Delta-Features: Die erste zeitliche Ableitung der MFCCs.</a:t>
+            </a:r>
+          </a:p>
+        </p:txBody>
+      </p:sp>
+      <p:sp>
+        <p:nvSpPr>
+          <p:cNvPr id="4" name="Foliennummernplatzhalter 3">
+            <a:extLst>
+              <a:ext uri="{FF2B5EF4-FFF2-40B4-BE49-F238E27FC236}">
+                <a16:creationId xmlns:a16="http://schemas.microsoft.com/office/drawing/2014/main" id="{2E80E235-26A6-A7CB-B35C-87EBFB13852B}"/>
+              </a:ext>
+            </a:extLst>
+          </p:cNvPr>
+          <p:cNvSpPr>
+            <a:spLocks noGrp="1"/>
+          </p:cNvSpPr>
+          <p:nvPr>
+            <p:ph type="sldNum" sz="quarter" idx="10"/>
+          </p:nvPr>
+        </p:nvSpPr>
+        <p:spPr/>
+        <p:txBody>
+          <a:bodyPr/>
+          <a:lstStyle/>
+          <a:p>
+            <a:pPr>
+              <a:defRPr/>
+            </a:pPr>
+            <a:fld id="{A0424531-ACBB-43B0-9536-C2FB0D769E6C}" type="slidenum">
+              <a:rPr lang="de-DE" altLang="de-DE" smtClean="0"/>
+              <a:pPr>
+                <a:defRPr/>
+              </a:pPr>
+              <a:t>5</a:t>
+            </a:fld>
+            <a:endParaRPr lang="de-DE" altLang="de-DE" dirty="0"/>
+          </a:p>
+        </p:txBody>
+      </p:sp>
+    </p:spTree>
+    <p:extLst>
+      <p:ext uri="{BB962C8B-B14F-4D97-AF65-F5344CB8AC3E}">
+        <p14:creationId xmlns:p14="http://schemas.microsoft.com/office/powerpoint/2010/main" val="2854101102"/>
+      </p:ext>
+    </p:extLst>
+  </p:cSld>
+  <p:clrMapOvr>
+    <a:masterClrMapping/>
+  </p:clrMapOvr>
+</p:sld>
+</file>
+
+<file path=ppt/slides/slide6.xml><?xml version="1.0" encoding="utf-8"?>
 <p:sld xmlns:a="http://schemas.openxmlformats.org/drawingml/2006/main" xmlns:r="http://schemas.openxmlformats.org/officeDocument/2006/relationships" xmlns:p="http://schemas.openxmlformats.org/presentationml/2006/main">
   <p:cSld>
     <p:spTree>
@@ -4355,7 +4608,7 @@
               <a:pPr>
                 <a:defRPr/>
               </a:pPr>
-              <a:t>5</a:t>
+              <a:t>6</a:t>
             </a:fld>
             <a:endParaRPr lang="de-DE" altLang="de-DE" dirty="0"/>
           </a:p>
@@ -4374,7 +4627,7 @@
 </p:sld>
 </file>
 
-<file path=ppt/slides/slide6.xml><?xml version="1.0" encoding="utf-8"?>
+<file path=ppt/slides/slide7.xml><?xml version="1.0" encoding="utf-8"?>
 <p:sld xmlns:a="http://schemas.openxmlformats.org/drawingml/2006/main" xmlns:r="http://schemas.openxmlformats.org/officeDocument/2006/relationships" xmlns:p="http://schemas.openxmlformats.org/presentationml/2006/main">
   <p:cSld>
     <p:spTree>
@@ -4486,7 +4739,7 @@
               <a:pPr>
                 <a:defRPr/>
               </a:pPr>
-              <a:t>6</a:t>
+              <a:t>7</a:t>
             </a:fld>
             <a:endParaRPr lang="de-DE" altLang="de-DE" dirty="0"/>
           </a:p>

--- a/Task_2/Task2Powerpoint.pptx
+++ b/Task_2/Task2Powerpoint.pptx
@@ -247,7 +247,7 @@
           <a:p>
             <a:fld id="{52D5829F-2F94-0B44-A96D-AE852A87AC61}" type="datetimeFigureOut">
               <a:rPr lang="de-DE" smtClean="0"/>
-              <a:t>15.06.26</a:t>
+              <a:t>18.06.2026</a:t>
             </a:fld>
             <a:endParaRPr lang="de-DE"/>
           </a:p>
@@ -3857,7 +3857,7 @@
             <a:pPr lvl="1"/>
             <a:r>
               <a:rPr lang="de-DE" dirty="0"/>
-              <a:t>?</a:t>
+              <a:t>Erklären PC1 und PC2 der PCA</a:t>
             </a:r>
           </a:p>
           <a:p>
@@ -3881,18 +3881,10 @@
             </a:r>
           </a:p>
           <a:p>
-            <a:pPr lvl="1"/>
             <a:r>
               <a:rPr lang="de-DE" dirty="0"/>
-              <a:t>Code</a:t>
-            </a:r>
-          </a:p>
-          <a:p>
-            <a:r>
-              <a:rPr lang="de-DE" dirty="0" err="1"/>
-              <a:t>Ergebnise</a:t>
-            </a:r>
-            <a:endParaRPr lang="de-DE" dirty="0"/>
+              <a:t>Ergebnisse</a:t>
+            </a:r>
           </a:p>
           <a:p>
             <a:endParaRPr lang="de-DE" dirty="0"/>
@@ -4146,7 +4138,7 @@
             </a:r>
             <a:r>
               <a:rPr lang="de-DE" dirty="0"/>
-              <a:t> (Schwerpunkt):Gibt an, bei welcher Frequenz der "Masseschwerpunkt" des Spektrums liegt. Maß für die "Helligkeit" des Klangs.</a:t>
+              <a:t> (Schwerpunkt): Gibt an, bei welcher Frequenz der "Masseschwerpunkt" des Spektrums liegt. Maß für die "Helligkeit" des Klangs.</a:t>
             </a:r>
           </a:p>
           <a:p>

--- a/Task_2/Task2Powerpoint.pptx
+++ b/Task_2/Task2Powerpoint.pptx
@@ -5,7 +5,7 @@
     <p:sldMasterId id="2147483648" r:id="rId1"/>
   </p:sldMasterIdLst>
   <p:notesMasterIdLst>
-    <p:notesMasterId r:id="rId9"/>
+    <p:notesMasterId r:id="rId11"/>
   </p:notesMasterIdLst>
   <p:sldIdLst>
     <p:sldId id="256" r:id="rId2"/>
@@ -13,8 +13,10 @@
     <p:sldId id="258" r:id="rId4"/>
     <p:sldId id="261" r:id="rId5"/>
     <p:sldId id="262" r:id="rId6"/>
-    <p:sldId id="259" r:id="rId7"/>
+    <p:sldId id="263" r:id="rId7"/>
     <p:sldId id="260" r:id="rId8"/>
+    <p:sldId id="264" r:id="rId9"/>
+    <p:sldId id="265" r:id="rId10"/>
   </p:sldIdLst>
   <p:sldSz cx="12192000" cy="6858000"/>
   <p:notesSz cx="9144000" cy="6858000"/>
@@ -247,7 +249,7 @@
           <a:p>
             <a:fld id="{52D5829F-2F94-0B44-A96D-AE852A87AC61}" type="datetimeFigureOut">
               <a:rPr lang="de-DE" smtClean="0"/>
-              <a:t>18.06.2026</a:t>
+              <a:t>19.06.26</a:t>
             </a:fld>
             <a:endParaRPr lang="de-DE"/>
           </a:p>
@@ -3837,7 +3839,20 @@
             <a:pPr lvl="1"/>
             <a:r>
               <a:rPr lang="de-DE" dirty="0"/>
-              <a:t>Wahl des Verfahrens</a:t>
+              <a:t>Code</a:t>
+            </a:r>
+          </a:p>
+          <a:p>
+            <a:r>
+              <a:rPr lang="de-DE" dirty="0"/>
+              <a:t>Hauptkomponentenanalyse</a:t>
+            </a:r>
+          </a:p>
+          <a:p>
+            <a:pPr lvl="1"/>
+            <a:r>
+              <a:rPr lang="de-DE" dirty="0"/>
+              <a:t>Erklären PC1 und PC2 der PCA</a:t>
             </a:r>
           </a:p>
           <a:p>
@@ -3850,27 +3865,7 @@
           <a:p>
             <a:r>
               <a:rPr lang="de-DE" dirty="0"/>
-              <a:t>Hauptkomponentenanalyse</a:t>
-            </a:r>
-          </a:p>
-          <a:p>
-            <a:pPr lvl="1"/>
-            <a:r>
-              <a:rPr lang="de-DE" dirty="0"/>
-              <a:t>Erklären PC1 und PC2 der PCA</a:t>
-            </a:r>
-          </a:p>
-          <a:p>
-            <a:pPr lvl="1"/>
-            <a:r>
-              <a:rPr lang="de-DE" dirty="0"/>
-              <a:t>Code</a:t>
-            </a:r>
-          </a:p>
-          <a:p>
-            <a:r>
-              <a:rPr lang="de-DE" dirty="0"/>
-              <a:t>Visualisierung</a:t>
+              <a:t>(Visualisierung)</a:t>
             </a:r>
           </a:p>
           <a:p>
@@ -4304,7 +4299,7 @@
             </a:br>
             <a:r>
               <a:rPr lang="de-DE" sz="2400" dirty="0"/>
-              <a:t>Betrachtete Merkmale &amp; PCA</a:t>
+              <a:t>Betrachtete Merkmale</a:t>
             </a:r>
             <a:endParaRPr lang="de-DE" dirty="0"/>
           </a:p>
@@ -4421,7 +4416,7 @@
         <p:cNvPr id="1" name="">
           <a:extLst>
             <a:ext uri="{FF2B5EF4-FFF2-40B4-BE49-F238E27FC236}">
-              <a16:creationId xmlns:a16="http://schemas.microsoft.com/office/drawing/2014/main" id="{989EF7E1-A933-E9B5-B253-6F4949985345}"/>
+              <a16:creationId xmlns:a16="http://schemas.microsoft.com/office/drawing/2014/main" id="{C20FC91D-551D-3A12-3B4F-FD19284DCF06}"/>
             </a:ext>
           </a:extLst>
         </p:cNvPr>
@@ -4441,7 +4436,7 @@
           <p:cNvPr id="5" name="Titel 4">
             <a:extLst>
               <a:ext uri="{FF2B5EF4-FFF2-40B4-BE49-F238E27FC236}">
-                <a16:creationId xmlns:a16="http://schemas.microsoft.com/office/drawing/2014/main" id="{62F1CD10-A4AB-B4AB-9BE2-80433FCB3278}"/>
+                <a16:creationId xmlns:a16="http://schemas.microsoft.com/office/drawing/2014/main" id="{90B690C3-0EC0-B10F-E8C5-83DB6885A9A5}"/>
               </a:ext>
             </a:extLst>
           </p:cNvPr>
@@ -4461,22 +4456,27 @@
               <a:rPr lang="de-DE" dirty="0" err="1"/>
               <a:t>Mekmalsanalyse</a:t>
             </a:r>
+            <a:r>
+              <a:rPr lang="de-DE" dirty="0"/>
+              <a:t>:</a:t>
+            </a:r>
             <a:br>
               <a:rPr lang="de-DE" dirty="0"/>
             </a:br>
             <a:r>
-              <a:rPr lang="de-DE" dirty="0"/>
-              <a:t>- Wahl des Verfahrens</a:t>
-            </a:r>
-          </a:p>
-        </p:txBody>
-      </p:sp>
-      <p:sp>
-        <p:nvSpPr>
-          <p:cNvPr id="6" name="Textplatzhalter 5">
+              <a:rPr lang="de-DE" sz="2400" dirty="0"/>
+              <a:t>Code</a:t>
+            </a:r>
+            <a:endParaRPr lang="de-DE" dirty="0"/>
+          </a:p>
+        </p:txBody>
+      </p:sp>
+      <p:sp>
+        <p:nvSpPr>
+          <p:cNvPr id="10" name="Inhaltsplatzhalter 9">
             <a:extLst>
               <a:ext uri="{FF2B5EF4-FFF2-40B4-BE49-F238E27FC236}">
-                <a16:creationId xmlns:a16="http://schemas.microsoft.com/office/drawing/2014/main" id="{55C44D33-13A3-8713-B234-8D3908F0D9BC}"/>
+                <a16:creationId xmlns:a16="http://schemas.microsoft.com/office/drawing/2014/main" id="{854D615C-F8E5-5FC5-C401-2791DF60C45B}"/>
               </a:ext>
             </a:extLst>
           </p:cNvPr>
@@ -4484,7 +4484,7 @@
             <a:spLocks noGrp="1"/>
           </p:cNvSpPr>
           <p:nvPr>
-            <p:ph type="body" idx="1"/>
+            <p:ph idx="1"/>
           </p:nvPr>
         </p:nvSpPr>
         <p:spPr/>
@@ -4492,82 +4492,26 @@
           <a:bodyPr/>
           <a:lstStyle/>
           <a:p>
-            <a:endParaRPr lang="de-DE"/>
-          </a:p>
-        </p:txBody>
-      </p:sp>
-      <p:sp>
-        <p:nvSpPr>
-          <p:cNvPr id="7" name="Inhaltsplatzhalter 6">
-            <a:extLst>
-              <a:ext uri="{FF2B5EF4-FFF2-40B4-BE49-F238E27FC236}">
-                <a16:creationId xmlns:a16="http://schemas.microsoft.com/office/drawing/2014/main" id="{1BFC87EB-56B9-DCF9-7F95-DCBA353E28FB}"/>
-              </a:ext>
-            </a:extLst>
-          </p:cNvPr>
-          <p:cNvSpPr>
-            <a:spLocks noGrp="1"/>
-          </p:cNvSpPr>
-          <p:nvPr>
-            <p:ph sz="half" idx="2"/>
-          </p:nvPr>
-        </p:nvSpPr>
-        <p:spPr/>
-        <p:txBody>
-          <a:bodyPr/>
-          <a:lstStyle/>
-          <a:p>
-            <a:endParaRPr lang="de-DE"/>
-          </a:p>
-        </p:txBody>
-      </p:sp>
-      <p:sp>
-        <p:nvSpPr>
-          <p:cNvPr id="8" name="Textplatzhalter 7">
-            <a:extLst>
-              <a:ext uri="{FF2B5EF4-FFF2-40B4-BE49-F238E27FC236}">
-                <a16:creationId xmlns:a16="http://schemas.microsoft.com/office/drawing/2014/main" id="{BDF3C8A3-59CC-8521-6232-3ECB66864F2C}"/>
-              </a:ext>
-            </a:extLst>
-          </p:cNvPr>
-          <p:cNvSpPr>
-            <a:spLocks noGrp="1"/>
-          </p:cNvSpPr>
-          <p:nvPr>
-            <p:ph type="body" sz="quarter" idx="3"/>
-          </p:nvPr>
-        </p:nvSpPr>
-        <p:spPr/>
-        <p:txBody>
-          <a:bodyPr/>
-          <a:lstStyle/>
-          <a:p>
-            <a:endParaRPr lang="de-DE"/>
-          </a:p>
-        </p:txBody>
-      </p:sp>
-      <p:sp>
-        <p:nvSpPr>
-          <p:cNvPr id="9" name="Inhaltsplatzhalter 8">
-            <a:extLst>
-              <a:ext uri="{FF2B5EF4-FFF2-40B4-BE49-F238E27FC236}">
-                <a16:creationId xmlns:a16="http://schemas.microsoft.com/office/drawing/2014/main" id="{1D7CCF7A-2093-A797-49E1-505BCD402F34}"/>
-              </a:ext>
-            </a:extLst>
-          </p:cNvPr>
-          <p:cNvSpPr>
-            <a:spLocks noGrp="1"/>
-          </p:cNvSpPr>
-          <p:nvPr>
-            <p:ph sz="quarter" idx="4"/>
-          </p:nvPr>
-        </p:nvSpPr>
-        <p:spPr/>
-        <p:txBody>
-          <a:bodyPr/>
-          <a:lstStyle/>
-          <a:p>
-            <a:endParaRPr lang="de-DE"/>
+            <a:r>
+              <a:rPr lang="de-DE" dirty="0"/>
+              <a:t>Bild vom Code / Beschreibung von </a:t>
+            </a:r>
+            <a:r>
+              <a:rPr lang="de-DE" dirty="0" err="1"/>
+              <a:t>methoden</a:t>
+            </a:r>
+            <a:r>
+              <a:rPr lang="de-DE" dirty="0"/>
+              <a:t>/ </a:t>
+            </a:r>
+            <a:r>
+              <a:rPr lang="de-DE" dirty="0" err="1"/>
+              <a:t>Bib</a:t>
+            </a:r>
+            <a:r>
+              <a:rPr lang="de-DE" dirty="0"/>
+              <a:t>. ?</a:t>
+            </a:r>
           </a:p>
         </p:txBody>
       </p:sp>
@@ -4576,7 +4520,7 @@
           <p:cNvPr id="4" name="Foliennummernplatzhalter 3">
             <a:extLst>
               <a:ext uri="{FF2B5EF4-FFF2-40B4-BE49-F238E27FC236}">
-                <a16:creationId xmlns:a16="http://schemas.microsoft.com/office/drawing/2014/main" id="{29963019-2664-0DE3-6798-02302A91631B}"/>
+                <a16:creationId xmlns:a16="http://schemas.microsoft.com/office/drawing/2014/main" id="{D5EAB245-0953-ACDB-0AB6-BCE17E472796}"/>
               </a:ext>
             </a:extLst>
           </p:cNvPr>
@@ -4609,7 +4553,7 @@
     </p:spTree>
     <p:extLst>
       <p:ext uri="{BB962C8B-B14F-4D97-AF65-F5344CB8AC3E}">
-        <p14:creationId xmlns:p14="http://schemas.microsoft.com/office/powerpoint/2010/main" val="844952061"/>
+        <p14:creationId xmlns:p14="http://schemas.microsoft.com/office/powerpoint/2010/main" val="1000162485"/>
       </p:ext>
     </p:extLst>
   </p:cSld>
@@ -4741,6 +4685,300 @@
     <p:extLst>
       <p:ext uri="{BB962C8B-B14F-4D97-AF65-F5344CB8AC3E}">
         <p14:creationId xmlns:p14="http://schemas.microsoft.com/office/powerpoint/2010/main" val="1705237617"/>
+      </p:ext>
+    </p:extLst>
+  </p:cSld>
+  <p:clrMapOvr>
+    <a:masterClrMapping/>
+  </p:clrMapOvr>
+</p:sld>
+</file>
+
+<file path=ppt/slides/slide8.xml><?xml version="1.0" encoding="utf-8"?>
+<p:sld xmlns:a="http://schemas.openxmlformats.org/drawingml/2006/main" xmlns:r="http://schemas.openxmlformats.org/officeDocument/2006/relationships" xmlns:p="http://schemas.openxmlformats.org/presentationml/2006/main">
+  <p:cSld>
+    <p:spTree>
+      <p:nvGrpSpPr>
+        <p:cNvPr id="1" name="">
+          <a:extLst>
+            <a:ext uri="{FF2B5EF4-FFF2-40B4-BE49-F238E27FC236}">
+              <a16:creationId xmlns:a16="http://schemas.microsoft.com/office/drawing/2014/main" id="{7F4DC8C5-6B84-38F9-328D-9E6B4534A4D9}"/>
+            </a:ext>
+          </a:extLst>
+        </p:cNvPr>
+        <p:cNvGrpSpPr/>
+        <p:nvPr/>
+      </p:nvGrpSpPr>
+      <p:grpSpPr>
+        <a:xfrm>
+          <a:off x="0" y="0"/>
+          <a:ext cx="0" cy="0"/>
+          <a:chOff x="0" y="0"/>
+          <a:chExt cx="0" cy="0"/>
+        </a:xfrm>
+      </p:grpSpPr>
+      <p:sp>
+        <p:nvSpPr>
+          <p:cNvPr id="5" name="Titel 4">
+            <a:extLst>
+              <a:ext uri="{FF2B5EF4-FFF2-40B4-BE49-F238E27FC236}">
+                <a16:creationId xmlns:a16="http://schemas.microsoft.com/office/drawing/2014/main" id="{A45EFF85-64A8-E302-6981-1B6B7F7F8DDD}"/>
+              </a:ext>
+            </a:extLst>
+          </p:cNvPr>
+          <p:cNvSpPr>
+            <a:spLocks noGrp="1"/>
+          </p:cNvSpPr>
+          <p:nvPr>
+            <p:ph type="title"/>
+          </p:nvPr>
+        </p:nvSpPr>
+        <p:spPr/>
+        <p:txBody>
+          <a:bodyPr/>
+          <a:lstStyle/>
+          <a:p>
+            <a:r>
+              <a:rPr lang="de-DE" dirty="0" err="1"/>
+              <a:t>Hauptkompenentenanalyse</a:t>
+            </a:r>
+            <a:r>
+              <a:rPr lang="de-DE" dirty="0"/>
+              <a:t>:</a:t>
+            </a:r>
+            <a:br>
+              <a:rPr lang="de-DE" dirty="0"/>
+            </a:br>
+            <a:r>
+              <a:rPr lang="de-DE" sz="2400" dirty="0"/>
+              <a:t>???</a:t>
+            </a:r>
+            <a:endParaRPr lang="de-DE" dirty="0"/>
+          </a:p>
+        </p:txBody>
+      </p:sp>
+      <p:sp>
+        <p:nvSpPr>
+          <p:cNvPr id="10" name="Inhaltsplatzhalter 9">
+            <a:extLst>
+              <a:ext uri="{FF2B5EF4-FFF2-40B4-BE49-F238E27FC236}">
+                <a16:creationId xmlns:a16="http://schemas.microsoft.com/office/drawing/2014/main" id="{2F3D23E5-4A0C-AAB9-6742-8234C303F895}"/>
+              </a:ext>
+            </a:extLst>
+          </p:cNvPr>
+          <p:cNvSpPr>
+            <a:spLocks noGrp="1"/>
+          </p:cNvSpPr>
+          <p:nvPr>
+            <p:ph idx="1"/>
+          </p:nvPr>
+        </p:nvSpPr>
+        <p:spPr/>
+        <p:txBody>
+          <a:bodyPr/>
+          <a:lstStyle/>
+          <a:p>
+            <a:r>
+              <a:rPr lang="de-DE" dirty="0"/>
+              <a:t>??</a:t>
+            </a:r>
+          </a:p>
+        </p:txBody>
+      </p:sp>
+      <p:sp>
+        <p:nvSpPr>
+          <p:cNvPr id="4" name="Foliennummernplatzhalter 3">
+            <a:extLst>
+              <a:ext uri="{FF2B5EF4-FFF2-40B4-BE49-F238E27FC236}">
+                <a16:creationId xmlns:a16="http://schemas.microsoft.com/office/drawing/2014/main" id="{4261BA00-8F21-42B1-B753-4444F47505B5}"/>
+              </a:ext>
+            </a:extLst>
+          </p:cNvPr>
+          <p:cNvSpPr>
+            <a:spLocks noGrp="1"/>
+          </p:cNvSpPr>
+          <p:nvPr>
+            <p:ph type="sldNum" sz="quarter" idx="10"/>
+          </p:nvPr>
+        </p:nvSpPr>
+        <p:spPr/>
+        <p:txBody>
+          <a:bodyPr/>
+          <a:lstStyle/>
+          <a:p>
+            <a:pPr>
+              <a:defRPr/>
+            </a:pPr>
+            <a:fld id="{A0424531-ACBB-43B0-9536-C2FB0D769E6C}" type="slidenum">
+              <a:rPr lang="de-DE" altLang="de-DE" smtClean="0"/>
+              <a:pPr>
+                <a:defRPr/>
+              </a:pPr>
+              <a:t>8</a:t>
+            </a:fld>
+            <a:endParaRPr lang="de-DE" altLang="de-DE" dirty="0"/>
+          </a:p>
+        </p:txBody>
+      </p:sp>
+    </p:spTree>
+    <p:extLst>
+      <p:ext uri="{BB962C8B-B14F-4D97-AF65-F5344CB8AC3E}">
+        <p14:creationId xmlns:p14="http://schemas.microsoft.com/office/powerpoint/2010/main" val="3056035922"/>
+      </p:ext>
+    </p:extLst>
+  </p:cSld>
+  <p:clrMapOvr>
+    <a:masterClrMapping/>
+  </p:clrMapOvr>
+</p:sld>
+</file>
+
+<file path=ppt/slides/slide9.xml><?xml version="1.0" encoding="utf-8"?>
+<p:sld xmlns:a="http://schemas.openxmlformats.org/drawingml/2006/main" xmlns:r="http://schemas.openxmlformats.org/officeDocument/2006/relationships" xmlns:p="http://schemas.openxmlformats.org/presentationml/2006/main">
+  <p:cSld>
+    <p:spTree>
+      <p:nvGrpSpPr>
+        <p:cNvPr id="1" name="">
+          <a:extLst>
+            <a:ext uri="{FF2B5EF4-FFF2-40B4-BE49-F238E27FC236}">
+              <a16:creationId xmlns:a16="http://schemas.microsoft.com/office/drawing/2014/main" id="{711A0095-53C7-3F5E-182B-1605E00E0FC0}"/>
+            </a:ext>
+          </a:extLst>
+        </p:cNvPr>
+        <p:cNvGrpSpPr/>
+        <p:nvPr/>
+      </p:nvGrpSpPr>
+      <p:grpSpPr>
+        <a:xfrm>
+          <a:off x="0" y="0"/>
+          <a:ext cx="0" cy="0"/>
+          <a:chOff x="0" y="0"/>
+          <a:chExt cx="0" cy="0"/>
+        </a:xfrm>
+      </p:grpSpPr>
+      <p:sp>
+        <p:nvSpPr>
+          <p:cNvPr id="5" name="Titel 4">
+            <a:extLst>
+              <a:ext uri="{FF2B5EF4-FFF2-40B4-BE49-F238E27FC236}">
+                <a16:creationId xmlns:a16="http://schemas.microsoft.com/office/drawing/2014/main" id="{D757B5A5-6051-FFCC-0340-6B2A2309AADC}"/>
+              </a:ext>
+            </a:extLst>
+          </p:cNvPr>
+          <p:cNvSpPr>
+            <a:spLocks noGrp="1"/>
+          </p:cNvSpPr>
+          <p:nvPr>
+            <p:ph type="title"/>
+          </p:nvPr>
+        </p:nvSpPr>
+        <p:spPr/>
+        <p:txBody>
+          <a:bodyPr/>
+          <a:lstStyle/>
+          <a:p>
+            <a:r>
+              <a:rPr lang="de-DE" dirty="0" err="1"/>
+              <a:t>Hauptkompenentenanalyse</a:t>
+            </a:r>
+            <a:r>
+              <a:rPr lang="de-DE" dirty="0"/>
+              <a:t>:</a:t>
+            </a:r>
+            <a:br>
+              <a:rPr lang="de-DE" dirty="0"/>
+            </a:br>
+            <a:r>
+              <a:rPr lang="de-DE" sz="2400" dirty="0"/>
+              <a:t>Code</a:t>
+            </a:r>
+            <a:endParaRPr lang="de-DE" dirty="0"/>
+          </a:p>
+        </p:txBody>
+      </p:sp>
+      <p:sp>
+        <p:nvSpPr>
+          <p:cNvPr id="10" name="Inhaltsplatzhalter 9">
+            <a:extLst>
+              <a:ext uri="{FF2B5EF4-FFF2-40B4-BE49-F238E27FC236}">
+                <a16:creationId xmlns:a16="http://schemas.microsoft.com/office/drawing/2014/main" id="{E0628943-4EE5-D432-8B1F-90A882908DCF}"/>
+              </a:ext>
+            </a:extLst>
+          </p:cNvPr>
+          <p:cNvSpPr>
+            <a:spLocks noGrp="1"/>
+          </p:cNvSpPr>
+          <p:nvPr>
+            <p:ph idx="1"/>
+          </p:nvPr>
+        </p:nvSpPr>
+        <p:spPr/>
+        <p:txBody>
+          <a:bodyPr/>
+          <a:lstStyle/>
+          <a:p>
+            <a:r>
+              <a:rPr lang="de-DE" dirty="0"/>
+              <a:t>Bild vom Code / Beschreibung von </a:t>
+            </a:r>
+            <a:r>
+              <a:rPr lang="de-DE" dirty="0" err="1"/>
+              <a:t>methoden</a:t>
+            </a:r>
+            <a:r>
+              <a:rPr lang="de-DE" dirty="0"/>
+              <a:t>/ </a:t>
+            </a:r>
+            <a:r>
+              <a:rPr lang="de-DE" dirty="0" err="1"/>
+              <a:t>Bib</a:t>
+            </a:r>
+            <a:r>
+              <a:rPr lang="de-DE" dirty="0"/>
+              <a:t>. ?</a:t>
+            </a:r>
+          </a:p>
+        </p:txBody>
+      </p:sp>
+      <p:sp>
+        <p:nvSpPr>
+          <p:cNvPr id="4" name="Foliennummernplatzhalter 3">
+            <a:extLst>
+              <a:ext uri="{FF2B5EF4-FFF2-40B4-BE49-F238E27FC236}">
+                <a16:creationId xmlns:a16="http://schemas.microsoft.com/office/drawing/2014/main" id="{953E53DE-A460-5286-4612-B8186AA66233}"/>
+              </a:ext>
+            </a:extLst>
+          </p:cNvPr>
+          <p:cNvSpPr>
+            <a:spLocks noGrp="1"/>
+          </p:cNvSpPr>
+          <p:nvPr>
+            <p:ph type="sldNum" sz="quarter" idx="10"/>
+          </p:nvPr>
+        </p:nvSpPr>
+        <p:spPr/>
+        <p:txBody>
+          <a:bodyPr/>
+          <a:lstStyle/>
+          <a:p>
+            <a:pPr>
+              <a:defRPr/>
+            </a:pPr>
+            <a:fld id="{A0424531-ACBB-43B0-9536-C2FB0D769E6C}" type="slidenum">
+              <a:rPr lang="de-DE" altLang="de-DE" smtClean="0"/>
+              <a:pPr>
+                <a:defRPr/>
+              </a:pPr>
+              <a:t>9</a:t>
+            </a:fld>
+            <a:endParaRPr lang="de-DE" altLang="de-DE" dirty="0"/>
+          </a:p>
+        </p:txBody>
+      </p:sp>
+    </p:spTree>
+    <p:extLst>
+      <p:ext uri="{BB962C8B-B14F-4D97-AF65-F5344CB8AC3E}">
+        <p14:creationId xmlns:p14="http://schemas.microsoft.com/office/powerpoint/2010/main" val="1026886502"/>
       </p:ext>
     </p:extLst>
   </p:cSld>

--- a/Task_2/Task2Powerpoint.pptx
+++ b/Task_2/Task2Powerpoint.pptx
@@ -5,18 +5,19 @@
     <p:sldMasterId id="2147483648" r:id="rId1"/>
   </p:sldMasterIdLst>
   <p:notesMasterIdLst>
-    <p:notesMasterId r:id="rId11"/>
+    <p:notesMasterId r:id="rId12"/>
   </p:notesMasterIdLst>
   <p:sldIdLst>
     <p:sldId id="256" r:id="rId2"/>
     <p:sldId id="257" r:id="rId3"/>
-    <p:sldId id="258" r:id="rId4"/>
-    <p:sldId id="261" r:id="rId5"/>
-    <p:sldId id="262" r:id="rId6"/>
-    <p:sldId id="263" r:id="rId7"/>
-    <p:sldId id="260" r:id="rId8"/>
-    <p:sldId id="264" r:id="rId9"/>
-    <p:sldId id="265" r:id="rId10"/>
+    <p:sldId id="266" r:id="rId4"/>
+    <p:sldId id="258" r:id="rId5"/>
+    <p:sldId id="263" r:id="rId6"/>
+    <p:sldId id="267" r:id="rId7"/>
+    <p:sldId id="268" r:id="rId8"/>
+    <p:sldId id="260" r:id="rId9"/>
+    <p:sldId id="264" r:id="rId10"/>
+    <p:sldId id="265" r:id="rId11"/>
   </p:sldIdLst>
   <p:sldSz cx="12192000" cy="6858000"/>
   <p:notesSz cx="9144000" cy="6858000"/>
@@ -591,6 +592,431 @@
     <p:extLst>
       <p:ext uri="{BB962C8B-B14F-4D97-AF65-F5344CB8AC3E}">
         <p14:creationId xmlns:p14="http://schemas.microsoft.com/office/powerpoint/2010/main" val="2591093164"/>
+      </p:ext>
+    </p:extLst>
+  </p:cSld>
+  <p:clrMapOvr>
+    <a:masterClrMapping/>
+  </p:clrMapOvr>
+</p:notes>
+</file>
+
+<file path=ppt/notesSlides/notesSlide2.xml><?xml version="1.0" encoding="utf-8"?>
+<p:notes xmlns:a="http://schemas.openxmlformats.org/drawingml/2006/main" xmlns:r="http://schemas.openxmlformats.org/officeDocument/2006/relationships" xmlns:p="http://schemas.openxmlformats.org/presentationml/2006/main">
+  <p:cSld>
+    <p:spTree>
+      <p:nvGrpSpPr>
+        <p:cNvPr id="1" name=""/>
+        <p:cNvGrpSpPr/>
+        <p:nvPr/>
+      </p:nvGrpSpPr>
+      <p:grpSpPr>
+        <a:xfrm>
+          <a:off x="0" y="0"/>
+          <a:ext cx="0" cy="0"/>
+          <a:chOff x="0" y="0"/>
+          <a:chExt cx="0" cy="0"/>
+        </a:xfrm>
+      </p:grpSpPr>
+      <p:sp>
+        <p:nvSpPr>
+          <p:cNvPr id="2" name="Folienbildplatzhalter 1"/>
+          <p:cNvSpPr>
+            <a:spLocks noGrp="1" noRot="1" noChangeAspect="1"/>
+          </p:cNvSpPr>
+          <p:nvPr>
+            <p:ph type="sldImg"/>
+          </p:nvPr>
+        </p:nvSpPr>
+        <p:spPr/>
+      </p:sp>
+      <p:sp>
+        <p:nvSpPr>
+          <p:cNvPr id="3" name="Notizenplatzhalter 2"/>
+          <p:cNvSpPr>
+            <a:spLocks noGrp="1"/>
+          </p:cNvSpPr>
+          <p:nvPr>
+            <p:ph type="body" idx="1"/>
+          </p:nvPr>
+        </p:nvSpPr>
+        <p:spPr/>
+        <p:txBody>
+          <a:bodyPr/>
+          <a:lstStyle/>
+          <a:p>
+            <a:r>
+              <a:rPr lang="de-DE" dirty="0"/>
+              <a:t>1. Spektrale Merkmale (Frequenzbereich)</a:t>
+            </a:r>
+          </a:p>
+          <a:p>
+            <a:pPr lvl="1"/>
+            <a:r>
+              <a:rPr lang="de-DE" dirty="0"/>
+              <a:t>MFCCs (13 Koeffizienten): Bilden die Spektraleinhüllende auf der Mel-Skala ab </a:t>
+            </a:r>
+          </a:p>
+          <a:p>
+            <a:pPr lvl="1"/>
+            <a:r>
+              <a:rPr lang="de-DE" dirty="0" err="1"/>
+              <a:t>Spectral</a:t>
+            </a:r>
+            <a:r>
+              <a:rPr lang="de-DE" dirty="0"/>
+              <a:t> </a:t>
+            </a:r>
+            <a:r>
+              <a:rPr lang="de-DE" dirty="0" err="1"/>
+              <a:t>Centroid</a:t>
+            </a:r>
+            <a:r>
+              <a:rPr lang="de-DE" dirty="0"/>
+              <a:t> (Schwerpunkt): Gibt an, bei welcher Frequenz der "Masseschwerpunkt" des Spektrums liegt. Maß für die "Helligkeit" des Klangs.</a:t>
+            </a:r>
+          </a:p>
+          <a:p>
+            <a:pPr lvl="1"/>
+            <a:r>
+              <a:rPr lang="de-DE" dirty="0" err="1"/>
+              <a:t>Spectral</a:t>
+            </a:r>
+            <a:r>
+              <a:rPr lang="de-DE" dirty="0"/>
+              <a:t> </a:t>
+            </a:r>
+            <a:r>
+              <a:rPr lang="de-DE" dirty="0" err="1"/>
+              <a:t>Bandwidth</a:t>
+            </a:r>
+            <a:r>
+              <a:rPr lang="de-DE" dirty="0"/>
+              <a:t> (Bandbreite): Beschreibt die Spreizung des Spektrums um den Schwerpunkt</a:t>
+            </a:r>
+          </a:p>
+          <a:p>
+            <a:pPr lvl="1"/>
+            <a:r>
+              <a:rPr lang="de-DE" dirty="0" err="1"/>
+              <a:t>Spectral</a:t>
+            </a:r>
+            <a:r>
+              <a:rPr lang="de-DE" dirty="0"/>
+              <a:t> Roll-off: Die Frequenz, unter der ein bestimmter Prozentsatz (meist 85%) der Spektralenergie liegt</a:t>
+            </a:r>
+          </a:p>
+          <a:p>
+            <a:pPr lvl="1"/>
+            <a:r>
+              <a:rPr lang="de-DE" dirty="0" err="1"/>
+              <a:t>Spectral</a:t>
+            </a:r>
+            <a:r>
+              <a:rPr lang="de-DE" dirty="0"/>
+              <a:t> </a:t>
+            </a:r>
+            <a:r>
+              <a:rPr lang="de-DE" dirty="0" err="1"/>
+              <a:t>Contrast</a:t>
+            </a:r>
+            <a:r>
+              <a:rPr lang="de-DE" dirty="0"/>
+              <a:t>: Misst den Unterschied zwischen Spitzen und Tälern im Spektrum.</a:t>
+            </a:r>
+          </a:p>
+          <a:p>
+            <a:pPr lvl="1"/>
+            <a:r>
+              <a:rPr lang="de-DE" dirty="0"/>
+              <a:t>Chroma Features (STFT/CENS): Projizieren das gesamte Spektrum auf 12 Halbtonklassen</a:t>
+            </a:r>
+          </a:p>
+          <a:p>
+            <a:r>
+              <a:rPr lang="de-DE" dirty="0"/>
+              <a:t>2. Zeitbereichs-Merkmale</a:t>
+            </a:r>
+          </a:p>
+          <a:p>
+            <a:pPr lvl="1"/>
+            <a:r>
+              <a:rPr lang="de-DE" dirty="0"/>
+              <a:t>Zero Crossing Rate (ZCR): Die Rate, mit der das Signal die Nulllinie kreuzt. Ein Maß für die Frequenz und Impulsivität (Rauschen)</a:t>
+            </a:r>
+          </a:p>
+          <a:p>
+            <a:pPr lvl="1"/>
+            <a:r>
+              <a:rPr lang="de-DE" dirty="0"/>
+              <a:t>Frame Energy (RMS): Der quadratische Mittelwert der Amplitude.</a:t>
+            </a:r>
+          </a:p>
+          <a:p>
+            <a:r>
+              <a:rPr lang="de-DE" dirty="0"/>
+              <a:t>3. Dynamische Merkmale</a:t>
+            </a:r>
+          </a:p>
+          <a:p>
+            <a:pPr lvl="1"/>
+            <a:r>
+              <a:rPr lang="de-DE" dirty="0"/>
+              <a:t>Delta-Features: Die erste zeitliche Ableitung der MFCCs.</a:t>
+            </a:r>
+          </a:p>
+          <a:p>
+            <a:pPr lvl="1"/>
+            <a:endParaRPr lang="de-DE" dirty="0"/>
+          </a:p>
+          <a:p>
+            <a:endParaRPr lang="de-DE" dirty="0"/>
+          </a:p>
+        </p:txBody>
+      </p:sp>
+      <p:sp>
+        <p:nvSpPr>
+          <p:cNvPr id="4" name="Foliennummernplatzhalter 3"/>
+          <p:cNvSpPr>
+            <a:spLocks noGrp="1"/>
+          </p:cNvSpPr>
+          <p:nvPr>
+            <p:ph type="sldNum" sz="quarter" idx="5"/>
+          </p:nvPr>
+        </p:nvSpPr>
+        <p:spPr/>
+        <p:txBody>
+          <a:bodyPr/>
+          <a:lstStyle/>
+          <a:p>
+            <a:fld id="{0492B7F2-6741-7346-B13A-366117EE2BBB}" type="slidenum">
+              <a:rPr lang="de-DE" smtClean="0"/>
+              <a:t>4</a:t>
+            </a:fld>
+            <a:endParaRPr lang="de-DE"/>
+          </a:p>
+        </p:txBody>
+      </p:sp>
+    </p:spTree>
+    <p:extLst>
+      <p:ext uri="{BB962C8B-B14F-4D97-AF65-F5344CB8AC3E}">
+        <p14:creationId xmlns:p14="http://schemas.microsoft.com/office/powerpoint/2010/main" val="1014031099"/>
+      </p:ext>
+    </p:extLst>
+  </p:cSld>
+  <p:clrMapOvr>
+    <a:masterClrMapping/>
+  </p:clrMapOvr>
+</p:notes>
+</file>
+
+<file path=ppt/notesSlides/notesSlide3.xml><?xml version="1.0" encoding="utf-8"?>
+<p:notes xmlns:a="http://schemas.openxmlformats.org/drawingml/2006/main" xmlns:r="http://schemas.openxmlformats.org/officeDocument/2006/relationships" xmlns:p="http://schemas.openxmlformats.org/presentationml/2006/main">
+  <p:cSld>
+    <p:spTree>
+      <p:nvGrpSpPr>
+        <p:cNvPr id="1" name="">
+          <a:extLst>
+            <a:ext uri="{FF2B5EF4-FFF2-40B4-BE49-F238E27FC236}">
+              <a16:creationId xmlns:a16="http://schemas.microsoft.com/office/drawing/2014/main" id="{8C49F389-D4E0-D2D0-D0E3-FEDCB6012685}"/>
+            </a:ext>
+          </a:extLst>
+        </p:cNvPr>
+        <p:cNvGrpSpPr/>
+        <p:nvPr/>
+      </p:nvGrpSpPr>
+      <p:grpSpPr>
+        <a:xfrm>
+          <a:off x="0" y="0"/>
+          <a:ext cx="0" cy="0"/>
+          <a:chOff x="0" y="0"/>
+          <a:chExt cx="0" cy="0"/>
+        </a:xfrm>
+      </p:grpSpPr>
+      <p:sp>
+        <p:nvSpPr>
+          <p:cNvPr id="2" name="Folienbildplatzhalter 1">
+            <a:extLst>
+              <a:ext uri="{FF2B5EF4-FFF2-40B4-BE49-F238E27FC236}">
+                <a16:creationId xmlns:a16="http://schemas.microsoft.com/office/drawing/2014/main" id="{31C17418-FDE2-F315-1FCC-C0AE13826ED7}"/>
+              </a:ext>
+            </a:extLst>
+          </p:cNvPr>
+          <p:cNvSpPr>
+            <a:spLocks noGrp="1" noRot="1" noChangeAspect="1"/>
+          </p:cNvSpPr>
+          <p:nvPr>
+            <p:ph type="sldImg"/>
+          </p:nvPr>
+        </p:nvSpPr>
+        <p:spPr/>
+      </p:sp>
+      <p:sp>
+        <p:nvSpPr>
+          <p:cNvPr id="3" name="Notizenplatzhalter 2">
+            <a:extLst>
+              <a:ext uri="{FF2B5EF4-FFF2-40B4-BE49-F238E27FC236}">
+                <a16:creationId xmlns:a16="http://schemas.microsoft.com/office/drawing/2014/main" id="{72DD5A0F-089C-81AB-670E-7E39A76EBC0D}"/>
+              </a:ext>
+            </a:extLst>
+          </p:cNvPr>
+          <p:cNvSpPr>
+            <a:spLocks noGrp="1"/>
+          </p:cNvSpPr>
+          <p:nvPr>
+            <p:ph type="body" idx="1"/>
+          </p:nvPr>
+        </p:nvSpPr>
+        <p:spPr/>
+        <p:txBody>
+          <a:bodyPr/>
+          <a:lstStyle/>
+          <a:p>
+            <a:endParaRPr lang="de-DE" dirty="0"/>
+          </a:p>
+        </p:txBody>
+      </p:sp>
+      <p:sp>
+        <p:nvSpPr>
+          <p:cNvPr id="4" name="Foliennummernplatzhalter 3">
+            <a:extLst>
+              <a:ext uri="{FF2B5EF4-FFF2-40B4-BE49-F238E27FC236}">
+                <a16:creationId xmlns:a16="http://schemas.microsoft.com/office/drawing/2014/main" id="{AA57F3D0-5F1F-FB96-9DEC-006699FAA684}"/>
+              </a:ext>
+            </a:extLst>
+          </p:cNvPr>
+          <p:cNvSpPr>
+            <a:spLocks noGrp="1"/>
+          </p:cNvSpPr>
+          <p:nvPr>
+            <p:ph type="sldNum" sz="quarter" idx="5"/>
+          </p:nvPr>
+        </p:nvSpPr>
+        <p:spPr/>
+        <p:txBody>
+          <a:bodyPr/>
+          <a:lstStyle/>
+          <a:p>
+            <a:fld id="{0492B7F2-6741-7346-B13A-366117EE2BBB}" type="slidenum">
+              <a:rPr lang="de-DE" smtClean="0"/>
+              <a:t>6</a:t>
+            </a:fld>
+            <a:endParaRPr lang="de-DE"/>
+          </a:p>
+        </p:txBody>
+      </p:sp>
+    </p:spTree>
+    <p:extLst>
+      <p:ext uri="{BB962C8B-B14F-4D97-AF65-F5344CB8AC3E}">
+        <p14:creationId xmlns:p14="http://schemas.microsoft.com/office/powerpoint/2010/main" val="2678451260"/>
+      </p:ext>
+    </p:extLst>
+  </p:cSld>
+  <p:clrMapOvr>
+    <a:masterClrMapping/>
+  </p:clrMapOvr>
+</p:notes>
+</file>
+
+<file path=ppt/notesSlides/notesSlide4.xml><?xml version="1.0" encoding="utf-8"?>
+<p:notes xmlns:a="http://schemas.openxmlformats.org/drawingml/2006/main" xmlns:r="http://schemas.openxmlformats.org/officeDocument/2006/relationships" xmlns:p="http://schemas.openxmlformats.org/presentationml/2006/main">
+  <p:cSld>
+    <p:spTree>
+      <p:nvGrpSpPr>
+        <p:cNvPr id="1" name="">
+          <a:extLst>
+            <a:ext uri="{FF2B5EF4-FFF2-40B4-BE49-F238E27FC236}">
+              <a16:creationId xmlns:a16="http://schemas.microsoft.com/office/drawing/2014/main" id="{7D3763EF-EA1A-0B8A-1379-0A6160E522A8}"/>
+            </a:ext>
+          </a:extLst>
+        </p:cNvPr>
+        <p:cNvGrpSpPr/>
+        <p:nvPr/>
+      </p:nvGrpSpPr>
+      <p:grpSpPr>
+        <a:xfrm>
+          <a:off x="0" y="0"/>
+          <a:ext cx="0" cy="0"/>
+          <a:chOff x="0" y="0"/>
+          <a:chExt cx="0" cy="0"/>
+        </a:xfrm>
+      </p:grpSpPr>
+      <p:sp>
+        <p:nvSpPr>
+          <p:cNvPr id="2" name="Folienbildplatzhalter 1">
+            <a:extLst>
+              <a:ext uri="{FF2B5EF4-FFF2-40B4-BE49-F238E27FC236}">
+                <a16:creationId xmlns:a16="http://schemas.microsoft.com/office/drawing/2014/main" id="{ED6D235D-AA7B-F048-6715-4D5C7A058148}"/>
+              </a:ext>
+            </a:extLst>
+          </p:cNvPr>
+          <p:cNvSpPr>
+            <a:spLocks noGrp="1" noRot="1" noChangeAspect="1"/>
+          </p:cNvSpPr>
+          <p:nvPr>
+            <p:ph type="sldImg"/>
+          </p:nvPr>
+        </p:nvSpPr>
+        <p:spPr/>
+      </p:sp>
+      <p:sp>
+        <p:nvSpPr>
+          <p:cNvPr id="3" name="Notizenplatzhalter 2">
+            <a:extLst>
+              <a:ext uri="{FF2B5EF4-FFF2-40B4-BE49-F238E27FC236}">
+                <a16:creationId xmlns:a16="http://schemas.microsoft.com/office/drawing/2014/main" id="{42AAE592-F1C0-8F4D-517A-D2570ED297B8}"/>
+              </a:ext>
+            </a:extLst>
+          </p:cNvPr>
+          <p:cNvSpPr>
+            <a:spLocks noGrp="1"/>
+          </p:cNvSpPr>
+          <p:nvPr>
+            <p:ph type="body" idx="1"/>
+          </p:nvPr>
+        </p:nvSpPr>
+        <p:spPr/>
+        <p:txBody>
+          <a:bodyPr/>
+          <a:lstStyle/>
+          <a:p>
+            <a:endParaRPr lang="de-DE" dirty="0"/>
+          </a:p>
+        </p:txBody>
+      </p:sp>
+      <p:sp>
+        <p:nvSpPr>
+          <p:cNvPr id="4" name="Foliennummernplatzhalter 3">
+            <a:extLst>
+              <a:ext uri="{FF2B5EF4-FFF2-40B4-BE49-F238E27FC236}">
+                <a16:creationId xmlns:a16="http://schemas.microsoft.com/office/drawing/2014/main" id="{A438551F-788D-EDA4-E8B5-EFFC99D96854}"/>
+              </a:ext>
+            </a:extLst>
+          </p:cNvPr>
+          <p:cNvSpPr>
+            <a:spLocks noGrp="1"/>
+          </p:cNvSpPr>
+          <p:nvPr>
+            <p:ph type="sldNum" sz="quarter" idx="5"/>
+          </p:nvPr>
+        </p:nvSpPr>
+        <p:spPr/>
+        <p:txBody>
+          <a:bodyPr/>
+          <a:lstStyle/>
+          <a:p>
+            <a:fld id="{0492B7F2-6741-7346-B13A-366117EE2BBB}" type="slidenum">
+              <a:rPr lang="de-DE" smtClean="0"/>
+              <a:t>7</a:t>
+            </a:fld>
+            <a:endParaRPr lang="de-DE"/>
+          </a:p>
+        </p:txBody>
+      </p:sp>
+    </p:spTree>
+    <p:extLst>
+      <p:ext uri="{BB962C8B-B14F-4D97-AF65-F5344CB8AC3E}">
+        <p14:creationId xmlns:p14="http://schemas.microsoft.com/office/powerpoint/2010/main" val="1770632462"/>
       </p:ext>
     </p:extLst>
   </p:cSld>
@@ -3742,6 +4168,161 @@
 </p:sld>
 </file>
 
+<file path=ppt/slides/slide10.xml><?xml version="1.0" encoding="utf-8"?>
+<p:sld xmlns:a="http://schemas.openxmlformats.org/drawingml/2006/main" xmlns:r="http://schemas.openxmlformats.org/officeDocument/2006/relationships" xmlns:p="http://schemas.openxmlformats.org/presentationml/2006/main">
+  <p:cSld>
+    <p:spTree>
+      <p:nvGrpSpPr>
+        <p:cNvPr id="1" name="">
+          <a:extLst>
+            <a:ext uri="{FF2B5EF4-FFF2-40B4-BE49-F238E27FC236}">
+              <a16:creationId xmlns:a16="http://schemas.microsoft.com/office/drawing/2014/main" id="{711A0095-53C7-3F5E-182B-1605E00E0FC0}"/>
+            </a:ext>
+          </a:extLst>
+        </p:cNvPr>
+        <p:cNvGrpSpPr/>
+        <p:nvPr/>
+      </p:nvGrpSpPr>
+      <p:grpSpPr>
+        <a:xfrm>
+          <a:off x="0" y="0"/>
+          <a:ext cx="0" cy="0"/>
+          <a:chOff x="0" y="0"/>
+          <a:chExt cx="0" cy="0"/>
+        </a:xfrm>
+      </p:grpSpPr>
+      <p:sp>
+        <p:nvSpPr>
+          <p:cNvPr id="5" name="Titel 4">
+            <a:extLst>
+              <a:ext uri="{FF2B5EF4-FFF2-40B4-BE49-F238E27FC236}">
+                <a16:creationId xmlns:a16="http://schemas.microsoft.com/office/drawing/2014/main" id="{D757B5A5-6051-FFCC-0340-6B2A2309AADC}"/>
+              </a:ext>
+            </a:extLst>
+          </p:cNvPr>
+          <p:cNvSpPr>
+            <a:spLocks noGrp="1"/>
+          </p:cNvSpPr>
+          <p:nvPr>
+            <p:ph type="title"/>
+          </p:nvPr>
+        </p:nvSpPr>
+        <p:spPr/>
+        <p:txBody>
+          <a:bodyPr/>
+          <a:lstStyle/>
+          <a:p>
+            <a:r>
+              <a:rPr lang="de-DE" dirty="0" err="1"/>
+              <a:t>Hauptkompenentenanalyse</a:t>
+            </a:r>
+            <a:r>
+              <a:rPr lang="de-DE" dirty="0"/>
+              <a:t>:</a:t>
+            </a:r>
+            <a:br>
+              <a:rPr lang="de-DE" dirty="0"/>
+            </a:br>
+            <a:r>
+              <a:rPr lang="de-DE" sz="2400" dirty="0"/>
+              <a:t>Code</a:t>
+            </a:r>
+            <a:endParaRPr lang="de-DE" dirty="0"/>
+          </a:p>
+        </p:txBody>
+      </p:sp>
+      <p:sp>
+        <p:nvSpPr>
+          <p:cNvPr id="10" name="Inhaltsplatzhalter 9">
+            <a:extLst>
+              <a:ext uri="{FF2B5EF4-FFF2-40B4-BE49-F238E27FC236}">
+                <a16:creationId xmlns:a16="http://schemas.microsoft.com/office/drawing/2014/main" id="{E0628943-4EE5-D432-8B1F-90A882908DCF}"/>
+              </a:ext>
+            </a:extLst>
+          </p:cNvPr>
+          <p:cNvSpPr>
+            <a:spLocks noGrp="1"/>
+          </p:cNvSpPr>
+          <p:nvPr>
+            <p:ph idx="1"/>
+          </p:nvPr>
+        </p:nvSpPr>
+        <p:spPr/>
+        <p:txBody>
+          <a:bodyPr/>
+          <a:lstStyle/>
+          <a:p>
+            <a:r>
+              <a:rPr lang="de-DE" dirty="0"/>
+              <a:t>Bild vom Code / Beschreibung von </a:t>
+            </a:r>
+            <a:r>
+              <a:rPr lang="de-DE" dirty="0" err="1"/>
+              <a:t>methoden</a:t>
+            </a:r>
+            <a:r>
+              <a:rPr lang="de-DE" dirty="0"/>
+              <a:t>/ </a:t>
+            </a:r>
+            <a:r>
+              <a:rPr lang="de-DE" dirty="0" err="1"/>
+              <a:t>Bib</a:t>
+            </a:r>
+            <a:r>
+              <a:rPr lang="de-DE" dirty="0"/>
+              <a:t>. ?</a:t>
+            </a:r>
+          </a:p>
+        </p:txBody>
+      </p:sp>
+      <p:sp>
+        <p:nvSpPr>
+          <p:cNvPr id="4" name="Foliennummernplatzhalter 3">
+            <a:extLst>
+              <a:ext uri="{FF2B5EF4-FFF2-40B4-BE49-F238E27FC236}">
+                <a16:creationId xmlns:a16="http://schemas.microsoft.com/office/drawing/2014/main" id="{953E53DE-A460-5286-4612-B8186AA66233}"/>
+              </a:ext>
+            </a:extLst>
+          </p:cNvPr>
+          <p:cNvSpPr>
+            <a:spLocks noGrp="1"/>
+          </p:cNvSpPr>
+          <p:nvPr>
+            <p:ph type="sldNum" sz="quarter" idx="10"/>
+          </p:nvPr>
+        </p:nvSpPr>
+        <p:spPr/>
+        <p:txBody>
+          <a:bodyPr/>
+          <a:lstStyle/>
+          <a:p>
+            <a:pPr>
+              <a:defRPr/>
+            </a:pPr>
+            <a:fld id="{A0424531-ACBB-43B0-9536-C2FB0D769E6C}" type="slidenum">
+              <a:rPr lang="de-DE" altLang="de-DE" smtClean="0"/>
+              <a:pPr>
+                <a:defRPr/>
+              </a:pPr>
+              <a:t>10</a:t>
+            </a:fld>
+            <a:endParaRPr lang="de-DE" altLang="de-DE" dirty="0"/>
+          </a:p>
+        </p:txBody>
+      </p:sp>
+    </p:spTree>
+    <p:extLst>
+      <p:ext uri="{BB962C8B-B14F-4D97-AF65-F5344CB8AC3E}">
+        <p14:creationId xmlns:p14="http://schemas.microsoft.com/office/powerpoint/2010/main" val="1026886502"/>
+      </p:ext>
+    </p:extLst>
+  </p:cSld>
+  <p:clrMapOvr>
+    <a:masterClrMapping/>
+  </p:clrMapOvr>
+</p:sld>
+</file>
+
 <file path=ppt/slides/slide2.xml><?xml version="1.0" encoding="utf-8"?>
 <p:sld xmlns:a="http://schemas.openxmlformats.org/drawingml/2006/main" xmlns:r="http://schemas.openxmlformats.org/officeDocument/2006/relationships" xmlns:p="http://schemas.openxmlformats.org/presentationml/2006/main">
   <p:cSld>
@@ -3810,79 +4391,79 @@
             <p:ph idx="1"/>
           </p:nvPr>
         </p:nvSpPr>
-        <p:spPr/>
+        <p:spPr>
+          <a:xfrm>
+            <a:off x="914400" y="1545265"/>
+            <a:ext cx="10668000" cy="4114800"/>
+          </a:xfrm>
+        </p:spPr>
         <p:txBody>
           <a:bodyPr/>
           <a:lstStyle/>
           <a:p>
             <a:r>
-              <a:rPr lang="de-DE" dirty="0"/>
-              <a:t>Merkmalsanalyse (Feature </a:t>
-            </a:r>
-            <a:r>
-              <a:rPr lang="de-DE" dirty="0" err="1"/>
+              <a:rPr lang="de-DE" sz="2000" dirty="0"/>
+              <a:t>Ziel</a:t>
+            </a:r>
+          </a:p>
+          <a:p>
+            <a:r>
+              <a:rPr lang="de-DE" sz="2000" dirty="0"/>
+              <a:t>Merkmalsanalyse </a:t>
+            </a:r>
+          </a:p>
+          <a:p>
+            <a:pPr lvl="1"/>
+            <a:r>
+              <a:rPr lang="de-DE" sz="1800" dirty="0"/>
+              <a:t>Feature </a:t>
+            </a:r>
+            <a:r>
+              <a:rPr lang="de-DE" sz="1800" dirty="0" err="1"/>
               <a:t>Extraction</a:t>
             </a:r>
-            <a:r>
-              <a:rPr lang="de-DE" dirty="0"/>
-              <a:t>)</a:t>
-            </a:r>
+            <a:endParaRPr lang="de-DE" sz="1800" dirty="0"/>
           </a:p>
           <a:p>
             <a:pPr lvl="1"/>
             <a:r>
-              <a:rPr lang="de-DE" dirty="0"/>
-              <a:t>Betrachtete Merkmale</a:t>
+              <a:rPr lang="de-DE" sz="1800" dirty="0" err="1"/>
+              <a:t>Standartisierung</a:t>
+            </a:r>
+            <a:endParaRPr lang="de-DE" sz="1800" dirty="0"/>
+          </a:p>
+          <a:p>
+            <a:r>
+              <a:rPr lang="de-DE" sz="2000" dirty="0"/>
+              <a:t>Hauptkomponentenanalyse </a:t>
             </a:r>
           </a:p>
           <a:p>
             <a:pPr lvl="1"/>
             <a:r>
-              <a:rPr lang="de-DE" dirty="0"/>
-              <a:t>Code</a:t>
-            </a:r>
-          </a:p>
-          <a:p>
-            <a:r>
-              <a:rPr lang="de-DE" dirty="0"/>
-              <a:t>Hauptkomponentenanalyse</a:t>
+              <a:rPr lang="de-DE" sz="1600" dirty="0"/>
+              <a:t>PCA</a:t>
+            </a:r>
+            <a:endParaRPr lang="de-DE" sz="1800" dirty="0"/>
+          </a:p>
+          <a:p>
+            <a:r>
+              <a:rPr lang="de-DE" sz="2000" dirty="0"/>
+              <a:t>(Visualisierung)</a:t>
             </a:r>
           </a:p>
           <a:p>
             <a:pPr lvl="1"/>
             <a:r>
-              <a:rPr lang="de-DE" dirty="0"/>
-              <a:t>Erklären PC1 und PC2 der PCA</a:t>
-            </a:r>
-          </a:p>
-          <a:p>
-            <a:pPr lvl="1"/>
-            <a:r>
-              <a:rPr lang="de-DE" dirty="0"/>
-              <a:t>Code</a:t>
-            </a:r>
-          </a:p>
-          <a:p>
-            <a:r>
-              <a:rPr lang="de-DE" dirty="0"/>
-              <a:t>(Visualisierung)</a:t>
-            </a:r>
-          </a:p>
-          <a:p>
-            <a:pPr lvl="1"/>
-            <a:r>
-              <a:rPr lang="de-DE" dirty="0"/>
+              <a:rPr lang="de-DE" sz="1800" dirty="0"/>
               <a:t>Verfahren</a:t>
             </a:r>
           </a:p>
           <a:p>
             <a:r>
-              <a:rPr lang="de-DE" dirty="0"/>
+              <a:rPr lang="de-DE" sz="2000" dirty="0"/>
               <a:t>Ergebnisse</a:t>
             </a:r>
-          </a:p>
-          <a:p>
-            <a:endParaRPr lang="de-DE" dirty="0"/>
           </a:p>
         </p:txBody>
       </p:sp>
@@ -3918,10 +4499,10 @@
       </p:grpSpPr>
       <p:sp>
         <p:nvSpPr>
-          <p:cNvPr id="5" name="Titel 4">
+          <p:cNvPr id="2" name="Titel 1">
             <a:extLst>
               <a:ext uri="{FF2B5EF4-FFF2-40B4-BE49-F238E27FC236}">
-                <a16:creationId xmlns:a16="http://schemas.microsoft.com/office/drawing/2014/main" id="{FF548E49-692C-4BBE-8063-A0FA8DCFE074}"/>
+                <a16:creationId xmlns:a16="http://schemas.microsoft.com/office/drawing/2014/main" id="{EEDBBAAD-698E-2BBD-EFF1-ADB56162D5C1}"/>
               </a:ext>
             </a:extLst>
           </p:cNvPr>
@@ -3938,19 +4519,18 @@
           <a:lstStyle/>
           <a:p>
             <a:r>
-              <a:rPr lang="de-DE" dirty="0" err="1"/>
-              <a:t>Mekmalsanalyse</a:t>
-            </a:r>
-            <a:endParaRPr lang="de-DE" dirty="0"/>
-          </a:p>
-        </p:txBody>
-      </p:sp>
-      <p:sp>
-        <p:nvSpPr>
-          <p:cNvPr id="10" name="Inhaltsplatzhalter 9">
+              <a:rPr lang="de-DE" dirty="0"/>
+              <a:t>Ziel</a:t>
+            </a:r>
+          </a:p>
+        </p:txBody>
+      </p:sp>
+      <p:sp>
+        <p:nvSpPr>
+          <p:cNvPr id="3" name="Inhaltsplatzhalter 2">
             <a:extLst>
               <a:ext uri="{FF2B5EF4-FFF2-40B4-BE49-F238E27FC236}">
-                <a16:creationId xmlns:a16="http://schemas.microsoft.com/office/drawing/2014/main" id="{7B8D0937-7521-B2D4-9DC6-F495F659D7E3}"/>
+                <a16:creationId xmlns:a16="http://schemas.microsoft.com/office/drawing/2014/main" id="{9C68DE30-D93E-3C7A-A549-46E39921BF6A}"/>
               </a:ext>
             </a:extLst>
           </p:cNvPr>
@@ -3968,7 +4548,7 @@
           <a:p>
             <a:r>
               <a:rPr lang="de-DE" dirty="0"/>
-              <a:t>Wie geht das?</a:t>
+              <a:t>Beschädigtes Zahnrad automatisiert anhand von verschiedenen Merkmalen klassifizieren</a:t>
             </a:r>
           </a:p>
         </p:txBody>
@@ -3978,7 +4558,7 @@
           <p:cNvPr id="4" name="Foliennummernplatzhalter 3">
             <a:extLst>
               <a:ext uri="{FF2B5EF4-FFF2-40B4-BE49-F238E27FC236}">
-                <a16:creationId xmlns:a16="http://schemas.microsoft.com/office/drawing/2014/main" id="{9D07ED7A-1406-D77F-FB1A-4675A86C9D75}"/>
+                <a16:creationId xmlns:a16="http://schemas.microsoft.com/office/drawing/2014/main" id="{82F1A48E-1B1B-0EF1-7B0E-C43B96540887}"/>
               </a:ext>
             </a:extLst>
           </p:cNvPr>
@@ -4011,7 +4591,7 @@
     </p:spTree>
     <p:extLst>
       <p:ext uri="{BB962C8B-B14F-4D97-AF65-F5344CB8AC3E}">
-        <p14:creationId xmlns:p14="http://schemas.microsoft.com/office/powerpoint/2010/main" val="2845843503"/>
+        <p14:creationId xmlns:p14="http://schemas.microsoft.com/office/powerpoint/2010/main" val="2304305667"/>
       </p:ext>
     </p:extLst>
   </p:cSld>
@@ -4026,13 +4606,7 @@
   <p:cSld>
     <p:spTree>
       <p:nvGrpSpPr>
-        <p:cNvPr id="1" name="">
-          <a:extLst>
-            <a:ext uri="{FF2B5EF4-FFF2-40B4-BE49-F238E27FC236}">
-              <a16:creationId xmlns:a16="http://schemas.microsoft.com/office/drawing/2014/main" id="{930EFE7B-3852-33FE-5E95-379941887B0A}"/>
-            </a:ext>
-          </a:extLst>
-        </p:cNvPr>
+        <p:cNvPr id="1" name=""/>
         <p:cNvGrpSpPr/>
         <p:nvPr/>
       </p:nvGrpSpPr>
@@ -4049,7 +4623,7 @@
           <p:cNvPr id="5" name="Titel 4">
             <a:extLst>
               <a:ext uri="{FF2B5EF4-FFF2-40B4-BE49-F238E27FC236}">
-                <a16:creationId xmlns:a16="http://schemas.microsoft.com/office/drawing/2014/main" id="{DAA63938-7527-95E9-B79B-33A80327C08D}"/>
+                <a16:creationId xmlns:a16="http://schemas.microsoft.com/office/drawing/2014/main" id="{FF548E49-692C-4BBE-8063-A0FA8DCFE074}"/>
               </a:ext>
             </a:extLst>
           </p:cNvPr>
@@ -4066,19 +4640,83 @@
           <a:lstStyle/>
           <a:p>
             <a:r>
-              <a:rPr lang="de-DE" dirty="0" err="1"/>
+              <a:rPr kumimoji="0" lang="de-DE" sz="3200" b="1" i="0" u="none" strike="noStrike" kern="0" cap="none" spc="0" normalizeH="0" baseline="0" noProof="0" dirty="0" err="1">
+                <a:ln>
+                  <a:noFill/>
+                </a:ln>
+                <a:solidFill>
+                  <a:srgbClr val="A8CC2F"/>
+                </a:solidFill>
+                <a:effectLst/>
+                <a:uLnTx/>
+                <a:uFillTx/>
+                <a:latin typeface="Arial"/>
+                <a:ea typeface="ヒラギノ角ゴ Pro W3"/>
+              </a:rPr>
               <a:t>Mekmalsanalyse</a:t>
             </a:r>
             <a:r>
-              <a:rPr lang="de-DE" dirty="0"/>
+              <a:rPr kumimoji="0" lang="de-DE" sz="3200" b="1" i="0" u="none" strike="noStrike" kern="0" cap="none" spc="0" normalizeH="0" baseline="0" noProof="0" dirty="0">
+                <a:ln>
+                  <a:noFill/>
+                </a:ln>
+                <a:solidFill>
+                  <a:srgbClr val="A8CC2F"/>
+                </a:solidFill>
+                <a:effectLst/>
+                <a:uLnTx/>
+                <a:uFillTx/>
+                <a:latin typeface="Arial"/>
+                <a:ea typeface="ヒラギノ角ゴ Pro W3"/>
+              </a:rPr>
               <a:t>:</a:t>
             </a:r>
             <a:br>
-              <a:rPr lang="de-DE" dirty="0"/>
+              <a:rPr kumimoji="0" lang="de-DE" sz="3200" b="1" i="0" u="none" strike="noStrike" kern="0" cap="none" spc="0" normalizeH="0" baseline="0" noProof="0" dirty="0">
+                <a:ln>
+                  <a:noFill/>
+                </a:ln>
+                <a:solidFill>
+                  <a:srgbClr val="A8CC2F"/>
+                </a:solidFill>
+                <a:effectLst/>
+                <a:uLnTx/>
+                <a:uFillTx/>
+                <a:latin typeface="Arial"/>
+                <a:ea typeface="ヒラギノ角ゴ Pro W3"/>
+              </a:rPr>
             </a:br>
             <a:r>
-              <a:rPr lang="de-DE" sz="2400" dirty="0"/>
-              <a:t>Betrachtete Merkmale</a:t>
+              <a:rPr kumimoji="0" lang="de-DE" sz="2400" b="1" i="0" u="none" strike="noStrike" kern="0" cap="none" spc="0" normalizeH="0" baseline="0" noProof="0" dirty="0">
+                <a:ln>
+                  <a:noFill/>
+                </a:ln>
+                <a:solidFill>
+                  <a:srgbClr val="A8CC2F"/>
+                </a:solidFill>
+                <a:effectLst/>
+                <a:uLnTx/>
+                <a:uFillTx/>
+                <a:latin typeface="Arial"/>
+                <a:ea typeface="ヒラギノ角ゴ Pro W3"/>
+              </a:rPr>
+              <a:t>Feature </a:t>
+            </a:r>
+            <a:r>
+              <a:rPr kumimoji="0" lang="de-DE" sz="2400" b="1" i="0" u="none" strike="noStrike" kern="0" cap="none" spc="0" normalizeH="0" baseline="0" noProof="0" dirty="0" err="1">
+                <a:ln>
+                  <a:noFill/>
+                </a:ln>
+                <a:solidFill>
+                  <a:srgbClr val="A8CC2F"/>
+                </a:solidFill>
+                <a:effectLst/>
+                <a:uLnTx/>
+                <a:uFillTx/>
+                <a:latin typeface="Arial"/>
+                <a:ea typeface="ヒラギノ角ゴ Pro W3"/>
+              </a:rPr>
+              <a:t>Extraction</a:t>
             </a:r>
             <a:endParaRPr lang="de-DE" dirty="0"/>
           </a:p>
@@ -4089,7 +4727,7 @@
           <p:cNvPr id="10" name="Inhaltsplatzhalter 9">
             <a:extLst>
               <a:ext uri="{FF2B5EF4-FFF2-40B4-BE49-F238E27FC236}">
-                <a16:creationId xmlns:a16="http://schemas.microsoft.com/office/drawing/2014/main" id="{D06E6E3A-1194-1372-0A0A-07C56D73E1D2}"/>
+                <a16:creationId xmlns:a16="http://schemas.microsoft.com/office/drawing/2014/main" id="{7B8D0937-7521-B2D4-9DC6-F495F659D7E3}"/>
               </a:ext>
             </a:extLst>
           </p:cNvPr>
@@ -4105,91 +4743,167 @@
           <a:bodyPr/>
           <a:lstStyle/>
           <a:p>
-            <a:r>
-              <a:rPr lang="de-DE" dirty="0"/>
-              <a:t>1. Spektrale Merkmale (Frequenzbereich)</a:t>
-            </a:r>
-          </a:p>
-          <a:p>
-            <a:pPr lvl="1"/>
-            <a:r>
-              <a:rPr lang="de-DE" dirty="0"/>
-              <a:t>MFCCs (13 Koeffizienten): Bilden die Spektraleinhüllende auf der Mel-Skala ab </a:t>
-            </a:r>
-          </a:p>
-          <a:p>
-            <a:pPr lvl="1"/>
-            <a:r>
-              <a:rPr lang="de-DE" dirty="0" err="1"/>
+            <a:pPr algn="l" fontAlgn="base">
+              <a:spcAft>
+                <a:spcPts val="300"/>
+              </a:spcAft>
+              <a:buFont typeface="Arial" panose="020B0604020202020204" pitchFamily="34" charset="0"/>
+              <a:buChar char="•"/>
+            </a:pPr>
+            <a:r>
+              <a:rPr lang="de-DE" b="0" i="0" dirty="0">
+                <a:effectLst/>
+                <a:latin typeface="gg sans"/>
+              </a:rPr>
+              <a:t>nicht jedes Feature einzeln detailliert herleiten </a:t>
+            </a:r>
+            <a:r>
+              <a:rPr lang="de-DE" b="0" i="0" dirty="0">
+                <a:effectLst/>
+                <a:latin typeface="inherit"/>
+              </a:rPr>
+              <a:t>→</a:t>
+            </a:r>
+            <a:r>
+              <a:rPr lang="de-DE" b="0" i="0" dirty="0">
+                <a:effectLst/>
+                <a:latin typeface="gg sans"/>
+              </a:rPr>
+              <a:t> gruppieren: </a:t>
+            </a:r>
+          </a:p>
+          <a:p>
+            <a:pPr lvl="1">
+              <a:spcAft>
+                <a:spcPts val="300"/>
+              </a:spcAft>
+              <a:buFont typeface="Arial" panose="020B0604020202020204" pitchFamily="34" charset="0"/>
+              <a:buChar char="•"/>
+            </a:pPr>
+            <a:r>
+              <a:rPr lang="de-DE" b="0" i="0" dirty="0">
+                <a:effectLst/>
+                <a:latin typeface="inherit"/>
+              </a:rPr>
+              <a:t>Zeitbereich: RMS Energy, Zero Crossing Rate → Wie stark ist das Signal, wie viele schnelle Wechsel gibt es?</a:t>
+            </a:r>
+          </a:p>
+          <a:p>
+            <a:pPr lvl="1">
+              <a:spcAft>
+                <a:spcPts val="300"/>
+              </a:spcAft>
+              <a:buFont typeface="Arial" panose="020B0604020202020204" pitchFamily="34" charset="0"/>
+              <a:buChar char="•"/>
+            </a:pPr>
+            <a:r>
+              <a:rPr lang="de-DE" b="0" i="0" dirty="0">
+                <a:effectLst/>
+                <a:latin typeface="inherit"/>
+              </a:rPr>
+              <a:t>Frequenzbereich: </a:t>
+            </a:r>
+            <a:r>
+              <a:rPr lang="de-DE" b="0" i="0" dirty="0" err="1">
+                <a:effectLst/>
+                <a:latin typeface="inherit"/>
+              </a:rPr>
               <a:t>Spectral</a:t>
             </a:r>
             <a:r>
-              <a:rPr lang="de-DE" dirty="0"/>
+              <a:rPr lang="de-DE" b="0" i="0" dirty="0">
+                <a:effectLst/>
+                <a:latin typeface="inherit"/>
+              </a:rPr>
               <a:t> </a:t>
             </a:r>
             <a:r>
-              <a:rPr lang="de-DE" dirty="0" err="1"/>
+              <a:rPr lang="de-DE" b="0" i="0" dirty="0" err="1">
+                <a:effectLst/>
+                <a:latin typeface="inherit"/>
+              </a:rPr>
               <a:t>Centroid</a:t>
             </a:r>
             <a:r>
-              <a:rPr lang="de-DE" dirty="0"/>
-              <a:t> (Schwerpunkt): Gibt an, bei welcher Frequenz der "Masseschwerpunkt" des Spektrums liegt. Maß für die "Helligkeit" des Klangs.</a:t>
-            </a:r>
-          </a:p>
-          <a:p>
-            <a:pPr lvl="1"/>
-            <a:r>
-              <a:rPr lang="de-DE" dirty="0" err="1"/>
-              <a:t>Spectral</a:t>
-            </a:r>
-            <a:r>
-              <a:rPr lang="de-DE" dirty="0"/>
-              <a:t> </a:t>
-            </a:r>
-            <a:r>
-              <a:rPr lang="de-DE" dirty="0" err="1"/>
+              <a:rPr lang="de-DE" b="0" i="0" dirty="0">
+                <a:effectLst/>
+                <a:latin typeface="inherit"/>
+              </a:rPr>
+              <a:t>, </a:t>
+            </a:r>
+            <a:r>
+              <a:rPr lang="de-DE" b="0" i="0" dirty="0" err="1">
+                <a:effectLst/>
+                <a:latin typeface="inherit"/>
+              </a:rPr>
               <a:t>Bandwidth</a:t>
             </a:r>
             <a:r>
-              <a:rPr lang="de-DE" dirty="0"/>
-              <a:t> (Bandbreite): Beschreibt die Spreizung des Spektrums um den Schwerpunkt</a:t>
-            </a:r>
-          </a:p>
-          <a:p>
-            <a:pPr lvl="1"/>
-            <a:r>
-              <a:rPr lang="de-DE" dirty="0" err="1"/>
-              <a:t>Spectral</a:t>
-            </a:r>
-            <a:r>
-              <a:rPr lang="de-DE" dirty="0"/>
-              <a:t> Roll-off: Die Frequenz, unter der ein bestimmter Prozentsatz (meist 85%) der Spektralenergie liegt</a:t>
-            </a:r>
-          </a:p>
-          <a:p>
-            <a:pPr lvl="1"/>
-            <a:r>
-              <a:rPr lang="de-DE" dirty="0" err="1"/>
-              <a:t>Spectral</a:t>
-            </a:r>
-            <a:r>
-              <a:rPr lang="de-DE" dirty="0"/>
-              <a:t> </a:t>
-            </a:r>
-            <a:r>
-              <a:rPr lang="de-DE" dirty="0" err="1"/>
+              <a:rPr lang="de-DE" b="0" i="0" dirty="0">
+                <a:effectLst/>
+                <a:latin typeface="inherit"/>
+              </a:rPr>
+              <a:t>, </a:t>
+            </a:r>
+            <a:r>
+              <a:rPr lang="de-DE" b="0" i="0" dirty="0" err="1">
+                <a:effectLst/>
+                <a:latin typeface="inherit"/>
+              </a:rPr>
+              <a:t>Rolloff</a:t>
+            </a:r>
+            <a:r>
+              <a:rPr lang="de-DE" b="0" i="0" dirty="0">
+                <a:effectLst/>
+                <a:latin typeface="inherit"/>
+              </a:rPr>
+              <a:t>, </a:t>
+            </a:r>
+            <a:r>
+              <a:rPr lang="de-DE" b="0" i="0" dirty="0" err="1">
+                <a:effectLst/>
+                <a:latin typeface="inherit"/>
+              </a:rPr>
               <a:t>Contrast</a:t>
             </a:r>
             <a:r>
-              <a:rPr lang="de-DE" dirty="0"/>
-              <a:t>: Misst den Unterschied zwischen Spitzen und Tälern im Spektrum.</a:t>
-            </a:r>
-          </a:p>
-          <a:p>
-            <a:pPr lvl="1"/>
-            <a:r>
-              <a:rPr lang="de-DE" dirty="0"/>
-              <a:t>Chroma Features (STFT/CENS): Projizieren das gesamte Spektrum auf 12 Halbtonklassen</a:t>
+              <a:rPr lang="de-DE" b="0" i="0" dirty="0">
+                <a:effectLst/>
+                <a:latin typeface="inherit"/>
+              </a:rPr>
+              <a:t> → Wo liegt Energie im Frequenzspektrum, wie breit/auffällig ist sie verteilt?</a:t>
+            </a:r>
+          </a:p>
+          <a:p>
+            <a:pPr lvl="1">
+              <a:spcAft>
+                <a:spcPts val="300"/>
+              </a:spcAft>
+              <a:buFont typeface="Arial" panose="020B0604020202020204" pitchFamily="34" charset="0"/>
+              <a:buChar char="•"/>
+            </a:pPr>
+            <a:r>
+              <a:rPr lang="de-DE" b="0" i="0" dirty="0">
+                <a:effectLst/>
+                <a:latin typeface="inherit"/>
+              </a:rPr>
+              <a:t>MFCCs / Delta-MFCCs: → Kompakte Beschreibung der spektralen Form und ihrer Veränderung.</a:t>
+            </a:r>
+          </a:p>
+          <a:p>
+            <a:pPr lvl="1">
+              <a:spcAft>
+                <a:spcPts val="300"/>
+              </a:spcAft>
+              <a:buFont typeface="Arial" panose="020B0604020202020204" pitchFamily="34" charset="0"/>
+              <a:buChar char="•"/>
+            </a:pPr>
+            <a:r>
+              <a:rPr lang="de-DE" b="0" i="0" dirty="0">
+                <a:effectLst/>
+                <a:latin typeface="inherit"/>
+              </a:rPr>
+              <a:t>Chroma: → Erfasst wiederkehrende spektrale Muster; bei technischen Signalen weniger intuitiv, aber als Mustermerkmal nutzbar.</a:t>
             </a:r>
           </a:p>
         </p:txBody>
@@ -4199,7 +4913,7 @@
           <p:cNvPr id="4" name="Foliennummernplatzhalter 3">
             <a:extLst>
               <a:ext uri="{FF2B5EF4-FFF2-40B4-BE49-F238E27FC236}">
-                <a16:creationId xmlns:a16="http://schemas.microsoft.com/office/drawing/2014/main" id="{67D5FC71-6E35-0F32-587F-E4DA9FEA2816}"/>
+                <a16:creationId xmlns:a16="http://schemas.microsoft.com/office/drawing/2014/main" id="{9D07ED7A-1406-D77F-FB1A-4675A86C9D75}"/>
               </a:ext>
             </a:extLst>
           </p:cNvPr>
@@ -4232,7 +4946,7 @@
     </p:spTree>
     <p:extLst>
       <p:ext uri="{BB962C8B-B14F-4D97-AF65-F5344CB8AC3E}">
-        <p14:creationId xmlns:p14="http://schemas.microsoft.com/office/powerpoint/2010/main" val="3042535655"/>
+        <p14:creationId xmlns:p14="http://schemas.microsoft.com/office/powerpoint/2010/main" val="2845843503"/>
       </p:ext>
     </p:extLst>
   </p:cSld>
@@ -4243,172 +4957,6 @@
 </file>
 
 <file path=ppt/slides/slide5.xml><?xml version="1.0" encoding="utf-8"?>
-<p:sld xmlns:a="http://schemas.openxmlformats.org/drawingml/2006/main" xmlns:r="http://schemas.openxmlformats.org/officeDocument/2006/relationships" xmlns:p="http://schemas.openxmlformats.org/presentationml/2006/main">
-  <p:cSld>
-    <p:spTree>
-      <p:nvGrpSpPr>
-        <p:cNvPr id="1" name="">
-          <a:extLst>
-            <a:ext uri="{FF2B5EF4-FFF2-40B4-BE49-F238E27FC236}">
-              <a16:creationId xmlns:a16="http://schemas.microsoft.com/office/drawing/2014/main" id="{0F570CD2-0EFA-C90D-FDB3-9ADFD1668184}"/>
-            </a:ext>
-          </a:extLst>
-        </p:cNvPr>
-        <p:cNvGrpSpPr/>
-        <p:nvPr/>
-      </p:nvGrpSpPr>
-      <p:grpSpPr>
-        <a:xfrm>
-          <a:off x="0" y="0"/>
-          <a:ext cx="0" cy="0"/>
-          <a:chOff x="0" y="0"/>
-          <a:chExt cx="0" cy="0"/>
-        </a:xfrm>
-      </p:grpSpPr>
-      <p:sp>
-        <p:nvSpPr>
-          <p:cNvPr id="5" name="Titel 4">
-            <a:extLst>
-              <a:ext uri="{FF2B5EF4-FFF2-40B4-BE49-F238E27FC236}">
-                <a16:creationId xmlns:a16="http://schemas.microsoft.com/office/drawing/2014/main" id="{319D2184-7ACE-A16F-5F1A-5155AEBDB03E}"/>
-              </a:ext>
-            </a:extLst>
-          </p:cNvPr>
-          <p:cNvSpPr>
-            <a:spLocks noGrp="1"/>
-          </p:cNvSpPr>
-          <p:nvPr>
-            <p:ph type="title"/>
-          </p:nvPr>
-        </p:nvSpPr>
-        <p:spPr/>
-        <p:txBody>
-          <a:bodyPr/>
-          <a:lstStyle/>
-          <a:p>
-            <a:r>
-              <a:rPr lang="de-DE" dirty="0" err="1"/>
-              <a:t>Mekmalsanalyse</a:t>
-            </a:r>
-            <a:r>
-              <a:rPr lang="de-DE" dirty="0"/>
-              <a:t>:</a:t>
-            </a:r>
-            <a:br>
-              <a:rPr lang="de-DE" dirty="0"/>
-            </a:br>
-            <a:r>
-              <a:rPr lang="de-DE" sz="2400" dirty="0"/>
-              <a:t>Betrachtete Merkmale</a:t>
-            </a:r>
-            <a:endParaRPr lang="de-DE" dirty="0"/>
-          </a:p>
-        </p:txBody>
-      </p:sp>
-      <p:sp>
-        <p:nvSpPr>
-          <p:cNvPr id="10" name="Inhaltsplatzhalter 9">
-            <a:extLst>
-              <a:ext uri="{FF2B5EF4-FFF2-40B4-BE49-F238E27FC236}">
-                <a16:creationId xmlns:a16="http://schemas.microsoft.com/office/drawing/2014/main" id="{19C4C79F-28B8-72C8-A1FA-5C00426D9315}"/>
-              </a:ext>
-            </a:extLst>
-          </p:cNvPr>
-          <p:cNvSpPr>
-            <a:spLocks noGrp="1"/>
-          </p:cNvSpPr>
-          <p:nvPr>
-            <p:ph idx="1"/>
-          </p:nvPr>
-        </p:nvSpPr>
-        <p:spPr/>
-        <p:txBody>
-          <a:bodyPr/>
-          <a:lstStyle/>
-          <a:p>
-            <a:r>
-              <a:rPr lang="de-DE" dirty="0"/>
-              <a:t>2. Zeitbereichs-Merkmale</a:t>
-            </a:r>
-          </a:p>
-          <a:p>
-            <a:pPr lvl="1"/>
-            <a:r>
-              <a:rPr lang="de-DE" dirty="0"/>
-              <a:t>Zero Crossing Rate (ZCR): Die Rate, mit der das Signal die Nulllinie kreuzt. Ein Maß für die Frequenz und Impulsivität (Rauschen)</a:t>
-            </a:r>
-          </a:p>
-          <a:p>
-            <a:pPr lvl="1"/>
-            <a:r>
-              <a:rPr lang="de-DE" dirty="0"/>
-              <a:t>Frame Energy (RMS): Der quadratische Mittelwert der Amplitude.</a:t>
-            </a:r>
-          </a:p>
-          <a:p>
-            <a:r>
-              <a:rPr lang="de-DE" dirty="0"/>
-              <a:t>3. Dynamische Merkmale</a:t>
-            </a:r>
-          </a:p>
-          <a:p>
-            <a:pPr lvl="1"/>
-            <a:r>
-              <a:rPr lang="de-DE" dirty="0"/>
-              <a:t>Delta-Features: Die erste zeitliche Ableitung der MFCCs.</a:t>
-            </a:r>
-          </a:p>
-        </p:txBody>
-      </p:sp>
-      <p:sp>
-        <p:nvSpPr>
-          <p:cNvPr id="4" name="Foliennummernplatzhalter 3">
-            <a:extLst>
-              <a:ext uri="{FF2B5EF4-FFF2-40B4-BE49-F238E27FC236}">
-                <a16:creationId xmlns:a16="http://schemas.microsoft.com/office/drawing/2014/main" id="{2E80E235-26A6-A7CB-B35C-87EBFB13852B}"/>
-              </a:ext>
-            </a:extLst>
-          </p:cNvPr>
-          <p:cNvSpPr>
-            <a:spLocks noGrp="1"/>
-          </p:cNvSpPr>
-          <p:nvPr>
-            <p:ph type="sldNum" sz="quarter" idx="10"/>
-          </p:nvPr>
-        </p:nvSpPr>
-        <p:spPr/>
-        <p:txBody>
-          <a:bodyPr/>
-          <a:lstStyle/>
-          <a:p>
-            <a:pPr>
-              <a:defRPr/>
-            </a:pPr>
-            <a:fld id="{A0424531-ACBB-43B0-9536-C2FB0D769E6C}" type="slidenum">
-              <a:rPr lang="de-DE" altLang="de-DE" smtClean="0"/>
-              <a:pPr>
-                <a:defRPr/>
-              </a:pPr>
-              <a:t>5</a:t>
-            </a:fld>
-            <a:endParaRPr lang="de-DE" altLang="de-DE" dirty="0"/>
-          </a:p>
-        </p:txBody>
-      </p:sp>
-    </p:spTree>
-    <p:extLst>
-      <p:ext uri="{BB962C8B-B14F-4D97-AF65-F5344CB8AC3E}">
-        <p14:creationId xmlns:p14="http://schemas.microsoft.com/office/powerpoint/2010/main" val="2854101102"/>
-      </p:ext>
-    </p:extLst>
-  </p:cSld>
-  <p:clrMapOvr>
-    <a:masterClrMapping/>
-  </p:clrMapOvr>
-</p:sld>
-</file>
-
-<file path=ppt/slides/slide6.xml><?xml version="1.0" encoding="utf-8"?>
 <p:sld xmlns:a="http://schemas.openxmlformats.org/drawingml/2006/main" xmlns:r="http://schemas.openxmlformats.org/officeDocument/2006/relationships" xmlns:p="http://schemas.openxmlformats.org/presentationml/2006/main">
   <p:cSld>
     <p:spTree>
@@ -4464,6 +5012,54 @@
               <a:rPr lang="de-DE" dirty="0"/>
             </a:br>
             <a:r>
+              <a:rPr kumimoji="0" lang="de-DE" sz="2400" b="1" i="0" u="none" strike="noStrike" kern="0" cap="none" spc="0" normalizeH="0" baseline="0" noProof="0" dirty="0">
+                <a:ln>
+                  <a:noFill/>
+                </a:ln>
+                <a:solidFill>
+                  <a:srgbClr val="A8CC2F"/>
+                </a:solidFill>
+                <a:effectLst/>
+                <a:uLnTx/>
+                <a:uFillTx/>
+                <a:latin typeface="Arial"/>
+                <a:ea typeface="ヒラギノ角ゴ Pro W3"/>
+              </a:rPr>
+              <a:t>Feature </a:t>
+            </a:r>
+            <a:r>
+              <a:rPr kumimoji="0" lang="de-DE" sz="2400" b="1" i="0" u="none" strike="noStrike" kern="0" cap="none" spc="0" normalizeH="0" baseline="0" noProof="0" dirty="0" err="1">
+                <a:ln>
+                  <a:noFill/>
+                </a:ln>
+                <a:solidFill>
+                  <a:srgbClr val="A8CC2F"/>
+                </a:solidFill>
+                <a:effectLst/>
+                <a:uLnTx/>
+                <a:uFillTx/>
+                <a:latin typeface="Arial"/>
+                <a:ea typeface="ヒラギノ角ゴ Pro W3"/>
+              </a:rPr>
+              <a:t>Extraction</a:t>
+            </a:r>
+            <a:r>
+              <a:rPr kumimoji="0" lang="de-DE" sz="2400" b="1" i="0" u="none" strike="noStrike" kern="0" cap="none" spc="0" normalizeH="0" baseline="0" noProof="0" dirty="0">
+                <a:ln>
+                  <a:noFill/>
+                </a:ln>
+                <a:solidFill>
+                  <a:srgbClr val="A8CC2F"/>
+                </a:solidFill>
+                <a:effectLst/>
+                <a:uLnTx/>
+                <a:uFillTx/>
+                <a:latin typeface="Arial"/>
+                <a:ea typeface="ヒラギノ角ゴ Pro W3"/>
+              </a:rPr>
+              <a:t>: </a:t>
+            </a:r>
+            <a:r>
               <a:rPr lang="de-DE" sz="2400" dirty="0"/>
               <a:t>Code</a:t>
             </a:r>
@@ -4487,30 +5083,30 @@
             <p:ph idx="1"/>
           </p:nvPr>
         </p:nvSpPr>
-        <p:spPr/>
+        <p:spPr>
+          <a:xfrm>
+            <a:off x="914400" y="1981200"/>
+            <a:ext cx="3304903" cy="4114800"/>
+          </a:xfrm>
+        </p:spPr>
         <p:txBody>
           <a:bodyPr/>
           <a:lstStyle/>
           <a:p>
             <a:r>
               <a:rPr lang="de-DE" dirty="0"/>
-              <a:t>Bild vom Code / Beschreibung von </a:t>
-            </a:r>
+              <a:t>Library:</a:t>
+            </a:r>
+          </a:p>
+          <a:p>
+            <a:pPr lvl="1"/>
             <a:r>
               <a:rPr lang="de-DE" dirty="0" err="1"/>
-              <a:t>methoden</a:t>
+              <a:t>Librosa</a:t>
             </a:r>
             <a:r>
               <a:rPr lang="de-DE" dirty="0"/>
-              <a:t>/ </a:t>
-            </a:r>
-            <a:r>
-              <a:rPr lang="de-DE" dirty="0" err="1"/>
-              <a:t>Bib</a:t>
-            </a:r>
-            <a:r>
-              <a:rPr lang="de-DE" dirty="0"/>
-              <a:t>. ?</a:t>
+              <a:t>: berechnen von…</a:t>
             </a:r>
           </a:p>
         </p:txBody>
@@ -4544,12 +5140,42 @@
               <a:pPr>
                 <a:defRPr/>
               </a:pPr>
-              <a:t>6</a:t>
+              <a:t>5</a:t>
             </a:fld>
             <a:endParaRPr lang="de-DE" altLang="de-DE" dirty="0"/>
           </a:p>
         </p:txBody>
       </p:sp>
+      <p:pic>
+        <p:nvPicPr>
+          <p:cNvPr id="8" name="Grafik 7" descr="Ein Bild, das Text, Screenshot, Schrift enthält.&#10;&#10;KI-generierte Inhalte können fehlerhaft sein.">
+            <a:extLst>
+              <a:ext uri="{FF2B5EF4-FFF2-40B4-BE49-F238E27FC236}">
+                <a16:creationId xmlns:a16="http://schemas.microsoft.com/office/drawing/2014/main" id="{C8DCE5B2-CBDE-2CE1-B10E-9BD9BD821FD5}"/>
+              </a:ext>
+            </a:extLst>
+          </p:cNvPr>
+          <p:cNvPicPr>
+            <a:picLocks noChangeAspect="1"/>
+          </p:cNvPicPr>
+          <p:nvPr/>
+        </p:nvPicPr>
+        <p:blipFill>
+          <a:blip r:embed="rId2"/>
+          <a:stretch>
+            <a:fillRect/>
+          </a:stretch>
+        </p:blipFill>
+        <p:spPr>
+          <a:xfrm>
+            <a:off x="4399752" y="2129246"/>
+            <a:ext cx="7571631" cy="3391989"/>
+          </a:xfrm>
+          <a:prstGeom prst="rect">
+            <a:avLst/>
+          </a:prstGeom>
+        </p:spPr>
+      </p:pic>
     </p:spTree>
     <p:extLst>
       <p:ext uri="{BB962C8B-B14F-4D97-AF65-F5344CB8AC3E}">
@@ -4563,7 +5189,683 @@
 </p:sld>
 </file>
 
+<file path=ppt/slides/slide6.xml><?xml version="1.0" encoding="utf-8"?>
+<p:sld xmlns:a="http://schemas.openxmlformats.org/drawingml/2006/main" xmlns:r="http://schemas.openxmlformats.org/officeDocument/2006/relationships" xmlns:p="http://schemas.openxmlformats.org/presentationml/2006/main">
+  <p:cSld>
+    <p:spTree>
+      <p:nvGrpSpPr>
+        <p:cNvPr id="1" name="">
+          <a:extLst>
+            <a:ext uri="{FF2B5EF4-FFF2-40B4-BE49-F238E27FC236}">
+              <a16:creationId xmlns:a16="http://schemas.microsoft.com/office/drawing/2014/main" id="{9C417B61-8CE5-3B97-6F85-3C618D6BECFE}"/>
+            </a:ext>
+          </a:extLst>
+        </p:cNvPr>
+        <p:cNvGrpSpPr/>
+        <p:nvPr/>
+      </p:nvGrpSpPr>
+      <p:grpSpPr>
+        <a:xfrm>
+          <a:off x="0" y="0"/>
+          <a:ext cx="0" cy="0"/>
+          <a:chOff x="0" y="0"/>
+          <a:chExt cx="0" cy="0"/>
+        </a:xfrm>
+      </p:grpSpPr>
+      <p:sp>
+        <p:nvSpPr>
+          <p:cNvPr id="5" name="Titel 4">
+            <a:extLst>
+              <a:ext uri="{FF2B5EF4-FFF2-40B4-BE49-F238E27FC236}">
+                <a16:creationId xmlns:a16="http://schemas.microsoft.com/office/drawing/2014/main" id="{898D85CC-7045-19F5-6B89-A95D6A5F2312}"/>
+              </a:ext>
+            </a:extLst>
+          </p:cNvPr>
+          <p:cNvSpPr>
+            <a:spLocks noGrp="1"/>
+          </p:cNvSpPr>
+          <p:nvPr>
+            <p:ph type="title"/>
+          </p:nvPr>
+        </p:nvSpPr>
+        <p:spPr/>
+        <p:txBody>
+          <a:bodyPr/>
+          <a:lstStyle/>
+          <a:p>
+            <a:r>
+              <a:rPr kumimoji="0" lang="de-DE" sz="3200" b="1" i="0" u="none" strike="noStrike" kern="0" cap="none" spc="0" normalizeH="0" baseline="0" noProof="0" dirty="0" err="1">
+                <a:ln>
+                  <a:noFill/>
+                </a:ln>
+                <a:solidFill>
+                  <a:srgbClr val="A8CC2F"/>
+                </a:solidFill>
+                <a:effectLst/>
+                <a:uLnTx/>
+                <a:uFillTx/>
+                <a:latin typeface="Arial"/>
+                <a:ea typeface="ヒラギノ角ゴ Pro W3"/>
+              </a:rPr>
+              <a:t>Mekmalsanalyse</a:t>
+            </a:r>
+            <a:r>
+              <a:rPr kumimoji="0" lang="de-DE" sz="3200" b="1" i="0" u="none" strike="noStrike" kern="0" cap="none" spc="0" normalizeH="0" baseline="0" noProof="0" dirty="0">
+                <a:ln>
+                  <a:noFill/>
+                </a:ln>
+                <a:solidFill>
+                  <a:srgbClr val="A8CC2F"/>
+                </a:solidFill>
+                <a:effectLst/>
+                <a:uLnTx/>
+                <a:uFillTx/>
+                <a:latin typeface="Arial"/>
+                <a:ea typeface="ヒラギノ角ゴ Pro W3"/>
+              </a:rPr>
+              <a:t>:</a:t>
+            </a:r>
+            <a:br>
+              <a:rPr kumimoji="0" lang="de-DE" sz="3200" b="1" i="0" u="none" strike="noStrike" kern="0" cap="none" spc="0" normalizeH="0" baseline="0" noProof="0" dirty="0">
+                <a:ln>
+                  <a:noFill/>
+                </a:ln>
+                <a:solidFill>
+                  <a:srgbClr val="A8CC2F"/>
+                </a:solidFill>
+                <a:effectLst/>
+                <a:uLnTx/>
+                <a:uFillTx/>
+                <a:latin typeface="Arial"/>
+                <a:ea typeface="ヒラギノ角ゴ Pro W3"/>
+              </a:rPr>
+            </a:br>
+            <a:r>
+              <a:rPr kumimoji="0" lang="de-DE" sz="2400" b="1" i="0" u="none" strike="noStrike" kern="0" cap="none" spc="0" normalizeH="0" baseline="0" noProof="0" dirty="0" err="1">
+                <a:ln>
+                  <a:noFill/>
+                </a:ln>
+                <a:solidFill>
+                  <a:srgbClr val="A8CC2F"/>
+                </a:solidFill>
+                <a:effectLst/>
+                <a:uLnTx/>
+                <a:uFillTx/>
+                <a:latin typeface="Arial"/>
+                <a:ea typeface="ヒラギノ角ゴ Pro W3"/>
+              </a:rPr>
+              <a:t>Standartisierung</a:t>
+            </a:r>
+            <a:r>
+              <a:rPr kumimoji="0" lang="de-DE" sz="2400" b="1" i="0" u="none" strike="noStrike" kern="0" cap="none" spc="0" normalizeH="0" baseline="0" noProof="0" dirty="0">
+                <a:ln>
+                  <a:noFill/>
+                </a:ln>
+                <a:solidFill>
+                  <a:srgbClr val="A8CC2F"/>
+                </a:solidFill>
+                <a:effectLst/>
+                <a:uLnTx/>
+                <a:uFillTx/>
+                <a:latin typeface="Arial"/>
+                <a:ea typeface="ヒラギノ角ゴ Pro W3"/>
+              </a:rPr>
+              <a:t> &amp; Code</a:t>
+            </a:r>
+            <a:endParaRPr lang="de-DE" dirty="0"/>
+          </a:p>
+        </p:txBody>
+      </p:sp>
+      <p:sp>
+        <p:nvSpPr>
+          <p:cNvPr id="10" name="Inhaltsplatzhalter 9">
+            <a:extLst>
+              <a:ext uri="{FF2B5EF4-FFF2-40B4-BE49-F238E27FC236}">
+                <a16:creationId xmlns:a16="http://schemas.microsoft.com/office/drawing/2014/main" id="{3CFC55D7-9A46-28B7-DCDC-9006970AADA8}"/>
+              </a:ext>
+            </a:extLst>
+          </p:cNvPr>
+          <p:cNvSpPr>
+            <a:spLocks noGrp="1"/>
+          </p:cNvSpPr>
+          <p:nvPr>
+            <p:ph idx="1"/>
+          </p:nvPr>
+        </p:nvSpPr>
+        <p:spPr/>
+        <p:txBody>
+          <a:bodyPr/>
+          <a:lstStyle/>
+          <a:p>
+            <a:pPr algn="l" fontAlgn="base">
+              <a:spcAft>
+                <a:spcPts val="300"/>
+              </a:spcAft>
+              <a:buFont typeface="Arial" panose="020B0604020202020204" pitchFamily="34" charset="0"/>
+              <a:buChar char="•"/>
+            </a:pPr>
+            <a:r>
+              <a:rPr lang="de-DE" b="0" i="0" dirty="0">
+                <a:effectLst/>
+                <a:latin typeface="gg sans"/>
+              </a:rPr>
+              <a:t>Merkmale haben unterschiedliche Einheiten und Größenordnungen</a:t>
+            </a:r>
+          </a:p>
+          <a:p>
+            <a:pPr lvl="1">
+              <a:spcAft>
+                <a:spcPts val="300"/>
+              </a:spcAft>
+              <a:buFont typeface="Wingdings" pitchFamily="2" charset="2"/>
+              <a:buChar char="è"/>
+            </a:pPr>
+            <a:r>
+              <a:rPr lang="de-DE" b="0" i="0" dirty="0">
+                <a:effectLst/>
+                <a:latin typeface="gg sans"/>
+              </a:rPr>
+              <a:t>Standardisieren auf Mittelwert 0 und Standardabweichung 1</a:t>
+            </a:r>
+          </a:p>
+          <a:p>
+            <a:pPr lvl="1">
+              <a:spcAft>
+                <a:spcPts val="300"/>
+              </a:spcAft>
+              <a:buFont typeface="Wingdings" pitchFamily="2" charset="2"/>
+              <a:buChar char="è"/>
+            </a:pPr>
+            <a:r>
+              <a:rPr lang="de-DE" dirty="0">
+                <a:latin typeface="gg sans"/>
+              </a:rPr>
+              <a:t>z.B.</a:t>
+            </a:r>
+            <a:r>
+              <a:rPr lang="de-DE" b="0" i="0" dirty="0">
+                <a:effectLst/>
+                <a:latin typeface="gg sans"/>
+              </a:rPr>
+              <a:t> Frequenzwerte nicht automatisch wichtiger als kleinere dimensionslose Werte</a:t>
+            </a:r>
+            <a:endParaRPr lang="de-DE" b="0" i="0" dirty="0">
+              <a:effectLst/>
+              <a:latin typeface="inherit"/>
+            </a:endParaRPr>
+          </a:p>
+        </p:txBody>
+      </p:sp>
+      <p:sp>
+        <p:nvSpPr>
+          <p:cNvPr id="4" name="Foliennummernplatzhalter 3">
+            <a:extLst>
+              <a:ext uri="{FF2B5EF4-FFF2-40B4-BE49-F238E27FC236}">
+                <a16:creationId xmlns:a16="http://schemas.microsoft.com/office/drawing/2014/main" id="{8925611F-2E54-B9F6-1387-380500D28BD7}"/>
+              </a:ext>
+            </a:extLst>
+          </p:cNvPr>
+          <p:cNvSpPr>
+            <a:spLocks noGrp="1"/>
+          </p:cNvSpPr>
+          <p:nvPr>
+            <p:ph type="sldNum" sz="quarter" idx="10"/>
+          </p:nvPr>
+        </p:nvSpPr>
+        <p:spPr/>
+        <p:txBody>
+          <a:bodyPr/>
+          <a:lstStyle/>
+          <a:p>
+            <a:pPr>
+              <a:defRPr/>
+            </a:pPr>
+            <a:fld id="{A0424531-ACBB-43B0-9536-C2FB0D769E6C}" type="slidenum">
+              <a:rPr lang="de-DE" altLang="de-DE" smtClean="0"/>
+              <a:pPr>
+                <a:defRPr/>
+              </a:pPr>
+              <a:t>6</a:t>
+            </a:fld>
+            <a:endParaRPr lang="de-DE" altLang="de-DE" dirty="0"/>
+          </a:p>
+        </p:txBody>
+      </p:sp>
+    </p:spTree>
+    <p:extLst>
+      <p:ext uri="{BB962C8B-B14F-4D97-AF65-F5344CB8AC3E}">
+        <p14:creationId xmlns:p14="http://schemas.microsoft.com/office/powerpoint/2010/main" val="870363113"/>
+      </p:ext>
+    </p:extLst>
+  </p:cSld>
+  <p:clrMapOvr>
+    <a:masterClrMapping/>
+  </p:clrMapOvr>
+</p:sld>
+</file>
+
 <file path=ppt/slides/slide7.xml><?xml version="1.0" encoding="utf-8"?>
+<p:sld xmlns:a="http://schemas.openxmlformats.org/drawingml/2006/main" xmlns:r="http://schemas.openxmlformats.org/officeDocument/2006/relationships" xmlns:p="http://schemas.openxmlformats.org/presentationml/2006/main">
+  <p:cSld>
+    <p:spTree>
+      <p:nvGrpSpPr>
+        <p:cNvPr id="1" name="">
+          <a:extLst>
+            <a:ext uri="{FF2B5EF4-FFF2-40B4-BE49-F238E27FC236}">
+              <a16:creationId xmlns:a16="http://schemas.microsoft.com/office/drawing/2014/main" id="{AE701B9E-346B-3528-8989-0CC87ABBC468}"/>
+            </a:ext>
+          </a:extLst>
+        </p:cNvPr>
+        <p:cNvGrpSpPr/>
+        <p:nvPr/>
+      </p:nvGrpSpPr>
+      <p:grpSpPr>
+        <a:xfrm>
+          <a:off x="0" y="0"/>
+          <a:ext cx="0" cy="0"/>
+          <a:chOff x="0" y="0"/>
+          <a:chExt cx="0" cy="0"/>
+        </a:xfrm>
+      </p:grpSpPr>
+      <p:sp>
+        <p:nvSpPr>
+          <p:cNvPr id="5" name="Titel 4">
+            <a:extLst>
+              <a:ext uri="{FF2B5EF4-FFF2-40B4-BE49-F238E27FC236}">
+                <a16:creationId xmlns:a16="http://schemas.microsoft.com/office/drawing/2014/main" id="{0C57D15E-CCA8-224B-43C2-BF840F74E7FD}"/>
+              </a:ext>
+            </a:extLst>
+          </p:cNvPr>
+          <p:cNvSpPr>
+            <a:spLocks noGrp="1"/>
+          </p:cNvSpPr>
+          <p:nvPr>
+            <p:ph type="title"/>
+          </p:nvPr>
+        </p:nvSpPr>
+        <p:spPr/>
+        <p:txBody>
+          <a:bodyPr/>
+          <a:lstStyle/>
+          <a:p>
+            <a:r>
+              <a:rPr kumimoji="0" lang="de-DE" sz="3200" b="1" i="0" u="none" strike="noStrike" kern="0" cap="none" spc="0" normalizeH="0" baseline="0" noProof="0" dirty="0" err="1">
+                <a:ln>
+                  <a:noFill/>
+                </a:ln>
+                <a:solidFill>
+                  <a:srgbClr val="A8CC2F"/>
+                </a:solidFill>
+                <a:effectLst/>
+                <a:uLnTx/>
+                <a:uFillTx/>
+                <a:latin typeface="Arial"/>
+                <a:ea typeface="ヒラギノ角ゴ Pro W3"/>
+              </a:rPr>
+              <a:t>Mekmalsanalyse</a:t>
+            </a:r>
+            <a:r>
+              <a:rPr kumimoji="0" lang="de-DE" sz="3200" b="1" i="0" u="none" strike="noStrike" kern="0" cap="none" spc="0" normalizeH="0" baseline="0" noProof="0" dirty="0">
+                <a:ln>
+                  <a:noFill/>
+                </a:ln>
+                <a:solidFill>
+                  <a:srgbClr val="A8CC2F"/>
+                </a:solidFill>
+                <a:effectLst/>
+                <a:uLnTx/>
+                <a:uFillTx/>
+                <a:latin typeface="Arial"/>
+                <a:ea typeface="ヒラギノ角ゴ Pro W3"/>
+              </a:rPr>
+              <a:t>:</a:t>
+            </a:r>
+            <a:br>
+              <a:rPr kumimoji="0" lang="de-DE" sz="3200" b="1" i="0" u="none" strike="noStrike" kern="0" cap="none" spc="0" normalizeH="0" baseline="0" noProof="0" dirty="0">
+                <a:ln>
+                  <a:noFill/>
+                </a:ln>
+                <a:solidFill>
+                  <a:srgbClr val="A8CC2F"/>
+                </a:solidFill>
+                <a:effectLst/>
+                <a:uLnTx/>
+                <a:uFillTx/>
+                <a:latin typeface="Arial"/>
+                <a:ea typeface="ヒラギノ角ゴ Pro W3"/>
+              </a:rPr>
+            </a:br>
+            <a:r>
+              <a:rPr kumimoji="0" lang="de-DE" sz="2400" b="1" i="0" u="none" strike="noStrike" kern="0" cap="none" spc="0" normalizeH="0" baseline="0" noProof="0" dirty="0" err="1">
+                <a:ln>
+                  <a:noFill/>
+                </a:ln>
+                <a:solidFill>
+                  <a:srgbClr val="A8CC2F"/>
+                </a:solidFill>
+                <a:effectLst/>
+                <a:uLnTx/>
+                <a:uFillTx/>
+                <a:latin typeface="Arial"/>
+                <a:ea typeface="ヒラギノ角ゴ Pro W3"/>
+              </a:rPr>
+              <a:t>Standartisierung</a:t>
+            </a:r>
+            <a:r>
+              <a:rPr kumimoji="0" lang="de-DE" sz="2400" b="1" i="0" u="none" strike="noStrike" kern="0" cap="none" spc="0" normalizeH="0" baseline="0" noProof="0" dirty="0">
+                <a:ln>
+                  <a:noFill/>
+                </a:ln>
+                <a:solidFill>
+                  <a:srgbClr val="A8CC2F"/>
+                </a:solidFill>
+                <a:effectLst/>
+                <a:uLnTx/>
+                <a:uFillTx/>
+                <a:latin typeface="Arial"/>
+                <a:ea typeface="ヒラギノ角ゴ Pro W3"/>
+              </a:rPr>
+              <a:t> &amp; PCA: Code</a:t>
+            </a:r>
+            <a:endParaRPr lang="de-DE" dirty="0"/>
+          </a:p>
+        </p:txBody>
+      </p:sp>
+      <p:pic>
+        <p:nvPicPr>
+          <p:cNvPr id="3" name="Inhaltsplatzhalter 2" descr="Ein Bild, das Text, Screenshot, Schrift enthält.&#10;&#10;KI-generierte Inhalte können fehlerhaft sein.">
+            <a:extLst>
+              <a:ext uri="{FF2B5EF4-FFF2-40B4-BE49-F238E27FC236}">
+                <a16:creationId xmlns:a16="http://schemas.microsoft.com/office/drawing/2014/main" id="{FA97D665-B2B0-6A98-0F8B-3D58A024C42B}"/>
+              </a:ext>
+            </a:extLst>
+          </p:cNvPr>
+          <p:cNvPicPr>
+            <a:picLocks noGrp="1" noChangeAspect="1"/>
+          </p:cNvPicPr>
+          <p:nvPr>
+            <p:ph idx="1"/>
+          </p:nvPr>
+        </p:nvPicPr>
+        <p:blipFill>
+          <a:blip r:embed="rId3"/>
+          <a:stretch>
+            <a:fillRect/>
+          </a:stretch>
+        </p:blipFill>
+        <p:spPr>
+          <a:xfrm>
+            <a:off x="929754" y="2588821"/>
+            <a:ext cx="10982846" cy="3244108"/>
+          </a:xfrm>
+        </p:spPr>
+      </p:pic>
+      <p:sp>
+        <p:nvSpPr>
+          <p:cNvPr id="4" name="Foliennummernplatzhalter 3">
+            <a:extLst>
+              <a:ext uri="{FF2B5EF4-FFF2-40B4-BE49-F238E27FC236}">
+                <a16:creationId xmlns:a16="http://schemas.microsoft.com/office/drawing/2014/main" id="{F25C558F-068E-467F-FEA0-9A2B9590AB17}"/>
+              </a:ext>
+            </a:extLst>
+          </p:cNvPr>
+          <p:cNvSpPr>
+            <a:spLocks noGrp="1"/>
+          </p:cNvSpPr>
+          <p:nvPr>
+            <p:ph type="sldNum" sz="quarter" idx="10"/>
+          </p:nvPr>
+        </p:nvSpPr>
+        <p:spPr/>
+        <p:txBody>
+          <a:bodyPr/>
+          <a:lstStyle/>
+          <a:p>
+            <a:pPr>
+              <a:defRPr/>
+            </a:pPr>
+            <a:fld id="{A0424531-ACBB-43B0-9536-C2FB0D769E6C}" type="slidenum">
+              <a:rPr lang="de-DE" altLang="de-DE" smtClean="0"/>
+              <a:pPr>
+                <a:defRPr/>
+              </a:pPr>
+              <a:t>7</a:t>
+            </a:fld>
+            <a:endParaRPr lang="de-DE" altLang="de-DE" dirty="0"/>
+          </a:p>
+        </p:txBody>
+      </p:sp>
+      <p:sp>
+        <p:nvSpPr>
+          <p:cNvPr id="6" name="Inhaltsplatzhalter 9">
+            <a:extLst>
+              <a:ext uri="{FF2B5EF4-FFF2-40B4-BE49-F238E27FC236}">
+                <a16:creationId xmlns:a16="http://schemas.microsoft.com/office/drawing/2014/main" id="{7AFC9A66-8356-7CE3-2D1D-54900DD9AADA}"/>
+              </a:ext>
+            </a:extLst>
+          </p:cNvPr>
+          <p:cNvSpPr txBox="1">
+            <a:spLocks/>
+          </p:cNvSpPr>
+          <p:nvPr/>
+        </p:nvSpPr>
+        <p:spPr bwMode="auto">
+          <a:xfrm>
+            <a:off x="914400" y="1981200"/>
+            <a:ext cx="9737766" cy="607621"/>
+          </a:xfrm>
+          <a:prstGeom prst="rect">
+            <a:avLst/>
+          </a:prstGeom>
+          <a:noFill/>
+          <a:ln>
+            <a:noFill/>
+          </a:ln>
+          <a:extLst>
+            <a:ext uri="{909E8E84-426E-40DD-AFC4-6F175D3DCCD1}">
+              <a14:hiddenFill xmlns:a14="http://schemas.microsoft.com/office/drawing/2010/main">
+                <a:solidFill>
+                  <a:srgbClr val="FFFFFF"/>
+                </a:solidFill>
+              </a14:hiddenFill>
+            </a:ext>
+            <a:ext uri="{91240B29-F687-4F45-9708-019B960494DF}">
+              <a14:hiddenLine xmlns:a14="http://schemas.microsoft.com/office/drawing/2010/main" w="9525">
+                <a:solidFill>
+                  <a:srgbClr val="000000"/>
+                </a:solidFill>
+                <a:miter lim="800000"/>
+                <a:headEnd/>
+                <a:tailEnd/>
+              </a14:hiddenLine>
+            </a:ext>
+          </a:extLst>
+        </p:spPr>
+        <p:txBody>
+          <a:bodyPr vert="horz" wrap="square" lIns="91440" tIns="45720" rIns="91440" bIns="45720" numCol="1" anchor="t" anchorCtr="0" compatLnSpc="1">
+            <a:prstTxWarp prst="textNoShape">
+              <a:avLst/>
+            </a:prstTxWarp>
+          </a:bodyPr>
+          <a:lstStyle>
+            <a:lvl1pPr marL="342900" indent="-342900" algn="l" rtl="0" eaLnBrk="1" fontAlgn="base" hangingPunct="1">
+              <a:spcBef>
+                <a:spcPct val="20000"/>
+              </a:spcBef>
+              <a:spcAft>
+                <a:spcPct val="0"/>
+              </a:spcAft>
+              <a:buFont typeface="Lucida Grande" charset="0"/>
+              <a:buChar char="·"/>
+              <a:defRPr sz="2400">
+                <a:solidFill>
+                  <a:srgbClr val="414141"/>
+                </a:solidFill>
+                <a:latin typeface="+mn-lt"/>
+                <a:ea typeface="+mn-ea"/>
+                <a:cs typeface="+mn-cs"/>
+              </a:defRPr>
+            </a:lvl1pPr>
+            <a:lvl2pPr marL="742950" indent="-285750" algn="l" rtl="0" eaLnBrk="1" fontAlgn="base" hangingPunct="1">
+              <a:spcBef>
+                <a:spcPct val="20000"/>
+              </a:spcBef>
+              <a:spcAft>
+                <a:spcPct val="0"/>
+              </a:spcAft>
+              <a:buFont typeface="Lucida Grande" charset="0"/>
+              <a:buChar char="·"/>
+              <a:defRPr sz="2000">
+                <a:solidFill>
+                  <a:srgbClr val="414141"/>
+                </a:solidFill>
+                <a:latin typeface="+mn-lt"/>
+                <a:ea typeface="+mn-ea"/>
+                <a:cs typeface="+mn-cs"/>
+              </a:defRPr>
+            </a:lvl2pPr>
+            <a:lvl3pPr marL="1143000" indent="-228600" algn="l" rtl="0" eaLnBrk="1" fontAlgn="base" hangingPunct="1">
+              <a:spcBef>
+                <a:spcPct val="20000"/>
+              </a:spcBef>
+              <a:spcAft>
+                <a:spcPct val="0"/>
+              </a:spcAft>
+              <a:buFont typeface="Lucida Grande" charset="0"/>
+              <a:buChar char="·"/>
+              <a:defRPr>
+                <a:solidFill>
+                  <a:srgbClr val="414141"/>
+                </a:solidFill>
+                <a:latin typeface="+mn-lt"/>
+                <a:ea typeface="+mn-ea"/>
+                <a:cs typeface="+mn-cs"/>
+              </a:defRPr>
+            </a:lvl3pPr>
+            <a:lvl4pPr marL="1144588" algn="l" rtl="0" eaLnBrk="1" fontAlgn="base" hangingPunct="1">
+              <a:spcBef>
+                <a:spcPct val="20000"/>
+              </a:spcBef>
+              <a:spcAft>
+                <a:spcPct val="0"/>
+              </a:spcAft>
+              <a:buClr>
+                <a:srgbClr val="414141"/>
+              </a:buClr>
+              <a:defRPr>
+                <a:solidFill>
+                  <a:srgbClr val="414141"/>
+                </a:solidFill>
+                <a:latin typeface="Courier New"/>
+                <a:ea typeface="+mn-ea"/>
+                <a:cs typeface="+mn-cs"/>
+              </a:defRPr>
+            </a:lvl4pPr>
+            <a:lvl5pPr marL="1144588" indent="-228600" algn="l" rtl="0" eaLnBrk="1" fontAlgn="base" hangingPunct="1">
+              <a:spcBef>
+                <a:spcPct val="20000"/>
+              </a:spcBef>
+              <a:spcAft>
+                <a:spcPct val="0"/>
+              </a:spcAft>
+              <a:buFont typeface="Lucida Grande" charset="0"/>
+              <a:buChar char="·"/>
+              <a:defRPr>
+                <a:solidFill>
+                  <a:srgbClr val="A8CC2F"/>
+                </a:solidFill>
+                <a:latin typeface="+mn-lt"/>
+                <a:ea typeface="+mn-ea"/>
+                <a:cs typeface="+mn-cs"/>
+              </a:defRPr>
+            </a:lvl5pPr>
+            <a:lvl6pPr marL="2438400" indent="-228600" algn="l" rtl="0" eaLnBrk="1" fontAlgn="base" hangingPunct="1">
+              <a:spcBef>
+                <a:spcPct val="20000"/>
+              </a:spcBef>
+              <a:spcAft>
+                <a:spcPct val="0"/>
+              </a:spcAft>
+              <a:defRPr sz="1600">
+                <a:solidFill>
+                  <a:srgbClr val="414141"/>
+                </a:solidFill>
+                <a:latin typeface="+mn-lt"/>
+                <a:ea typeface="+mn-ea"/>
+                <a:cs typeface="+mn-cs"/>
+              </a:defRPr>
+            </a:lvl6pPr>
+            <a:lvl7pPr marL="2895600" indent="-228600" algn="l" rtl="0" eaLnBrk="1" fontAlgn="base" hangingPunct="1">
+              <a:spcBef>
+                <a:spcPct val="20000"/>
+              </a:spcBef>
+              <a:spcAft>
+                <a:spcPct val="0"/>
+              </a:spcAft>
+              <a:defRPr sz="1600">
+                <a:solidFill>
+                  <a:srgbClr val="414141"/>
+                </a:solidFill>
+                <a:latin typeface="+mn-lt"/>
+                <a:ea typeface="+mn-ea"/>
+                <a:cs typeface="+mn-cs"/>
+              </a:defRPr>
+            </a:lvl7pPr>
+            <a:lvl8pPr marL="3352800" indent="-228600" algn="l" rtl="0" eaLnBrk="1" fontAlgn="base" hangingPunct="1">
+              <a:spcBef>
+                <a:spcPct val="20000"/>
+              </a:spcBef>
+              <a:spcAft>
+                <a:spcPct val="0"/>
+              </a:spcAft>
+              <a:defRPr sz="1600">
+                <a:solidFill>
+                  <a:srgbClr val="414141"/>
+                </a:solidFill>
+                <a:latin typeface="+mn-lt"/>
+                <a:ea typeface="+mn-ea"/>
+                <a:cs typeface="+mn-cs"/>
+              </a:defRPr>
+            </a:lvl8pPr>
+            <a:lvl9pPr marL="3810000" indent="-228600" algn="l" rtl="0" eaLnBrk="1" fontAlgn="base" hangingPunct="1">
+              <a:spcBef>
+                <a:spcPct val="20000"/>
+              </a:spcBef>
+              <a:spcAft>
+                <a:spcPct val="0"/>
+              </a:spcAft>
+              <a:defRPr sz="1600">
+                <a:solidFill>
+                  <a:srgbClr val="414141"/>
+                </a:solidFill>
+                <a:latin typeface="+mn-lt"/>
+                <a:ea typeface="+mn-ea"/>
+                <a:cs typeface="+mn-cs"/>
+              </a:defRPr>
+            </a:lvl9pPr>
+          </a:lstStyle>
+          <a:p>
+            <a:r>
+              <a:rPr lang="de-DE" kern="0" dirty="0"/>
+              <a:t>Libraries:</a:t>
+            </a:r>
+          </a:p>
+        </p:txBody>
+      </p:sp>
+    </p:spTree>
+    <p:extLst>
+      <p:ext uri="{BB962C8B-B14F-4D97-AF65-F5344CB8AC3E}">
+        <p14:creationId xmlns:p14="http://schemas.microsoft.com/office/powerpoint/2010/main" val="3200753547"/>
+      </p:ext>
+    </p:extLst>
+  </p:cSld>
+  <p:clrMapOvr>
+    <a:masterClrMapping/>
+  </p:clrMapOvr>
+</p:sld>
+</file>
+
+<file path=ppt/slides/slide8.xml><?xml version="1.0" encoding="utf-8"?>
 <p:sld xmlns:a="http://schemas.openxmlformats.org/drawingml/2006/main" xmlns:r="http://schemas.openxmlformats.org/officeDocument/2006/relationships" xmlns:p="http://schemas.openxmlformats.org/presentationml/2006/main">
   <p:cSld>
     <p:spTree>
@@ -4675,7 +5977,7 @@
               <a:pPr>
                 <a:defRPr/>
               </a:pPr>
-              <a:t>7</a:t>
+              <a:t>8</a:t>
             </a:fld>
             <a:endParaRPr lang="de-DE" altLang="de-DE" dirty="0"/>
           </a:p>
@@ -4694,7 +5996,7 @@
 </p:sld>
 </file>
 
-<file path=ppt/slides/slide8.xml><?xml version="1.0" encoding="utf-8"?>
+<file path=ppt/slides/slide9.xml><?xml version="1.0" encoding="utf-8"?>
 <p:sld xmlns:a="http://schemas.openxmlformats.org/drawingml/2006/main" xmlns:r="http://schemas.openxmlformats.org/officeDocument/2006/relationships" xmlns:p="http://schemas.openxmlformats.org/presentationml/2006/main">
   <p:cSld>
     <p:spTree>
@@ -4814,7 +6116,7 @@
               <a:pPr>
                 <a:defRPr/>
               </a:pPr>
-              <a:t>8</a:t>
+              <a:t>9</a:t>
             </a:fld>
             <a:endParaRPr lang="de-DE" altLang="de-DE" dirty="0"/>
           </a:p>
@@ -4824,161 +6126,6 @@
     <p:extLst>
       <p:ext uri="{BB962C8B-B14F-4D97-AF65-F5344CB8AC3E}">
         <p14:creationId xmlns:p14="http://schemas.microsoft.com/office/powerpoint/2010/main" val="3056035922"/>
-      </p:ext>
-    </p:extLst>
-  </p:cSld>
-  <p:clrMapOvr>
-    <a:masterClrMapping/>
-  </p:clrMapOvr>
-</p:sld>
-</file>
-
-<file path=ppt/slides/slide9.xml><?xml version="1.0" encoding="utf-8"?>
-<p:sld xmlns:a="http://schemas.openxmlformats.org/drawingml/2006/main" xmlns:r="http://schemas.openxmlformats.org/officeDocument/2006/relationships" xmlns:p="http://schemas.openxmlformats.org/presentationml/2006/main">
-  <p:cSld>
-    <p:spTree>
-      <p:nvGrpSpPr>
-        <p:cNvPr id="1" name="">
-          <a:extLst>
-            <a:ext uri="{FF2B5EF4-FFF2-40B4-BE49-F238E27FC236}">
-              <a16:creationId xmlns:a16="http://schemas.microsoft.com/office/drawing/2014/main" id="{711A0095-53C7-3F5E-182B-1605E00E0FC0}"/>
-            </a:ext>
-          </a:extLst>
-        </p:cNvPr>
-        <p:cNvGrpSpPr/>
-        <p:nvPr/>
-      </p:nvGrpSpPr>
-      <p:grpSpPr>
-        <a:xfrm>
-          <a:off x="0" y="0"/>
-          <a:ext cx="0" cy="0"/>
-          <a:chOff x="0" y="0"/>
-          <a:chExt cx="0" cy="0"/>
-        </a:xfrm>
-      </p:grpSpPr>
-      <p:sp>
-        <p:nvSpPr>
-          <p:cNvPr id="5" name="Titel 4">
-            <a:extLst>
-              <a:ext uri="{FF2B5EF4-FFF2-40B4-BE49-F238E27FC236}">
-                <a16:creationId xmlns:a16="http://schemas.microsoft.com/office/drawing/2014/main" id="{D757B5A5-6051-FFCC-0340-6B2A2309AADC}"/>
-              </a:ext>
-            </a:extLst>
-          </p:cNvPr>
-          <p:cNvSpPr>
-            <a:spLocks noGrp="1"/>
-          </p:cNvSpPr>
-          <p:nvPr>
-            <p:ph type="title"/>
-          </p:nvPr>
-        </p:nvSpPr>
-        <p:spPr/>
-        <p:txBody>
-          <a:bodyPr/>
-          <a:lstStyle/>
-          <a:p>
-            <a:r>
-              <a:rPr lang="de-DE" dirty="0" err="1"/>
-              <a:t>Hauptkompenentenanalyse</a:t>
-            </a:r>
-            <a:r>
-              <a:rPr lang="de-DE" dirty="0"/>
-              <a:t>:</a:t>
-            </a:r>
-            <a:br>
-              <a:rPr lang="de-DE" dirty="0"/>
-            </a:br>
-            <a:r>
-              <a:rPr lang="de-DE" sz="2400" dirty="0"/>
-              <a:t>Code</a:t>
-            </a:r>
-            <a:endParaRPr lang="de-DE" dirty="0"/>
-          </a:p>
-        </p:txBody>
-      </p:sp>
-      <p:sp>
-        <p:nvSpPr>
-          <p:cNvPr id="10" name="Inhaltsplatzhalter 9">
-            <a:extLst>
-              <a:ext uri="{FF2B5EF4-FFF2-40B4-BE49-F238E27FC236}">
-                <a16:creationId xmlns:a16="http://schemas.microsoft.com/office/drawing/2014/main" id="{E0628943-4EE5-D432-8B1F-90A882908DCF}"/>
-              </a:ext>
-            </a:extLst>
-          </p:cNvPr>
-          <p:cNvSpPr>
-            <a:spLocks noGrp="1"/>
-          </p:cNvSpPr>
-          <p:nvPr>
-            <p:ph idx="1"/>
-          </p:nvPr>
-        </p:nvSpPr>
-        <p:spPr/>
-        <p:txBody>
-          <a:bodyPr/>
-          <a:lstStyle/>
-          <a:p>
-            <a:r>
-              <a:rPr lang="de-DE" dirty="0"/>
-              <a:t>Bild vom Code / Beschreibung von </a:t>
-            </a:r>
-            <a:r>
-              <a:rPr lang="de-DE" dirty="0" err="1"/>
-              <a:t>methoden</a:t>
-            </a:r>
-            <a:r>
-              <a:rPr lang="de-DE" dirty="0"/>
-              <a:t>/ </a:t>
-            </a:r>
-            <a:r>
-              <a:rPr lang="de-DE" dirty="0" err="1"/>
-              <a:t>Bib</a:t>
-            </a:r>
-            <a:r>
-              <a:rPr lang="de-DE" dirty="0"/>
-              <a:t>. ?</a:t>
-            </a:r>
-          </a:p>
-        </p:txBody>
-      </p:sp>
-      <p:sp>
-        <p:nvSpPr>
-          <p:cNvPr id="4" name="Foliennummernplatzhalter 3">
-            <a:extLst>
-              <a:ext uri="{FF2B5EF4-FFF2-40B4-BE49-F238E27FC236}">
-                <a16:creationId xmlns:a16="http://schemas.microsoft.com/office/drawing/2014/main" id="{953E53DE-A460-5286-4612-B8186AA66233}"/>
-              </a:ext>
-            </a:extLst>
-          </p:cNvPr>
-          <p:cNvSpPr>
-            <a:spLocks noGrp="1"/>
-          </p:cNvSpPr>
-          <p:nvPr>
-            <p:ph type="sldNum" sz="quarter" idx="10"/>
-          </p:nvPr>
-        </p:nvSpPr>
-        <p:spPr/>
-        <p:txBody>
-          <a:bodyPr/>
-          <a:lstStyle/>
-          <a:p>
-            <a:pPr>
-              <a:defRPr/>
-            </a:pPr>
-            <a:fld id="{A0424531-ACBB-43B0-9536-C2FB0D769E6C}" type="slidenum">
-              <a:rPr lang="de-DE" altLang="de-DE" smtClean="0"/>
-              <a:pPr>
-                <a:defRPr/>
-              </a:pPr>
-              <a:t>9</a:t>
-            </a:fld>
-            <a:endParaRPr lang="de-DE" altLang="de-DE" dirty="0"/>
-          </a:p>
-        </p:txBody>
-      </p:sp>
-    </p:spTree>
-    <p:extLst>
-      <p:ext uri="{BB962C8B-B14F-4D97-AF65-F5344CB8AC3E}">
-        <p14:creationId xmlns:p14="http://schemas.microsoft.com/office/powerpoint/2010/main" val="1026886502"/>
       </p:ext>
     </p:extLst>
   </p:cSld>

--- a/Task_2/Task2Powerpoint.pptx
+++ b/Task_2/Task2Powerpoint.pptx
@@ -5,7 +5,7 @@
     <p:sldMasterId id="2147483648" r:id="rId1"/>
   </p:sldMasterIdLst>
   <p:notesMasterIdLst>
-    <p:notesMasterId r:id="rId12"/>
+    <p:notesMasterId r:id="rId20"/>
   </p:notesMasterIdLst>
   <p:sldIdLst>
     <p:sldId id="256" r:id="rId2"/>
@@ -14,10 +14,18 @@
     <p:sldId id="258" r:id="rId5"/>
     <p:sldId id="263" r:id="rId6"/>
     <p:sldId id="267" r:id="rId7"/>
-    <p:sldId id="268" r:id="rId8"/>
-    <p:sldId id="260" r:id="rId9"/>
-    <p:sldId id="264" r:id="rId10"/>
+    <p:sldId id="264" r:id="rId8"/>
+    <p:sldId id="269" r:id="rId9"/>
+    <p:sldId id="268" r:id="rId10"/>
     <p:sldId id="265" r:id="rId11"/>
+    <p:sldId id="270" r:id="rId12"/>
+    <p:sldId id="271" r:id="rId13"/>
+    <p:sldId id="272" r:id="rId14"/>
+    <p:sldId id="273" r:id="rId15"/>
+    <p:sldId id="274" r:id="rId16"/>
+    <p:sldId id="275" r:id="rId17"/>
+    <p:sldId id="276" r:id="rId18"/>
+    <p:sldId id="277" r:id="rId19"/>
   </p:sldIdLst>
   <p:sldSz cx="12192000" cy="6858000"/>
   <p:notesSz cx="9144000" cy="6858000"/>
@@ -250,7 +258,7 @@
           <a:p>
             <a:fld id="{52D5829F-2F94-0B44-A96D-AE852A87AC61}" type="datetimeFigureOut">
               <a:rPr lang="de-DE" smtClean="0"/>
-              <a:t>19.06.26</a:t>
+              <a:t>19.06.2026</a:t>
             </a:fld>
             <a:endParaRPr lang="de-DE"/>
           </a:p>
@@ -1007,7 +1015,7 @@
           <a:p>
             <a:fld id="{0492B7F2-6741-7346-B13A-366117EE2BBB}" type="slidenum">
               <a:rPr lang="de-DE" smtClean="0"/>
-              <a:t>7</a:t>
+              <a:t>9</a:t>
             </a:fld>
             <a:endParaRPr lang="de-DE"/>
           </a:p>
@@ -4213,68 +4221,76 @@
           <a:lstStyle/>
           <a:p>
             <a:r>
-              <a:rPr lang="de-DE" dirty="0" err="1"/>
-              <a:t>Hauptkompenentenanalyse</a:t>
-            </a:r>
-            <a:r>
               <a:rPr lang="de-DE" dirty="0"/>
-              <a:t>:</a:t>
+              <a:t>Visualisierung:</a:t>
             </a:r>
             <a:br>
               <a:rPr lang="de-DE" dirty="0"/>
             </a:br>
             <a:r>
               <a:rPr lang="de-DE" sz="2400" dirty="0"/>
-              <a:t>Code</a:t>
+              <a:t>Ansicht einer Position beider Channel</a:t>
             </a:r>
             <a:endParaRPr lang="de-DE" dirty="0"/>
           </a:p>
         </p:txBody>
       </p:sp>
-      <p:sp>
-        <p:nvSpPr>
-          <p:cNvPr id="10" name="Inhaltsplatzhalter 9">
+      <p:pic>
+        <p:nvPicPr>
+          <p:cNvPr id="3" name="Inhaltsplatzhalter 2">
             <a:extLst>
               <a:ext uri="{FF2B5EF4-FFF2-40B4-BE49-F238E27FC236}">
-                <a16:creationId xmlns:a16="http://schemas.microsoft.com/office/drawing/2014/main" id="{E0628943-4EE5-D432-8B1F-90A882908DCF}"/>
+                <a16:creationId xmlns:a16="http://schemas.microsoft.com/office/drawing/2014/main" id="{D7C1B853-D0B1-D6E0-7F1E-5BADA4184D15}"/>
               </a:ext>
             </a:extLst>
           </p:cNvPr>
-          <p:cNvSpPr>
-            <a:spLocks noGrp="1"/>
-          </p:cNvSpPr>
+          <p:cNvPicPr>
+            <a:picLocks noGrp="1" noChangeAspect="1"/>
+          </p:cNvPicPr>
           <p:nvPr>
             <p:ph idx="1"/>
           </p:nvPr>
-        </p:nvSpPr>
-        <p:spPr/>
-        <p:txBody>
-          <a:bodyPr/>
-          <a:lstStyle/>
-          <a:p>
-            <a:r>
-              <a:rPr lang="de-DE" dirty="0"/>
-              <a:t>Bild vom Code / Beschreibung von </a:t>
-            </a:r>
-            <a:r>
-              <a:rPr lang="de-DE" dirty="0" err="1"/>
-              <a:t>methoden</a:t>
-            </a:r>
-            <a:r>
-              <a:rPr lang="de-DE" dirty="0"/>
-              <a:t>/ </a:t>
-            </a:r>
-            <a:r>
-              <a:rPr lang="de-DE" dirty="0" err="1"/>
-              <a:t>Bib</a:t>
-            </a:r>
-            <a:r>
-              <a:rPr lang="de-DE" dirty="0"/>
-              <a:t>. ?</a:t>
-            </a:r>
-          </a:p>
-        </p:txBody>
-      </p:sp>
+        </p:nvPicPr>
+        <p:blipFill rotWithShape="1">
+          <a:blip r:embed="rId2"/>
+          <a:srcRect b="66742"/>
+          <a:stretch>
+            <a:fillRect/>
+          </a:stretch>
+        </p:blipFill>
+        <p:spPr bwMode="auto">
+          <a:xfrm>
+            <a:off x="201201" y="1510004"/>
+            <a:ext cx="11381199" cy="4877888"/>
+          </a:xfrm>
+          <a:prstGeom prst="rect">
+            <a:avLst/>
+          </a:prstGeom>
+          <a:noFill/>
+          <a:ln>
+            <a:noFill/>
+          </a:ln>
+          <a:extLst>
+            <a:ext uri="{909E8E84-426E-40DD-AFC4-6F175D3DCCD1}">
+              <a14:hiddenFill xmlns:a14="http://schemas.microsoft.com/office/drawing/2010/main">
+                <a:solidFill>
+                  <a:srgbClr val="FFFFFF"/>
+                </a:solidFill>
+              </a14:hiddenFill>
+            </a:ext>
+            <a:ext uri="{91240B29-F687-4F45-9708-019B960494DF}">
+              <a14:hiddenLine xmlns:a14="http://schemas.microsoft.com/office/drawing/2010/main" w="9525">
+                <a:solidFill>
+                  <a:srgbClr val="000000"/>
+                </a:solidFill>
+                <a:miter lim="800000"/>
+                <a:headEnd/>
+                <a:tailEnd/>
+              </a14:hiddenLine>
+            </a:ext>
+          </a:extLst>
+        </p:spPr>
+      </p:pic>
       <p:sp>
         <p:nvSpPr>
           <p:cNvPr id="4" name="Foliennummernplatzhalter 3">
@@ -4314,6 +4330,1657 @@
     <p:extLst>
       <p:ext uri="{BB962C8B-B14F-4D97-AF65-F5344CB8AC3E}">
         <p14:creationId xmlns:p14="http://schemas.microsoft.com/office/powerpoint/2010/main" val="1026886502"/>
+      </p:ext>
+    </p:extLst>
+  </p:cSld>
+  <p:clrMapOvr>
+    <a:masterClrMapping/>
+  </p:clrMapOvr>
+</p:sld>
+</file>
+
+<file path=ppt/slides/slide11.xml><?xml version="1.0" encoding="utf-8"?>
+<p:sld xmlns:a="http://schemas.openxmlformats.org/drawingml/2006/main" xmlns:r="http://schemas.openxmlformats.org/officeDocument/2006/relationships" xmlns:p="http://schemas.openxmlformats.org/presentationml/2006/main">
+  <p:cSld>
+    <p:spTree>
+      <p:nvGrpSpPr>
+        <p:cNvPr id="1" name=""/>
+        <p:cNvGrpSpPr/>
+        <p:nvPr/>
+      </p:nvGrpSpPr>
+      <p:grpSpPr>
+        <a:xfrm>
+          <a:off x="0" y="0"/>
+          <a:ext cx="0" cy="0"/>
+          <a:chOff x="0" y="0"/>
+          <a:chExt cx="0" cy="0"/>
+        </a:xfrm>
+      </p:grpSpPr>
+      <p:sp>
+        <p:nvSpPr>
+          <p:cNvPr id="2" name="Titel 1">
+            <a:extLst>
+              <a:ext uri="{FF2B5EF4-FFF2-40B4-BE49-F238E27FC236}">
+                <a16:creationId xmlns:a16="http://schemas.microsoft.com/office/drawing/2014/main" id="{CF324D3E-0F2F-AB0F-B173-23CAC68258D5}"/>
+              </a:ext>
+            </a:extLst>
+          </p:cNvPr>
+          <p:cNvSpPr>
+            <a:spLocks noGrp="1"/>
+          </p:cNvSpPr>
+          <p:nvPr>
+            <p:ph type="title"/>
+          </p:nvPr>
+        </p:nvSpPr>
+        <p:spPr>
+          <a:xfrm>
+            <a:off x="914400" y="609600"/>
+            <a:ext cx="7137918" cy="1143000"/>
+          </a:xfrm>
+        </p:spPr>
+        <p:txBody>
+          <a:bodyPr/>
+          <a:lstStyle/>
+          <a:p>
+            <a:r>
+              <a:rPr lang="de-DE" dirty="0"/>
+              <a:t>Visualisierung:</a:t>
+            </a:r>
+            <a:br>
+              <a:rPr lang="de-DE" dirty="0"/>
+            </a:br>
+            <a:r>
+              <a:rPr lang="de-DE" sz="2400" dirty="0"/>
+              <a:t>Unterschiedlich viele Messungen der Zahnräder</a:t>
+            </a:r>
+            <a:endParaRPr lang="de-DE" dirty="0"/>
+          </a:p>
+        </p:txBody>
+      </p:sp>
+      <p:pic>
+        <p:nvPicPr>
+          <p:cNvPr id="6" name="Inhaltsplatzhalter 5">
+            <a:extLst>
+              <a:ext uri="{FF2B5EF4-FFF2-40B4-BE49-F238E27FC236}">
+                <a16:creationId xmlns:a16="http://schemas.microsoft.com/office/drawing/2014/main" id="{BA3F2AA0-8383-B2C0-5137-84EFD29BE71B}"/>
+              </a:ext>
+            </a:extLst>
+          </p:cNvPr>
+          <p:cNvPicPr>
+            <a:picLocks noGrp="1" noChangeAspect="1"/>
+          </p:cNvPicPr>
+          <p:nvPr>
+            <p:ph idx="1"/>
+          </p:nvPr>
+        </p:nvPicPr>
+        <p:blipFill rotWithShape="1">
+          <a:blip r:embed="rId2"/>
+          <a:srcRect t="33031" b="33123"/>
+          <a:stretch>
+            <a:fillRect/>
+          </a:stretch>
+        </p:blipFill>
+        <p:spPr bwMode="auto">
+          <a:xfrm>
+            <a:off x="117225" y="1472681"/>
+            <a:ext cx="11465175" cy="5000764"/>
+          </a:xfrm>
+          <a:prstGeom prst="rect">
+            <a:avLst/>
+          </a:prstGeom>
+          <a:noFill/>
+          <a:ln>
+            <a:noFill/>
+          </a:ln>
+          <a:extLst>
+            <a:ext uri="{909E8E84-426E-40DD-AFC4-6F175D3DCCD1}">
+              <a14:hiddenFill xmlns:a14="http://schemas.microsoft.com/office/drawing/2010/main">
+                <a:solidFill>
+                  <a:srgbClr val="FFFFFF"/>
+                </a:solidFill>
+              </a14:hiddenFill>
+            </a:ext>
+            <a:ext uri="{91240B29-F687-4F45-9708-019B960494DF}">
+              <a14:hiddenLine xmlns:a14="http://schemas.microsoft.com/office/drawing/2010/main" w="9525">
+                <a:solidFill>
+                  <a:srgbClr val="000000"/>
+                </a:solidFill>
+                <a:miter lim="800000"/>
+                <a:headEnd/>
+                <a:tailEnd/>
+              </a14:hiddenLine>
+            </a:ext>
+          </a:extLst>
+        </p:spPr>
+      </p:pic>
+      <p:sp>
+        <p:nvSpPr>
+          <p:cNvPr id="4" name="Foliennummernplatzhalter 3">
+            <a:extLst>
+              <a:ext uri="{FF2B5EF4-FFF2-40B4-BE49-F238E27FC236}">
+                <a16:creationId xmlns:a16="http://schemas.microsoft.com/office/drawing/2014/main" id="{18FD1414-35C8-6A57-2C40-93B37217933C}"/>
+              </a:ext>
+            </a:extLst>
+          </p:cNvPr>
+          <p:cNvSpPr>
+            <a:spLocks noGrp="1"/>
+          </p:cNvSpPr>
+          <p:nvPr>
+            <p:ph type="sldNum" sz="quarter" idx="10"/>
+          </p:nvPr>
+        </p:nvSpPr>
+        <p:spPr/>
+        <p:txBody>
+          <a:bodyPr/>
+          <a:lstStyle/>
+          <a:p>
+            <a:pPr>
+              <a:defRPr/>
+            </a:pPr>
+            <a:fld id="{A0424531-ACBB-43B0-9536-C2FB0D769E6C}" type="slidenum">
+              <a:rPr lang="de-DE" altLang="de-DE" smtClean="0"/>
+              <a:pPr>
+                <a:defRPr/>
+              </a:pPr>
+              <a:t>11</a:t>
+            </a:fld>
+            <a:endParaRPr lang="de-DE" altLang="de-DE" dirty="0"/>
+          </a:p>
+        </p:txBody>
+      </p:sp>
+    </p:spTree>
+    <p:extLst>
+      <p:ext uri="{BB962C8B-B14F-4D97-AF65-F5344CB8AC3E}">
+        <p14:creationId xmlns:p14="http://schemas.microsoft.com/office/powerpoint/2010/main" val="4106251163"/>
+      </p:ext>
+    </p:extLst>
+  </p:cSld>
+  <p:clrMapOvr>
+    <a:masterClrMapping/>
+  </p:clrMapOvr>
+</p:sld>
+</file>
+
+<file path=ppt/slides/slide12.xml><?xml version="1.0" encoding="utf-8"?>
+<p:sld xmlns:a="http://schemas.openxmlformats.org/drawingml/2006/main" xmlns:r="http://schemas.openxmlformats.org/officeDocument/2006/relationships" xmlns:p="http://schemas.openxmlformats.org/presentationml/2006/main">
+  <p:cSld>
+    <p:spTree>
+      <p:nvGrpSpPr>
+        <p:cNvPr id="1" name="">
+          <a:extLst>
+            <a:ext uri="{FF2B5EF4-FFF2-40B4-BE49-F238E27FC236}">
+              <a16:creationId xmlns:a16="http://schemas.microsoft.com/office/drawing/2014/main" id="{73CF3C4D-956F-CF44-1DA8-88DDD2237ABF}"/>
+            </a:ext>
+          </a:extLst>
+        </p:cNvPr>
+        <p:cNvGrpSpPr/>
+        <p:nvPr/>
+      </p:nvGrpSpPr>
+      <p:grpSpPr>
+        <a:xfrm>
+          <a:off x="0" y="0"/>
+          <a:ext cx="0" cy="0"/>
+          <a:chOff x="0" y="0"/>
+          <a:chExt cx="0" cy="0"/>
+        </a:xfrm>
+      </p:grpSpPr>
+      <p:sp>
+        <p:nvSpPr>
+          <p:cNvPr id="2" name="Titel 1">
+            <a:extLst>
+              <a:ext uri="{FF2B5EF4-FFF2-40B4-BE49-F238E27FC236}">
+                <a16:creationId xmlns:a16="http://schemas.microsoft.com/office/drawing/2014/main" id="{10501F1A-FCB7-133D-6F5D-FABA9A2F000C}"/>
+              </a:ext>
+            </a:extLst>
+          </p:cNvPr>
+          <p:cNvSpPr>
+            <a:spLocks noGrp="1"/>
+          </p:cNvSpPr>
+          <p:nvPr>
+            <p:ph type="title"/>
+          </p:nvPr>
+        </p:nvSpPr>
+        <p:spPr>
+          <a:xfrm>
+            <a:off x="914400" y="609600"/>
+            <a:ext cx="7137918" cy="1143000"/>
+          </a:xfrm>
+        </p:spPr>
+        <p:txBody>
+          <a:bodyPr/>
+          <a:lstStyle/>
+          <a:p>
+            <a:r>
+              <a:rPr lang="de-DE" dirty="0"/>
+              <a:t>Visualisierung:</a:t>
+            </a:r>
+            <a:br>
+              <a:rPr lang="de-DE" dirty="0"/>
+            </a:br>
+            <a:r>
+              <a:rPr lang="de-DE" sz="2400" dirty="0"/>
+              <a:t>Unterschiedlich viele Messungen der Zahnräder</a:t>
+            </a:r>
+            <a:endParaRPr lang="de-DE" dirty="0"/>
+          </a:p>
+        </p:txBody>
+      </p:sp>
+      <p:pic>
+        <p:nvPicPr>
+          <p:cNvPr id="6" name="Inhaltsplatzhalter 5">
+            <a:extLst>
+              <a:ext uri="{FF2B5EF4-FFF2-40B4-BE49-F238E27FC236}">
+                <a16:creationId xmlns:a16="http://schemas.microsoft.com/office/drawing/2014/main" id="{70C101CF-2A7E-EB74-1C4A-B189FAC9EDAF}"/>
+              </a:ext>
+            </a:extLst>
+          </p:cNvPr>
+          <p:cNvPicPr>
+            <a:picLocks noGrp="1" noChangeAspect="1"/>
+          </p:cNvPicPr>
+          <p:nvPr>
+            <p:ph idx="1"/>
+          </p:nvPr>
+        </p:nvPicPr>
+        <p:blipFill rotWithShape="1">
+          <a:blip r:embed="rId2"/>
+          <a:srcRect t="66668" b="-15547"/>
+          <a:stretch>
+            <a:fillRect/>
+          </a:stretch>
+        </p:blipFill>
+        <p:spPr bwMode="auto">
+          <a:xfrm>
+            <a:off x="117225" y="1502230"/>
+            <a:ext cx="11465175" cy="7221892"/>
+          </a:xfrm>
+          <a:prstGeom prst="rect">
+            <a:avLst/>
+          </a:prstGeom>
+          <a:noFill/>
+          <a:ln>
+            <a:noFill/>
+          </a:ln>
+          <a:extLst>
+            <a:ext uri="{909E8E84-426E-40DD-AFC4-6F175D3DCCD1}">
+              <a14:hiddenFill xmlns:a14="http://schemas.microsoft.com/office/drawing/2010/main">
+                <a:solidFill>
+                  <a:srgbClr val="FFFFFF"/>
+                </a:solidFill>
+              </a14:hiddenFill>
+            </a:ext>
+            <a:ext uri="{91240B29-F687-4F45-9708-019B960494DF}">
+              <a14:hiddenLine xmlns:a14="http://schemas.microsoft.com/office/drawing/2010/main" w="9525">
+                <a:solidFill>
+                  <a:srgbClr val="000000"/>
+                </a:solidFill>
+                <a:miter lim="800000"/>
+                <a:headEnd/>
+                <a:tailEnd/>
+              </a14:hiddenLine>
+            </a:ext>
+          </a:extLst>
+        </p:spPr>
+      </p:pic>
+      <p:sp>
+        <p:nvSpPr>
+          <p:cNvPr id="4" name="Foliennummernplatzhalter 3">
+            <a:extLst>
+              <a:ext uri="{FF2B5EF4-FFF2-40B4-BE49-F238E27FC236}">
+                <a16:creationId xmlns:a16="http://schemas.microsoft.com/office/drawing/2014/main" id="{A702F702-44A1-66E4-2B59-8E21067E4DCF}"/>
+              </a:ext>
+            </a:extLst>
+          </p:cNvPr>
+          <p:cNvSpPr>
+            <a:spLocks noGrp="1"/>
+          </p:cNvSpPr>
+          <p:nvPr>
+            <p:ph type="sldNum" sz="quarter" idx="10"/>
+          </p:nvPr>
+        </p:nvSpPr>
+        <p:spPr/>
+        <p:txBody>
+          <a:bodyPr/>
+          <a:lstStyle/>
+          <a:p>
+            <a:pPr>
+              <a:defRPr/>
+            </a:pPr>
+            <a:fld id="{A0424531-ACBB-43B0-9536-C2FB0D769E6C}" type="slidenum">
+              <a:rPr lang="de-DE" altLang="de-DE" smtClean="0"/>
+              <a:pPr>
+                <a:defRPr/>
+              </a:pPr>
+              <a:t>12</a:t>
+            </a:fld>
+            <a:endParaRPr lang="de-DE" altLang="de-DE" dirty="0"/>
+          </a:p>
+        </p:txBody>
+      </p:sp>
+    </p:spTree>
+    <p:extLst>
+      <p:ext uri="{BB962C8B-B14F-4D97-AF65-F5344CB8AC3E}">
+        <p14:creationId xmlns:p14="http://schemas.microsoft.com/office/powerpoint/2010/main" val="1533880017"/>
+      </p:ext>
+    </p:extLst>
+  </p:cSld>
+  <p:clrMapOvr>
+    <a:masterClrMapping/>
+  </p:clrMapOvr>
+</p:sld>
+</file>
+
+<file path=ppt/slides/slide13.xml><?xml version="1.0" encoding="utf-8"?>
+<p:sld xmlns:a="http://schemas.openxmlformats.org/drawingml/2006/main" xmlns:r="http://schemas.openxmlformats.org/officeDocument/2006/relationships" xmlns:p="http://schemas.openxmlformats.org/presentationml/2006/main">
+  <p:cSld>
+    <p:spTree>
+      <p:nvGrpSpPr>
+        <p:cNvPr id="1" name="">
+          <a:extLst>
+            <a:ext uri="{FF2B5EF4-FFF2-40B4-BE49-F238E27FC236}">
+              <a16:creationId xmlns:a16="http://schemas.microsoft.com/office/drawing/2014/main" id="{5B1114C7-DE47-0944-DF0C-B611520E41A2}"/>
+            </a:ext>
+          </a:extLst>
+        </p:cNvPr>
+        <p:cNvGrpSpPr/>
+        <p:nvPr/>
+      </p:nvGrpSpPr>
+      <p:grpSpPr>
+        <a:xfrm>
+          <a:off x="0" y="0"/>
+          <a:ext cx="0" cy="0"/>
+          <a:chOff x="0" y="0"/>
+          <a:chExt cx="0" cy="0"/>
+        </a:xfrm>
+      </p:grpSpPr>
+      <p:sp>
+        <p:nvSpPr>
+          <p:cNvPr id="2" name="Titel 1">
+            <a:extLst>
+              <a:ext uri="{FF2B5EF4-FFF2-40B4-BE49-F238E27FC236}">
+                <a16:creationId xmlns:a16="http://schemas.microsoft.com/office/drawing/2014/main" id="{77D077AA-8134-0C8E-A018-B8169899F662}"/>
+              </a:ext>
+            </a:extLst>
+          </p:cNvPr>
+          <p:cNvSpPr>
+            <a:spLocks noGrp="1"/>
+          </p:cNvSpPr>
+          <p:nvPr>
+            <p:ph type="title"/>
+          </p:nvPr>
+        </p:nvSpPr>
+        <p:spPr>
+          <a:xfrm>
+            <a:off x="914400" y="609600"/>
+            <a:ext cx="7137918" cy="1143000"/>
+          </a:xfrm>
+        </p:spPr>
+        <p:txBody>
+          <a:bodyPr/>
+          <a:lstStyle/>
+          <a:p>
+            <a:r>
+              <a:rPr lang="de-DE" dirty="0"/>
+              <a:t>Visualisierung:</a:t>
+            </a:r>
+            <a:br>
+              <a:rPr lang="de-DE" dirty="0"/>
+            </a:br>
+            <a:r>
+              <a:rPr lang="de-DE" sz="2400" dirty="0"/>
+              <a:t>Ausgewählte „</a:t>
+            </a:r>
+            <a:r>
+              <a:rPr lang="de-DE" sz="2400" dirty="0" err="1"/>
+              <a:t>mID</a:t>
+            </a:r>
+            <a:r>
+              <a:rPr lang="de-DE" sz="2400" dirty="0"/>
+              <a:t>“ für Z01 und Z04</a:t>
+            </a:r>
+            <a:endParaRPr lang="de-DE" dirty="0"/>
+          </a:p>
+        </p:txBody>
+      </p:sp>
+      <p:sp>
+        <p:nvSpPr>
+          <p:cNvPr id="4" name="Foliennummernplatzhalter 3">
+            <a:extLst>
+              <a:ext uri="{FF2B5EF4-FFF2-40B4-BE49-F238E27FC236}">
+                <a16:creationId xmlns:a16="http://schemas.microsoft.com/office/drawing/2014/main" id="{A159F460-EDFE-F390-52E2-C60A9F313BDA}"/>
+              </a:ext>
+            </a:extLst>
+          </p:cNvPr>
+          <p:cNvSpPr>
+            <a:spLocks noGrp="1"/>
+          </p:cNvSpPr>
+          <p:nvPr>
+            <p:ph type="sldNum" sz="quarter" idx="10"/>
+          </p:nvPr>
+        </p:nvSpPr>
+        <p:spPr/>
+        <p:txBody>
+          <a:bodyPr/>
+          <a:lstStyle/>
+          <a:p>
+            <a:pPr>
+              <a:defRPr/>
+            </a:pPr>
+            <a:fld id="{A0424531-ACBB-43B0-9536-C2FB0D769E6C}" type="slidenum">
+              <a:rPr lang="de-DE" altLang="de-DE" smtClean="0"/>
+              <a:pPr>
+                <a:defRPr/>
+              </a:pPr>
+              <a:t>13</a:t>
+            </a:fld>
+            <a:endParaRPr lang="de-DE" altLang="de-DE" dirty="0"/>
+          </a:p>
+        </p:txBody>
+      </p:sp>
+      <p:pic>
+        <p:nvPicPr>
+          <p:cNvPr id="5" name="Grafik 4">
+            <a:extLst>
+              <a:ext uri="{FF2B5EF4-FFF2-40B4-BE49-F238E27FC236}">
+                <a16:creationId xmlns:a16="http://schemas.microsoft.com/office/drawing/2014/main" id="{E031110A-4272-FAC2-BA3D-2894E70F2763}"/>
+              </a:ext>
+            </a:extLst>
+          </p:cNvPr>
+          <p:cNvPicPr>
+            <a:picLocks noChangeAspect="1"/>
+          </p:cNvPicPr>
+          <p:nvPr/>
+        </p:nvPicPr>
+        <p:blipFill>
+          <a:blip r:embed="rId2"/>
+          <a:srcRect b="75018"/>
+          <a:stretch>
+            <a:fillRect/>
+          </a:stretch>
+        </p:blipFill>
+        <p:spPr>
+          <a:xfrm>
+            <a:off x="796585" y="1609918"/>
+            <a:ext cx="10598829" cy="4718695"/>
+          </a:xfrm>
+          <a:prstGeom prst="rect">
+            <a:avLst/>
+          </a:prstGeom>
+        </p:spPr>
+      </p:pic>
+    </p:spTree>
+    <p:extLst>
+      <p:ext uri="{BB962C8B-B14F-4D97-AF65-F5344CB8AC3E}">
+        <p14:creationId xmlns:p14="http://schemas.microsoft.com/office/powerpoint/2010/main" val="641672160"/>
+      </p:ext>
+    </p:extLst>
+  </p:cSld>
+  <p:clrMapOvr>
+    <a:masterClrMapping/>
+  </p:clrMapOvr>
+</p:sld>
+</file>
+
+<file path=ppt/slides/slide14.xml><?xml version="1.0" encoding="utf-8"?>
+<p:sld xmlns:a="http://schemas.openxmlformats.org/drawingml/2006/main" xmlns:r="http://schemas.openxmlformats.org/officeDocument/2006/relationships" xmlns:p="http://schemas.openxmlformats.org/presentationml/2006/main">
+  <p:cSld>
+    <p:spTree>
+      <p:nvGrpSpPr>
+        <p:cNvPr id="1" name="">
+          <a:extLst>
+            <a:ext uri="{FF2B5EF4-FFF2-40B4-BE49-F238E27FC236}">
+              <a16:creationId xmlns:a16="http://schemas.microsoft.com/office/drawing/2014/main" id="{487AAFDA-5709-6898-CE4E-940E6A34EADE}"/>
+            </a:ext>
+          </a:extLst>
+        </p:cNvPr>
+        <p:cNvGrpSpPr/>
+        <p:nvPr/>
+      </p:nvGrpSpPr>
+      <p:grpSpPr>
+        <a:xfrm>
+          <a:off x="0" y="0"/>
+          <a:ext cx="0" cy="0"/>
+          <a:chOff x="0" y="0"/>
+          <a:chExt cx="0" cy="0"/>
+        </a:xfrm>
+      </p:grpSpPr>
+      <p:sp>
+        <p:nvSpPr>
+          <p:cNvPr id="2" name="Titel 1">
+            <a:extLst>
+              <a:ext uri="{FF2B5EF4-FFF2-40B4-BE49-F238E27FC236}">
+                <a16:creationId xmlns:a16="http://schemas.microsoft.com/office/drawing/2014/main" id="{11DF8090-BADC-27B4-F673-12947654E7F5}"/>
+              </a:ext>
+            </a:extLst>
+          </p:cNvPr>
+          <p:cNvSpPr>
+            <a:spLocks noGrp="1"/>
+          </p:cNvSpPr>
+          <p:nvPr>
+            <p:ph type="title"/>
+          </p:nvPr>
+        </p:nvSpPr>
+        <p:spPr>
+          <a:xfrm>
+            <a:off x="914400" y="609600"/>
+            <a:ext cx="7137918" cy="1143000"/>
+          </a:xfrm>
+        </p:spPr>
+        <p:txBody>
+          <a:bodyPr/>
+          <a:lstStyle/>
+          <a:p>
+            <a:r>
+              <a:rPr lang="de-DE" dirty="0"/>
+              <a:t>Visualisierung:</a:t>
+            </a:r>
+            <a:br>
+              <a:rPr lang="de-DE" dirty="0"/>
+            </a:br>
+            <a:r>
+              <a:rPr lang="de-DE" sz="2400" dirty="0" err="1"/>
+              <a:t>Duchschnitts</a:t>
+            </a:r>
+            <a:r>
+              <a:rPr lang="de-DE" sz="2400" dirty="0"/>
+              <a:t>-Methode mit beiden „</a:t>
+            </a:r>
+            <a:r>
+              <a:rPr lang="de-DE" sz="2400" dirty="0" err="1"/>
+              <a:t>rID</a:t>
+            </a:r>
+            <a:r>
+              <a:rPr lang="de-DE" sz="2400" dirty="0"/>
+              <a:t>“</a:t>
+            </a:r>
+            <a:endParaRPr lang="de-DE" dirty="0"/>
+          </a:p>
+        </p:txBody>
+      </p:sp>
+      <p:sp>
+        <p:nvSpPr>
+          <p:cNvPr id="4" name="Foliennummernplatzhalter 3">
+            <a:extLst>
+              <a:ext uri="{FF2B5EF4-FFF2-40B4-BE49-F238E27FC236}">
+                <a16:creationId xmlns:a16="http://schemas.microsoft.com/office/drawing/2014/main" id="{763FBD9B-FA60-4D7A-9530-63A817FC9A2C}"/>
+              </a:ext>
+            </a:extLst>
+          </p:cNvPr>
+          <p:cNvSpPr>
+            <a:spLocks noGrp="1"/>
+          </p:cNvSpPr>
+          <p:nvPr>
+            <p:ph type="sldNum" sz="quarter" idx="10"/>
+          </p:nvPr>
+        </p:nvSpPr>
+        <p:spPr/>
+        <p:txBody>
+          <a:bodyPr/>
+          <a:lstStyle/>
+          <a:p>
+            <a:pPr>
+              <a:defRPr/>
+            </a:pPr>
+            <a:fld id="{A0424531-ACBB-43B0-9536-C2FB0D769E6C}" type="slidenum">
+              <a:rPr lang="de-DE" altLang="de-DE" smtClean="0"/>
+              <a:pPr>
+                <a:defRPr/>
+              </a:pPr>
+              <a:t>14</a:t>
+            </a:fld>
+            <a:endParaRPr lang="de-DE" altLang="de-DE" dirty="0"/>
+          </a:p>
+        </p:txBody>
+      </p:sp>
+      <p:pic>
+        <p:nvPicPr>
+          <p:cNvPr id="5" name="Grafik 4">
+            <a:extLst>
+              <a:ext uri="{FF2B5EF4-FFF2-40B4-BE49-F238E27FC236}">
+                <a16:creationId xmlns:a16="http://schemas.microsoft.com/office/drawing/2014/main" id="{C977AD44-41FF-8C67-A8C2-47E0CA46A5AC}"/>
+              </a:ext>
+            </a:extLst>
+          </p:cNvPr>
+          <p:cNvPicPr>
+            <a:picLocks noChangeAspect="1"/>
+          </p:cNvPicPr>
+          <p:nvPr/>
+        </p:nvPicPr>
+        <p:blipFill>
+          <a:blip r:embed="rId2"/>
+          <a:srcRect t="75053" b="-35"/>
+          <a:stretch>
+            <a:fillRect/>
+          </a:stretch>
+        </p:blipFill>
+        <p:spPr>
+          <a:xfrm>
+            <a:off x="796585" y="1609918"/>
+            <a:ext cx="10598829" cy="4718695"/>
+          </a:xfrm>
+          <a:prstGeom prst="rect">
+            <a:avLst/>
+          </a:prstGeom>
+        </p:spPr>
+      </p:pic>
+    </p:spTree>
+    <p:extLst>
+      <p:ext uri="{BB962C8B-B14F-4D97-AF65-F5344CB8AC3E}">
+        <p14:creationId xmlns:p14="http://schemas.microsoft.com/office/powerpoint/2010/main" val="2916641920"/>
+      </p:ext>
+    </p:extLst>
+  </p:cSld>
+  <p:clrMapOvr>
+    <a:masterClrMapping/>
+  </p:clrMapOvr>
+</p:sld>
+</file>
+
+<file path=ppt/slides/slide15.xml><?xml version="1.0" encoding="utf-8"?>
+<p:sld xmlns:a="http://schemas.openxmlformats.org/drawingml/2006/main" xmlns:r="http://schemas.openxmlformats.org/officeDocument/2006/relationships" xmlns:p="http://schemas.openxmlformats.org/presentationml/2006/main">
+  <p:cSld>
+    <p:spTree>
+      <p:nvGrpSpPr>
+        <p:cNvPr id="1" name="">
+          <a:extLst>
+            <a:ext uri="{FF2B5EF4-FFF2-40B4-BE49-F238E27FC236}">
+              <a16:creationId xmlns:a16="http://schemas.microsoft.com/office/drawing/2014/main" id="{29BA22DC-F88E-99AF-A1B7-63C4E1E70CFE}"/>
+            </a:ext>
+          </a:extLst>
+        </p:cNvPr>
+        <p:cNvGrpSpPr/>
+        <p:nvPr/>
+      </p:nvGrpSpPr>
+      <p:grpSpPr>
+        <a:xfrm>
+          <a:off x="0" y="0"/>
+          <a:ext cx="0" cy="0"/>
+          <a:chOff x="0" y="0"/>
+          <a:chExt cx="0" cy="0"/>
+        </a:xfrm>
+      </p:grpSpPr>
+      <p:sp>
+        <p:nvSpPr>
+          <p:cNvPr id="2" name="Titel 1">
+            <a:extLst>
+              <a:ext uri="{FF2B5EF4-FFF2-40B4-BE49-F238E27FC236}">
+                <a16:creationId xmlns:a16="http://schemas.microsoft.com/office/drawing/2014/main" id="{6697FF2F-4ABD-DBF1-1A9F-CD59B441583D}"/>
+              </a:ext>
+            </a:extLst>
+          </p:cNvPr>
+          <p:cNvSpPr>
+            <a:spLocks noGrp="1"/>
+          </p:cNvSpPr>
+          <p:nvPr>
+            <p:ph type="title"/>
+          </p:nvPr>
+        </p:nvSpPr>
+        <p:spPr>
+          <a:xfrm>
+            <a:off x="914400" y="609600"/>
+            <a:ext cx="7137918" cy="1143000"/>
+          </a:xfrm>
+        </p:spPr>
+        <p:txBody>
+          <a:bodyPr/>
+          <a:lstStyle/>
+          <a:p>
+            <a:r>
+              <a:rPr lang="de-DE" dirty="0"/>
+              <a:t>Visualisierung:</a:t>
+            </a:r>
+            <a:br>
+              <a:rPr lang="de-DE" dirty="0"/>
+            </a:br>
+            <a:r>
+              <a:rPr lang="de-DE" sz="2400" dirty="0"/>
+              <a:t>Kompletter Datensatz ohne Durchschnitt</a:t>
+            </a:r>
+            <a:endParaRPr lang="de-DE" dirty="0"/>
+          </a:p>
+        </p:txBody>
+      </p:sp>
+      <p:sp>
+        <p:nvSpPr>
+          <p:cNvPr id="4" name="Foliennummernplatzhalter 3">
+            <a:extLst>
+              <a:ext uri="{FF2B5EF4-FFF2-40B4-BE49-F238E27FC236}">
+                <a16:creationId xmlns:a16="http://schemas.microsoft.com/office/drawing/2014/main" id="{AE2A0D2F-9C7B-D07B-E152-6D17F2779EF2}"/>
+              </a:ext>
+            </a:extLst>
+          </p:cNvPr>
+          <p:cNvSpPr>
+            <a:spLocks noGrp="1"/>
+          </p:cNvSpPr>
+          <p:nvPr>
+            <p:ph type="sldNum" sz="quarter" idx="10"/>
+          </p:nvPr>
+        </p:nvSpPr>
+        <p:spPr/>
+        <p:txBody>
+          <a:bodyPr/>
+          <a:lstStyle/>
+          <a:p>
+            <a:pPr>
+              <a:defRPr/>
+            </a:pPr>
+            <a:fld id="{A0424531-ACBB-43B0-9536-C2FB0D769E6C}" type="slidenum">
+              <a:rPr lang="de-DE" altLang="de-DE" smtClean="0"/>
+              <a:pPr>
+                <a:defRPr/>
+              </a:pPr>
+              <a:t>15</a:t>
+            </a:fld>
+            <a:endParaRPr lang="de-DE" altLang="de-DE" dirty="0"/>
+          </a:p>
+        </p:txBody>
+      </p:sp>
+      <p:pic>
+        <p:nvPicPr>
+          <p:cNvPr id="5" name="Grafik 4">
+            <a:extLst>
+              <a:ext uri="{FF2B5EF4-FFF2-40B4-BE49-F238E27FC236}">
+                <a16:creationId xmlns:a16="http://schemas.microsoft.com/office/drawing/2014/main" id="{CF898B92-B545-00D3-5767-0C02FD697DAD}"/>
+              </a:ext>
+            </a:extLst>
+          </p:cNvPr>
+          <p:cNvPicPr>
+            <a:picLocks noChangeAspect="1"/>
+          </p:cNvPicPr>
+          <p:nvPr/>
+        </p:nvPicPr>
+        <p:blipFill>
+          <a:blip r:embed="rId2"/>
+          <a:srcRect t="49902" b="25116"/>
+          <a:stretch>
+            <a:fillRect/>
+          </a:stretch>
+        </p:blipFill>
+        <p:spPr>
+          <a:xfrm>
+            <a:off x="796585" y="1609918"/>
+            <a:ext cx="10598829" cy="4718695"/>
+          </a:xfrm>
+          <a:prstGeom prst="rect">
+            <a:avLst/>
+          </a:prstGeom>
+        </p:spPr>
+      </p:pic>
+    </p:spTree>
+    <p:extLst>
+      <p:ext uri="{BB962C8B-B14F-4D97-AF65-F5344CB8AC3E}">
+        <p14:creationId xmlns:p14="http://schemas.microsoft.com/office/powerpoint/2010/main" val="2865727699"/>
+      </p:ext>
+    </p:extLst>
+  </p:cSld>
+  <p:clrMapOvr>
+    <a:masterClrMapping/>
+  </p:clrMapOvr>
+</p:sld>
+</file>
+
+<file path=ppt/slides/slide16.xml><?xml version="1.0" encoding="utf-8"?>
+<p:sld xmlns:a="http://schemas.openxmlformats.org/drawingml/2006/main" xmlns:r="http://schemas.openxmlformats.org/officeDocument/2006/relationships" xmlns:p="http://schemas.openxmlformats.org/presentationml/2006/main">
+  <p:cSld>
+    <p:spTree>
+      <p:nvGrpSpPr>
+        <p:cNvPr id="1" name=""/>
+        <p:cNvGrpSpPr/>
+        <p:nvPr/>
+      </p:nvGrpSpPr>
+      <p:grpSpPr>
+        <a:xfrm>
+          <a:off x="0" y="0"/>
+          <a:ext cx="0" cy="0"/>
+          <a:chOff x="0" y="0"/>
+          <a:chExt cx="0" cy="0"/>
+        </a:xfrm>
+      </p:grpSpPr>
+      <p:sp>
+        <p:nvSpPr>
+          <p:cNvPr id="2" name="Titel 1">
+            <a:extLst>
+              <a:ext uri="{FF2B5EF4-FFF2-40B4-BE49-F238E27FC236}">
+                <a16:creationId xmlns:a16="http://schemas.microsoft.com/office/drawing/2014/main" id="{C254BBB6-51EB-B8DF-B124-F43AAB73DC5D}"/>
+              </a:ext>
+            </a:extLst>
+          </p:cNvPr>
+          <p:cNvSpPr>
+            <a:spLocks noGrp="1"/>
+          </p:cNvSpPr>
+          <p:nvPr>
+            <p:ph type="title"/>
+          </p:nvPr>
+        </p:nvSpPr>
+        <p:spPr/>
+        <p:txBody>
+          <a:bodyPr/>
+          <a:lstStyle/>
+          <a:p>
+            <a:r>
+              <a:rPr lang="de-DE" dirty="0"/>
+              <a:t>Ergebnisse:</a:t>
+            </a:r>
+          </a:p>
+        </p:txBody>
+      </p:sp>
+      <p:sp>
+        <p:nvSpPr>
+          <p:cNvPr id="3" name="Inhaltsplatzhalter 2">
+            <a:extLst>
+              <a:ext uri="{FF2B5EF4-FFF2-40B4-BE49-F238E27FC236}">
+                <a16:creationId xmlns:a16="http://schemas.microsoft.com/office/drawing/2014/main" id="{EC792880-C870-78F8-FD9F-3732660E48D9}"/>
+              </a:ext>
+            </a:extLst>
+          </p:cNvPr>
+          <p:cNvSpPr>
+            <a:spLocks noGrp="1"/>
+          </p:cNvSpPr>
+          <p:nvPr>
+            <p:ph idx="1"/>
+          </p:nvPr>
+        </p:nvSpPr>
+        <p:spPr/>
+        <p:txBody>
+          <a:bodyPr/>
+          <a:lstStyle/>
+          <a:p>
+            <a:r>
+              <a:rPr lang="de-DE" dirty="0"/>
+              <a:t>Wir erkennen durch die extrahierten Merkmale, die durch die PCA auf zwei Achsen darstellbar gemacht worden sind, dass Z05 deutlich aus dem Muster der restlichen Zahnräder fällt.</a:t>
+            </a:r>
+          </a:p>
+          <a:p>
+            <a:r>
+              <a:rPr lang="de-DE" dirty="0"/>
+              <a:t>Wir haben demnach die Signale für eine Automatisierung vorbereitet…</a:t>
+            </a:r>
+          </a:p>
+        </p:txBody>
+      </p:sp>
+      <p:sp>
+        <p:nvSpPr>
+          <p:cNvPr id="4" name="Foliennummernplatzhalter 3">
+            <a:extLst>
+              <a:ext uri="{FF2B5EF4-FFF2-40B4-BE49-F238E27FC236}">
+                <a16:creationId xmlns:a16="http://schemas.microsoft.com/office/drawing/2014/main" id="{3375FB55-D6ED-C35B-B368-0D1BE8E0FB23}"/>
+              </a:ext>
+            </a:extLst>
+          </p:cNvPr>
+          <p:cNvSpPr>
+            <a:spLocks noGrp="1"/>
+          </p:cNvSpPr>
+          <p:nvPr>
+            <p:ph type="sldNum" sz="quarter" idx="10"/>
+          </p:nvPr>
+        </p:nvSpPr>
+        <p:spPr/>
+        <p:txBody>
+          <a:bodyPr/>
+          <a:lstStyle/>
+          <a:p>
+            <a:pPr>
+              <a:defRPr/>
+            </a:pPr>
+            <a:fld id="{A0424531-ACBB-43B0-9536-C2FB0D769E6C}" type="slidenum">
+              <a:rPr lang="de-DE" altLang="de-DE" smtClean="0"/>
+              <a:pPr>
+                <a:defRPr/>
+              </a:pPr>
+              <a:t>16</a:t>
+            </a:fld>
+            <a:endParaRPr lang="de-DE" altLang="de-DE" dirty="0"/>
+          </a:p>
+        </p:txBody>
+      </p:sp>
+    </p:spTree>
+    <p:extLst>
+      <p:ext uri="{BB962C8B-B14F-4D97-AF65-F5344CB8AC3E}">
+        <p14:creationId xmlns:p14="http://schemas.microsoft.com/office/powerpoint/2010/main" val="176930895"/>
+      </p:ext>
+    </p:extLst>
+  </p:cSld>
+  <p:clrMapOvr>
+    <a:masterClrMapping/>
+  </p:clrMapOvr>
+</p:sld>
+</file>
+
+<file path=ppt/slides/slide17.xml><?xml version="1.0" encoding="utf-8"?>
+<p:sld xmlns:a="http://schemas.openxmlformats.org/drawingml/2006/main" xmlns:r="http://schemas.openxmlformats.org/officeDocument/2006/relationships" xmlns:p="http://schemas.openxmlformats.org/presentationml/2006/main">
+  <p:cSld>
+    <p:spTree>
+      <p:nvGrpSpPr>
+        <p:cNvPr id="1" name="">
+          <a:extLst>
+            <a:ext uri="{FF2B5EF4-FFF2-40B4-BE49-F238E27FC236}">
+              <a16:creationId xmlns:a16="http://schemas.microsoft.com/office/drawing/2014/main" id="{ADFB2192-37A0-7AD0-AE14-22BFEAF4E142}"/>
+            </a:ext>
+          </a:extLst>
+        </p:cNvPr>
+        <p:cNvGrpSpPr/>
+        <p:nvPr/>
+      </p:nvGrpSpPr>
+      <p:grpSpPr>
+        <a:xfrm>
+          <a:off x="0" y="0"/>
+          <a:ext cx="0" cy="0"/>
+          <a:chOff x="0" y="0"/>
+          <a:chExt cx="0" cy="0"/>
+        </a:xfrm>
+      </p:grpSpPr>
+      <p:sp>
+        <p:nvSpPr>
+          <p:cNvPr id="2" name="Titel 1">
+            <a:extLst>
+              <a:ext uri="{FF2B5EF4-FFF2-40B4-BE49-F238E27FC236}">
+                <a16:creationId xmlns:a16="http://schemas.microsoft.com/office/drawing/2014/main" id="{855CE2B4-9BA0-9AC0-F40D-53D5E9298211}"/>
+              </a:ext>
+            </a:extLst>
+          </p:cNvPr>
+          <p:cNvSpPr>
+            <a:spLocks noGrp="1"/>
+          </p:cNvSpPr>
+          <p:nvPr>
+            <p:ph type="title"/>
+          </p:nvPr>
+        </p:nvSpPr>
+        <p:spPr>
+          <a:xfrm>
+            <a:off x="914400" y="609600"/>
+            <a:ext cx="7137918" cy="1143000"/>
+          </a:xfrm>
+        </p:spPr>
+        <p:txBody>
+          <a:bodyPr/>
+          <a:lstStyle/>
+          <a:p>
+            <a:r>
+              <a:rPr lang="de-DE" dirty="0"/>
+              <a:t>Visualisierung:</a:t>
+            </a:r>
+            <a:br>
+              <a:rPr lang="de-DE" dirty="0"/>
+            </a:br>
+            <a:r>
+              <a:rPr lang="de-DE" sz="2400" dirty="0" err="1"/>
+              <a:t>Duchschnitts</a:t>
+            </a:r>
+            <a:r>
+              <a:rPr lang="de-DE" sz="2400" dirty="0"/>
+              <a:t>-Methode mit beiden „</a:t>
+            </a:r>
+            <a:r>
+              <a:rPr lang="de-DE" sz="2400" dirty="0" err="1"/>
+              <a:t>rID</a:t>
+            </a:r>
+            <a:r>
+              <a:rPr lang="de-DE" sz="2400" dirty="0"/>
+              <a:t>“</a:t>
+            </a:r>
+            <a:endParaRPr lang="de-DE" dirty="0"/>
+          </a:p>
+        </p:txBody>
+      </p:sp>
+      <p:sp>
+        <p:nvSpPr>
+          <p:cNvPr id="4" name="Foliennummernplatzhalter 3">
+            <a:extLst>
+              <a:ext uri="{FF2B5EF4-FFF2-40B4-BE49-F238E27FC236}">
+                <a16:creationId xmlns:a16="http://schemas.microsoft.com/office/drawing/2014/main" id="{5FDE66EE-D1C7-077E-9546-55B1FA2DC8E7}"/>
+              </a:ext>
+            </a:extLst>
+          </p:cNvPr>
+          <p:cNvSpPr>
+            <a:spLocks noGrp="1"/>
+          </p:cNvSpPr>
+          <p:nvPr>
+            <p:ph type="sldNum" sz="quarter" idx="10"/>
+          </p:nvPr>
+        </p:nvSpPr>
+        <p:spPr/>
+        <p:txBody>
+          <a:bodyPr/>
+          <a:lstStyle/>
+          <a:p>
+            <a:pPr>
+              <a:defRPr/>
+            </a:pPr>
+            <a:fld id="{A0424531-ACBB-43B0-9536-C2FB0D769E6C}" type="slidenum">
+              <a:rPr lang="de-DE" altLang="de-DE" smtClean="0"/>
+              <a:pPr>
+                <a:defRPr/>
+              </a:pPr>
+              <a:t>17</a:t>
+            </a:fld>
+            <a:endParaRPr lang="de-DE" altLang="de-DE" dirty="0"/>
+          </a:p>
+        </p:txBody>
+      </p:sp>
+      <p:pic>
+        <p:nvPicPr>
+          <p:cNvPr id="5" name="Grafik 4">
+            <a:extLst>
+              <a:ext uri="{FF2B5EF4-FFF2-40B4-BE49-F238E27FC236}">
+                <a16:creationId xmlns:a16="http://schemas.microsoft.com/office/drawing/2014/main" id="{0048D6D3-2E0E-7BD8-7237-FA9BCBF8D10A}"/>
+              </a:ext>
+            </a:extLst>
+          </p:cNvPr>
+          <p:cNvPicPr>
+            <a:picLocks noChangeAspect="1"/>
+          </p:cNvPicPr>
+          <p:nvPr/>
+        </p:nvPicPr>
+        <p:blipFill>
+          <a:blip r:embed="rId2"/>
+          <a:srcRect t="75053" b="-35"/>
+          <a:stretch>
+            <a:fillRect/>
+          </a:stretch>
+        </p:blipFill>
+        <p:spPr>
+          <a:xfrm>
+            <a:off x="796585" y="1609918"/>
+            <a:ext cx="10598829" cy="4718695"/>
+          </a:xfrm>
+          <a:prstGeom prst="rect">
+            <a:avLst/>
+          </a:prstGeom>
+        </p:spPr>
+      </p:pic>
+      <p:sp>
+        <p:nvSpPr>
+          <p:cNvPr id="3" name="Ellipse 2">
+            <a:extLst>
+              <a:ext uri="{FF2B5EF4-FFF2-40B4-BE49-F238E27FC236}">
+                <a16:creationId xmlns:a16="http://schemas.microsoft.com/office/drawing/2014/main" id="{ACDBC10B-6EAA-F6BE-EF46-CD4ADE54D3B0}"/>
+              </a:ext>
+            </a:extLst>
+          </p:cNvPr>
+          <p:cNvSpPr/>
+          <p:nvPr/>
+        </p:nvSpPr>
+        <p:spPr bwMode="auto">
+          <a:xfrm>
+            <a:off x="2921877" y="1609918"/>
+            <a:ext cx="3584026" cy="2432147"/>
+          </a:xfrm>
+          <a:prstGeom prst="ellipse">
+            <a:avLst/>
+          </a:prstGeom>
+          <a:noFill/>
+          <a:ln w="38100" cap="flat" cmpd="sng" algn="ctr">
+            <a:solidFill>
+              <a:srgbClr val="FF0000"/>
+            </a:solidFill>
+            <a:prstDash val="solid"/>
+            <a:round/>
+            <a:headEnd type="none" w="med" len="med"/>
+            <a:tailEnd type="none" w="med" len="med"/>
+          </a:ln>
+          <a:effectLst/>
+        </p:spPr>
+        <p:txBody>
+          <a:bodyPr vert="horz" wrap="square" lIns="91440" tIns="45720" rIns="91440" bIns="45720" numCol="1" rtlCol="0" anchor="t" anchorCtr="0" compatLnSpc="1">
+            <a:prstTxWarp prst="textNoShape">
+              <a:avLst/>
+            </a:prstTxWarp>
+          </a:bodyPr>
+          <a:lstStyle/>
+          <a:p>
+            <a:pPr marL="0" marR="0" indent="0" algn="l" defTabSz="914400" rtl="0" eaLnBrk="0" fontAlgn="base" latinLnBrk="0" hangingPunct="0">
+              <a:lnSpc>
+                <a:spcPct val="100000"/>
+              </a:lnSpc>
+              <a:spcBef>
+                <a:spcPct val="0"/>
+              </a:spcBef>
+              <a:spcAft>
+                <a:spcPct val="0"/>
+              </a:spcAft>
+              <a:buClrTx/>
+              <a:buSzTx/>
+              <a:buFontTx/>
+              <a:buNone/>
+              <a:tabLst/>
+            </a:pPr>
+            <a:endParaRPr kumimoji="0" lang="de-DE" sz="2400" b="0" i="0" u="none" strike="noStrike" cap="none" normalizeH="0" baseline="0">
+              <a:ln>
+                <a:noFill/>
+              </a:ln>
+              <a:solidFill>
+                <a:schemeClr val="tx1"/>
+              </a:solidFill>
+              <a:effectLst/>
+              <a:latin typeface="Arial" pitchFamily="-109" charset="0"/>
+              <a:ea typeface="ヒラギノ角ゴ Pro W3" pitchFamily="-109" charset="-128"/>
+              <a:cs typeface="ヒラギノ角ゴ Pro W3" pitchFamily="-109" charset="-128"/>
+            </a:endParaRPr>
+          </a:p>
+        </p:txBody>
+      </p:sp>
+      <p:sp>
+        <p:nvSpPr>
+          <p:cNvPr id="6" name="Ellipse 5">
+            <a:extLst>
+              <a:ext uri="{FF2B5EF4-FFF2-40B4-BE49-F238E27FC236}">
+                <a16:creationId xmlns:a16="http://schemas.microsoft.com/office/drawing/2014/main" id="{D37839B8-4B21-EBB6-F137-5A809E7017FD}"/>
+              </a:ext>
+            </a:extLst>
+          </p:cNvPr>
+          <p:cNvSpPr/>
+          <p:nvPr/>
+        </p:nvSpPr>
+        <p:spPr bwMode="auto">
+          <a:xfrm>
+            <a:off x="7690923" y="1608459"/>
+            <a:ext cx="3584026" cy="2432147"/>
+          </a:xfrm>
+          <a:prstGeom prst="ellipse">
+            <a:avLst/>
+          </a:prstGeom>
+          <a:noFill/>
+          <a:ln w="38100" cap="flat" cmpd="sng" algn="ctr">
+            <a:solidFill>
+              <a:srgbClr val="FF0000"/>
+            </a:solidFill>
+            <a:prstDash val="solid"/>
+            <a:round/>
+            <a:headEnd type="none" w="med" len="med"/>
+            <a:tailEnd type="none" w="med" len="med"/>
+          </a:ln>
+          <a:effectLst/>
+        </p:spPr>
+        <p:txBody>
+          <a:bodyPr vert="horz" wrap="square" lIns="91440" tIns="45720" rIns="91440" bIns="45720" numCol="1" rtlCol="0" anchor="t" anchorCtr="0" compatLnSpc="1">
+            <a:prstTxWarp prst="textNoShape">
+              <a:avLst/>
+            </a:prstTxWarp>
+          </a:bodyPr>
+          <a:lstStyle/>
+          <a:p>
+            <a:pPr marL="0" marR="0" indent="0" algn="l" defTabSz="914400" rtl="0" eaLnBrk="0" fontAlgn="base" latinLnBrk="0" hangingPunct="0">
+              <a:lnSpc>
+                <a:spcPct val="100000"/>
+              </a:lnSpc>
+              <a:spcBef>
+                <a:spcPct val="0"/>
+              </a:spcBef>
+              <a:spcAft>
+                <a:spcPct val="0"/>
+              </a:spcAft>
+              <a:buClrTx/>
+              <a:buSzTx/>
+              <a:buFontTx/>
+              <a:buNone/>
+              <a:tabLst/>
+            </a:pPr>
+            <a:endParaRPr kumimoji="0" lang="de-DE" sz="2400" b="0" i="0" u="none" strike="noStrike" cap="none" normalizeH="0" baseline="0">
+              <a:ln>
+                <a:noFill/>
+              </a:ln>
+              <a:solidFill>
+                <a:schemeClr val="tx1"/>
+              </a:solidFill>
+              <a:effectLst/>
+              <a:latin typeface="Arial" pitchFamily="-109" charset="0"/>
+              <a:ea typeface="ヒラギノ角ゴ Pro W3" pitchFamily="-109" charset="-128"/>
+              <a:cs typeface="ヒラギノ角ゴ Pro W3" pitchFamily="-109" charset="-128"/>
+            </a:endParaRPr>
+          </a:p>
+        </p:txBody>
+      </p:sp>
+      <p:cxnSp>
+        <p:nvCxnSpPr>
+          <p:cNvPr id="8" name="Gerader Verbinder 7">
+            <a:extLst>
+              <a:ext uri="{FF2B5EF4-FFF2-40B4-BE49-F238E27FC236}">
+                <a16:creationId xmlns:a16="http://schemas.microsoft.com/office/drawing/2014/main" id="{69F7DD7D-654D-6481-809F-2B3BF2DCB2C0}"/>
+              </a:ext>
+            </a:extLst>
+          </p:cNvPr>
+          <p:cNvCxnSpPr>
+            <a:cxnSpLocks/>
+          </p:cNvCxnSpPr>
+          <p:nvPr/>
+        </p:nvCxnSpPr>
+        <p:spPr bwMode="auto">
+          <a:xfrm>
+            <a:off x="1579418" y="2992582"/>
+            <a:ext cx="4416137" cy="1849582"/>
+          </a:xfrm>
+          <a:prstGeom prst="line">
+            <a:avLst/>
+          </a:prstGeom>
+          <a:solidFill>
+            <a:schemeClr val="accent1"/>
+          </a:solidFill>
+          <a:ln w="38100" cap="flat" cmpd="sng" algn="ctr">
+            <a:solidFill>
+              <a:srgbClr val="FF0000"/>
+            </a:solidFill>
+            <a:prstDash val="solid"/>
+            <a:round/>
+            <a:headEnd type="none" w="med" len="med"/>
+            <a:tailEnd type="none" w="med" len="med"/>
+          </a:ln>
+          <a:effectLst/>
+        </p:spPr>
+      </p:cxnSp>
+      <p:cxnSp>
+        <p:nvCxnSpPr>
+          <p:cNvPr id="10" name="Gerader Verbinder 9">
+            <a:extLst>
+              <a:ext uri="{FF2B5EF4-FFF2-40B4-BE49-F238E27FC236}">
+                <a16:creationId xmlns:a16="http://schemas.microsoft.com/office/drawing/2014/main" id="{91CA1D6C-3643-C6AE-3F44-33BAF53B12E8}"/>
+              </a:ext>
+            </a:extLst>
+          </p:cNvPr>
+          <p:cNvCxnSpPr>
+            <a:cxnSpLocks/>
+          </p:cNvCxnSpPr>
+          <p:nvPr/>
+        </p:nvCxnSpPr>
+        <p:spPr bwMode="auto">
+          <a:xfrm>
+            <a:off x="6730450" y="3429000"/>
+            <a:ext cx="4452557" cy="611606"/>
+          </a:xfrm>
+          <a:prstGeom prst="line">
+            <a:avLst/>
+          </a:prstGeom>
+          <a:solidFill>
+            <a:schemeClr val="accent1"/>
+          </a:solidFill>
+          <a:ln w="38100" cap="flat" cmpd="sng" algn="ctr">
+            <a:solidFill>
+              <a:srgbClr val="FF0000"/>
+            </a:solidFill>
+            <a:prstDash val="solid"/>
+            <a:round/>
+            <a:headEnd type="none" w="med" len="med"/>
+            <a:tailEnd type="none" w="med" len="med"/>
+          </a:ln>
+          <a:effectLst/>
+        </p:spPr>
+      </p:cxnSp>
+    </p:spTree>
+    <p:extLst>
+      <p:ext uri="{BB962C8B-B14F-4D97-AF65-F5344CB8AC3E}">
+        <p14:creationId xmlns:p14="http://schemas.microsoft.com/office/powerpoint/2010/main" val="344667624"/>
+      </p:ext>
+    </p:extLst>
+  </p:cSld>
+  <p:clrMapOvr>
+    <a:masterClrMapping/>
+  </p:clrMapOvr>
+  <p:timing>
+    <p:tnLst>
+      <p:par>
+        <p:cTn id="1" dur="indefinite" restart="never" nodeType="tmRoot">
+          <p:childTnLst>
+            <p:seq concurrent="1" nextAc="seek">
+              <p:cTn id="2" dur="indefinite" nodeType="mainSeq">
+                <p:childTnLst>
+                  <p:par>
+                    <p:cTn id="3" fill="hold">
+                      <p:stCondLst>
+                        <p:cond delay="indefinite"/>
+                      </p:stCondLst>
+                      <p:childTnLst>
+                        <p:par>
+                          <p:cTn id="4" fill="hold">
+                            <p:stCondLst>
+                              <p:cond delay="0"/>
+                            </p:stCondLst>
+                            <p:childTnLst>
+                              <p:par>
+                                <p:cTn id="5" presetID="1" presetClass="entr" presetSubtype="0" fill="hold" grpId="0" nodeType="clickEffect">
+                                  <p:stCondLst>
+                                    <p:cond delay="0"/>
+                                  </p:stCondLst>
+                                  <p:childTnLst>
+                                    <p:set>
+                                      <p:cBhvr>
+                                        <p:cTn id="6" dur="1" fill="hold">
+                                          <p:stCondLst>
+                                            <p:cond delay="0"/>
+                                          </p:stCondLst>
+                                        </p:cTn>
+                                        <p:tgtEl>
+                                          <p:spTgt spid="6"/>
+                                        </p:tgtEl>
+                                        <p:attrNameLst>
+                                          <p:attrName>style.visibility</p:attrName>
+                                        </p:attrNameLst>
+                                      </p:cBhvr>
+                                      <p:to>
+                                        <p:strVal val="visible"/>
+                                      </p:to>
+                                    </p:set>
+                                  </p:childTnLst>
+                                </p:cTn>
+                              </p:par>
+                              <p:par>
+                                <p:cTn id="7" presetID="1" presetClass="entr" presetSubtype="0" fill="hold" grpId="0" nodeType="withEffect">
+                                  <p:stCondLst>
+                                    <p:cond delay="0"/>
+                                  </p:stCondLst>
+                                  <p:childTnLst>
+                                    <p:set>
+                                      <p:cBhvr>
+                                        <p:cTn id="8" dur="1" fill="hold">
+                                          <p:stCondLst>
+                                            <p:cond delay="0"/>
+                                          </p:stCondLst>
+                                        </p:cTn>
+                                        <p:tgtEl>
+                                          <p:spTgt spid="3"/>
+                                        </p:tgtEl>
+                                        <p:attrNameLst>
+                                          <p:attrName>style.visibility</p:attrName>
+                                        </p:attrNameLst>
+                                      </p:cBhvr>
+                                      <p:to>
+                                        <p:strVal val="visible"/>
+                                      </p:to>
+                                    </p:set>
+                                  </p:childTnLst>
+                                </p:cTn>
+                              </p:par>
+                            </p:childTnLst>
+                          </p:cTn>
+                        </p:par>
+                      </p:childTnLst>
+                    </p:cTn>
+                  </p:par>
+                  <p:par>
+                    <p:cTn id="9" fill="hold">
+                      <p:stCondLst>
+                        <p:cond delay="indefinite"/>
+                      </p:stCondLst>
+                      <p:childTnLst>
+                        <p:par>
+                          <p:cTn id="10" fill="hold">
+                            <p:stCondLst>
+                              <p:cond delay="0"/>
+                            </p:stCondLst>
+                            <p:childTnLst>
+                              <p:par>
+                                <p:cTn id="11" presetID="1" presetClass="exit" presetSubtype="0" fill="hold" grpId="1" nodeType="clickEffect">
+                                  <p:stCondLst>
+                                    <p:cond delay="0"/>
+                                  </p:stCondLst>
+                                  <p:childTnLst>
+                                    <p:set>
+                                      <p:cBhvr>
+                                        <p:cTn id="12" dur="1" fill="hold">
+                                          <p:stCondLst>
+                                            <p:cond delay="0"/>
+                                          </p:stCondLst>
+                                        </p:cTn>
+                                        <p:tgtEl>
+                                          <p:spTgt spid="3"/>
+                                        </p:tgtEl>
+                                        <p:attrNameLst>
+                                          <p:attrName>style.visibility</p:attrName>
+                                        </p:attrNameLst>
+                                      </p:cBhvr>
+                                      <p:to>
+                                        <p:strVal val="hidden"/>
+                                      </p:to>
+                                    </p:set>
+                                  </p:childTnLst>
+                                </p:cTn>
+                              </p:par>
+                              <p:par>
+                                <p:cTn id="13" presetID="1" presetClass="exit" presetSubtype="0" fill="hold" grpId="1" nodeType="withEffect">
+                                  <p:stCondLst>
+                                    <p:cond delay="0"/>
+                                  </p:stCondLst>
+                                  <p:childTnLst>
+                                    <p:set>
+                                      <p:cBhvr>
+                                        <p:cTn id="14" dur="1" fill="hold">
+                                          <p:stCondLst>
+                                            <p:cond delay="0"/>
+                                          </p:stCondLst>
+                                        </p:cTn>
+                                        <p:tgtEl>
+                                          <p:spTgt spid="6"/>
+                                        </p:tgtEl>
+                                        <p:attrNameLst>
+                                          <p:attrName>style.visibility</p:attrName>
+                                        </p:attrNameLst>
+                                      </p:cBhvr>
+                                      <p:to>
+                                        <p:strVal val="hidden"/>
+                                      </p:to>
+                                    </p:set>
+                                  </p:childTnLst>
+                                </p:cTn>
+                              </p:par>
+                            </p:childTnLst>
+                          </p:cTn>
+                        </p:par>
+                      </p:childTnLst>
+                    </p:cTn>
+                  </p:par>
+                  <p:par>
+                    <p:cTn id="15" fill="hold">
+                      <p:stCondLst>
+                        <p:cond delay="indefinite"/>
+                      </p:stCondLst>
+                      <p:childTnLst>
+                        <p:par>
+                          <p:cTn id="16" fill="hold">
+                            <p:stCondLst>
+                              <p:cond delay="0"/>
+                            </p:stCondLst>
+                            <p:childTnLst>
+                              <p:par>
+                                <p:cTn id="17" presetID="1" presetClass="entr" presetSubtype="0" fill="hold" nodeType="clickEffect">
+                                  <p:stCondLst>
+                                    <p:cond delay="0"/>
+                                  </p:stCondLst>
+                                  <p:childTnLst>
+                                    <p:set>
+                                      <p:cBhvr>
+                                        <p:cTn id="18" dur="1" fill="hold">
+                                          <p:stCondLst>
+                                            <p:cond delay="0"/>
+                                          </p:stCondLst>
+                                        </p:cTn>
+                                        <p:tgtEl>
+                                          <p:spTgt spid="10"/>
+                                        </p:tgtEl>
+                                        <p:attrNameLst>
+                                          <p:attrName>style.visibility</p:attrName>
+                                        </p:attrNameLst>
+                                      </p:cBhvr>
+                                      <p:to>
+                                        <p:strVal val="visible"/>
+                                      </p:to>
+                                    </p:set>
+                                  </p:childTnLst>
+                                </p:cTn>
+                              </p:par>
+                              <p:par>
+                                <p:cTn id="19" presetID="1" presetClass="entr" presetSubtype="0" fill="hold" nodeType="withEffect">
+                                  <p:stCondLst>
+                                    <p:cond delay="0"/>
+                                  </p:stCondLst>
+                                  <p:childTnLst>
+                                    <p:set>
+                                      <p:cBhvr>
+                                        <p:cTn id="20" dur="1" fill="hold">
+                                          <p:stCondLst>
+                                            <p:cond delay="0"/>
+                                          </p:stCondLst>
+                                        </p:cTn>
+                                        <p:tgtEl>
+                                          <p:spTgt spid="8"/>
+                                        </p:tgtEl>
+                                        <p:attrNameLst>
+                                          <p:attrName>style.visibility</p:attrName>
+                                        </p:attrNameLst>
+                                      </p:cBhvr>
+                                      <p:to>
+                                        <p:strVal val="visible"/>
+                                      </p:to>
+                                    </p:set>
+                                  </p:childTnLst>
+                                </p:cTn>
+                              </p:par>
+                            </p:childTnLst>
+                          </p:cTn>
+                        </p:par>
+                      </p:childTnLst>
+                    </p:cTn>
+                  </p:par>
+                </p:childTnLst>
+              </p:cTn>
+              <p:prevCondLst>
+                <p:cond evt="onPrev" delay="0">
+                  <p:tgtEl>
+                    <p:sldTgt/>
+                  </p:tgtEl>
+                </p:cond>
+              </p:prevCondLst>
+              <p:nextCondLst>
+                <p:cond evt="onNext" delay="0">
+                  <p:tgtEl>
+                    <p:sldTgt/>
+                  </p:tgtEl>
+                </p:cond>
+              </p:nextCondLst>
+            </p:seq>
+          </p:childTnLst>
+        </p:cTn>
+      </p:par>
+    </p:tnLst>
+    <p:bldLst>
+      <p:bldP spid="3" grpId="0" animBg="1"/>
+      <p:bldP spid="3" grpId="1" animBg="1"/>
+      <p:bldP spid="6" grpId="0" animBg="1"/>
+      <p:bldP spid="6" grpId="1" animBg="1"/>
+    </p:bldLst>
+  </p:timing>
+</p:sld>
+</file>
+
+<file path=ppt/slides/slide18.xml><?xml version="1.0" encoding="utf-8"?>
+<p:sld xmlns:a="http://schemas.openxmlformats.org/drawingml/2006/main" xmlns:r="http://schemas.openxmlformats.org/officeDocument/2006/relationships" xmlns:p="http://schemas.openxmlformats.org/presentationml/2006/main">
+  <p:cSld>
+    <p:spTree>
+      <p:nvGrpSpPr>
+        <p:cNvPr id="1" name=""/>
+        <p:cNvGrpSpPr/>
+        <p:nvPr/>
+      </p:nvGrpSpPr>
+      <p:grpSpPr>
+        <a:xfrm>
+          <a:off x="0" y="0"/>
+          <a:ext cx="0" cy="0"/>
+          <a:chOff x="0" y="0"/>
+          <a:chExt cx="0" cy="0"/>
+        </a:xfrm>
+      </p:grpSpPr>
+      <p:sp>
+        <p:nvSpPr>
+          <p:cNvPr id="6" name="Untertitel 5">
+            <a:extLst>
+              <a:ext uri="{FF2B5EF4-FFF2-40B4-BE49-F238E27FC236}">
+                <a16:creationId xmlns:a16="http://schemas.microsoft.com/office/drawing/2014/main" id="{8E05B92F-5D29-4DF0-F112-74C93A8CC531}"/>
+              </a:ext>
+            </a:extLst>
+          </p:cNvPr>
+          <p:cNvSpPr>
+            <a:spLocks noGrp="1"/>
+          </p:cNvSpPr>
+          <p:nvPr>
+            <p:ph type="subTitle" idx="1"/>
+          </p:nvPr>
+        </p:nvSpPr>
+        <p:spPr/>
+        <p:txBody>
+          <a:bodyPr/>
+          <a:lstStyle/>
+          <a:p>
+            <a:r>
+              <a:rPr lang="de-DE" dirty="0"/>
+              <a:t>Ende (Benny noch fertig </a:t>
+            </a:r>
+            <a:r>
+              <a:rPr lang="de-DE"/>
+              <a:t>machen auch Folie 1)</a:t>
+            </a:r>
+          </a:p>
+        </p:txBody>
+      </p:sp>
+      <p:sp>
+        <p:nvSpPr>
+          <p:cNvPr id="5" name="Titel 4">
+            <a:extLst>
+              <a:ext uri="{FF2B5EF4-FFF2-40B4-BE49-F238E27FC236}">
+                <a16:creationId xmlns:a16="http://schemas.microsoft.com/office/drawing/2014/main" id="{34C6A74A-6374-BE37-E58E-71A93F657616}"/>
+              </a:ext>
+            </a:extLst>
+          </p:cNvPr>
+          <p:cNvSpPr>
+            <a:spLocks noGrp="1"/>
+          </p:cNvSpPr>
+          <p:nvPr>
+            <p:ph type="title"/>
+          </p:nvPr>
+        </p:nvSpPr>
+        <p:spPr/>
+        <p:txBody>
+          <a:bodyPr/>
+          <a:lstStyle/>
+          <a:p>
+            <a:endParaRPr lang="de-DE" dirty="0"/>
+          </a:p>
+        </p:txBody>
+      </p:sp>
+      <p:sp>
+        <p:nvSpPr>
+          <p:cNvPr id="4" name="Foliennummernplatzhalter 3">
+            <a:extLst>
+              <a:ext uri="{FF2B5EF4-FFF2-40B4-BE49-F238E27FC236}">
+                <a16:creationId xmlns:a16="http://schemas.microsoft.com/office/drawing/2014/main" id="{D7332567-6737-1C8C-A05C-902704591A63}"/>
+              </a:ext>
+            </a:extLst>
+          </p:cNvPr>
+          <p:cNvSpPr>
+            <a:spLocks noGrp="1"/>
+          </p:cNvSpPr>
+          <p:nvPr>
+            <p:ph type="sldNum" sz="quarter" idx="10"/>
+          </p:nvPr>
+        </p:nvSpPr>
+        <p:spPr/>
+        <p:txBody>
+          <a:bodyPr/>
+          <a:lstStyle/>
+          <a:p>
+            <a:pPr>
+              <a:defRPr/>
+            </a:pPr>
+            <a:fld id="{A0424531-ACBB-43B0-9536-C2FB0D769E6C}" type="slidenum">
+              <a:rPr lang="de-DE" altLang="de-DE" smtClean="0"/>
+              <a:pPr>
+                <a:defRPr/>
+              </a:pPr>
+              <a:t>18</a:t>
+            </a:fld>
+            <a:endParaRPr lang="de-DE" altLang="de-DE" dirty="0"/>
+          </a:p>
+        </p:txBody>
+      </p:sp>
+    </p:spTree>
+    <p:extLst>
+      <p:ext uri="{BB962C8B-B14F-4D97-AF65-F5344CB8AC3E}">
+        <p14:creationId xmlns:p14="http://schemas.microsoft.com/office/powerpoint/2010/main" val="467022224"/>
       </p:ext>
     </p:extLst>
   </p:cSld>
@@ -4409,28 +6076,21 @@
           <a:p>
             <a:r>
               <a:rPr lang="de-DE" sz="2000" dirty="0"/>
-              <a:t>Merkmalsanalyse </a:t>
-            </a:r>
-          </a:p>
-          <a:p>
-            <a:pPr lvl="1"/>
-            <a:r>
-              <a:rPr lang="de-DE" sz="1800" dirty="0"/>
-              <a:t>Feature </a:t>
-            </a:r>
-            <a:r>
-              <a:rPr lang="de-DE" sz="1800" dirty="0" err="1"/>
-              <a:t>Extraction</a:t>
-            </a:r>
-            <a:endParaRPr lang="de-DE" sz="1800" dirty="0"/>
-          </a:p>
-          <a:p>
-            <a:pPr lvl="1"/>
-            <a:r>
-              <a:rPr lang="de-DE" sz="1800" dirty="0" err="1"/>
-              <a:t>Standartisierung</a:t>
-            </a:r>
-            <a:endParaRPr lang="de-DE" sz="1800" dirty="0"/>
+              <a:t>Merkmal-Extraktion</a:t>
+            </a:r>
+          </a:p>
+          <a:p>
+            <a:r>
+              <a:rPr lang="de-DE" sz="2000" dirty="0"/>
+              <a:t>Explorative Datenanalyse</a:t>
+            </a:r>
+            <a:endParaRPr lang="de-DE" sz="1600" dirty="0"/>
+          </a:p>
+          <a:p>
+            <a:r>
+              <a:rPr lang="de-DE" sz="2000" dirty="0"/>
+              <a:t>Standardisierung</a:t>
+            </a:r>
           </a:p>
           <a:p>
             <a:r>
@@ -4444,20 +6104,14 @@
               <a:rPr lang="de-DE" sz="1600" dirty="0"/>
               <a:t>PCA</a:t>
             </a:r>
+            <a:endParaRPr lang="de-DE" sz="2200" dirty="0"/>
+          </a:p>
+          <a:p>
+            <a:r>
+              <a:rPr lang="de-DE" sz="2000" dirty="0"/>
+              <a:t>Visualisierung</a:t>
+            </a:r>
             <a:endParaRPr lang="de-DE" sz="1800" dirty="0"/>
-          </a:p>
-          <a:p>
-            <a:r>
-              <a:rPr lang="de-DE" sz="2000" dirty="0"/>
-              <a:t>(Visualisierung)</a:t>
-            </a:r>
-          </a:p>
-          <a:p>
-            <a:pPr lvl="1"/>
-            <a:r>
-              <a:rPr lang="de-DE" sz="1800" dirty="0"/>
-              <a:t>Verfahren</a:t>
-            </a:r>
           </a:p>
           <a:p>
             <a:r>
@@ -4548,7 +6202,14 @@
           <a:p>
             <a:r>
               <a:rPr lang="de-DE" dirty="0"/>
-              <a:t>Beschädigtes Zahnrad automatisiert anhand von verschiedenen Merkmalen klassifizieren</a:t>
+              <a:t>Beschädigtes Zahnrad automatisiert anhand von verschiedenen Merkmalen klassifizieren (Im großen)</a:t>
+            </a:r>
+          </a:p>
+          <a:p>
+            <a:pPr lvl="1"/>
+            <a:r>
+              <a:rPr lang="de-DE" dirty="0"/>
+              <a:t>In diesem Task ist unser Ziel die Vorbereitung für die Automatisierung</a:t>
             </a:r>
           </a:p>
         </p:txBody>
@@ -4653,7 +6314,7 @@
                 <a:latin typeface="Arial"/>
                 <a:ea typeface="ヒラギノ角ゴ Pro W3"/>
               </a:rPr>
-              <a:t>Mekmalsanalyse</a:t>
+              <a:t>Mekmalanalyse</a:t>
             </a:r>
             <a:r>
               <a:rPr kumimoji="0" lang="de-DE" sz="3200" b="1" i="0" u="none" strike="noStrike" kern="0" cap="none" spc="0" normalizeH="0" baseline="0" noProof="0" dirty="0">
@@ -4751,25 +6412,17 @@
               <a:buChar char="•"/>
             </a:pPr>
             <a:r>
+              <a:rPr lang="de-DE" dirty="0">
+                <a:latin typeface="gg sans"/>
+              </a:rPr>
+              <a:t>Gruppieren der Features</a:t>
+            </a:r>
+            <a:r>
               <a:rPr lang="de-DE" b="0" i="0" dirty="0">
                 <a:effectLst/>
                 <a:latin typeface="gg sans"/>
               </a:rPr>
-              <a:t>nicht jedes Feature einzeln detailliert herleiten </a:t>
-            </a:r>
-            <a:r>
-              <a:rPr lang="de-DE" b="0" i="0" dirty="0">
-                <a:effectLst/>
-                <a:latin typeface="inherit"/>
-              </a:rPr>
-              <a:t>→</a:t>
-            </a:r>
-            <a:r>
-              <a:rPr lang="de-DE" b="0" i="0" dirty="0">
-                <a:effectLst/>
-                <a:latin typeface="gg sans"/>
-              </a:rPr>
-              <a:t> gruppieren: </a:t>
+              <a:t> </a:t>
             </a:r>
           </a:p>
           <a:p>
@@ -4785,7 +6438,20 @@
                 <a:effectLst/>
                 <a:latin typeface="inherit"/>
               </a:rPr>
-              <a:t>Zeitbereich: RMS Energy, Zero Crossing Rate → Wie stark ist das Signal, wie viele schnelle Wechsel gibt es?</a:t>
+              <a:t>Zeitbereich: RMS Energy, Zero Crossing Rate </a:t>
+            </a:r>
+            <a:br>
+              <a:rPr lang="de-DE" b="0" i="0" dirty="0">
+                <a:effectLst/>
+                <a:latin typeface="inherit"/>
+              </a:rPr>
+            </a:br>
+            <a:r>
+              <a:rPr lang="de-DE" b="0" i="0" dirty="0">
+                <a:effectLst/>
+                <a:latin typeface="inherit"/>
+              </a:rPr>
+              <a:t>	→ Wie stark ist das Signal, wie viele schnelle Wechsel gibt es?</a:t>
             </a:r>
           </a:p>
           <a:p>
@@ -4843,21 +6509,7 @@
                 <a:effectLst/>
                 <a:latin typeface="inherit"/>
               </a:rPr>
-              <a:t>, </a:t>
-            </a:r>
-            <a:r>
-              <a:rPr lang="de-DE" b="0" i="0" dirty="0" err="1">
-                <a:effectLst/>
-                <a:latin typeface="inherit"/>
-              </a:rPr>
-              <a:t>Rolloff</a:t>
-            </a:r>
-            <a:r>
-              <a:rPr lang="de-DE" b="0" i="0" dirty="0">
-                <a:effectLst/>
-                <a:latin typeface="inherit"/>
-              </a:rPr>
-              <a:t>, </a:t>
+              <a:t>, Rolloff, </a:t>
             </a:r>
             <a:r>
               <a:rPr lang="de-DE" b="0" i="0" dirty="0" err="1">
@@ -4871,7 +6523,20 @@
                 <a:effectLst/>
                 <a:latin typeface="inherit"/>
               </a:rPr>
-              <a:t> → Wo liegt Energie im Frequenzspektrum, wie breit/auffällig ist sie verteilt?</a:t>
+              <a:t> </a:t>
+            </a:r>
+            <a:br>
+              <a:rPr lang="de-DE" b="0" i="0" dirty="0">
+                <a:effectLst/>
+                <a:latin typeface="inherit"/>
+              </a:rPr>
+            </a:br>
+            <a:r>
+              <a:rPr lang="de-DE" b="0" i="0" dirty="0">
+                <a:effectLst/>
+                <a:latin typeface="inherit"/>
+              </a:rPr>
+              <a:t>	→ Wo liegt Energie im Frequenzspektrum, wie breit/auffällig ist sie verteilt?</a:t>
             </a:r>
           </a:p>
           <a:p>
@@ -4887,7 +6552,20 @@
                 <a:effectLst/>
                 <a:latin typeface="inherit"/>
               </a:rPr>
-              <a:t>MFCCs / Delta-MFCCs: → Kompakte Beschreibung der spektralen Form und ihrer Veränderung.</a:t>
+              <a:t>MFCCs / Delta-MFCCs: </a:t>
+            </a:r>
+            <a:br>
+              <a:rPr lang="de-DE" b="0" i="0" dirty="0">
+                <a:effectLst/>
+                <a:latin typeface="inherit"/>
+              </a:rPr>
+            </a:br>
+            <a:r>
+              <a:rPr lang="de-DE" b="0" i="0" dirty="0">
+                <a:effectLst/>
+                <a:latin typeface="inherit"/>
+              </a:rPr>
+              <a:t>	→ Kompakte Beschreibung der spektralen Form und ihrer Veränderung.</a:t>
             </a:r>
           </a:p>
           <a:p>
@@ -4903,7 +6581,20 @@
                 <a:effectLst/>
                 <a:latin typeface="inherit"/>
               </a:rPr>
-              <a:t>Chroma: → Erfasst wiederkehrende spektrale Muster; bei technischen Signalen weniger intuitiv, aber als Mustermerkmal nutzbar.</a:t>
+              <a:t>Chroma: </a:t>
+            </a:r>
+            <a:br>
+              <a:rPr lang="de-DE" b="0" i="0" dirty="0">
+                <a:effectLst/>
+                <a:latin typeface="inherit"/>
+              </a:rPr>
+            </a:br>
+            <a:r>
+              <a:rPr lang="de-DE" b="0" i="0" dirty="0">
+                <a:effectLst/>
+                <a:latin typeface="inherit"/>
+              </a:rPr>
+              <a:t>	→ Erfasst wiederkehrende spektrale Muster; bei technischen Signalen weniger intuitiv, aber 	als Mustermerkmal nutzbar.</a:t>
             </a:r>
           </a:p>
         </p:txBody>
@@ -5095,18 +6786,26 @@
           <a:p>
             <a:r>
               <a:rPr lang="de-DE" dirty="0"/>
-              <a:t>Library:</a:t>
-            </a:r>
+              <a:t>Library: </a:t>
+            </a:r>
+            <a:r>
+              <a:rPr lang="de-DE" dirty="0" err="1"/>
+              <a:t>librosa</a:t>
+            </a:r>
+            <a:endParaRPr lang="de-DE" dirty="0"/>
           </a:p>
           <a:p>
             <a:pPr lvl="1"/>
             <a:r>
-              <a:rPr lang="de-DE" dirty="0" err="1"/>
-              <a:t>Librosa</a:t>
-            </a:r>
-            <a:r>
               <a:rPr lang="de-DE" dirty="0"/>
-              <a:t>: berechnen von…</a:t>
+              <a:t>Berechnen der Merkmale </a:t>
+            </a:r>
+            <a:br>
+              <a:rPr lang="de-DE" dirty="0"/>
+            </a:br>
+            <a:r>
+              <a:rPr lang="de-DE" dirty="0"/>
+              <a:t> </a:t>
             </a:r>
           </a:p>
         </p:txBody>
@@ -5234,36 +6933,8 @@
           <a:lstStyle/>
           <a:p>
             <a:r>
-              <a:rPr kumimoji="0" lang="de-DE" sz="3200" b="1" i="0" u="none" strike="noStrike" kern="0" cap="none" spc="0" normalizeH="0" baseline="0" noProof="0" dirty="0" err="1">
-                <a:ln>
-                  <a:noFill/>
-                </a:ln>
-                <a:solidFill>
-                  <a:srgbClr val="A8CC2F"/>
-                </a:solidFill>
-                <a:effectLst/>
-                <a:uLnTx/>
-                <a:uFillTx/>
-                <a:latin typeface="Arial"/>
-                <a:ea typeface="ヒラギノ角ゴ Pro W3"/>
-              </a:rPr>
-              <a:t>Mekmalsanalyse</a:t>
-            </a:r>
-            <a:r>
-              <a:rPr kumimoji="0" lang="de-DE" sz="3200" b="1" i="0" u="none" strike="noStrike" kern="0" cap="none" spc="0" normalizeH="0" baseline="0" noProof="0" dirty="0">
-                <a:ln>
-                  <a:noFill/>
-                </a:ln>
-                <a:solidFill>
-                  <a:srgbClr val="A8CC2F"/>
-                </a:solidFill>
-                <a:effectLst/>
-                <a:uLnTx/>
-                <a:uFillTx/>
-                <a:latin typeface="Arial"/>
-                <a:ea typeface="ヒラギノ角ゴ Pro W3"/>
-              </a:rPr>
-              <a:t>:</a:t>
+              <a:rPr lang="de-DE" dirty="0"/>
+              <a:t>Hauptkomponentenanalyse:</a:t>
             </a:r>
             <a:br>
               <a:rPr kumimoji="0" lang="de-DE" sz="3200" b="1" i="0" u="none" strike="noStrike" kern="0" cap="none" spc="0" normalizeH="0" baseline="0" noProof="0" dirty="0">
@@ -5281,22 +6952,6 @@
               </a:rPr>
             </a:br>
             <a:r>
-              <a:rPr kumimoji="0" lang="de-DE" sz="2400" b="1" i="0" u="none" strike="noStrike" kern="0" cap="none" spc="0" normalizeH="0" baseline="0" noProof="0" dirty="0" err="1">
-                <a:ln>
-                  <a:noFill/>
-                </a:ln>
-                <a:solidFill>
-                  <a:srgbClr val="A8CC2F"/>
-                </a:solidFill>
-                <a:effectLst/>
-                <a:uLnTx/>
-                <a:uFillTx/>
-                <a:latin typeface="Arial"/>
-                <a:ea typeface="ヒラギノ角ゴ Pro W3"/>
-              </a:rPr>
-              <a:t>Standartisierung</a:t>
-            </a:r>
-            <a:r>
               <a:rPr kumimoji="0" lang="de-DE" sz="2400" b="1" i="0" u="none" strike="noStrike" kern="0" cap="none" spc="0" normalizeH="0" baseline="0" noProof="0" dirty="0">
                 <a:ln>
                   <a:noFill/>
@@ -5310,7 +6965,7 @@
                 <a:latin typeface="Arial"/>
                 <a:ea typeface="ヒラギノ角ゴ Pro W3"/>
               </a:rPr>
-              <a:t> &amp; Code</a:t>
+              <a:t>Standardisierung</a:t>
             </a:r>
             <a:endParaRPr lang="de-DE" dirty="0"/>
           </a:p>
@@ -5353,13 +7008,20 @@
             </a:r>
           </a:p>
           <a:p>
-            <a:pPr lvl="1">
+            <a:pPr marL="457200" lvl="1" indent="0">
               <a:spcAft>
                 <a:spcPts val="300"/>
               </a:spcAft>
-              <a:buFont typeface="Wingdings" pitchFamily="2" charset="2"/>
-              <a:buChar char="è"/>
+              <a:buNone/>
             </a:pPr>
+            <a:r>
+              <a:rPr lang="de-DE" b="0" i="0" dirty="0">
+                <a:effectLst/>
+                <a:latin typeface="gg sans"/>
+                <a:sym typeface="Wingdings" panose="05000000000000000000" pitchFamily="2" charset="2"/>
+              </a:rPr>
+              <a:t> </a:t>
+            </a:r>
             <a:r>
               <a:rPr lang="de-DE" b="0" i="0" dirty="0">
                 <a:effectLst/>
@@ -5369,13 +7031,19 @@
             </a:r>
           </a:p>
           <a:p>
-            <a:pPr lvl="1">
+            <a:pPr marL="457200" lvl="1" indent="0">
               <a:spcAft>
                 <a:spcPts val="300"/>
               </a:spcAft>
-              <a:buFont typeface="Wingdings" pitchFamily="2" charset="2"/>
-              <a:buChar char="è"/>
+              <a:buNone/>
             </a:pPr>
+            <a:r>
+              <a:rPr lang="de-DE" dirty="0">
+                <a:latin typeface="gg sans"/>
+                <a:sym typeface="Wingdings" panose="05000000000000000000" pitchFamily="2" charset="2"/>
+              </a:rPr>
+              <a:t> </a:t>
+            </a:r>
             <a:r>
               <a:rPr lang="de-DE" dirty="0">
                 <a:latin typeface="gg sans"/>
@@ -5431,6 +7099,36 @@
           </a:p>
         </p:txBody>
       </p:sp>
+      <p:pic>
+        <p:nvPicPr>
+          <p:cNvPr id="12" name="Grafik 11">
+            <a:extLst>
+              <a:ext uri="{FF2B5EF4-FFF2-40B4-BE49-F238E27FC236}">
+                <a16:creationId xmlns:a16="http://schemas.microsoft.com/office/drawing/2014/main" id="{83AF4FFF-43A2-A94E-D9CF-F66A42D8AC69}"/>
+              </a:ext>
+            </a:extLst>
+          </p:cNvPr>
+          <p:cNvPicPr>
+            <a:picLocks noChangeAspect="1"/>
+          </p:cNvPicPr>
+          <p:nvPr/>
+        </p:nvPicPr>
+        <p:blipFill>
+          <a:blip r:embed="rId3"/>
+          <a:stretch>
+            <a:fillRect/>
+          </a:stretch>
+        </p:blipFill>
+        <p:spPr>
+          <a:xfrm>
+            <a:off x="1426710" y="4119965"/>
+            <a:ext cx="8885690" cy="1044030"/>
+          </a:xfrm>
+          <a:prstGeom prst="rect">
+            <a:avLst/>
+          </a:prstGeom>
+        </p:spPr>
+      </p:pic>
     </p:spTree>
     <p:extLst>
       <p:ext uri="{BB962C8B-B14F-4D97-AF65-F5344CB8AC3E}">
@@ -5445,6 +7143,375 @@
 </file>
 
 <file path=ppt/slides/slide7.xml><?xml version="1.0" encoding="utf-8"?>
+<p:sld xmlns:a="http://schemas.openxmlformats.org/drawingml/2006/main" xmlns:r="http://schemas.openxmlformats.org/officeDocument/2006/relationships" xmlns:p="http://schemas.openxmlformats.org/presentationml/2006/main">
+  <p:cSld>
+    <p:spTree>
+      <p:nvGrpSpPr>
+        <p:cNvPr id="1" name="">
+          <a:extLst>
+            <a:ext uri="{FF2B5EF4-FFF2-40B4-BE49-F238E27FC236}">
+              <a16:creationId xmlns:a16="http://schemas.microsoft.com/office/drawing/2014/main" id="{7F4DC8C5-6B84-38F9-328D-9E6B4534A4D9}"/>
+            </a:ext>
+          </a:extLst>
+        </p:cNvPr>
+        <p:cNvGrpSpPr/>
+        <p:nvPr/>
+      </p:nvGrpSpPr>
+      <p:grpSpPr>
+        <a:xfrm>
+          <a:off x="0" y="0"/>
+          <a:ext cx="0" cy="0"/>
+          <a:chOff x="0" y="0"/>
+          <a:chExt cx="0" cy="0"/>
+        </a:xfrm>
+      </p:grpSpPr>
+      <p:sp>
+        <p:nvSpPr>
+          <p:cNvPr id="5" name="Titel 4">
+            <a:extLst>
+              <a:ext uri="{FF2B5EF4-FFF2-40B4-BE49-F238E27FC236}">
+                <a16:creationId xmlns:a16="http://schemas.microsoft.com/office/drawing/2014/main" id="{A45EFF85-64A8-E302-6981-1B6B7F7F8DDD}"/>
+              </a:ext>
+            </a:extLst>
+          </p:cNvPr>
+          <p:cNvSpPr>
+            <a:spLocks noGrp="1"/>
+          </p:cNvSpPr>
+          <p:nvPr>
+            <p:ph type="title"/>
+          </p:nvPr>
+        </p:nvSpPr>
+        <p:spPr/>
+        <p:txBody>
+          <a:bodyPr/>
+          <a:lstStyle/>
+          <a:p>
+            <a:r>
+              <a:rPr lang="de-DE" dirty="0"/>
+              <a:t>Explorative Datenanalyse:</a:t>
+            </a:r>
+            <a:br>
+              <a:rPr lang="de-DE" dirty="0"/>
+            </a:br>
+            <a:r>
+              <a:rPr lang="de-DE" sz="2400" dirty="0"/>
+              <a:t>Boxplot-Analyse</a:t>
+            </a:r>
+            <a:endParaRPr lang="de-DE" dirty="0"/>
+          </a:p>
+        </p:txBody>
+      </p:sp>
+      <p:pic>
+        <p:nvPicPr>
+          <p:cNvPr id="3" name="Inhaltsplatzhalter 2">
+            <a:extLst>
+              <a:ext uri="{FF2B5EF4-FFF2-40B4-BE49-F238E27FC236}">
+                <a16:creationId xmlns:a16="http://schemas.microsoft.com/office/drawing/2014/main" id="{979B5319-8740-7A92-1452-B0AE766BD9F4}"/>
+              </a:ext>
+            </a:extLst>
+          </p:cNvPr>
+          <p:cNvPicPr>
+            <a:picLocks noGrp="1" noChangeAspect="1"/>
+          </p:cNvPicPr>
+          <p:nvPr>
+            <p:ph idx="1"/>
+          </p:nvPr>
+        </p:nvPicPr>
+        <p:blipFill rotWithShape="1">
+          <a:blip r:embed="rId2"/>
+          <a:srcRect b="48812"/>
+          <a:stretch>
+            <a:fillRect/>
+          </a:stretch>
+        </p:blipFill>
+        <p:spPr bwMode="auto">
+          <a:xfrm>
+            <a:off x="111772" y="1873899"/>
+            <a:ext cx="11968455" cy="4038599"/>
+          </a:xfrm>
+          <a:prstGeom prst="rect">
+            <a:avLst/>
+          </a:prstGeom>
+          <a:noFill/>
+          <a:ln>
+            <a:noFill/>
+          </a:ln>
+          <a:extLst>
+            <a:ext uri="{909E8E84-426E-40DD-AFC4-6F175D3DCCD1}">
+              <a14:hiddenFill xmlns:a14="http://schemas.microsoft.com/office/drawing/2010/main">
+                <a:solidFill>
+                  <a:srgbClr val="FFFFFF"/>
+                </a:solidFill>
+              </a14:hiddenFill>
+            </a:ext>
+            <a:ext uri="{91240B29-F687-4F45-9708-019B960494DF}">
+              <a14:hiddenLine xmlns:a14="http://schemas.microsoft.com/office/drawing/2010/main" w="9525">
+                <a:solidFill>
+                  <a:srgbClr val="000000"/>
+                </a:solidFill>
+                <a:miter lim="800000"/>
+                <a:headEnd/>
+                <a:tailEnd/>
+              </a14:hiddenLine>
+            </a:ext>
+          </a:extLst>
+        </p:spPr>
+      </p:pic>
+      <p:sp>
+        <p:nvSpPr>
+          <p:cNvPr id="4" name="Foliennummernplatzhalter 3">
+            <a:extLst>
+              <a:ext uri="{FF2B5EF4-FFF2-40B4-BE49-F238E27FC236}">
+                <a16:creationId xmlns:a16="http://schemas.microsoft.com/office/drawing/2014/main" id="{4261BA00-8F21-42B1-B753-4444F47505B5}"/>
+              </a:ext>
+            </a:extLst>
+          </p:cNvPr>
+          <p:cNvSpPr>
+            <a:spLocks noGrp="1"/>
+          </p:cNvSpPr>
+          <p:nvPr>
+            <p:ph type="sldNum" sz="quarter" idx="10"/>
+          </p:nvPr>
+        </p:nvSpPr>
+        <p:spPr/>
+        <p:txBody>
+          <a:bodyPr/>
+          <a:lstStyle/>
+          <a:p>
+            <a:pPr>
+              <a:defRPr/>
+            </a:pPr>
+            <a:fld id="{A0424531-ACBB-43B0-9536-C2FB0D769E6C}" type="slidenum">
+              <a:rPr lang="de-DE" altLang="de-DE" smtClean="0"/>
+              <a:pPr>
+                <a:defRPr/>
+              </a:pPr>
+              <a:t>7</a:t>
+            </a:fld>
+            <a:endParaRPr lang="de-DE" altLang="de-DE" dirty="0"/>
+          </a:p>
+        </p:txBody>
+      </p:sp>
+    </p:spTree>
+    <p:extLst>
+      <p:ext uri="{BB962C8B-B14F-4D97-AF65-F5344CB8AC3E}">
+        <p14:creationId xmlns:p14="http://schemas.microsoft.com/office/powerpoint/2010/main" val="3056035922"/>
+      </p:ext>
+    </p:extLst>
+  </p:cSld>
+  <p:clrMapOvr>
+    <a:masterClrMapping/>
+  </p:clrMapOvr>
+</p:sld>
+</file>
+
+<file path=ppt/slides/slide8.xml><?xml version="1.0" encoding="utf-8"?>
+<p:sld xmlns:a="http://schemas.openxmlformats.org/drawingml/2006/main" xmlns:r="http://schemas.openxmlformats.org/officeDocument/2006/relationships" xmlns:p="http://schemas.openxmlformats.org/presentationml/2006/main">
+  <p:cSld>
+    <p:spTree>
+      <p:nvGrpSpPr>
+        <p:cNvPr id="1" name="">
+          <a:extLst>
+            <a:ext uri="{FF2B5EF4-FFF2-40B4-BE49-F238E27FC236}">
+              <a16:creationId xmlns:a16="http://schemas.microsoft.com/office/drawing/2014/main" id="{7162A3BB-CCD8-3885-6A02-EE175FE1CB1B}"/>
+            </a:ext>
+          </a:extLst>
+        </p:cNvPr>
+        <p:cNvGrpSpPr/>
+        <p:nvPr/>
+      </p:nvGrpSpPr>
+      <p:grpSpPr>
+        <a:xfrm>
+          <a:off x="0" y="0"/>
+          <a:ext cx="0" cy="0"/>
+          <a:chOff x="0" y="0"/>
+          <a:chExt cx="0" cy="0"/>
+        </a:xfrm>
+      </p:grpSpPr>
+      <p:sp>
+        <p:nvSpPr>
+          <p:cNvPr id="5" name="Titel 4">
+            <a:extLst>
+              <a:ext uri="{FF2B5EF4-FFF2-40B4-BE49-F238E27FC236}">
+                <a16:creationId xmlns:a16="http://schemas.microsoft.com/office/drawing/2014/main" id="{23FF9676-A75A-6AB8-50C5-C4EED7B6A7C1}"/>
+              </a:ext>
+            </a:extLst>
+          </p:cNvPr>
+          <p:cNvSpPr>
+            <a:spLocks noGrp="1"/>
+          </p:cNvSpPr>
+          <p:nvPr>
+            <p:ph type="title"/>
+          </p:nvPr>
+        </p:nvSpPr>
+        <p:spPr/>
+        <p:txBody>
+          <a:bodyPr/>
+          <a:lstStyle/>
+          <a:p>
+            <a:r>
+              <a:rPr lang="de-DE" dirty="0"/>
+              <a:t>Explorative Datenanalyse:</a:t>
+            </a:r>
+            <a:br>
+              <a:rPr lang="de-DE" dirty="0"/>
+            </a:br>
+            <a:r>
+              <a:rPr lang="de-DE" sz="2400" dirty="0"/>
+              <a:t>Boxplot-Analyse</a:t>
+            </a:r>
+            <a:endParaRPr lang="de-DE" dirty="0"/>
+          </a:p>
+        </p:txBody>
+      </p:sp>
+      <p:pic>
+        <p:nvPicPr>
+          <p:cNvPr id="3" name="Inhaltsplatzhalter 2">
+            <a:extLst>
+              <a:ext uri="{FF2B5EF4-FFF2-40B4-BE49-F238E27FC236}">
+                <a16:creationId xmlns:a16="http://schemas.microsoft.com/office/drawing/2014/main" id="{B45411E6-140F-B59E-A64B-D3B346EC85B1}"/>
+              </a:ext>
+            </a:extLst>
+          </p:cNvPr>
+          <p:cNvPicPr>
+            <a:picLocks noGrp="1" noChangeAspect="1"/>
+          </p:cNvPicPr>
+          <p:nvPr>
+            <p:ph idx="1"/>
+          </p:nvPr>
+        </p:nvPicPr>
+        <p:blipFill rotWithShape="1">
+          <a:blip r:embed="rId2"/>
+          <a:srcRect t="52986"/>
+          <a:stretch>
+            <a:fillRect/>
+          </a:stretch>
+        </p:blipFill>
+        <p:spPr bwMode="auto">
+          <a:xfrm>
+            <a:off x="161730" y="1589818"/>
+            <a:ext cx="11868540" cy="3678364"/>
+          </a:xfrm>
+          <a:prstGeom prst="rect">
+            <a:avLst/>
+          </a:prstGeom>
+          <a:noFill/>
+          <a:ln>
+            <a:noFill/>
+          </a:ln>
+          <a:extLst>
+            <a:ext uri="{909E8E84-426E-40DD-AFC4-6F175D3DCCD1}">
+              <a14:hiddenFill xmlns:a14="http://schemas.microsoft.com/office/drawing/2010/main">
+                <a:solidFill>
+                  <a:srgbClr val="FFFFFF"/>
+                </a:solidFill>
+              </a14:hiddenFill>
+            </a:ext>
+            <a:ext uri="{91240B29-F687-4F45-9708-019B960494DF}">
+              <a14:hiddenLine xmlns:a14="http://schemas.microsoft.com/office/drawing/2010/main" w="9525">
+                <a:solidFill>
+                  <a:srgbClr val="000000"/>
+                </a:solidFill>
+                <a:miter lim="800000"/>
+                <a:headEnd/>
+                <a:tailEnd/>
+              </a14:hiddenLine>
+            </a:ext>
+          </a:extLst>
+        </p:spPr>
+      </p:pic>
+      <p:sp>
+        <p:nvSpPr>
+          <p:cNvPr id="4" name="Foliennummernplatzhalter 3">
+            <a:extLst>
+              <a:ext uri="{FF2B5EF4-FFF2-40B4-BE49-F238E27FC236}">
+                <a16:creationId xmlns:a16="http://schemas.microsoft.com/office/drawing/2014/main" id="{668000FF-5C0D-F793-7E08-F6647F058BF1}"/>
+              </a:ext>
+            </a:extLst>
+          </p:cNvPr>
+          <p:cNvSpPr>
+            <a:spLocks noGrp="1"/>
+          </p:cNvSpPr>
+          <p:nvPr>
+            <p:ph type="sldNum" sz="quarter" idx="10"/>
+          </p:nvPr>
+        </p:nvSpPr>
+        <p:spPr/>
+        <p:txBody>
+          <a:bodyPr/>
+          <a:lstStyle/>
+          <a:p>
+            <a:pPr>
+              <a:defRPr/>
+            </a:pPr>
+            <a:fld id="{A0424531-ACBB-43B0-9536-C2FB0D769E6C}" type="slidenum">
+              <a:rPr lang="de-DE" altLang="de-DE" smtClean="0"/>
+              <a:pPr>
+                <a:defRPr/>
+              </a:pPr>
+              <a:t>8</a:t>
+            </a:fld>
+            <a:endParaRPr lang="de-DE" altLang="de-DE" dirty="0"/>
+          </a:p>
+        </p:txBody>
+      </p:sp>
+      <p:sp>
+        <p:nvSpPr>
+          <p:cNvPr id="6" name="Textfeld 5">
+            <a:extLst>
+              <a:ext uri="{FF2B5EF4-FFF2-40B4-BE49-F238E27FC236}">
+                <a16:creationId xmlns:a16="http://schemas.microsoft.com/office/drawing/2014/main" id="{DBCE15F3-9C3E-D3E2-9110-0C55D36695D8}"/>
+              </a:ext>
+            </a:extLst>
+          </p:cNvPr>
+          <p:cNvSpPr txBox="1"/>
+          <p:nvPr/>
+        </p:nvSpPr>
+        <p:spPr>
+          <a:xfrm>
+            <a:off x="467591" y="5434445"/>
+            <a:ext cx="10941627" cy="461665"/>
+          </a:xfrm>
+          <a:prstGeom prst="rect">
+            <a:avLst/>
+          </a:prstGeom>
+          <a:noFill/>
+        </p:spPr>
+        <p:txBody>
+          <a:bodyPr wrap="square" rtlCol="0">
+            <a:spAutoFit/>
+          </a:bodyPr>
+          <a:lstStyle/>
+          <a:p>
+            <a:r>
+              <a:rPr lang="de-DE" dirty="0"/>
+              <a:t>Prüfen: </a:t>
+            </a:r>
+            <a:r>
+              <a:rPr lang="de-DE" dirty="0" err="1"/>
+              <a:t>specture</a:t>
+            </a:r>
+            <a:r>
+              <a:rPr lang="de-DE" dirty="0"/>
+              <a:t> Rolloff … (Tim)</a:t>
+            </a:r>
+          </a:p>
+        </p:txBody>
+      </p:sp>
+    </p:spTree>
+    <p:extLst>
+      <p:ext uri="{BB962C8B-B14F-4D97-AF65-F5344CB8AC3E}">
+        <p14:creationId xmlns:p14="http://schemas.microsoft.com/office/powerpoint/2010/main" val="2853938348"/>
+      </p:ext>
+    </p:extLst>
+  </p:cSld>
+  <p:clrMapOvr>
+    <a:masterClrMapping/>
+  </p:clrMapOvr>
+</p:sld>
+</file>
+
+<file path=ppt/slides/slide9.xml><?xml version="1.0" encoding="utf-8"?>
 <p:sld xmlns:a="http://schemas.openxmlformats.org/drawingml/2006/main" xmlns:r="http://schemas.openxmlformats.org/officeDocument/2006/relationships" xmlns:p="http://schemas.openxmlformats.org/presentationml/2006/main">
   <p:cSld>
     <p:spTree>
@@ -5489,83 +7556,24 @@
           <a:lstStyle/>
           <a:p>
             <a:r>
-              <a:rPr kumimoji="0" lang="de-DE" sz="3200" b="1" i="0" u="none" strike="noStrike" kern="0" cap="none" spc="0" normalizeH="0" baseline="0" noProof="0" dirty="0" err="1">
-                <a:ln>
-                  <a:noFill/>
-                </a:ln>
-                <a:solidFill>
-                  <a:srgbClr val="A8CC2F"/>
-                </a:solidFill>
-                <a:effectLst/>
-                <a:uLnTx/>
-                <a:uFillTx/>
+              <a:rPr lang="de-DE" dirty="0">
                 <a:latin typeface="Arial"/>
                 <a:ea typeface="ヒラギノ角ゴ Pro W3"/>
               </a:rPr>
-              <a:t>Mekmalsanalyse</a:t>
-            </a:r>
-            <a:r>
-              <a:rPr kumimoji="0" lang="de-DE" sz="3200" b="1" i="0" u="none" strike="noStrike" kern="0" cap="none" spc="0" normalizeH="0" baseline="0" noProof="0" dirty="0">
-                <a:ln>
-                  <a:noFill/>
-                </a:ln>
-                <a:solidFill>
-                  <a:srgbClr val="A8CC2F"/>
-                </a:solidFill>
-                <a:effectLst/>
-                <a:uLnTx/>
-                <a:uFillTx/>
-                <a:latin typeface="Arial"/>
-                <a:ea typeface="ヒラギノ角ゴ Pro W3"/>
-              </a:rPr>
-              <a:t>:</a:t>
+              <a:t>Hauptkomponentenanalyse:</a:t>
             </a:r>
             <a:br>
-              <a:rPr kumimoji="0" lang="de-DE" sz="3200" b="1" i="0" u="none" strike="noStrike" kern="0" cap="none" spc="0" normalizeH="0" baseline="0" noProof="0" dirty="0">
-                <a:ln>
-                  <a:noFill/>
-                </a:ln>
-                <a:solidFill>
-                  <a:srgbClr val="A8CC2F"/>
-                </a:solidFill>
-                <a:effectLst/>
-                <a:uLnTx/>
-                <a:uFillTx/>
+              <a:rPr lang="de-DE" dirty="0">
                 <a:latin typeface="Arial"/>
                 <a:ea typeface="ヒラギノ角ゴ Pro W3"/>
               </a:rPr>
             </a:br>
             <a:r>
-              <a:rPr kumimoji="0" lang="de-DE" sz="2400" b="1" i="0" u="none" strike="noStrike" kern="0" cap="none" spc="0" normalizeH="0" baseline="0" noProof="0" dirty="0" err="1">
-                <a:ln>
-                  <a:noFill/>
-                </a:ln>
-                <a:solidFill>
-                  <a:srgbClr val="A8CC2F"/>
-                </a:solidFill>
-                <a:effectLst/>
-                <a:uLnTx/>
-                <a:uFillTx/>
+              <a:rPr lang="de-DE" sz="2400" dirty="0">
                 <a:latin typeface="Arial"/>
                 <a:ea typeface="ヒラギノ角ゴ Pro W3"/>
               </a:rPr>
-              <a:t>Standartisierung</a:t>
-            </a:r>
-            <a:r>
-              <a:rPr kumimoji="0" lang="de-DE" sz="2400" b="1" i="0" u="none" strike="noStrike" kern="0" cap="none" spc="0" normalizeH="0" baseline="0" noProof="0" dirty="0">
-                <a:ln>
-                  <a:noFill/>
-                </a:ln>
-                <a:solidFill>
-                  <a:srgbClr val="A8CC2F"/>
-                </a:solidFill>
-                <a:effectLst/>
-                <a:uLnTx/>
-                <a:uFillTx/>
-                <a:latin typeface="Arial"/>
-                <a:ea typeface="ヒラギノ角ゴ Pro W3"/>
-              </a:rPr>
-              <a:t> &amp; PCA: Code</a:t>
+              <a:t>(PCA)</a:t>
             </a:r>
             <a:endParaRPr lang="de-DE" dirty="0"/>
           </a:p>
@@ -5587,16 +7595,17 @@
             <p:ph idx="1"/>
           </p:nvPr>
         </p:nvPicPr>
-        <p:blipFill>
+        <p:blipFill rotWithShape="1">
           <a:blip r:embed="rId3"/>
+          <a:srcRect t="46176"/>
           <a:stretch>
             <a:fillRect/>
           </a:stretch>
         </p:blipFill>
         <p:spPr>
           <a:xfrm>
-            <a:off x="929754" y="2588821"/>
-            <a:ext cx="10982846" cy="3244108"/>
+            <a:off x="929754" y="4086807"/>
+            <a:ext cx="9722412" cy="1545729"/>
           </a:xfrm>
         </p:spPr>
       </p:pic>
@@ -5629,7 +7638,7 @@
               <a:pPr>
                 <a:defRPr/>
               </a:pPr>
-              <a:t>7</a:t>
+              <a:t>9</a:t>
             </a:fld>
             <a:endParaRPr lang="de-DE" altLang="de-DE" dirty="0"/>
           </a:p>
@@ -5652,7 +7661,7 @@
         <p:spPr bwMode="auto">
           <a:xfrm>
             <a:off x="914400" y="1981200"/>
-            <a:ext cx="9737766" cy="607621"/>
+            <a:ext cx="9737766" cy="2105607"/>
           </a:xfrm>
           <a:prstGeom prst="rect">
             <a:avLst/>
@@ -5846,9 +7855,10 @@
           </a:lstStyle>
           <a:p>
             <a:r>
-              <a:rPr lang="de-DE" kern="0" dirty="0"/>
-              <a:t>Libraries:</a:t>
-            </a:r>
+              <a:rPr lang="de-DE" dirty="0"/>
+              <a:t>PCA fasst viele Merkmale in zwei Hauptachsen zusammen, die möglichst viel Varianz erklären. Dadurch können wir sehen, ob sich Zahnradzustände räumlich trennen.</a:t>
+            </a:r>
+            <a:endParaRPr lang="de-DE" kern="0" dirty="0"/>
           </a:p>
         </p:txBody>
       </p:sp>
@@ -5856,276 +7866,6 @@
     <p:extLst>
       <p:ext uri="{BB962C8B-B14F-4D97-AF65-F5344CB8AC3E}">
         <p14:creationId xmlns:p14="http://schemas.microsoft.com/office/powerpoint/2010/main" val="3200753547"/>
-      </p:ext>
-    </p:extLst>
-  </p:cSld>
-  <p:clrMapOvr>
-    <a:masterClrMapping/>
-  </p:clrMapOvr>
-</p:sld>
-</file>
-
-<file path=ppt/slides/slide8.xml><?xml version="1.0" encoding="utf-8"?>
-<p:sld xmlns:a="http://schemas.openxmlformats.org/drawingml/2006/main" xmlns:r="http://schemas.openxmlformats.org/officeDocument/2006/relationships" xmlns:p="http://schemas.openxmlformats.org/presentationml/2006/main">
-  <p:cSld>
-    <p:spTree>
-      <p:nvGrpSpPr>
-        <p:cNvPr id="1" name="">
-          <a:extLst>
-            <a:ext uri="{FF2B5EF4-FFF2-40B4-BE49-F238E27FC236}">
-              <a16:creationId xmlns:a16="http://schemas.microsoft.com/office/drawing/2014/main" id="{36DE2805-E9D8-D04A-5336-8CDAB64B1573}"/>
-            </a:ext>
-          </a:extLst>
-        </p:cNvPr>
-        <p:cNvGrpSpPr/>
-        <p:nvPr/>
-      </p:nvGrpSpPr>
-      <p:grpSpPr>
-        <a:xfrm>
-          <a:off x="0" y="0"/>
-          <a:ext cx="0" cy="0"/>
-          <a:chOff x="0" y="0"/>
-          <a:chExt cx="0" cy="0"/>
-        </a:xfrm>
-      </p:grpSpPr>
-      <p:sp>
-        <p:nvSpPr>
-          <p:cNvPr id="5" name="Titel 4">
-            <a:extLst>
-              <a:ext uri="{FF2B5EF4-FFF2-40B4-BE49-F238E27FC236}">
-                <a16:creationId xmlns:a16="http://schemas.microsoft.com/office/drawing/2014/main" id="{6DA65B3C-0286-CC68-F9A2-DBFCC6079493}"/>
-              </a:ext>
-            </a:extLst>
-          </p:cNvPr>
-          <p:cNvSpPr>
-            <a:spLocks noGrp="1"/>
-          </p:cNvSpPr>
-          <p:nvPr>
-            <p:ph type="title"/>
-          </p:nvPr>
-        </p:nvSpPr>
-        <p:spPr/>
-        <p:txBody>
-          <a:bodyPr/>
-          <a:lstStyle/>
-          <a:p>
-            <a:r>
-              <a:rPr lang="de-DE" dirty="0" err="1"/>
-              <a:t>Hauptkompenentenanalyse</a:t>
-            </a:r>
-            <a:endParaRPr lang="de-DE" dirty="0"/>
-          </a:p>
-        </p:txBody>
-      </p:sp>
-      <p:sp>
-        <p:nvSpPr>
-          <p:cNvPr id="2" name="Inhaltsplatzhalter 1">
-            <a:extLst>
-              <a:ext uri="{FF2B5EF4-FFF2-40B4-BE49-F238E27FC236}">
-                <a16:creationId xmlns:a16="http://schemas.microsoft.com/office/drawing/2014/main" id="{4490464E-DEAC-0130-7CE7-D7F45BF9BB2E}"/>
-              </a:ext>
-            </a:extLst>
-          </p:cNvPr>
-          <p:cNvSpPr>
-            <a:spLocks noGrp="1"/>
-          </p:cNvSpPr>
-          <p:nvPr>
-            <p:ph idx="1"/>
-          </p:nvPr>
-        </p:nvSpPr>
-        <p:spPr/>
-        <p:txBody>
-          <a:bodyPr/>
-          <a:lstStyle/>
-          <a:p>
-            <a:r>
-              <a:rPr lang="de-DE" dirty="0"/>
-              <a:t>Wie geht das?</a:t>
-            </a:r>
-          </a:p>
-          <a:p>
-            <a:endParaRPr lang="de-DE" dirty="0"/>
-          </a:p>
-        </p:txBody>
-      </p:sp>
-      <p:sp>
-        <p:nvSpPr>
-          <p:cNvPr id="4" name="Foliennummernplatzhalter 3">
-            <a:extLst>
-              <a:ext uri="{FF2B5EF4-FFF2-40B4-BE49-F238E27FC236}">
-                <a16:creationId xmlns:a16="http://schemas.microsoft.com/office/drawing/2014/main" id="{107B5250-4EA0-4248-FE0E-9C9933A0314D}"/>
-              </a:ext>
-            </a:extLst>
-          </p:cNvPr>
-          <p:cNvSpPr>
-            <a:spLocks noGrp="1"/>
-          </p:cNvSpPr>
-          <p:nvPr>
-            <p:ph type="sldNum" sz="quarter" idx="10"/>
-          </p:nvPr>
-        </p:nvSpPr>
-        <p:spPr/>
-        <p:txBody>
-          <a:bodyPr/>
-          <a:lstStyle/>
-          <a:p>
-            <a:pPr>
-              <a:defRPr/>
-            </a:pPr>
-            <a:fld id="{A0424531-ACBB-43B0-9536-C2FB0D769E6C}" type="slidenum">
-              <a:rPr lang="de-DE" altLang="de-DE" smtClean="0"/>
-              <a:pPr>
-                <a:defRPr/>
-              </a:pPr>
-              <a:t>8</a:t>
-            </a:fld>
-            <a:endParaRPr lang="de-DE" altLang="de-DE" dirty="0"/>
-          </a:p>
-        </p:txBody>
-      </p:sp>
-    </p:spTree>
-    <p:extLst>
-      <p:ext uri="{BB962C8B-B14F-4D97-AF65-F5344CB8AC3E}">
-        <p14:creationId xmlns:p14="http://schemas.microsoft.com/office/powerpoint/2010/main" val="1705237617"/>
-      </p:ext>
-    </p:extLst>
-  </p:cSld>
-  <p:clrMapOvr>
-    <a:masterClrMapping/>
-  </p:clrMapOvr>
-</p:sld>
-</file>
-
-<file path=ppt/slides/slide9.xml><?xml version="1.0" encoding="utf-8"?>
-<p:sld xmlns:a="http://schemas.openxmlformats.org/drawingml/2006/main" xmlns:r="http://schemas.openxmlformats.org/officeDocument/2006/relationships" xmlns:p="http://schemas.openxmlformats.org/presentationml/2006/main">
-  <p:cSld>
-    <p:spTree>
-      <p:nvGrpSpPr>
-        <p:cNvPr id="1" name="">
-          <a:extLst>
-            <a:ext uri="{FF2B5EF4-FFF2-40B4-BE49-F238E27FC236}">
-              <a16:creationId xmlns:a16="http://schemas.microsoft.com/office/drawing/2014/main" id="{7F4DC8C5-6B84-38F9-328D-9E6B4534A4D9}"/>
-            </a:ext>
-          </a:extLst>
-        </p:cNvPr>
-        <p:cNvGrpSpPr/>
-        <p:nvPr/>
-      </p:nvGrpSpPr>
-      <p:grpSpPr>
-        <a:xfrm>
-          <a:off x="0" y="0"/>
-          <a:ext cx="0" cy="0"/>
-          <a:chOff x="0" y="0"/>
-          <a:chExt cx="0" cy="0"/>
-        </a:xfrm>
-      </p:grpSpPr>
-      <p:sp>
-        <p:nvSpPr>
-          <p:cNvPr id="5" name="Titel 4">
-            <a:extLst>
-              <a:ext uri="{FF2B5EF4-FFF2-40B4-BE49-F238E27FC236}">
-                <a16:creationId xmlns:a16="http://schemas.microsoft.com/office/drawing/2014/main" id="{A45EFF85-64A8-E302-6981-1B6B7F7F8DDD}"/>
-              </a:ext>
-            </a:extLst>
-          </p:cNvPr>
-          <p:cNvSpPr>
-            <a:spLocks noGrp="1"/>
-          </p:cNvSpPr>
-          <p:nvPr>
-            <p:ph type="title"/>
-          </p:nvPr>
-        </p:nvSpPr>
-        <p:spPr/>
-        <p:txBody>
-          <a:bodyPr/>
-          <a:lstStyle/>
-          <a:p>
-            <a:r>
-              <a:rPr lang="de-DE" dirty="0" err="1"/>
-              <a:t>Hauptkompenentenanalyse</a:t>
-            </a:r>
-            <a:r>
-              <a:rPr lang="de-DE" dirty="0"/>
-              <a:t>:</a:t>
-            </a:r>
-            <a:br>
-              <a:rPr lang="de-DE" dirty="0"/>
-            </a:br>
-            <a:r>
-              <a:rPr lang="de-DE" sz="2400" dirty="0"/>
-              <a:t>???</a:t>
-            </a:r>
-            <a:endParaRPr lang="de-DE" dirty="0"/>
-          </a:p>
-        </p:txBody>
-      </p:sp>
-      <p:sp>
-        <p:nvSpPr>
-          <p:cNvPr id="10" name="Inhaltsplatzhalter 9">
-            <a:extLst>
-              <a:ext uri="{FF2B5EF4-FFF2-40B4-BE49-F238E27FC236}">
-                <a16:creationId xmlns:a16="http://schemas.microsoft.com/office/drawing/2014/main" id="{2F3D23E5-4A0C-AAB9-6742-8234C303F895}"/>
-              </a:ext>
-            </a:extLst>
-          </p:cNvPr>
-          <p:cNvSpPr>
-            <a:spLocks noGrp="1"/>
-          </p:cNvSpPr>
-          <p:nvPr>
-            <p:ph idx="1"/>
-          </p:nvPr>
-        </p:nvSpPr>
-        <p:spPr/>
-        <p:txBody>
-          <a:bodyPr/>
-          <a:lstStyle/>
-          <a:p>
-            <a:r>
-              <a:rPr lang="de-DE" dirty="0"/>
-              <a:t>??</a:t>
-            </a:r>
-          </a:p>
-        </p:txBody>
-      </p:sp>
-      <p:sp>
-        <p:nvSpPr>
-          <p:cNvPr id="4" name="Foliennummernplatzhalter 3">
-            <a:extLst>
-              <a:ext uri="{FF2B5EF4-FFF2-40B4-BE49-F238E27FC236}">
-                <a16:creationId xmlns:a16="http://schemas.microsoft.com/office/drawing/2014/main" id="{4261BA00-8F21-42B1-B753-4444F47505B5}"/>
-              </a:ext>
-            </a:extLst>
-          </p:cNvPr>
-          <p:cNvSpPr>
-            <a:spLocks noGrp="1"/>
-          </p:cNvSpPr>
-          <p:nvPr>
-            <p:ph type="sldNum" sz="quarter" idx="10"/>
-          </p:nvPr>
-        </p:nvSpPr>
-        <p:spPr/>
-        <p:txBody>
-          <a:bodyPr/>
-          <a:lstStyle/>
-          <a:p>
-            <a:pPr>
-              <a:defRPr/>
-            </a:pPr>
-            <a:fld id="{A0424531-ACBB-43B0-9536-C2FB0D769E6C}" type="slidenum">
-              <a:rPr lang="de-DE" altLang="de-DE" smtClean="0"/>
-              <a:pPr>
-                <a:defRPr/>
-              </a:pPr>
-              <a:t>9</a:t>
-            </a:fld>
-            <a:endParaRPr lang="de-DE" altLang="de-DE" dirty="0"/>
-          </a:p>
-        </p:txBody>
-      </p:sp>
-    </p:spTree>
-    <p:extLst>
-      <p:ext uri="{BB962C8B-B14F-4D97-AF65-F5344CB8AC3E}">
-        <p14:creationId xmlns:p14="http://schemas.microsoft.com/office/powerpoint/2010/main" val="3056035922"/>
       </p:ext>
     </p:extLst>
   </p:cSld>

--- a/Task_2/Task2Powerpoint.pptx
+++ b/Task_2/Task2Powerpoint.pptx
@@ -2,11 +2,14 @@
 <file path=ppt/presentation.xml><?xml version="1.0" encoding="utf-8"?>
 <p:presentation xmlns:a="http://schemas.openxmlformats.org/drawingml/2006/main" xmlns:r="http://schemas.openxmlformats.org/officeDocument/2006/relationships" xmlns:p="http://schemas.openxmlformats.org/presentationml/2006/main" showSpecialPlsOnTitleSld="0" strictFirstAndLastChars="0" saveSubsetFonts="1" autoCompressPictures="0">
   <p:sldMasterIdLst>
-    <p:sldMasterId id="2147483648" r:id="rId1"/>
+    <p:sldMasterId id="2147483744" r:id="rId1"/>
   </p:sldMasterIdLst>
   <p:notesMasterIdLst>
     <p:notesMasterId r:id="rId20"/>
   </p:notesMasterIdLst>
+  <p:handoutMasterIdLst>
+    <p:handoutMasterId r:id="rId21"/>
+  </p:handoutMasterIdLst>
   <p:sldIdLst>
     <p:sldId id="256" r:id="rId2"/>
     <p:sldId id="257" r:id="rId3"/>
@@ -176,6 +179,195 @@
 </p:presentation>
 </file>
 
+<file path=ppt/handoutMasters/handoutMaster1.xml><?xml version="1.0" encoding="utf-8"?>
+<p:handoutMaster xmlns:a="http://schemas.openxmlformats.org/drawingml/2006/main" xmlns:r="http://schemas.openxmlformats.org/officeDocument/2006/relationships" xmlns:p="http://schemas.openxmlformats.org/presentationml/2006/main">
+  <p:cSld>
+    <p:bg>
+      <p:bgRef idx="1001">
+        <a:schemeClr val="bg1"/>
+      </p:bgRef>
+    </p:bg>
+    <p:spTree>
+      <p:nvGrpSpPr>
+        <p:cNvPr id="1" name=""/>
+        <p:cNvGrpSpPr/>
+        <p:nvPr/>
+      </p:nvGrpSpPr>
+      <p:grpSpPr>
+        <a:xfrm>
+          <a:off x="0" y="0"/>
+          <a:ext cx="0" cy="0"/>
+          <a:chOff x="0" y="0"/>
+          <a:chExt cx="0" cy="0"/>
+        </a:xfrm>
+      </p:grpSpPr>
+      <p:sp>
+        <p:nvSpPr>
+          <p:cNvPr id="2" name="Kopfzeilenplatzhalter 1">
+            <a:extLst>
+              <a:ext uri="{FF2B5EF4-FFF2-40B4-BE49-F238E27FC236}">
+                <a16:creationId xmlns:a16="http://schemas.microsoft.com/office/drawing/2014/main" id="{3C424A38-A8B2-E0EC-7A28-AFD479539829}"/>
+              </a:ext>
+            </a:extLst>
+          </p:cNvPr>
+          <p:cNvSpPr>
+            <a:spLocks noGrp="1"/>
+          </p:cNvSpPr>
+          <p:nvPr>
+            <p:ph type="hdr" sz="quarter"/>
+          </p:nvPr>
+        </p:nvSpPr>
+        <p:spPr>
+          <a:xfrm>
+            <a:off x="0" y="0"/>
+            <a:ext cx="3962400" cy="344488"/>
+          </a:xfrm>
+          <a:prstGeom prst="rect">
+            <a:avLst/>
+          </a:prstGeom>
+        </p:spPr>
+        <p:txBody>
+          <a:bodyPr vert="horz" lIns="91440" tIns="45720" rIns="91440" bIns="45720" rtlCol="0"/>
+          <a:lstStyle>
+            <a:lvl1pPr algn="l">
+              <a:defRPr sz="1200"/>
+            </a:lvl1pPr>
+          </a:lstStyle>
+          <a:p>
+            <a:endParaRPr lang="de-DE"/>
+          </a:p>
+        </p:txBody>
+      </p:sp>
+      <p:sp>
+        <p:nvSpPr>
+          <p:cNvPr id="3" name="Datumsplatzhalter 2">
+            <a:extLst>
+              <a:ext uri="{FF2B5EF4-FFF2-40B4-BE49-F238E27FC236}">
+                <a16:creationId xmlns:a16="http://schemas.microsoft.com/office/drawing/2014/main" id="{B4BC391B-27A7-FAAD-7DC7-CB36FE5A6E4A}"/>
+              </a:ext>
+            </a:extLst>
+          </p:cNvPr>
+          <p:cNvSpPr>
+            <a:spLocks noGrp="1"/>
+          </p:cNvSpPr>
+          <p:nvPr>
+            <p:ph type="dt" sz="quarter" idx="1"/>
+          </p:nvPr>
+        </p:nvSpPr>
+        <p:spPr>
+          <a:xfrm>
+            <a:off x="5180013" y="0"/>
+            <a:ext cx="3962400" cy="344488"/>
+          </a:xfrm>
+          <a:prstGeom prst="rect">
+            <a:avLst/>
+          </a:prstGeom>
+        </p:spPr>
+        <p:txBody>
+          <a:bodyPr vert="horz" lIns="91440" tIns="45720" rIns="91440" bIns="45720" rtlCol="0"/>
+          <a:lstStyle>
+            <a:lvl1pPr algn="r">
+              <a:defRPr sz="1200"/>
+            </a:lvl1pPr>
+          </a:lstStyle>
+          <a:p>
+            <a:fld id="{75AB4CA9-CCE6-4DE5-84AD-E1F7B6CB5CBB}" type="datetimeFigureOut">
+              <a:rPr lang="de-DE" smtClean="0"/>
+              <a:t>20.06.2026</a:t>
+            </a:fld>
+            <a:endParaRPr lang="de-DE"/>
+          </a:p>
+        </p:txBody>
+      </p:sp>
+      <p:sp>
+        <p:nvSpPr>
+          <p:cNvPr id="4" name="Fußzeilenplatzhalter 3">
+            <a:extLst>
+              <a:ext uri="{FF2B5EF4-FFF2-40B4-BE49-F238E27FC236}">
+                <a16:creationId xmlns:a16="http://schemas.microsoft.com/office/drawing/2014/main" id="{C9044DCD-B54D-86BE-7F28-47D99C0553F4}"/>
+              </a:ext>
+            </a:extLst>
+          </p:cNvPr>
+          <p:cNvSpPr>
+            <a:spLocks noGrp="1"/>
+          </p:cNvSpPr>
+          <p:nvPr>
+            <p:ph type="ftr" sz="quarter" idx="2"/>
+          </p:nvPr>
+        </p:nvSpPr>
+        <p:spPr>
+          <a:xfrm>
+            <a:off x="0" y="6513513"/>
+            <a:ext cx="3962400" cy="344487"/>
+          </a:xfrm>
+          <a:prstGeom prst="rect">
+            <a:avLst/>
+          </a:prstGeom>
+        </p:spPr>
+        <p:txBody>
+          <a:bodyPr vert="horz" lIns="91440" tIns="45720" rIns="91440" bIns="45720" rtlCol="0" anchor="b"/>
+          <a:lstStyle>
+            <a:lvl1pPr algn="l">
+              <a:defRPr sz="1200"/>
+            </a:lvl1pPr>
+          </a:lstStyle>
+          <a:p>
+            <a:endParaRPr lang="de-DE" dirty="0"/>
+          </a:p>
+        </p:txBody>
+      </p:sp>
+      <p:sp>
+        <p:nvSpPr>
+          <p:cNvPr id="5" name="Foliennummernplatzhalter 4">
+            <a:extLst>
+              <a:ext uri="{FF2B5EF4-FFF2-40B4-BE49-F238E27FC236}">
+                <a16:creationId xmlns:a16="http://schemas.microsoft.com/office/drawing/2014/main" id="{0420775E-50E3-8820-082D-219DAAE6487C}"/>
+              </a:ext>
+            </a:extLst>
+          </p:cNvPr>
+          <p:cNvSpPr>
+            <a:spLocks noGrp="1"/>
+          </p:cNvSpPr>
+          <p:nvPr>
+            <p:ph type="sldNum" sz="quarter" idx="3"/>
+          </p:nvPr>
+        </p:nvSpPr>
+        <p:spPr>
+          <a:xfrm>
+            <a:off x="5180013" y="6513513"/>
+            <a:ext cx="3962400" cy="344487"/>
+          </a:xfrm>
+          <a:prstGeom prst="rect">
+            <a:avLst/>
+          </a:prstGeom>
+        </p:spPr>
+        <p:txBody>
+          <a:bodyPr vert="horz" lIns="91440" tIns="45720" rIns="91440" bIns="45720" rtlCol="0" anchor="b"/>
+          <a:lstStyle>
+            <a:lvl1pPr algn="r">
+              <a:defRPr sz="1200"/>
+            </a:lvl1pPr>
+          </a:lstStyle>
+          <a:p>
+            <a:fld id="{6B6A8762-026B-44CD-B702-65A0748002CC}" type="slidenum">
+              <a:rPr lang="de-DE" smtClean="0"/>
+              <a:t>‹Nr.›</a:t>
+            </a:fld>
+            <a:endParaRPr lang="de-DE" dirty="0"/>
+          </a:p>
+        </p:txBody>
+      </p:sp>
+    </p:spTree>
+    <p:extLst>
+      <p:ext uri="{BB962C8B-B14F-4D97-AF65-F5344CB8AC3E}">
+        <p14:creationId xmlns:p14="http://schemas.microsoft.com/office/powerpoint/2010/main" val="2380008372"/>
+      </p:ext>
+    </p:extLst>
+  </p:cSld>
+  <p:clrMap bg1="lt1" tx1="dk1" bg2="lt2" tx2="dk2" accent1="accent1" accent2="accent2" accent3="accent3" accent4="accent4" accent5="accent5" accent6="accent6" hlink="hlink" folHlink="folHlink"/>
+</p:handoutMaster>
+</file>
+
 <file path=ppt/notesMasters/notesMaster1.xml><?xml version="1.0" encoding="utf-8"?>
 <p:notesMaster xmlns:a="http://schemas.openxmlformats.org/drawingml/2006/main" xmlns:r="http://schemas.openxmlformats.org/officeDocument/2006/relationships" xmlns:p="http://schemas.openxmlformats.org/presentationml/2006/main">
   <p:cSld>
@@ -258,7 +450,7 @@
           <a:p>
             <a:fld id="{52D5829F-2F94-0B44-A96D-AE852A87AC61}" type="datetimeFigureOut">
               <a:rPr lang="de-DE" smtClean="0"/>
-              <a:t>19.06.2026</a:t>
+              <a:t>20.06.2026</a:t>
             </a:fld>
             <a:endParaRPr lang="de-DE"/>
           </a:p>
@@ -553,6 +745,13 @@
           </p:nvPr>
         </p:nvSpPr>
         <p:spPr/>
+        <p:txBody>
+          <a:bodyPr/>
+          <a:lstStyle/>
+          <a:p>
+            <a:endParaRPr lang="de-DE"/>
+          </a:p>
+        </p:txBody>
       </p:sp>
       <p:sp>
         <p:nvSpPr>
@@ -637,6 +836,13 @@
           </p:nvPr>
         </p:nvSpPr>
         <p:spPr/>
+        <p:txBody>
+          <a:bodyPr/>
+          <a:lstStyle/>
+          <a:p>
+            <a:endParaRPr lang="de-DE"/>
+          </a:p>
+        </p:txBody>
       </p:sp>
       <p:sp>
         <p:nvSpPr>
@@ -668,69 +874,29 @@
           <a:p>
             <a:pPr lvl="1"/>
             <a:r>
-              <a:rPr lang="de-DE" dirty="0" err="1"/>
-              <a:t>Spectral</a:t>
-            </a:r>
-            <a:r>
               <a:rPr lang="de-DE" dirty="0"/>
-              <a:t> </a:t>
-            </a:r>
-            <a:r>
-              <a:rPr lang="de-DE" dirty="0" err="1"/>
-              <a:t>Centroid</a:t>
-            </a:r>
+              <a:t>Spectral Centroid (Schwerpunkt): Gibt an, bei welcher Frequenz der "Masseschwerpunkt" des Spektrums liegt. Maß für die "Helligkeit" des Klangs.</a:t>
+            </a:r>
+          </a:p>
+          <a:p>
+            <a:pPr lvl="1"/>
             <a:r>
               <a:rPr lang="de-DE" dirty="0"/>
-              <a:t> (Schwerpunkt): Gibt an, bei welcher Frequenz der "Masseschwerpunkt" des Spektrums liegt. Maß für die "Helligkeit" des Klangs.</a:t>
+              <a:t>Spectral Bandwidth (Bandbreite): Beschreibt die Spreizung des Spektrums um den Schwerpunkt</a:t>
             </a:r>
           </a:p>
           <a:p>
             <a:pPr lvl="1"/>
             <a:r>
-              <a:rPr lang="de-DE" dirty="0" err="1"/>
-              <a:t>Spectral</a:t>
-            </a:r>
-            <a:r>
               <a:rPr lang="de-DE" dirty="0"/>
-              <a:t> </a:t>
-            </a:r>
-            <a:r>
-              <a:rPr lang="de-DE" dirty="0" err="1"/>
-              <a:t>Bandwidth</a:t>
-            </a:r>
+              <a:t>Spectral Roll-off: Die Frequenz, unter der ein bestimmter Prozentsatz (meist 85%) der Spektralenergie liegt</a:t>
+            </a:r>
+          </a:p>
+          <a:p>
+            <a:pPr lvl="1"/>
             <a:r>
               <a:rPr lang="de-DE" dirty="0"/>
-              <a:t> (Bandbreite): Beschreibt die Spreizung des Spektrums um den Schwerpunkt</a:t>
-            </a:r>
-          </a:p>
-          <a:p>
-            <a:pPr lvl="1"/>
-            <a:r>
-              <a:rPr lang="de-DE" dirty="0" err="1"/>
-              <a:t>Spectral</a:t>
-            </a:r>
-            <a:r>
-              <a:rPr lang="de-DE" dirty="0"/>
-              <a:t> Roll-off: Die Frequenz, unter der ein bestimmter Prozentsatz (meist 85%) der Spektralenergie liegt</a:t>
-            </a:r>
-          </a:p>
-          <a:p>
-            <a:pPr lvl="1"/>
-            <a:r>
-              <a:rPr lang="de-DE" dirty="0" err="1"/>
-              <a:t>Spectral</a:t>
-            </a:r>
-            <a:r>
-              <a:rPr lang="de-DE" dirty="0"/>
-              <a:t> </a:t>
-            </a:r>
-            <a:r>
-              <a:rPr lang="de-DE" dirty="0" err="1"/>
-              <a:t>Contrast</a:t>
-            </a:r>
-            <a:r>
-              <a:rPr lang="de-DE" dirty="0"/>
-              <a:t>: Misst den Unterschied zwischen Spitzen und Tälern im Spektrum.</a:t>
+              <a:t>Spectral Contrast: Misst den Unterschied zwischen Spitzen und Tälern im Spektrum.</a:t>
             </a:r>
           </a:p>
           <a:p>
@@ -858,6 +1024,13 @@
           </p:nvPr>
         </p:nvSpPr>
         <p:spPr/>
+        <p:txBody>
+          <a:bodyPr/>
+          <a:lstStyle/>
+          <a:p>
+            <a:endParaRPr lang="de-DE"/>
+          </a:p>
+        </p:txBody>
       </p:sp>
       <p:sp>
         <p:nvSpPr>
@@ -966,6 +1139,13 @@
           </p:nvPr>
         </p:nvSpPr>
         <p:spPr/>
+        <p:txBody>
+          <a:bodyPr/>
+          <a:lstStyle/>
+          <a:p>
+            <a:endParaRPr lang="de-DE"/>
+          </a:p>
+        </p:txBody>
       </p:sp>
       <p:sp>
         <p:nvSpPr>
@@ -1034,9 +1214,9 @@
 </p:notes>
 </file>
 
-<file path=ppt/slideLayouts/slideLayout1.xml><?xml version="1.0" encoding="utf-8"?>
-<p:sldLayout xmlns:a="http://schemas.openxmlformats.org/drawingml/2006/main" xmlns:r="http://schemas.openxmlformats.org/officeDocument/2006/relationships" xmlns:p="http://schemas.openxmlformats.org/presentationml/2006/main" preserve="1">
-  <p:cSld name="Titelfolie">
+<file path=ppt/notesSlides/notesSlide5.xml><?xml version="1.0" encoding="utf-8"?>
+<p:notes xmlns:a="http://schemas.openxmlformats.org/drawingml/2006/main" xmlns:r="http://schemas.openxmlformats.org/officeDocument/2006/relationships" xmlns:p="http://schemas.openxmlformats.org/presentationml/2006/main">
+  <p:cSld>
     <p:spTree>
       <p:nvGrpSpPr>
         <p:cNvPr id="1" name=""/>
@@ -1053,76 +1233,12 @@
       </p:grpSpPr>
       <p:sp>
         <p:nvSpPr>
-          <p:cNvPr id="3" name="Untertitel 2"/>
-          <p:cNvSpPr>
-            <a:spLocks noGrp="1"/>
-          </p:cNvSpPr>
-          <p:nvPr>
-            <p:ph type="subTitle" idx="1"/>
-          </p:nvPr>
-        </p:nvSpPr>
-        <p:spPr>
-          <a:xfrm>
-            <a:off x="1828800" y="3886200"/>
-            <a:ext cx="8534400" cy="1752600"/>
-          </a:xfrm>
-        </p:spPr>
-        <p:txBody>
-          <a:bodyPr/>
-          <a:lstStyle>
-            <a:lvl1pPr marL="0" indent="0" algn="ctr">
-              <a:buNone/>
-              <a:defRPr/>
-            </a:lvl1pPr>
-            <a:lvl2pPr marL="457200" indent="0" algn="ctr">
-              <a:buNone/>
-              <a:defRPr/>
-            </a:lvl2pPr>
-            <a:lvl3pPr marL="914400" indent="0" algn="ctr">
-              <a:buNone/>
-              <a:defRPr/>
-            </a:lvl3pPr>
-            <a:lvl4pPr marL="1371600" indent="0" algn="ctr">
-              <a:buNone/>
-              <a:defRPr/>
-            </a:lvl4pPr>
-            <a:lvl5pPr marL="1828800" indent="0" algn="ctr">
-              <a:buNone/>
-              <a:defRPr/>
-            </a:lvl5pPr>
-            <a:lvl6pPr marL="2286000" indent="0" algn="ctr">
-              <a:buNone/>
-              <a:defRPr/>
-            </a:lvl6pPr>
-            <a:lvl7pPr marL="2743200" indent="0" algn="ctr">
-              <a:buNone/>
-              <a:defRPr/>
-            </a:lvl7pPr>
-            <a:lvl8pPr marL="3200400" indent="0" algn="ctr">
-              <a:buNone/>
-              <a:defRPr/>
-            </a:lvl8pPr>
-            <a:lvl9pPr marL="3657600" indent="0" algn="ctr">
-              <a:buNone/>
-              <a:defRPr/>
-            </a:lvl9pPr>
-          </a:lstStyle>
-          <a:p>
-            <a:r>
-              <a:rPr lang="de-DE"/>
-              <a:t>Master-Untertitelformat bearbeiten</a:t>
-            </a:r>
-          </a:p>
-        </p:txBody>
-      </p:sp>
-      <p:sp>
-        <p:nvSpPr>
-          <p:cNvPr id="6" name="Titel 5"/>
-          <p:cNvSpPr>
-            <a:spLocks noGrp="1"/>
-          </p:cNvSpPr>
-          <p:nvPr>
-            <p:ph type="title"/>
+          <p:cNvPr id="2" name="Folienbildplatzhalter 1"/>
+          <p:cNvSpPr>
+            <a:spLocks noGrp="1" noRot="1" noChangeAspect="1"/>
+          </p:cNvSpPr>
+          <p:nvPr>
+            <p:ph type="sldImg"/>
           </p:nvPr>
         </p:nvSpPr>
         <p:spPr/>
@@ -1130,70 +1246,79 @@
           <a:bodyPr/>
           <a:lstStyle/>
           <a:p>
-            <a:r>
-              <a:rPr lang="de-DE"/>
-              <a:t>Mastertitelformat bearbeiten</a:t>
-            </a:r>
-          </a:p>
-        </p:txBody>
-      </p:sp>
-      <p:sp>
-        <p:nvSpPr>
-          <p:cNvPr id="2" name="Rectangle 6">
-            <a:extLst>
-              <a:ext uri="{FF2B5EF4-FFF2-40B4-BE49-F238E27FC236}">
-                <a16:creationId xmlns:a16="http://schemas.microsoft.com/office/drawing/2014/main" id="{525EC9E2-31FF-3EA5-3975-E86E167F9610}"/>
-              </a:ext>
-            </a:extLst>
-          </p:cNvPr>
-          <p:cNvSpPr>
-            <a:spLocks noGrp="1" noChangeArrowheads="1"/>
-          </p:cNvSpPr>
-          <p:nvPr>
-            <p:ph type="sldNum" sz="quarter" idx="10"/>
-          </p:nvPr>
-        </p:nvSpPr>
-        <p:spPr>
-          <a:ln/>
-        </p:spPr>
-        <p:txBody>
-          <a:bodyPr/>
-          <a:lstStyle>
-            <a:lvl1pPr>
-              <a:defRPr/>
-            </a:lvl1pPr>
-          </a:lstStyle>
-          <a:p>
-            <a:pPr>
-              <a:defRPr/>
-            </a:pPr>
-            <a:fld id="{6AE6AF26-C926-4A56-9975-C85146180884}" type="slidenum">
-              <a:rPr lang="de-DE" altLang="de-DE"/>
-              <a:pPr>
-                <a:defRPr/>
-              </a:pPr>
-              <a:t>‹Nr.›</a:t>
+            <a:endParaRPr lang="de-DE"/>
+          </a:p>
+        </p:txBody>
+      </p:sp>
+      <p:sp>
+        <p:nvSpPr>
+          <p:cNvPr id="3" name="Notizenplatzhalter 2"/>
+          <p:cNvSpPr>
+            <a:spLocks noGrp="1"/>
+          </p:cNvSpPr>
+          <p:nvPr>
+            <p:ph type="body" idx="1"/>
+          </p:nvPr>
+        </p:nvSpPr>
+        <p:spPr/>
+        <p:txBody>
+          <a:bodyPr/>
+          <a:lstStyle/>
+          <a:p>
+            <a:r>
+              <a:rPr lang="de-DE" dirty="0"/>
+              <a:t>mID: Z01-Z05 = 0000 und </a:t>
+            </a:r>
+            <a:r>
+              <a:rPr lang="de-DE" dirty="0" err="1"/>
+              <a:t>rID</a:t>
+            </a:r>
+            <a:r>
+              <a:rPr lang="de-DE" dirty="0"/>
+              <a:t> = 00000 und Pos = 00</a:t>
+            </a:r>
+          </a:p>
+        </p:txBody>
+      </p:sp>
+      <p:sp>
+        <p:nvSpPr>
+          <p:cNvPr id="4" name="Foliennummernplatzhalter 3"/>
+          <p:cNvSpPr>
+            <a:spLocks noGrp="1"/>
+          </p:cNvSpPr>
+          <p:nvPr>
+            <p:ph type="sldNum" sz="quarter" idx="5"/>
+          </p:nvPr>
+        </p:nvSpPr>
+        <p:spPr/>
+        <p:txBody>
+          <a:bodyPr/>
+          <a:lstStyle/>
+          <a:p>
+            <a:fld id="{0492B7F2-6741-7346-B13A-366117EE2BBB}" type="slidenum">
+              <a:rPr lang="de-DE" smtClean="0"/>
+              <a:t>10</a:t>
             </a:fld>
-            <a:endParaRPr lang="de-DE" altLang="de-DE" dirty="0"/>
+            <a:endParaRPr lang="de-DE"/>
           </a:p>
         </p:txBody>
       </p:sp>
     </p:spTree>
     <p:extLst>
       <p:ext uri="{BB962C8B-B14F-4D97-AF65-F5344CB8AC3E}">
-        <p14:creationId xmlns:p14="http://schemas.microsoft.com/office/powerpoint/2010/main" val="402712494"/>
+        <p14:creationId xmlns:p14="http://schemas.microsoft.com/office/powerpoint/2010/main" val="4205122503"/>
       </p:ext>
     </p:extLst>
   </p:cSld>
   <p:clrMapOvr>
     <a:masterClrMapping/>
   </p:clrMapOvr>
-</p:sldLayout>
+</p:notes>
 </file>
 
-<file path=ppt/slideLayouts/slideLayout10.xml><?xml version="1.0" encoding="utf-8"?>
-<p:sldLayout xmlns:a="http://schemas.openxmlformats.org/drawingml/2006/main" xmlns:r="http://schemas.openxmlformats.org/officeDocument/2006/relationships" xmlns:p="http://schemas.openxmlformats.org/presentationml/2006/main" type="vertTx" preserve="1">
-  <p:cSld name="Titel und vertikaler Text">
+<file path=ppt/slideLayouts/slideLayout1.xml><?xml version="1.0" encoding="utf-8"?>
+<p:sldLayout xmlns:a="http://schemas.openxmlformats.org/drawingml/2006/main" xmlns:r="http://schemas.openxmlformats.org/officeDocument/2006/relationships" xmlns:p="http://schemas.openxmlformats.org/presentationml/2006/main" preserve="1">
+  <p:cSld name="1_Benutzerdefiniertes Layout">
     <p:spTree>
       <p:nvGrpSpPr>
         <p:cNvPr id="1" name=""/>
@@ -1208,2233 +1333,35 @@
           <a:chExt cx="0" cy="0"/>
         </a:xfrm>
       </p:grpSpPr>
-      <p:sp>
-        <p:nvSpPr>
-          <p:cNvPr id="2" name="Titel 1"/>
-          <p:cNvSpPr>
-            <a:spLocks noGrp="1"/>
-          </p:cNvSpPr>
-          <p:nvPr>
-            <p:ph type="title"/>
-          </p:nvPr>
-        </p:nvSpPr>
-        <p:spPr/>
-        <p:txBody>
-          <a:bodyPr/>
-          <a:lstStyle/>
-          <a:p>
-            <a:r>
-              <a:rPr lang="de-DE"/>
-              <a:t>Mastertitelformat bearbeiten</a:t>
-            </a:r>
-          </a:p>
-        </p:txBody>
-      </p:sp>
-      <p:sp>
-        <p:nvSpPr>
-          <p:cNvPr id="3" name="Vertikaler Textplatzhalter 2"/>
-          <p:cNvSpPr>
-            <a:spLocks noGrp="1"/>
-          </p:cNvSpPr>
-          <p:nvPr>
-            <p:ph type="body" orient="vert" idx="1"/>
-          </p:nvPr>
-        </p:nvSpPr>
-        <p:spPr/>
-        <p:txBody>
-          <a:bodyPr vert="eaVert"/>
-          <a:lstStyle/>
-          <a:p>
-            <a:pPr lvl="0"/>
-            <a:r>
-              <a:rPr lang="de-DE"/>
-              <a:t>Mastertextformat bearbeiten</a:t>
-            </a:r>
-          </a:p>
-          <a:p>
-            <a:pPr lvl="1"/>
-            <a:r>
-              <a:rPr lang="de-DE"/>
-              <a:t>Zweite Ebene</a:t>
-            </a:r>
-          </a:p>
-          <a:p>
-            <a:pPr lvl="2"/>
-            <a:r>
-              <a:rPr lang="de-DE"/>
-              <a:t>Dritte Ebene</a:t>
-            </a:r>
-          </a:p>
-          <a:p>
-            <a:pPr lvl="3"/>
-            <a:r>
-              <a:rPr lang="de-DE"/>
-              <a:t>Vierte Ebene</a:t>
-            </a:r>
-          </a:p>
-          <a:p>
-            <a:pPr lvl="4"/>
-            <a:r>
-              <a:rPr lang="de-DE"/>
-              <a:t>Fünfte Ebene</a:t>
-            </a:r>
-          </a:p>
-        </p:txBody>
-      </p:sp>
-      <p:sp>
-        <p:nvSpPr>
-          <p:cNvPr id="4" name="Rectangle 6">
-            <a:extLst>
-              <a:ext uri="{FF2B5EF4-FFF2-40B4-BE49-F238E27FC236}">
-                <a16:creationId xmlns:a16="http://schemas.microsoft.com/office/drawing/2014/main" id="{60DFE463-EA6F-7A0D-E324-9309CA19F764}"/>
-              </a:ext>
-            </a:extLst>
-          </p:cNvPr>
-          <p:cNvSpPr>
-            <a:spLocks noGrp="1" noChangeArrowheads="1"/>
-          </p:cNvSpPr>
-          <p:nvPr>
-            <p:ph type="sldNum" sz="quarter" idx="10"/>
-          </p:nvPr>
-        </p:nvSpPr>
-        <p:spPr>
-          <a:ln/>
-        </p:spPr>
-        <p:txBody>
-          <a:bodyPr/>
-          <a:lstStyle>
-            <a:lvl1pPr>
-              <a:defRPr/>
-            </a:lvl1pPr>
-          </a:lstStyle>
-          <a:p>
-            <a:pPr>
-              <a:defRPr/>
-            </a:pPr>
-            <a:fld id="{93308B93-56F5-4BC0-B85D-44A31F485381}" type="slidenum">
-              <a:rPr lang="de-DE" altLang="de-DE"/>
-              <a:pPr>
-                <a:defRPr/>
-              </a:pPr>
-              <a:t>‹Nr.›</a:t>
-            </a:fld>
-            <a:endParaRPr lang="de-DE" altLang="de-DE" dirty="0"/>
-          </a:p>
-        </p:txBody>
-      </p:sp>
-    </p:spTree>
-    <p:extLst>
-      <p:ext uri="{BB962C8B-B14F-4D97-AF65-F5344CB8AC3E}">
-        <p14:creationId xmlns:p14="http://schemas.microsoft.com/office/powerpoint/2010/main" val="2031696499"/>
-      </p:ext>
-    </p:extLst>
-  </p:cSld>
-  <p:clrMapOvr>
-    <a:masterClrMapping/>
-  </p:clrMapOvr>
-</p:sldLayout>
-</file>
-
-<file path=ppt/slideLayouts/slideLayout11.xml><?xml version="1.0" encoding="utf-8"?>
-<p:sldLayout xmlns:a="http://schemas.openxmlformats.org/drawingml/2006/main" xmlns:r="http://schemas.openxmlformats.org/officeDocument/2006/relationships" xmlns:p="http://schemas.openxmlformats.org/presentationml/2006/main" type="vertTitleAndTx" preserve="1">
-  <p:cSld name="Vertikaler Titel und Text">
-    <p:spTree>
-      <p:nvGrpSpPr>
-        <p:cNvPr id="1" name=""/>
-        <p:cNvGrpSpPr/>
-        <p:nvPr/>
-      </p:nvGrpSpPr>
-      <p:grpSpPr>
-        <a:xfrm>
-          <a:off x="0" y="0"/>
-          <a:ext cx="0" cy="0"/>
-          <a:chOff x="0" y="0"/>
-          <a:chExt cx="0" cy="0"/>
-        </a:xfrm>
-      </p:grpSpPr>
-      <p:sp>
-        <p:nvSpPr>
-          <p:cNvPr id="2" name="Vertikaler Titel 1"/>
-          <p:cNvSpPr>
-            <a:spLocks noGrp="1"/>
-          </p:cNvSpPr>
-          <p:nvPr>
-            <p:ph type="title" orient="vert"/>
-          </p:nvPr>
-        </p:nvSpPr>
-        <p:spPr>
-          <a:xfrm>
-            <a:off x="8915400" y="609600"/>
-            <a:ext cx="2667000" cy="5486400"/>
-          </a:xfrm>
-        </p:spPr>
-        <p:txBody>
-          <a:bodyPr vert="eaVert"/>
-          <a:lstStyle/>
-          <a:p>
-            <a:r>
-              <a:rPr lang="de-DE"/>
-              <a:t>Mastertitelformat bearbeiten</a:t>
-            </a:r>
-          </a:p>
-        </p:txBody>
-      </p:sp>
-      <p:sp>
-        <p:nvSpPr>
-          <p:cNvPr id="3" name="Vertikaler Textplatzhalter 2"/>
-          <p:cNvSpPr>
-            <a:spLocks noGrp="1"/>
-          </p:cNvSpPr>
-          <p:nvPr>
-            <p:ph type="body" orient="vert" idx="1"/>
-          </p:nvPr>
-        </p:nvSpPr>
-        <p:spPr>
-          <a:xfrm>
-            <a:off x="914400" y="609600"/>
-            <a:ext cx="7797800" cy="5486400"/>
-          </a:xfrm>
-        </p:spPr>
-        <p:txBody>
-          <a:bodyPr vert="eaVert"/>
-          <a:lstStyle/>
-          <a:p>
-            <a:pPr lvl="0"/>
-            <a:r>
-              <a:rPr lang="de-DE"/>
-              <a:t>Mastertextformat bearbeiten</a:t>
-            </a:r>
-          </a:p>
-          <a:p>
-            <a:pPr lvl="1"/>
-            <a:r>
-              <a:rPr lang="de-DE"/>
-              <a:t>Zweite Ebene</a:t>
-            </a:r>
-          </a:p>
-          <a:p>
-            <a:pPr lvl="2"/>
-            <a:r>
-              <a:rPr lang="de-DE"/>
-              <a:t>Dritte Ebene</a:t>
-            </a:r>
-          </a:p>
-          <a:p>
-            <a:pPr lvl="3"/>
-            <a:r>
-              <a:rPr lang="de-DE"/>
-              <a:t>Vierte Ebene</a:t>
-            </a:r>
-          </a:p>
-          <a:p>
-            <a:pPr lvl="4"/>
-            <a:r>
-              <a:rPr lang="de-DE"/>
-              <a:t>Fünfte Ebene</a:t>
-            </a:r>
-          </a:p>
-        </p:txBody>
-      </p:sp>
-      <p:sp>
-        <p:nvSpPr>
-          <p:cNvPr id="4" name="Rectangle 6">
-            <a:extLst>
-              <a:ext uri="{FF2B5EF4-FFF2-40B4-BE49-F238E27FC236}">
-                <a16:creationId xmlns:a16="http://schemas.microsoft.com/office/drawing/2014/main" id="{FE4CA076-6F98-AFCE-C8A3-5B1E49D5A546}"/>
-              </a:ext>
-            </a:extLst>
-          </p:cNvPr>
-          <p:cNvSpPr>
-            <a:spLocks noGrp="1" noChangeArrowheads="1"/>
-          </p:cNvSpPr>
-          <p:nvPr>
-            <p:ph type="sldNum" sz="quarter" idx="10"/>
-          </p:nvPr>
-        </p:nvSpPr>
-        <p:spPr>
-          <a:ln/>
-        </p:spPr>
-        <p:txBody>
-          <a:bodyPr/>
-          <a:lstStyle>
-            <a:lvl1pPr>
-              <a:defRPr/>
-            </a:lvl1pPr>
-          </a:lstStyle>
-          <a:p>
-            <a:pPr>
-              <a:defRPr/>
-            </a:pPr>
-            <a:fld id="{A44C87F1-4186-4704-A4D5-1175D6C93009}" type="slidenum">
-              <a:rPr lang="de-DE" altLang="de-DE"/>
-              <a:pPr>
-                <a:defRPr/>
-              </a:pPr>
-              <a:t>‹Nr.›</a:t>
-            </a:fld>
-            <a:endParaRPr lang="de-DE" altLang="de-DE" dirty="0"/>
-          </a:p>
-        </p:txBody>
-      </p:sp>
-    </p:spTree>
-    <p:extLst>
-      <p:ext uri="{BB962C8B-B14F-4D97-AF65-F5344CB8AC3E}">
-        <p14:creationId xmlns:p14="http://schemas.microsoft.com/office/powerpoint/2010/main" val="4175737765"/>
-      </p:ext>
-    </p:extLst>
-  </p:cSld>
-  <p:clrMapOvr>
-    <a:masterClrMapping/>
-  </p:clrMapOvr>
-</p:sldLayout>
-</file>
-
-<file path=ppt/slideLayouts/slideLayout2.xml><?xml version="1.0" encoding="utf-8"?>
-<p:sldLayout xmlns:a="http://schemas.openxmlformats.org/drawingml/2006/main" xmlns:r="http://schemas.openxmlformats.org/officeDocument/2006/relationships" xmlns:p="http://schemas.openxmlformats.org/presentationml/2006/main" type="obj" preserve="1">
-  <p:cSld name="Titel und Inhalt">
-    <p:spTree>
-      <p:nvGrpSpPr>
-        <p:cNvPr id="1" name=""/>
-        <p:cNvGrpSpPr/>
-        <p:nvPr/>
-      </p:nvGrpSpPr>
-      <p:grpSpPr>
-        <a:xfrm>
-          <a:off x="0" y="0"/>
-          <a:ext cx="0" cy="0"/>
-          <a:chOff x="0" y="0"/>
-          <a:chExt cx="0" cy="0"/>
-        </a:xfrm>
-      </p:grpSpPr>
-      <p:sp>
-        <p:nvSpPr>
-          <p:cNvPr id="2" name="Titel 1"/>
-          <p:cNvSpPr>
-            <a:spLocks noGrp="1"/>
-          </p:cNvSpPr>
-          <p:nvPr>
-            <p:ph type="title"/>
-          </p:nvPr>
-        </p:nvSpPr>
-        <p:spPr/>
-        <p:txBody>
-          <a:bodyPr/>
-          <a:lstStyle/>
-          <a:p>
-            <a:r>
-              <a:rPr lang="de-DE"/>
-              <a:t>Mastertitelformat bearbeiten</a:t>
-            </a:r>
-          </a:p>
-        </p:txBody>
-      </p:sp>
-      <p:sp>
-        <p:nvSpPr>
-          <p:cNvPr id="3" name="Inhaltsplatzhalter 2"/>
-          <p:cNvSpPr>
-            <a:spLocks noGrp="1"/>
-          </p:cNvSpPr>
-          <p:nvPr>
-            <p:ph idx="1"/>
-          </p:nvPr>
-        </p:nvSpPr>
-        <p:spPr/>
-        <p:txBody>
-          <a:bodyPr/>
-          <a:lstStyle/>
-          <a:p>
-            <a:pPr lvl="0"/>
-            <a:r>
-              <a:rPr lang="de-DE"/>
-              <a:t>Mastertextformat bearbeiten</a:t>
-            </a:r>
-          </a:p>
-          <a:p>
-            <a:pPr lvl="1"/>
-            <a:r>
-              <a:rPr lang="de-DE"/>
-              <a:t>Zweite Ebene</a:t>
-            </a:r>
-          </a:p>
-          <a:p>
-            <a:pPr lvl="2"/>
-            <a:r>
-              <a:rPr lang="de-DE"/>
-              <a:t>Dritte Ebene</a:t>
-            </a:r>
-          </a:p>
-          <a:p>
-            <a:pPr lvl="3"/>
-            <a:r>
-              <a:rPr lang="de-DE"/>
-              <a:t>Vierte Ebene</a:t>
-            </a:r>
-          </a:p>
-          <a:p>
-            <a:pPr lvl="4"/>
-            <a:r>
-              <a:rPr lang="de-DE"/>
-              <a:t>Fünfte Ebene</a:t>
-            </a:r>
-            <a:endParaRPr lang="de-DE" dirty="0"/>
-          </a:p>
-        </p:txBody>
-      </p:sp>
-      <p:sp>
-        <p:nvSpPr>
-          <p:cNvPr id="4" name="Rectangle 6">
-            <a:extLst>
-              <a:ext uri="{FF2B5EF4-FFF2-40B4-BE49-F238E27FC236}">
-                <a16:creationId xmlns:a16="http://schemas.microsoft.com/office/drawing/2014/main" id="{E075048B-B3AF-D45D-EEB0-384F8E09762E}"/>
-              </a:ext>
-            </a:extLst>
-          </p:cNvPr>
-          <p:cNvSpPr>
-            <a:spLocks noGrp="1" noChangeArrowheads="1"/>
-          </p:cNvSpPr>
-          <p:nvPr>
-            <p:ph type="sldNum" sz="quarter" idx="10"/>
-          </p:nvPr>
-        </p:nvSpPr>
-        <p:spPr>
-          <a:ln/>
-        </p:spPr>
-        <p:txBody>
-          <a:bodyPr/>
-          <a:lstStyle>
-            <a:lvl1pPr>
-              <a:defRPr/>
-            </a:lvl1pPr>
-          </a:lstStyle>
-          <a:p>
-            <a:pPr>
-              <a:defRPr/>
-            </a:pPr>
-            <a:fld id="{A0424531-ACBB-43B0-9536-C2FB0D769E6C}" type="slidenum">
-              <a:rPr lang="de-DE" altLang="de-DE"/>
-              <a:pPr>
-                <a:defRPr/>
-              </a:pPr>
-              <a:t>‹Nr.›</a:t>
-            </a:fld>
-            <a:endParaRPr lang="de-DE" altLang="de-DE" dirty="0"/>
-          </a:p>
-        </p:txBody>
-      </p:sp>
-    </p:spTree>
-    <p:extLst>
-      <p:ext uri="{BB962C8B-B14F-4D97-AF65-F5344CB8AC3E}">
-        <p14:creationId xmlns:p14="http://schemas.microsoft.com/office/powerpoint/2010/main" val="1776048126"/>
-      </p:ext>
-    </p:extLst>
-  </p:cSld>
-  <p:clrMapOvr>
-    <a:masterClrMapping/>
-  </p:clrMapOvr>
-</p:sldLayout>
-</file>
-
-<file path=ppt/slideLayouts/slideLayout3.xml><?xml version="1.0" encoding="utf-8"?>
-<p:sldLayout xmlns:a="http://schemas.openxmlformats.org/drawingml/2006/main" xmlns:r="http://schemas.openxmlformats.org/officeDocument/2006/relationships" xmlns:p="http://schemas.openxmlformats.org/presentationml/2006/main" type="secHead" preserve="1">
-  <p:cSld name="Abschnittsüberschrift">
-    <p:spTree>
-      <p:nvGrpSpPr>
-        <p:cNvPr id="1" name=""/>
-        <p:cNvGrpSpPr/>
-        <p:nvPr/>
-      </p:nvGrpSpPr>
-      <p:grpSpPr>
-        <a:xfrm>
-          <a:off x="0" y="0"/>
-          <a:ext cx="0" cy="0"/>
-          <a:chOff x="0" y="0"/>
-          <a:chExt cx="0" cy="0"/>
-        </a:xfrm>
-      </p:grpSpPr>
-      <p:sp>
-        <p:nvSpPr>
-          <p:cNvPr id="2" name="Titel 1"/>
-          <p:cNvSpPr>
-            <a:spLocks noGrp="1"/>
-          </p:cNvSpPr>
-          <p:nvPr>
-            <p:ph type="title"/>
-          </p:nvPr>
-        </p:nvSpPr>
-        <p:spPr>
-          <a:xfrm>
-            <a:off x="963084" y="4406901"/>
-            <a:ext cx="10363200" cy="1362075"/>
-          </a:xfrm>
-        </p:spPr>
-        <p:txBody>
-          <a:bodyPr/>
-          <a:lstStyle>
-            <a:lvl1pPr algn="l">
-              <a:defRPr sz="4000" b="1" cap="all"/>
-            </a:lvl1pPr>
-          </a:lstStyle>
-          <a:p>
-            <a:r>
-              <a:rPr lang="de-DE"/>
-              <a:t>Mastertitelformat bearbeiten</a:t>
-            </a:r>
-            <a:endParaRPr lang="de-DE" dirty="0"/>
-          </a:p>
-        </p:txBody>
-      </p:sp>
-      <p:sp>
-        <p:nvSpPr>
-          <p:cNvPr id="3" name="Textplatzhalter 2"/>
-          <p:cNvSpPr>
-            <a:spLocks noGrp="1"/>
-          </p:cNvSpPr>
-          <p:nvPr>
-            <p:ph type="body" idx="1"/>
-          </p:nvPr>
-        </p:nvSpPr>
-        <p:spPr>
-          <a:xfrm>
-            <a:off x="963084" y="2906713"/>
-            <a:ext cx="10363200" cy="1500187"/>
-          </a:xfrm>
-        </p:spPr>
-        <p:txBody>
-          <a:bodyPr anchor="b"/>
-          <a:lstStyle>
-            <a:lvl1pPr marL="0" indent="0">
-              <a:buNone/>
-              <a:defRPr sz="2000"/>
-            </a:lvl1pPr>
-            <a:lvl2pPr marL="457200" indent="0">
-              <a:buNone/>
-              <a:defRPr sz="1800"/>
-            </a:lvl2pPr>
-            <a:lvl3pPr marL="914400" indent="0">
-              <a:buNone/>
-              <a:defRPr sz="1600"/>
-            </a:lvl3pPr>
-            <a:lvl4pPr marL="1371600" indent="0">
-              <a:buNone/>
-              <a:defRPr sz="1400"/>
-            </a:lvl4pPr>
-            <a:lvl5pPr marL="1828800" indent="0">
-              <a:buNone/>
-              <a:defRPr sz="1400"/>
-            </a:lvl5pPr>
-            <a:lvl6pPr marL="2286000" indent="0">
-              <a:buNone/>
-              <a:defRPr sz="1400"/>
-            </a:lvl6pPr>
-            <a:lvl7pPr marL="2743200" indent="0">
-              <a:buNone/>
-              <a:defRPr sz="1400"/>
-            </a:lvl7pPr>
-            <a:lvl8pPr marL="3200400" indent="0">
-              <a:buNone/>
-              <a:defRPr sz="1400"/>
-            </a:lvl8pPr>
-            <a:lvl9pPr marL="3657600" indent="0">
-              <a:buNone/>
-              <a:defRPr sz="1400"/>
-            </a:lvl9pPr>
-          </a:lstStyle>
-          <a:p>
-            <a:pPr lvl="0"/>
-            <a:r>
-              <a:rPr lang="de-DE"/>
-              <a:t>Mastertextformat bearbeiten</a:t>
-            </a:r>
-          </a:p>
-        </p:txBody>
-      </p:sp>
-      <p:sp>
-        <p:nvSpPr>
-          <p:cNvPr id="4" name="Rectangle 6">
-            <a:extLst>
-              <a:ext uri="{FF2B5EF4-FFF2-40B4-BE49-F238E27FC236}">
-                <a16:creationId xmlns:a16="http://schemas.microsoft.com/office/drawing/2014/main" id="{1E2EDF3A-9325-1B45-8BEF-BAD58BAD3312}"/>
-              </a:ext>
-            </a:extLst>
-          </p:cNvPr>
-          <p:cNvSpPr>
-            <a:spLocks noGrp="1" noChangeArrowheads="1"/>
-          </p:cNvSpPr>
-          <p:nvPr>
-            <p:ph type="sldNum" sz="quarter" idx="10"/>
-          </p:nvPr>
-        </p:nvSpPr>
-        <p:spPr>
-          <a:ln/>
-        </p:spPr>
-        <p:txBody>
-          <a:bodyPr/>
-          <a:lstStyle>
-            <a:lvl1pPr>
-              <a:defRPr/>
-            </a:lvl1pPr>
-          </a:lstStyle>
-          <a:p>
-            <a:pPr>
-              <a:defRPr/>
-            </a:pPr>
-            <a:fld id="{F045649C-264A-4E4C-9902-AA3F818819D1}" type="slidenum">
-              <a:rPr lang="de-DE" altLang="de-DE"/>
-              <a:pPr>
-                <a:defRPr/>
-              </a:pPr>
-              <a:t>‹Nr.›</a:t>
-            </a:fld>
-            <a:endParaRPr lang="de-DE" altLang="de-DE" dirty="0"/>
-          </a:p>
-        </p:txBody>
-      </p:sp>
-    </p:spTree>
-    <p:extLst>
-      <p:ext uri="{BB962C8B-B14F-4D97-AF65-F5344CB8AC3E}">
-        <p14:creationId xmlns:p14="http://schemas.microsoft.com/office/powerpoint/2010/main" val="628024090"/>
-      </p:ext>
-    </p:extLst>
-  </p:cSld>
-  <p:clrMapOvr>
-    <a:masterClrMapping/>
-  </p:clrMapOvr>
-</p:sldLayout>
-</file>
-
-<file path=ppt/slideLayouts/slideLayout4.xml><?xml version="1.0" encoding="utf-8"?>
-<p:sldLayout xmlns:a="http://schemas.openxmlformats.org/drawingml/2006/main" xmlns:r="http://schemas.openxmlformats.org/officeDocument/2006/relationships" xmlns:p="http://schemas.openxmlformats.org/presentationml/2006/main" type="twoObj" preserve="1">
-  <p:cSld name="Zwei Inhalte">
-    <p:spTree>
-      <p:nvGrpSpPr>
-        <p:cNvPr id="1" name=""/>
-        <p:cNvGrpSpPr/>
-        <p:nvPr/>
-      </p:nvGrpSpPr>
-      <p:grpSpPr>
-        <a:xfrm>
-          <a:off x="0" y="0"/>
-          <a:ext cx="0" cy="0"/>
-          <a:chOff x="0" y="0"/>
-          <a:chExt cx="0" cy="0"/>
-        </a:xfrm>
-      </p:grpSpPr>
-      <p:sp>
-        <p:nvSpPr>
-          <p:cNvPr id="2" name="Titel 1"/>
-          <p:cNvSpPr>
-            <a:spLocks noGrp="1"/>
-          </p:cNvSpPr>
-          <p:nvPr>
-            <p:ph type="title"/>
-          </p:nvPr>
-        </p:nvSpPr>
-        <p:spPr/>
-        <p:txBody>
-          <a:bodyPr/>
-          <a:lstStyle/>
-          <a:p>
-            <a:r>
-              <a:rPr lang="de-DE"/>
-              <a:t>Mastertitelformat bearbeiten</a:t>
-            </a:r>
-          </a:p>
-        </p:txBody>
-      </p:sp>
-      <p:sp>
-        <p:nvSpPr>
-          <p:cNvPr id="3" name="Inhaltsplatzhalter 2"/>
-          <p:cNvSpPr>
-            <a:spLocks noGrp="1"/>
-          </p:cNvSpPr>
-          <p:nvPr>
-            <p:ph sz="half" idx="1"/>
-          </p:nvPr>
-        </p:nvSpPr>
-        <p:spPr>
-          <a:xfrm>
-            <a:off x="914400" y="1981200"/>
-            <a:ext cx="5232400" cy="4114800"/>
-          </a:xfrm>
-        </p:spPr>
-        <p:txBody>
-          <a:bodyPr/>
-          <a:lstStyle>
-            <a:lvl1pPr>
-              <a:defRPr sz="2400"/>
-            </a:lvl1pPr>
-            <a:lvl2pPr>
-              <a:defRPr sz="2000"/>
-            </a:lvl2pPr>
-            <a:lvl3pPr>
-              <a:defRPr sz="1800"/>
-            </a:lvl3pPr>
-            <a:lvl4pPr>
-              <a:defRPr sz="1600"/>
-            </a:lvl4pPr>
-            <a:lvl5pPr>
-              <a:defRPr sz="1600"/>
-            </a:lvl5pPr>
-            <a:lvl6pPr>
-              <a:defRPr sz="1800"/>
-            </a:lvl6pPr>
-            <a:lvl7pPr>
-              <a:defRPr sz="1800"/>
-            </a:lvl7pPr>
-            <a:lvl8pPr>
-              <a:defRPr sz="1800"/>
-            </a:lvl8pPr>
-            <a:lvl9pPr>
-              <a:defRPr sz="1800"/>
-            </a:lvl9pPr>
-          </a:lstStyle>
-          <a:p>
-            <a:pPr lvl="0"/>
-            <a:r>
-              <a:rPr lang="de-DE"/>
-              <a:t>Mastertextformat bearbeiten</a:t>
-            </a:r>
-          </a:p>
-          <a:p>
-            <a:pPr lvl="1"/>
-            <a:r>
-              <a:rPr lang="de-DE"/>
-              <a:t>Zweite Ebene</a:t>
-            </a:r>
-          </a:p>
-          <a:p>
-            <a:pPr lvl="2"/>
-            <a:r>
-              <a:rPr lang="de-DE"/>
-              <a:t>Dritte Ebene</a:t>
-            </a:r>
-          </a:p>
-          <a:p>
-            <a:pPr lvl="3"/>
-            <a:r>
-              <a:rPr lang="de-DE"/>
-              <a:t>Vierte Ebene</a:t>
-            </a:r>
-          </a:p>
-          <a:p>
-            <a:pPr lvl="4"/>
-            <a:r>
-              <a:rPr lang="de-DE"/>
-              <a:t>Fünfte Ebene</a:t>
-            </a:r>
-            <a:endParaRPr lang="de-DE" dirty="0"/>
-          </a:p>
-        </p:txBody>
-      </p:sp>
-      <p:sp>
-        <p:nvSpPr>
-          <p:cNvPr id="4" name="Inhaltsplatzhalter 3"/>
-          <p:cNvSpPr>
-            <a:spLocks noGrp="1"/>
-          </p:cNvSpPr>
-          <p:nvPr>
-            <p:ph sz="half" idx="2"/>
-          </p:nvPr>
-        </p:nvSpPr>
-        <p:spPr>
-          <a:xfrm>
-            <a:off x="6350000" y="1981200"/>
-            <a:ext cx="5232400" cy="4114800"/>
-          </a:xfrm>
-        </p:spPr>
-        <p:txBody>
-          <a:bodyPr/>
-          <a:lstStyle>
-            <a:lvl1pPr>
-              <a:defRPr sz="2400"/>
-            </a:lvl1pPr>
-            <a:lvl2pPr>
-              <a:defRPr sz="2000"/>
-            </a:lvl2pPr>
-            <a:lvl3pPr>
-              <a:defRPr sz="1800"/>
-            </a:lvl3pPr>
-            <a:lvl4pPr>
-              <a:defRPr sz="1600"/>
-            </a:lvl4pPr>
-            <a:lvl5pPr>
-              <a:defRPr sz="1600"/>
-            </a:lvl5pPr>
-            <a:lvl6pPr>
-              <a:defRPr sz="1800"/>
-            </a:lvl6pPr>
-            <a:lvl7pPr>
-              <a:defRPr sz="1800"/>
-            </a:lvl7pPr>
-            <a:lvl8pPr>
-              <a:defRPr sz="1800"/>
-            </a:lvl8pPr>
-            <a:lvl9pPr>
-              <a:defRPr sz="1800"/>
-            </a:lvl9pPr>
-          </a:lstStyle>
-          <a:p>
-            <a:pPr lvl="0"/>
-            <a:r>
-              <a:rPr lang="de-DE"/>
-              <a:t>Mastertextformat bearbeiten</a:t>
-            </a:r>
-          </a:p>
-          <a:p>
-            <a:pPr lvl="1"/>
-            <a:r>
-              <a:rPr lang="de-DE"/>
-              <a:t>Zweite Ebene</a:t>
-            </a:r>
-          </a:p>
-          <a:p>
-            <a:pPr lvl="2"/>
-            <a:r>
-              <a:rPr lang="de-DE"/>
-              <a:t>Dritte Ebene</a:t>
-            </a:r>
-          </a:p>
-          <a:p>
-            <a:pPr lvl="3"/>
-            <a:r>
-              <a:rPr lang="de-DE"/>
-              <a:t>Vierte Ebene</a:t>
-            </a:r>
-          </a:p>
-          <a:p>
-            <a:pPr lvl="4"/>
-            <a:r>
-              <a:rPr lang="de-DE"/>
-              <a:t>Fünfte Ebene</a:t>
-            </a:r>
-            <a:endParaRPr lang="de-DE" dirty="0"/>
-          </a:p>
-        </p:txBody>
-      </p:sp>
-      <p:sp>
-        <p:nvSpPr>
-          <p:cNvPr id="5" name="Rectangle 6">
-            <a:extLst>
-              <a:ext uri="{FF2B5EF4-FFF2-40B4-BE49-F238E27FC236}">
-                <a16:creationId xmlns:a16="http://schemas.microsoft.com/office/drawing/2014/main" id="{596493AE-D593-6ADB-6030-F4D20E7DFEAC}"/>
-              </a:ext>
-            </a:extLst>
-          </p:cNvPr>
-          <p:cNvSpPr>
-            <a:spLocks noGrp="1" noChangeArrowheads="1"/>
-          </p:cNvSpPr>
-          <p:nvPr>
-            <p:ph type="sldNum" sz="quarter" idx="10"/>
-          </p:nvPr>
-        </p:nvSpPr>
-        <p:spPr>
-          <a:ln/>
-        </p:spPr>
-        <p:txBody>
-          <a:bodyPr/>
-          <a:lstStyle>
-            <a:lvl1pPr>
-              <a:defRPr/>
-            </a:lvl1pPr>
-          </a:lstStyle>
-          <a:p>
-            <a:pPr>
-              <a:defRPr/>
-            </a:pPr>
-            <a:fld id="{76E3D0BF-4D1A-45ED-AD8F-0FD3B3BB66E2}" type="slidenum">
-              <a:rPr lang="de-DE" altLang="de-DE"/>
-              <a:pPr>
-                <a:defRPr/>
-              </a:pPr>
-              <a:t>‹Nr.›</a:t>
-            </a:fld>
-            <a:endParaRPr lang="de-DE" altLang="de-DE" dirty="0"/>
-          </a:p>
-        </p:txBody>
-      </p:sp>
-    </p:spTree>
-    <p:extLst>
-      <p:ext uri="{BB962C8B-B14F-4D97-AF65-F5344CB8AC3E}">
-        <p14:creationId xmlns:p14="http://schemas.microsoft.com/office/powerpoint/2010/main" val="2409252195"/>
-      </p:ext>
-    </p:extLst>
-  </p:cSld>
-  <p:clrMapOvr>
-    <a:masterClrMapping/>
-  </p:clrMapOvr>
-</p:sldLayout>
-</file>
-
-<file path=ppt/slideLayouts/slideLayout5.xml><?xml version="1.0" encoding="utf-8"?>
-<p:sldLayout xmlns:a="http://schemas.openxmlformats.org/drawingml/2006/main" xmlns:r="http://schemas.openxmlformats.org/officeDocument/2006/relationships" xmlns:p="http://schemas.openxmlformats.org/presentationml/2006/main" type="twoTxTwoObj" preserve="1">
-  <p:cSld name="Vergleich">
-    <p:spTree>
-      <p:nvGrpSpPr>
-        <p:cNvPr id="1" name=""/>
-        <p:cNvGrpSpPr/>
-        <p:nvPr/>
-      </p:nvGrpSpPr>
-      <p:grpSpPr>
-        <a:xfrm>
-          <a:off x="0" y="0"/>
-          <a:ext cx="0" cy="0"/>
-          <a:chOff x="0" y="0"/>
-          <a:chExt cx="0" cy="0"/>
-        </a:xfrm>
-      </p:grpSpPr>
-      <p:sp>
-        <p:nvSpPr>
-          <p:cNvPr id="2" name="Titel 1"/>
-          <p:cNvSpPr>
-            <a:spLocks noGrp="1"/>
-          </p:cNvSpPr>
-          <p:nvPr>
-            <p:ph type="title"/>
-          </p:nvPr>
-        </p:nvSpPr>
-        <p:spPr>
-          <a:xfrm>
-            <a:off x="609600" y="274638"/>
-            <a:ext cx="10972800" cy="1143000"/>
-          </a:xfrm>
-        </p:spPr>
-        <p:txBody>
-          <a:bodyPr/>
-          <a:lstStyle>
-            <a:lvl1pPr>
-              <a:defRPr/>
-            </a:lvl1pPr>
-          </a:lstStyle>
-          <a:p>
-            <a:r>
-              <a:rPr lang="de-DE"/>
-              <a:t>Mastertitelformat bearbeiten</a:t>
-            </a:r>
-          </a:p>
-        </p:txBody>
-      </p:sp>
-      <p:sp>
-        <p:nvSpPr>
-          <p:cNvPr id="3" name="Textplatzhalter 2"/>
-          <p:cNvSpPr>
-            <a:spLocks noGrp="1"/>
-          </p:cNvSpPr>
-          <p:nvPr>
-            <p:ph type="body" idx="1"/>
-          </p:nvPr>
-        </p:nvSpPr>
-        <p:spPr>
-          <a:xfrm>
-            <a:off x="609600" y="1535113"/>
-            <a:ext cx="5386917" cy="639762"/>
-          </a:xfrm>
-        </p:spPr>
-        <p:txBody>
-          <a:bodyPr anchor="b"/>
-          <a:lstStyle>
-            <a:lvl1pPr marL="0" indent="0">
-              <a:buNone/>
-              <a:defRPr sz="2400" b="1"/>
-            </a:lvl1pPr>
-            <a:lvl2pPr marL="457200" indent="0">
-              <a:buNone/>
-              <a:defRPr sz="2000" b="1"/>
-            </a:lvl2pPr>
-            <a:lvl3pPr marL="914400" indent="0">
-              <a:buNone/>
-              <a:defRPr sz="1800" b="1"/>
-            </a:lvl3pPr>
-            <a:lvl4pPr marL="1371600" indent="0">
-              <a:buNone/>
-              <a:defRPr sz="1600" b="1"/>
-            </a:lvl4pPr>
-            <a:lvl5pPr marL="1828800" indent="0">
-              <a:buNone/>
-              <a:defRPr sz="1600" b="1"/>
-            </a:lvl5pPr>
-            <a:lvl6pPr marL="2286000" indent="0">
-              <a:buNone/>
-              <a:defRPr sz="1600" b="1"/>
-            </a:lvl6pPr>
-            <a:lvl7pPr marL="2743200" indent="0">
-              <a:buNone/>
-              <a:defRPr sz="1600" b="1"/>
-            </a:lvl7pPr>
-            <a:lvl8pPr marL="3200400" indent="0">
-              <a:buNone/>
-              <a:defRPr sz="1600" b="1"/>
-            </a:lvl8pPr>
-            <a:lvl9pPr marL="3657600" indent="0">
-              <a:buNone/>
-              <a:defRPr sz="1600" b="1"/>
-            </a:lvl9pPr>
-          </a:lstStyle>
-          <a:p>
-            <a:pPr lvl="0"/>
-            <a:r>
-              <a:rPr lang="de-DE"/>
-              <a:t>Mastertextformat bearbeiten</a:t>
-            </a:r>
-          </a:p>
-        </p:txBody>
-      </p:sp>
-      <p:sp>
-        <p:nvSpPr>
-          <p:cNvPr id="4" name="Inhaltsplatzhalter 3"/>
-          <p:cNvSpPr>
-            <a:spLocks noGrp="1"/>
-          </p:cNvSpPr>
-          <p:nvPr>
-            <p:ph sz="half" idx="2"/>
-          </p:nvPr>
-        </p:nvSpPr>
-        <p:spPr>
-          <a:xfrm>
-            <a:off x="609600" y="2174875"/>
-            <a:ext cx="5386917" cy="3951288"/>
-          </a:xfrm>
-        </p:spPr>
-        <p:txBody>
-          <a:bodyPr/>
-          <a:lstStyle>
-            <a:lvl1pPr>
-              <a:defRPr sz="2400"/>
-            </a:lvl1pPr>
-            <a:lvl2pPr>
-              <a:defRPr sz="2000"/>
-            </a:lvl2pPr>
-            <a:lvl3pPr>
-              <a:defRPr sz="1800"/>
-            </a:lvl3pPr>
-            <a:lvl4pPr>
-              <a:defRPr sz="1600"/>
-            </a:lvl4pPr>
-            <a:lvl5pPr>
-              <a:defRPr sz="1600"/>
-            </a:lvl5pPr>
-            <a:lvl6pPr>
-              <a:defRPr sz="1600"/>
-            </a:lvl6pPr>
-            <a:lvl7pPr>
-              <a:defRPr sz="1600"/>
-            </a:lvl7pPr>
-            <a:lvl8pPr>
-              <a:defRPr sz="1600"/>
-            </a:lvl8pPr>
-            <a:lvl9pPr>
-              <a:defRPr sz="1600"/>
-            </a:lvl9pPr>
-          </a:lstStyle>
-          <a:p>
-            <a:pPr lvl="0"/>
-            <a:r>
-              <a:rPr lang="de-DE"/>
-              <a:t>Mastertextformat bearbeiten</a:t>
-            </a:r>
-          </a:p>
-          <a:p>
-            <a:pPr lvl="1"/>
-            <a:r>
-              <a:rPr lang="de-DE"/>
-              <a:t>Zweite Ebene</a:t>
-            </a:r>
-          </a:p>
-          <a:p>
-            <a:pPr lvl="2"/>
-            <a:r>
-              <a:rPr lang="de-DE"/>
-              <a:t>Dritte Ebene</a:t>
-            </a:r>
-          </a:p>
-          <a:p>
-            <a:pPr lvl="3"/>
-            <a:r>
-              <a:rPr lang="de-DE"/>
-              <a:t>Vierte Ebene</a:t>
-            </a:r>
-          </a:p>
-          <a:p>
-            <a:pPr lvl="4"/>
-            <a:r>
-              <a:rPr lang="de-DE"/>
-              <a:t>Fünfte Ebene</a:t>
-            </a:r>
-            <a:endParaRPr lang="de-DE" dirty="0"/>
-          </a:p>
-        </p:txBody>
-      </p:sp>
-      <p:sp>
-        <p:nvSpPr>
-          <p:cNvPr id="5" name="Textplatzhalter 4"/>
-          <p:cNvSpPr>
-            <a:spLocks noGrp="1"/>
-          </p:cNvSpPr>
-          <p:nvPr>
-            <p:ph type="body" sz="quarter" idx="3"/>
-          </p:nvPr>
-        </p:nvSpPr>
-        <p:spPr>
-          <a:xfrm>
-            <a:off x="6193368" y="1535113"/>
-            <a:ext cx="5389033" cy="639762"/>
-          </a:xfrm>
-        </p:spPr>
-        <p:txBody>
-          <a:bodyPr anchor="b"/>
-          <a:lstStyle>
-            <a:lvl1pPr marL="0" indent="0">
-              <a:buNone/>
-              <a:defRPr sz="2400" b="1"/>
-            </a:lvl1pPr>
-            <a:lvl2pPr marL="457200" indent="0">
-              <a:buNone/>
-              <a:defRPr sz="2000" b="1"/>
-            </a:lvl2pPr>
-            <a:lvl3pPr marL="914400" indent="0">
-              <a:buNone/>
-              <a:defRPr sz="1800" b="1"/>
-            </a:lvl3pPr>
-            <a:lvl4pPr marL="1371600" indent="0">
-              <a:buNone/>
-              <a:defRPr sz="1600" b="1"/>
-            </a:lvl4pPr>
-            <a:lvl5pPr marL="1828800" indent="0">
-              <a:buNone/>
-              <a:defRPr sz="1600" b="1"/>
-            </a:lvl5pPr>
-            <a:lvl6pPr marL="2286000" indent="0">
-              <a:buNone/>
-              <a:defRPr sz="1600" b="1"/>
-            </a:lvl6pPr>
-            <a:lvl7pPr marL="2743200" indent="0">
-              <a:buNone/>
-              <a:defRPr sz="1600" b="1"/>
-            </a:lvl7pPr>
-            <a:lvl8pPr marL="3200400" indent="0">
-              <a:buNone/>
-              <a:defRPr sz="1600" b="1"/>
-            </a:lvl8pPr>
-            <a:lvl9pPr marL="3657600" indent="0">
-              <a:buNone/>
-              <a:defRPr sz="1600" b="1"/>
-            </a:lvl9pPr>
-          </a:lstStyle>
-          <a:p>
-            <a:pPr lvl="0"/>
-            <a:r>
-              <a:rPr lang="de-DE"/>
-              <a:t>Mastertextformat bearbeiten</a:t>
-            </a:r>
-          </a:p>
-        </p:txBody>
-      </p:sp>
-      <p:sp>
-        <p:nvSpPr>
-          <p:cNvPr id="6" name="Inhaltsplatzhalter 5"/>
-          <p:cNvSpPr>
-            <a:spLocks noGrp="1"/>
-          </p:cNvSpPr>
-          <p:nvPr>
-            <p:ph sz="quarter" idx="4"/>
-          </p:nvPr>
-        </p:nvSpPr>
-        <p:spPr>
-          <a:xfrm>
-            <a:off x="6193368" y="2174875"/>
-            <a:ext cx="5389033" cy="3951288"/>
-          </a:xfrm>
-        </p:spPr>
-        <p:txBody>
-          <a:bodyPr/>
-          <a:lstStyle>
-            <a:lvl1pPr>
-              <a:defRPr sz="2400"/>
-            </a:lvl1pPr>
-            <a:lvl2pPr>
-              <a:defRPr sz="2000"/>
-            </a:lvl2pPr>
-            <a:lvl3pPr>
-              <a:defRPr sz="1800"/>
-            </a:lvl3pPr>
-            <a:lvl4pPr>
-              <a:defRPr sz="1600"/>
-            </a:lvl4pPr>
-            <a:lvl5pPr>
-              <a:defRPr sz="1600"/>
-            </a:lvl5pPr>
-            <a:lvl6pPr>
-              <a:defRPr sz="1600"/>
-            </a:lvl6pPr>
-            <a:lvl7pPr>
-              <a:defRPr sz="1600"/>
-            </a:lvl7pPr>
-            <a:lvl8pPr>
-              <a:defRPr sz="1600"/>
-            </a:lvl8pPr>
-            <a:lvl9pPr>
-              <a:defRPr sz="1600"/>
-            </a:lvl9pPr>
-          </a:lstStyle>
-          <a:p>
-            <a:pPr lvl="0"/>
-            <a:r>
-              <a:rPr lang="de-DE"/>
-              <a:t>Mastertextformat bearbeiten</a:t>
-            </a:r>
-          </a:p>
-          <a:p>
-            <a:pPr lvl="1"/>
-            <a:r>
-              <a:rPr lang="de-DE"/>
-              <a:t>Zweite Ebene</a:t>
-            </a:r>
-          </a:p>
-          <a:p>
-            <a:pPr lvl="2"/>
-            <a:r>
-              <a:rPr lang="de-DE"/>
-              <a:t>Dritte Ebene</a:t>
-            </a:r>
-          </a:p>
-          <a:p>
-            <a:pPr lvl="3"/>
-            <a:r>
-              <a:rPr lang="de-DE"/>
-              <a:t>Vierte Ebene</a:t>
-            </a:r>
-          </a:p>
-          <a:p>
-            <a:pPr lvl="4"/>
-            <a:r>
-              <a:rPr lang="de-DE"/>
-              <a:t>Fünfte Ebene</a:t>
-            </a:r>
-          </a:p>
-        </p:txBody>
-      </p:sp>
-      <p:sp>
-        <p:nvSpPr>
-          <p:cNvPr id="7" name="Rectangle 6">
-            <a:extLst>
-              <a:ext uri="{FF2B5EF4-FFF2-40B4-BE49-F238E27FC236}">
-                <a16:creationId xmlns:a16="http://schemas.microsoft.com/office/drawing/2014/main" id="{903A15AB-4207-F294-7D08-E72DE9340EA7}"/>
-              </a:ext>
-            </a:extLst>
-          </p:cNvPr>
-          <p:cNvSpPr>
-            <a:spLocks noGrp="1" noChangeArrowheads="1"/>
-          </p:cNvSpPr>
-          <p:nvPr>
-            <p:ph type="sldNum" sz="quarter" idx="10"/>
-          </p:nvPr>
-        </p:nvSpPr>
-        <p:spPr>
-          <a:ln/>
-        </p:spPr>
-        <p:txBody>
-          <a:bodyPr/>
-          <a:lstStyle>
-            <a:lvl1pPr>
-              <a:defRPr/>
-            </a:lvl1pPr>
-          </a:lstStyle>
-          <a:p>
-            <a:pPr>
-              <a:defRPr/>
-            </a:pPr>
-            <a:fld id="{ADC79237-C483-4955-AFED-2A4A37FECB46}" type="slidenum">
-              <a:rPr lang="de-DE" altLang="de-DE"/>
-              <a:pPr>
-                <a:defRPr/>
-              </a:pPr>
-              <a:t>‹Nr.›</a:t>
-            </a:fld>
-            <a:endParaRPr lang="de-DE" altLang="de-DE" dirty="0"/>
-          </a:p>
-        </p:txBody>
-      </p:sp>
-    </p:spTree>
-    <p:extLst>
-      <p:ext uri="{BB962C8B-B14F-4D97-AF65-F5344CB8AC3E}">
-        <p14:creationId xmlns:p14="http://schemas.microsoft.com/office/powerpoint/2010/main" val="2800856429"/>
-      </p:ext>
-    </p:extLst>
-  </p:cSld>
-  <p:clrMapOvr>
-    <a:masterClrMapping/>
-  </p:clrMapOvr>
-</p:sldLayout>
-</file>
-
-<file path=ppt/slideLayouts/slideLayout6.xml><?xml version="1.0" encoding="utf-8"?>
-<p:sldLayout xmlns:a="http://schemas.openxmlformats.org/drawingml/2006/main" xmlns:r="http://schemas.openxmlformats.org/officeDocument/2006/relationships" xmlns:p="http://schemas.openxmlformats.org/presentationml/2006/main" type="titleOnly" preserve="1">
-  <p:cSld name="Nur Titel">
-    <p:spTree>
-      <p:nvGrpSpPr>
-        <p:cNvPr id="1" name=""/>
-        <p:cNvGrpSpPr/>
-        <p:nvPr/>
-      </p:nvGrpSpPr>
-      <p:grpSpPr>
-        <a:xfrm>
-          <a:off x="0" y="0"/>
-          <a:ext cx="0" cy="0"/>
-          <a:chOff x="0" y="0"/>
-          <a:chExt cx="0" cy="0"/>
-        </a:xfrm>
-      </p:grpSpPr>
-      <p:sp>
-        <p:nvSpPr>
-          <p:cNvPr id="2" name="Titel 1"/>
-          <p:cNvSpPr>
-            <a:spLocks noGrp="1"/>
-          </p:cNvSpPr>
-          <p:nvPr>
-            <p:ph type="title"/>
-          </p:nvPr>
-        </p:nvSpPr>
-        <p:spPr/>
-        <p:txBody>
-          <a:bodyPr/>
-          <a:lstStyle/>
-          <a:p>
-            <a:r>
-              <a:rPr lang="de-DE"/>
-              <a:t>Mastertitelformat bearbeiten</a:t>
-            </a:r>
-          </a:p>
-        </p:txBody>
-      </p:sp>
-      <p:sp>
-        <p:nvSpPr>
-          <p:cNvPr id="3" name="Rectangle 6">
-            <a:extLst>
-              <a:ext uri="{FF2B5EF4-FFF2-40B4-BE49-F238E27FC236}">
-                <a16:creationId xmlns:a16="http://schemas.microsoft.com/office/drawing/2014/main" id="{B17DEB6D-9627-4A47-CFB5-10285D34D69C}"/>
-              </a:ext>
-            </a:extLst>
-          </p:cNvPr>
-          <p:cNvSpPr>
-            <a:spLocks noGrp="1" noChangeArrowheads="1"/>
-          </p:cNvSpPr>
-          <p:nvPr>
-            <p:ph type="sldNum" sz="quarter" idx="10"/>
-          </p:nvPr>
-        </p:nvSpPr>
-        <p:spPr>
-          <a:ln/>
-        </p:spPr>
-        <p:txBody>
-          <a:bodyPr/>
-          <a:lstStyle>
-            <a:lvl1pPr>
-              <a:defRPr/>
-            </a:lvl1pPr>
-          </a:lstStyle>
-          <a:p>
-            <a:pPr>
-              <a:defRPr/>
-            </a:pPr>
-            <a:fld id="{229E4B4A-732C-499D-9D78-1714C721CB73}" type="slidenum">
-              <a:rPr lang="de-DE" altLang="de-DE"/>
-              <a:pPr>
-                <a:defRPr/>
-              </a:pPr>
-              <a:t>‹Nr.›</a:t>
-            </a:fld>
-            <a:endParaRPr lang="de-DE" altLang="de-DE" dirty="0"/>
-          </a:p>
-        </p:txBody>
-      </p:sp>
-    </p:spTree>
-    <p:extLst>
-      <p:ext uri="{BB962C8B-B14F-4D97-AF65-F5344CB8AC3E}">
-        <p14:creationId xmlns:p14="http://schemas.microsoft.com/office/powerpoint/2010/main" val="2558464020"/>
-      </p:ext>
-    </p:extLst>
-  </p:cSld>
-  <p:clrMapOvr>
-    <a:masterClrMapping/>
-  </p:clrMapOvr>
-</p:sldLayout>
-</file>
-
-<file path=ppt/slideLayouts/slideLayout7.xml><?xml version="1.0" encoding="utf-8"?>
-<p:sldLayout xmlns:a="http://schemas.openxmlformats.org/drawingml/2006/main" xmlns:r="http://schemas.openxmlformats.org/officeDocument/2006/relationships" xmlns:p="http://schemas.openxmlformats.org/presentationml/2006/main" type="blank" preserve="1">
-  <p:cSld name="Leer">
-    <p:spTree>
-      <p:nvGrpSpPr>
-        <p:cNvPr id="1" name=""/>
-        <p:cNvGrpSpPr/>
-        <p:nvPr/>
-      </p:nvGrpSpPr>
-      <p:grpSpPr>
-        <a:xfrm>
-          <a:off x="0" y="0"/>
-          <a:ext cx="0" cy="0"/>
-          <a:chOff x="0" y="0"/>
-          <a:chExt cx="0" cy="0"/>
-        </a:xfrm>
-      </p:grpSpPr>
-      <p:sp>
-        <p:nvSpPr>
-          <p:cNvPr id="2" name="Rectangle 6">
-            <a:extLst>
-              <a:ext uri="{FF2B5EF4-FFF2-40B4-BE49-F238E27FC236}">
-                <a16:creationId xmlns:a16="http://schemas.microsoft.com/office/drawing/2014/main" id="{C880F39A-DC2C-A2A6-0B94-C1E1A2C729C2}"/>
-              </a:ext>
-            </a:extLst>
-          </p:cNvPr>
-          <p:cNvSpPr>
-            <a:spLocks noGrp="1" noChangeArrowheads="1"/>
-          </p:cNvSpPr>
-          <p:nvPr>
-            <p:ph type="sldNum" sz="quarter" idx="10"/>
-          </p:nvPr>
-        </p:nvSpPr>
-        <p:spPr>
-          <a:ln/>
-        </p:spPr>
-        <p:txBody>
-          <a:bodyPr/>
-          <a:lstStyle>
-            <a:lvl1pPr>
-              <a:defRPr/>
-            </a:lvl1pPr>
-          </a:lstStyle>
-          <a:p>
-            <a:pPr>
-              <a:defRPr/>
-            </a:pPr>
-            <a:fld id="{D1BEC67A-447A-45B8-88A0-2BB092BD2204}" type="slidenum">
-              <a:rPr lang="de-DE" altLang="de-DE"/>
-              <a:pPr>
-                <a:defRPr/>
-              </a:pPr>
-              <a:t>‹Nr.›</a:t>
-            </a:fld>
-            <a:endParaRPr lang="de-DE" altLang="de-DE" dirty="0"/>
-          </a:p>
-        </p:txBody>
-      </p:sp>
-    </p:spTree>
-    <p:extLst>
-      <p:ext uri="{BB962C8B-B14F-4D97-AF65-F5344CB8AC3E}">
-        <p14:creationId xmlns:p14="http://schemas.microsoft.com/office/powerpoint/2010/main" val="3795365053"/>
-      </p:ext>
-    </p:extLst>
-  </p:cSld>
-  <p:clrMapOvr>
-    <a:masterClrMapping/>
-  </p:clrMapOvr>
-</p:sldLayout>
-</file>
-
-<file path=ppt/slideLayouts/slideLayout8.xml><?xml version="1.0" encoding="utf-8"?>
-<p:sldLayout xmlns:a="http://schemas.openxmlformats.org/drawingml/2006/main" xmlns:r="http://schemas.openxmlformats.org/officeDocument/2006/relationships" xmlns:p="http://schemas.openxmlformats.org/presentationml/2006/main" preserve="1">
-  <p:cSld name="Inhalt mit Beschriftung">
-    <p:spTree>
-      <p:nvGrpSpPr>
-        <p:cNvPr id="1" name=""/>
-        <p:cNvGrpSpPr/>
-        <p:nvPr/>
-      </p:nvGrpSpPr>
-      <p:grpSpPr>
-        <a:xfrm>
-          <a:off x="0" y="0"/>
-          <a:ext cx="0" cy="0"/>
-          <a:chOff x="0" y="0"/>
-          <a:chExt cx="0" cy="0"/>
-        </a:xfrm>
-      </p:grpSpPr>
-      <p:sp>
-        <p:nvSpPr>
-          <p:cNvPr id="2" name="Titel 1"/>
-          <p:cNvSpPr>
-            <a:spLocks noGrp="1"/>
-          </p:cNvSpPr>
-          <p:nvPr>
-            <p:ph type="title"/>
-          </p:nvPr>
-        </p:nvSpPr>
-        <p:spPr>
-          <a:xfrm>
-            <a:off x="609601" y="273050"/>
-            <a:ext cx="4011084" cy="707678"/>
-          </a:xfrm>
-        </p:spPr>
-        <p:txBody>
-          <a:bodyPr anchor="b"/>
-          <a:lstStyle>
-            <a:lvl1pPr algn="l">
-              <a:defRPr sz="2000" b="1"/>
-            </a:lvl1pPr>
-          </a:lstStyle>
-          <a:p>
-            <a:r>
-              <a:rPr lang="de-DE"/>
-              <a:t>Mastertitelformat bearbeiten</a:t>
-            </a:r>
-          </a:p>
-        </p:txBody>
-      </p:sp>
-      <p:sp>
-        <p:nvSpPr>
-          <p:cNvPr id="3" name="Inhaltsplatzhalter 2"/>
-          <p:cNvSpPr>
-            <a:spLocks noGrp="1"/>
-          </p:cNvSpPr>
-          <p:nvPr>
-            <p:ph idx="1"/>
-          </p:nvPr>
-        </p:nvSpPr>
-        <p:spPr>
-          <a:xfrm>
-            <a:off x="609600" y="1542503"/>
-            <a:ext cx="5486401" cy="4590824"/>
-          </a:xfrm>
-        </p:spPr>
-        <p:txBody>
-          <a:bodyPr/>
-          <a:lstStyle>
-            <a:lvl1pPr>
-              <a:defRPr sz="3200"/>
-            </a:lvl1pPr>
-            <a:lvl2pPr>
-              <a:defRPr sz="2800"/>
-            </a:lvl2pPr>
-            <a:lvl3pPr>
-              <a:defRPr sz="2400"/>
-            </a:lvl3pPr>
-            <a:lvl4pPr>
-              <a:defRPr sz="2000"/>
-            </a:lvl4pPr>
-            <a:lvl5pPr>
-              <a:defRPr sz="2000"/>
-            </a:lvl5pPr>
-            <a:lvl6pPr>
-              <a:defRPr sz="2000"/>
-            </a:lvl6pPr>
-            <a:lvl7pPr>
-              <a:defRPr sz="2000"/>
-            </a:lvl7pPr>
-            <a:lvl8pPr>
-              <a:defRPr sz="2000"/>
-            </a:lvl8pPr>
-            <a:lvl9pPr>
-              <a:defRPr sz="2000"/>
-            </a:lvl9pPr>
-          </a:lstStyle>
-          <a:p>
-            <a:pPr lvl="0"/>
-            <a:r>
-              <a:rPr lang="de-DE"/>
-              <a:t>Mastertextformat bearbeiten</a:t>
-            </a:r>
-          </a:p>
-          <a:p>
-            <a:pPr lvl="1"/>
-            <a:r>
-              <a:rPr lang="de-DE"/>
-              <a:t>Zweite Ebene</a:t>
-            </a:r>
-          </a:p>
-          <a:p>
-            <a:pPr lvl="2"/>
-            <a:r>
-              <a:rPr lang="de-DE"/>
-              <a:t>Dritte Ebene</a:t>
-            </a:r>
-          </a:p>
-          <a:p>
-            <a:pPr lvl="3"/>
-            <a:r>
-              <a:rPr lang="de-DE"/>
-              <a:t>Vierte Ebene</a:t>
-            </a:r>
-          </a:p>
-          <a:p>
-            <a:pPr lvl="4"/>
-            <a:r>
-              <a:rPr lang="de-DE"/>
-              <a:t>Fünfte Ebene</a:t>
-            </a:r>
-            <a:endParaRPr lang="de-DE" dirty="0"/>
-          </a:p>
-        </p:txBody>
-      </p:sp>
-      <p:sp>
-        <p:nvSpPr>
-          <p:cNvPr id="4" name="Textplatzhalter 3"/>
-          <p:cNvSpPr>
-            <a:spLocks noGrp="1"/>
-          </p:cNvSpPr>
-          <p:nvPr>
-            <p:ph type="body" sz="half" idx="2"/>
-          </p:nvPr>
-        </p:nvSpPr>
-        <p:spPr>
-          <a:xfrm>
-            <a:off x="609599" y="981599"/>
-            <a:ext cx="4011084" cy="553740"/>
-          </a:xfrm>
-        </p:spPr>
-        <p:txBody>
-          <a:bodyPr/>
-          <a:lstStyle>
-            <a:lvl1pPr marL="0" indent="0">
-              <a:buNone/>
-              <a:defRPr sz="1400"/>
-            </a:lvl1pPr>
-            <a:lvl2pPr marL="457200" indent="0">
-              <a:buNone/>
-              <a:defRPr sz="1200"/>
-            </a:lvl2pPr>
-            <a:lvl3pPr marL="914400" indent="0">
-              <a:buNone/>
-              <a:defRPr sz="1000"/>
-            </a:lvl3pPr>
-            <a:lvl4pPr marL="1371600" indent="0">
-              <a:buNone/>
-              <a:defRPr sz="900"/>
-            </a:lvl4pPr>
-            <a:lvl5pPr marL="1828800" indent="0">
-              <a:buNone/>
-              <a:defRPr sz="900"/>
-            </a:lvl5pPr>
-            <a:lvl6pPr marL="2286000" indent="0">
-              <a:buNone/>
-              <a:defRPr sz="900"/>
-            </a:lvl6pPr>
-            <a:lvl7pPr marL="2743200" indent="0">
-              <a:buNone/>
-              <a:defRPr sz="900"/>
-            </a:lvl7pPr>
-            <a:lvl8pPr marL="3200400" indent="0">
-              <a:buNone/>
-              <a:defRPr sz="900"/>
-            </a:lvl8pPr>
-            <a:lvl9pPr marL="3657600" indent="0">
-              <a:buNone/>
-              <a:defRPr sz="900"/>
-            </a:lvl9pPr>
-          </a:lstStyle>
-          <a:p>
-            <a:pPr lvl="0"/>
-            <a:r>
-              <a:rPr lang="de-DE"/>
-              <a:t>Mastertextformat bearbeiten</a:t>
-            </a:r>
-          </a:p>
-        </p:txBody>
-      </p:sp>
-      <p:sp>
-        <p:nvSpPr>
-          <p:cNvPr id="6" name="Inhaltsplatzhalter 2"/>
-          <p:cNvSpPr>
-            <a:spLocks noGrp="1"/>
-          </p:cNvSpPr>
-          <p:nvPr>
-            <p:ph idx="11"/>
-          </p:nvPr>
-        </p:nvSpPr>
-        <p:spPr>
-          <a:xfrm>
-            <a:off x="6096000" y="1542502"/>
-            <a:ext cx="5760639" cy="5152599"/>
-          </a:xfrm>
-        </p:spPr>
-        <p:txBody>
-          <a:bodyPr/>
-          <a:lstStyle>
-            <a:lvl1pPr>
-              <a:defRPr sz="3200"/>
-            </a:lvl1pPr>
-            <a:lvl2pPr>
-              <a:defRPr sz="2800"/>
-            </a:lvl2pPr>
-            <a:lvl3pPr>
-              <a:defRPr sz="2400"/>
-            </a:lvl3pPr>
-            <a:lvl4pPr>
-              <a:defRPr sz="2000"/>
-            </a:lvl4pPr>
-            <a:lvl5pPr>
-              <a:defRPr sz="2000"/>
-            </a:lvl5pPr>
-            <a:lvl6pPr>
-              <a:defRPr sz="2000"/>
-            </a:lvl6pPr>
-            <a:lvl7pPr>
-              <a:defRPr sz="2000"/>
-            </a:lvl7pPr>
-            <a:lvl8pPr>
-              <a:defRPr sz="2000"/>
-            </a:lvl8pPr>
-            <a:lvl9pPr>
-              <a:defRPr sz="2000"/>
-            </a:lvl9pPr>
-          </a:lstStyle>
-          <a:p>
-            <a:pPr lvl="0"/>
-            <a:r>
-              <a:rPr lang="de-DE"/>
-              <a:t>Mastertextformat bearbeiten</a:t>
-            </a:r>
-          </a:p>
-          <a:p>
-            <a:pPr lvl="1"/>
-            <a:r>
-              <a:rPr lang="de-DE"/>
-              <a:t>Zweite Ebene</a:t>
-            </a:r>
-          </a:p>
-          <a:p>
-            <a:pPr lvl="2"/>
-            <a:r>
-              <a:rPr lang="de-DE"/>
-              <a:t>Dritte Ebene</a:t>
-            </a:r>
-          </a:p>
-          <a:p>
-            <a:pPr lvl="3"/>
-            <a:r>
-              <a:rPr lang="de-DE"/>
-              <a:t>Vierte Ebene</a:t>
-            </a:r>
-          </a:p>
-          <a:p>
-            <a:pPr lvl="4"/>
-            <a:r>
-              <a:rPr lang="de-DE"/>
-              <a:t>Fünfte Ebene</a:t>
-            </a:r>
-            <a:endParaRPr lang="de-DE" dirty="0"/>
-          </a:p>
-        </p:txBody>
-      </p:sp>
-    </p:spTree>
-    <p:extLst>
-      <p:ext uri="{BB962C8B-B14F-4D97-AF65-F5344CB8AC3E}">
-        <p14:creationId xmlns:p14="http://schemas.microsoft.com/office/powerpoint/2010/main" val="3433896808"/>
-      </p:ext>
-    </p:extLst>
-  </p:cSld>
-  <p:clrMapOvr>
-    <a:masterClrMapping/>
-  </p:clrMapOvr>
-</p:sldLayout>
-</file>
-
-<file path=ppt/slideLayouts/slideLayout9.xml><?xml version="1.0" encoding="utf-8"?>
-<p:sldLayout xmlns:a="http://schemas.openxmlformats.org/drawingml/2006/main" xmlns:r="http://schemas.openxmlformats.org/officeDocument/2006/relationships" xmlns:p="http://schemas.openxmlformats.org/presentationml/2006/main" type="picTx" preserve="1">
-  <p:cSld name="Bild mit Beschriftung">
-    <p:spTree>
-      <p:nvGrpSpPr>
-        <p:cNvPr id="1" name=""/>
-        <p:cNvGrpSpPr/>
-        <p:nvPr/>
-      </p:nvGrpSpPr>
-      <p:grpSpPr>
-        <a:xfrm>
-          <a:off x="0" y="0"/>
-          <a:ext cx="0" cy="0"/>
-          <a:chOff x="0" y="0"/>
-          <a:chExt cx="0" cy="0"/>
-        </a:xfrm>
-      </p:grpSpPr>
-      <p:sp>
-        <p:nvSpPr>
-          <p:cNvPr id="2" name="Titel 1"/>
-          <p:cNvSpPr>
-            <a:spLocks noGrp="1"/>
-          </p:cNvSpPr>
-          <p:nvPr>
-            <p:ph type="title"/>
-          </p:nvPr>
-        </p:nvSpPr>
-        <p:spPr>
-          <a:xfrm>
-            <a:off x="2389717" y="4800600"/>
-            <a:ext cx="7315200" cy="566738"/>
-          </a:xfrm>
-        </p:spPr>
-        <p:txBody>
-          <a:bodyPr anchor="b"/>
-          <a:lstStyle>
-            <a:lvl1pPr algn="l">
-              <a:defRPr sz="2000" b="1"/>
-            </a:lvl1pPr>
-          </a:lstStyle>
-          <a:p>
-            <a:r>
-              <a:rPr lang="de-DE"/>
-              <a:t>Mastertitelformat bearbeiten</a:t>
-            </a:r>
-          </a:p>
-        </p:txBody>
-      </p:sp>
-      <p:sp>
-        <p:nvSpPr>
-          <p:cNvPr id="3" name="Bildplatzhalter 2"/>
-          <p:cNvSpPr>
-            <a:spLocks noGrp="1"/>
-          </p:cNvSpPr>
-          <p:nvPr>
-            <p:ph type="pic" idx="1"/>
-          </p:nvPr>
-        </p:nvSpPr>
-        <p:spPr>
-          <a:xfrm>
-            <a:off x="2389717" y="612775"/>
-            <a:ext cx="7315200" cy="4114800"/>
-          </a:xfrm>
-        </p:spPr>
-        <p:txBody>
-          <a:bodyPr/>
-          <a:lstStyle>
-            <a:lvl1pPr marL="0" indent="0">
-              <a:buNone/>
-              <a:defRPr sz="3200"/>
-            </a:lvl1pPr>
-            <a:lvl2pPr marL="457200" indent="0">
-              <a:buNone/>
-              <a:defRPr sz="2800"/>
-            </a:lvl2pPr>
-            <a:lvl3pPr marL="914400" indent="0">
-              <a:buNone/>
-              <a:defRPr sz="2400"/>
-            </a:lvl3pPr>
-            <a:lvl4pPr marL="1371600" indent="0">
-              <a:buNone/>
-              <a:defRPr sz="2000"/>
-            </a:lvl4pPr>
-            <a:lvl5pPr marL="1828800" indent="0">
-              <a:buNone/>
-              <a:defRPr sz="2000"/>
-            </a:lvl5pPr>
-            <a:lvl6pPr marL="2286000" indent="0">
-              <a:buNone/>
-              <a:defRPr sz="2000"/>
-            </a:lvl6pPr>
-            <a:lvl7pPr marL="2743200" indent="0">
-              <a:buNone/>
-              <a:defRPr sz="2000"/>
-            </a:lvl7pPr>
-            <a:lvl8pPr marL="3200400" indent="0">
-              <a:buNone/>
-              <a:defRPr sz="2000"/>
-            </a:lvl8pPr>
-            <a:lvl9pPr marL="3657600" indent="0">
-              <a:buNone/>
-              <a:defRPr sz="2000"/>
-            </a:lvl9pPr>
-          </a:lstStyle>
-          <a:p>
-            <a:pPr lvl="0"/>
-            <a:r>
-              <a:rPr lang="de-DE" noProof="0"/>
-              <a:t>Bild durch Klicken auf Symbol hinzufügen</a:t>
-            </a:r>
-            <a:endParaRPr lang="de-DE" noProof="0" dirty="0"/>
-          </a:p>
-        </p:txBody>
-      </p:sp>
-      <p:sp>
-        <p:nvSpPr>
-          <p:cNvPr id="4" name="Textplatzhalter 3"/>
-          <p:cNvSpPr>
-            <a:spLocks noGrp="1"/>
-          </p:cNvSpPr>
-          <p:nvPr>
-            <p:ph type="body" sz="half" idx="2"/>
-          </p:nvPr>
-        </p:nvSpPr>
-        <p:spPr>
-          <a:xfrm>
-            <a:off x="2389717" y="5367338"/>
-            <a:ext cx="7315200" cy="804862"/>
-          </a:xfrm>
-        </p:spPr>
-        <p:txBody>
-          <a:bodyPr/>
-          <a:lstStyle>
-            <a:lvl1pPr marL="0" indent="0">
-              <a:buNone/>
-              <a:defRPr sz="1400"/>
-            </a:lvl1pPr>
-            <a:lvl2pPr marL="457200" indent="0">
-              <a:buNone/>
-              <a:defRPr sz="1200"/>
-            </a:lvl2pPr>
-            <a:lvl3pPr marL="914400" indent="0">
-              <a:buNone/>
-              <a:defRPr sz="1000"/>
-            </a:lvl3pPr>
-            <a:lvl4pPr marL="1371600" indent="0">
-              <a:buNone/>
-              <a:defRPr sz="900"/>
-            </a:lvl4pPr>
-            <a:lvl5pPr marL="1828800" indent="0">
-              <a:buNone/>
-              <a:defRPr sz="900"/>
-            </a:lvl5pPr>
-            <a:lvl6pPr marL="2286000" indent="0">
-              <a:buNone/>
-              <a:defRPr sz="900"/>
-            </a:lvl6pPr>
-            <a:lvl7pPr marL="2743200" indent="0">
-              <a:buNone/>
-              <a:defRPr sz="900"/>
-            </a:lvl7pPr>
-            <a:lvl8pPr marL="3200400" indent="0">
-              <a:buNone/>
-              <a:defRPr sz="900"/>
-            </a:lvl8pPr>
-            <a:lvl9pPr marL="3657600" indent="0">
-              <a:buNone/>
-              <a:defRPr sz="900"/>
-            </a:lvl9pPr>
-          </a:lstStyle>
-          <a:p>
-            <a:pPr lvl="0"/>
-            <a:r>
-              <a:rPr lang="de-DE"/>
-              <a:t>Mastertextformat bearbeiten</a:t>
-            </a:r>
-          </a:p>
-        </p:txBody>
-      </p:sp>
-      <p:sp>
-        <p:nvSpPr>
-          <p:cNvPr id="5" name="Rectangle 6">
-            <a:extLst>
-              <a:ext uri="{FF2B5EF4-FFF2-40B4-BE49-F238E27FC236}">
-                <a16:creationId xmlns:a16="http://schemas.microsoft.com/office/drawing/2014/main" id="{B0BF1845-B872-C207-2FA9-F0CE0DE85508}"/>
-              </a:ext>
-            </a:extLst>
-          </p:cNvPr>
-          <p:cNvSpPr>
-            <a:spLocks noGrp="1" noChangeArrowheads="1"/>
-          </p:cNvSpPr>
-          <p:nvPr>
-            <p:ph type="sldNum" sz="quarter" idx="10"/>
-          </p:nvPr>
-        </p:nvSpPr>
-        <p:spPr>
-          <a:ln/>
-        </p:spPr>
-        <p:txBody>
-          <a:bodyPr/>
-          <a:lstStyle>
-            <a:lvl1pPr>
-              <a:defRPr/>
-            </a:lvl1pPr>
-          </a:lstStyle>
-          <a:p>
-            <a:pPr>
-              <a:defRPr/>
-            </a:pPr>
-            <a:fld id="{A86D8BDE-5646-46B8-8690-93431C932126}" type="slidenum">
-              <a:rPr lang="de-DE" altLang="de-DE"/>
-              <a:pPr>
-                <a:defRPr/>
-              </a:pPr>
-              <a:t>‹Nr.›</a:t>
-            </a:fld>
-            <a:endParaRPr lang="de-DE" altLang="de-DE" dirty="0"/>
-          </a:p>
-        </p:txBody>
-      </p:sp>
-    </p:spTree>
-    <p:extLst>
-      <p:ext uri="{BB962C8B-B14F-4D97-AF65-F5344CB8AC3E}">
-        <p14:creationId xmlns:p14="http://schemas.microsoft.com/office/powerpoint/2010/main" val="3294353936"/>
-      </p:ext>
-    </p:extLst>
-  </p:cSld>
-  <p:clrMapOvr>
-    <a:masterClrMapping/>
-  </p:clrMapOvr>
-</p:sldLayout>
-</file>
-
-<file path=ppt/slideMasters/slideMaster1.xml><?xml version="1.0" encoding="utf-8"?>
-<p:sldMaster xmlns:a="http://schemas.openxmlformats.org/drawingml/2006/main" xmlns:r="http://schemas.openxmlformats.org/officeDocument/2006/relationships" xmlns:p="http://schemas.openxmlformats.org/presentationml/2006/main">
-  <p:cSld>
-    <p:bg>
-      <p:bgPr>
-        <a:solidFill>
-          <a:schemeClr val="bg1"/>
-        </a:solidFill>
-        <a:effectLst/>
-      </p:bgPr>
-    </p:bg>
-    <p:spTree>
-      <p:nvGrpSpPr>
-        <p:cNvPr id="1" name=""/>
-        <p:cNvGrpSpPr/>
-        <p:nvPr/>
-      </p:nvGrpSpPr>
-      <p:grpSpPr>
-        <a:xfrm>
-          <a:off x="0" y="0"/>
-          <a:ext cx="0" cy="0"/>
-          <a:chOff x="0" y="0"/>
-          <a:chExt cx="0" cy="0"/>
-        </a:xfrm>
-      </p:grpSpPr>
-      <p:sp>
-        <p:nvSpPr>
-          <p:cNvPr id="1026" name="Rectangle 2">
-            <a:extLst>
-              <a:ext uri="{FF2B5EF4-FFF2-40B4-BE49-F238E27FC236}">
-                <a16:creationId xmlns:a16="http://schemas.microsoft.com/office/drawing/2014/main" id="{BA723C0C-88A1-F25A-D4A2-7567856B7127}"/>
-              </a:ext>
-            </a:extLst>
-          </p:cNvPr>
-          <p:cNvSpPr>
-            <a:spLocks noGrp="1" noChangeArrowheads="1"/>
-          </p:cNvSpPr>
-          <p:nvPr>
-            <p:ph type="title"/>
-          </p:nvPr>
-        </p:nvSpPr>
-        <p:spPr bwMode="auto">
-          <a:xfrm>
-            <a:off x="914400" y="609600"/>
-            <a:ext cx="6604000" cy="1143000"/>
-          </a:xfrm>
-          <a:prstGeom prst="rect">
-            <a:avLst/>
-          </a:prstGeom>
-          <a:noFill/>
-          <a:ln>
-            <a:noFill/>
-          </a:ln>
-          <a:extLst>
-            <a:ext uri="{909E8E84-426E-40DD-AFC4-6F175D3DCCD1}">
-              <a14:hiddenFill xmlns:a14="http://schemas.microsoft.com/office/drawing/2010/main">
-                <a:solidFill>
-                  <a:srgbClr val="FFFFFF"/>
-                </a:solidFill>
-              </a14:hiddenFill>
-            </a:ext>
-            <a:ext uri="{91240B29-F687-4F45-9708-019B960494DF}">
-              <a14:hiddenLine xmlns:a14="http://schemas.microsoft.com/office/drawing/2010/main" w="9525">
-                <a:solidFill>
-                  <a:srgbClr val="000000"/>
-                </a:solidFill>
-                <a:miter lim="800000"/>
-                <a:headEnd/>
-                <a:tailEnd/>
-              </a14:hiddenLine>
-            </a:ext>
-          </a:extLst>
-        </p:spPr>
-        <p:txBody>
-          <a:bodyPr vert="horz" wrap="square" lIns="91440" tIns="45720" rIns="91440" bIns="45720" numCol="1" anchor="t" anchorCtr="0" compatLnSpc="1">
-            <a:prstTxWarp prst="textNoShape">
-              <a:avLst/>
-            </a:prstTxWarp>
-          </a:bodyPr>
-          <a:lstStyle/>
-          <a:p>
-            <a:pPr lvl="0"/>
-            <a:r>
-              <a:rPr lang="de-DE" altLang="de-DE" dirty="0"/>
-              <a:t>Mastertitelformat bearbeiten</a:t>
-            </a:r>
-          </a:p>
-        </p:txBody>
-      </p:sp>
-      <p:sp>
-        <p:nvSpPr>
-          <p:cNvPr id="1027" name="Rectangle 3">
-            <a:extLst>
-              <a:ext uri="{FF2B5EF4-FFF2-40B4-BE49-F238E27FC236}">
-                <a16:creationId xmlns:a16="http://schemas.microsoft.com/office/drawing/2014/main" id="{0255CE51-F867-6AB4-B806-D37629DC603E}"/>
-              </a:ext>
-            </a:extLst>
-          </p:cNvPr>
-          <p:cNvSpPr>
-            <a:spLocks noGrp="1" noChangeArrowheads="1"/>
-          </p:cNvSpPr>
-          <p:nvPr>
-            <p:ph type="body" idx="1"/>
-          </p:nvPr>
-        </p:nvSpPr>
-        <p:spPr bwMode="auto">
-          <a:xfrm>
-            <a:off x="914400" y="1981200"/>
-            <a:ext cx="10668000" cy="4114800"/>
-          </a:xfrm>
-          <a:prstGeom prst="rect">
-            <a:avLst/>
-          </a:prstGeom>
-          <a:noFill/>
-          <a:ln>
-            <a:noFill/>
-          </a:ln>
-          <a:extLst>
-            <a:ext uri="{909E8E84-426E-40DD-AFC4-6F175D3DCCD1}">
-              <a14:hiddenFill xmlns:a14="http://schemas.microsoft.com/office/drawing/2010/main">
-                <a:solidFill>
-                  <a:srgbClr val="FFFFFF"/>
-                </a:solidFill>
-              </a14:hiddenFill>
-            </a:ext>
-            <a:ext uri="{91240B29-F687-4F45-9708-019B960494DF}">
-              <a14:hiddenLine xmlns:a14="http://schemas.microsoft.com/office/drawing/2010/main" w="9525">
-                <a:solidFill>
-                  <a:srgbClr val="000000"/>
-                </a:solidFill>
-                <a:miter lim="800000"/>
-                <a:headEnd/>
-                <a:tailEnd/>
-              </a14:hiddenLine>
-            </a:ext>
-          </a:extLst>
-        </p:spPr>
-        <p:txBody>
-          <a:bodyPr vert="horz" wrap="square" lIns="91440" tIns="45720" rIns="91440" bIns="45720" numCol="1" anchor="t" anchorCtr="0" compatLnSpc="1">
-            <a:prstTxWarp prst="textNoShape">
-              <a:avLst/>
-            </a:prstTxWarp>
-          </a:bodyPr>
-          <a:lstStyle/>
-          <a:p>
-            <a:pPr lvl="0"/>
-            <a:r>
-              <a:rPr lang="de-DE" altLang="de-DE"/>
-              <a:t>Mastertextformat bearbeiten</a:t>
-            </a:r>
-          </a:p>
-          <a:p>
-            <a:pPr lvl="1"/>
-            <a:r>
-              <a:rPr lang="de-DE" altLang="de-DE"/>
-              <a:t>Zweite Ebene</a:t>
-            </a:r>
-          </a:p>
-          <a:p>
-            <a:pPr lvl="2"/>
-            <a:r>
-              <a:rPr lang="de-DE" altLang="de-DE"/>
-              <a:t>Dritte Ebene</a:t>
-            </a:r>
-          </a:p>
-          <a:p>
-            <a:pPr lvl="3"/>
-            <a:r>
-              <a:rPr lang="de-DE" altLang="de-DE"/>
-              <a:t>Vierte Ebene</a:t>
-            </a:r>
-          </a:p>
-          <a:p>
-            <a:pPr lvl="4"/>
-            <a:r>
-              <a:rPr lang="de-DE" altLang="de-DE"/>
-              <a:t>Fünfte Ebene</a:t>
-            </a:r>
-          </a:p>
-        </p:txBody>
-      </p:sp>
-      <p:sp>
-        <p:nvSpPr>
-          <p:cNvPr id="1030" name="Rectangle 6">
-            <a:extLst>
-              <a:ext uri="{FF2B5EF4-FFF2-40B4-BE49-F238E27FC236}">
-                <a16:creationId xmlns:a16="http://schemas.microsoft.com/office/drawing/2014/main" id="{82E82AB3-F935-9061-40AA-BD4675D5663D}"/>
-              </a:ext>
-            </a:extLst>
-          </p:cNvPr>
-          <p:cNvSpPr>
-            <a:spLocks noGrp="1" noChangeArrowheads="1"/>
-          </p:cNvSpPr>
-          <p:nvPr>
-            <p:ph type="sldNum" sz="quarter" idx="4"/>
-          </p:nvPr>
-        </p:nvSpPr>
-        <p:spPr bwMode="auto">
-          <a:xfrm>
-            <a:off x="9042400" y="6248400"/>
-            <a:ext cx="2540000" cy="457200"/>
-          </a:xfrm>
-          <a:prstGeom prst="rect">
-            <a:avLst/>
-          </a:prstGeom>
-          <a:noFill/>
-          <a:ln w="9525">
-            <a:noFill/>
-            <a:miter lim="800000"/>
-            <a:headEnd/>
-            <a:tailEnd/>
-          </a:ln>
-        </p:spPr>
-        <p:txBody>
-          <a:bodyPr vert="horz" wrap="square" lIns="91440" tIns="45720" rIns="91440" bIns="45720" numCol="1" anchor="t" anchorCtr="0" compatLnSpc="1">
-            <a:prstTxWarp prst="textNoShape">
-              <a:avLst/>
-            </a:prstTxWarp>
-          </a:bodyPr>
-          <a:lstStyle>
-            <a:lvl1pPr algn="r">
-              <a:buFont typeface="Times" panose="02020603050405020304" pitchFamily="18" charset="0"/>
-              <a:buNone/>
-              <a:defRPr sz="1000">
-                <a:solidFill>
-                  <a:srgbClr val="A8CC2F"/>
-                </a:solidFill>
-              </a:defRPr>
-            </a:lvl1pPr>
-          </a:lstStyle>
-          <a:p>
-            <a:pPr>
-              <a:defRPr/>
-            </a:pPr>
-            <a:fld id="{AF7B6FBB-3871-4A64-9491-1B11EE455FFC}" type="slidenum">
-              <a:rPr lang="de-DE" altLang="de-DE"/>
-              <a:pPr>
-                <a:defRPr/>
-              </a:pPr>
-              <a:t>‹Nr.›</a:t>
-            </a:fld>
-            <a:endParaRPr lang="de-DE" altLang="de-DE" dirty="0"/>
-          </a:p>
-        </p:txBody>
-      </p:sp>
       <p:pic>
         <p:nvPicPr>
-          <p:cNvPr id="1029" name="Picture 8" descr="btu_logo_rz_horiz_rgbjpg">
-            <a:extLst>
-              <a:ext uri="{FF2B5EF4-FFF2-40B4-BE49-F238E27FC236}">
-                <a16:creationId xmlns:a16="http://schemas.microsoft.com/office/drawing/2014/main" id="{24F5A3AF-D943-BD2A-8943-FC6AD197ADB6}"/>
-              </a:ext>
-            </a:extLst>
-          </p:cNvPr>
-          <p:cNvPicPr>
-            <a:picLocks noChangeAspect="1" noChangeArrowheads="1"/>
-          </p:cNvPicPr>
+          <p:cNvPr id="2" name="Picture 7">
+            <a:extLst>
+              <a:ext uri="{FF2B5EF4-FFF2-40B4-BE49-F238E27FC236}">
+                <a16:creationId xmlns:a16="http://schemas.microsoft.com/office/drawing/2014/main" id="{B444426F-EB14-AE2B-DE0F-A801F4F81953}"/>
+              </a:ext>
+            </a:extLst>
+          </p:cNvPr>
+          <p:cNvPicPr/>
           <p:nvPr/>
         </p:nvPicPr>
-        <p:blipFill>
-          <a:blip r:embed="rId13">
+        <p:blipFill rotWithShape="1">
+          <a:blip r:embed="rId2">
             <a:extLst>
               <a:ext uri="{28A0092B-C50C-407E-A947-70E740481C1C}">
                 <a14:useLocalDpi xmlns:a14="http://schemas.microsoft.com/office/drawing/2010/main" val="0"/>
               </a:ext>
             </a:extLst>
           </a:blip>
-          <a:srcRect/>
+          <a:srcRect t="24768" b="62769"/>
           <a:stretch>
             <a:fillRect/>
           </a:stretch>
         </p:blipFill>
         <p:spPr bwMode="auto">
           <a:xfrm>
-            <a:off x="8362950" y="404813"/>
-            <a:ext cx="3219450" cy="1104900"/>
+            <a:off x="0" y="1656000"/>
+            <a:ext cx="4038600" cy="3589200"/>
           </a:xfrm>
           <a:prstGeom prst="rect">
             <a:avLst/>
@@ -3466,175 +1393,1834 @@
       </p:pic>
       <p:sp>
         <p:nvSpPr>
-          <p:cNvPr id="6" name="Rectangle 6">
-            <a:extLst>
-              <a:ext uri="{FF2B5EF4-FFF2-40B4-BE49-F238E27FC236}">
-                <a16:creationId xmlns:a16="http://schemas.microsoft.com/office/drawing/2014/main" id="{A329ECA6-616C-D49B-7DA8-B83F69442116}"/>
-              </a:ext>
-            </a:extLst>
-          </p:cNvPr>
-          <p:cNvSpPr>
-            <a:spLocks noGrp="1" noChangeArrowheads="1"/>
-          </p:cNvSpPr>
+          <p:cNvPr id="3" name="Foliennummernplatzhalter 2">
+            <a:extLst>
+              <a:ext uri="{FF2B5EF4-FFF2-40B4-BE49-F238E27FC236}">
+                <a16:creationId xmlns:a16="http://schemas.microsoft.com/office/drawing/2014/main" id="{2B340968-F14F-B3B0-6A1A-48445E11A325}"/>
+              </a:ext>
+            </a:extLst>
+          </p:cNvPr>
+          <p:cNvSpPr>
+            <a:spLocks noGrp="1"/>
+          </p:cNvSpPr>
+          <p:nvPr>
+            <p:ph type="sldNum" sz="quarter" idx="10"/>
+          </p:nvPr>
+        </p:nvSpPr>
+        <p:spPr/>
+        <p:txBody>
+          <a:bodyPr/>
+          <a:lstStyle/>
+          <a:p>
+            <a:fld id="{80B4FCE6-DC73-4135-BC56-1F242D45A84C}" type="slidenum">
+              <a:rPr lang="de-DE" smtClean="0"/>
+              <a:t>‹Nr.›</a:t>
+            </a:fld>
+            <a:endParaRPr lang="de-DE"/>
+          </a:p>
+        </p:txBody>
+      </p:sp>
+      <p:sp>
+        <p:nvSpPr>
+          <p:cNvPr id="4" name="Fußzeilenplatzhalter 3">
+            <a:extLst>
+              <a:ext uri="{FF2B5EF4-FFF2-40B4-BE49-F238E27FC236}">
+                <a16:creationId xmlns:a16="http://schemas.microsoft.com/office/drawing/2014/main" id="{C79F848B-CD57-204F-C247-E348D52A37ED}"/>
+              </a:ext>
+            </a:extLst>
+          </p:cNvPr>
+          <p:cNvSpPr>
+            <a:spLocks noGrp="1"/>
+          </p:cNvSpPr>
+          <p:nvPr>
+            <p:ph type="ftr" sz="quarter" idx="11"/>
+          </p:nvPr>
+        </p:nvSpPr>
+        <p:spPr/>
+        <p:txBody>
+          <a:bodyPr/>
+          <a:lstStyle/>
+          <a:p>
+            <a:r>
+              <a:rPr lang="de-DE"/>
+              <a:t>Materialdiagnostik: Task 2</a:t>
+            </a:r>
+            <a:endParaRPr lang="de-DE" dirty="0"/>
+          </a:p>
+        </p:txBody>
+      </p:sp>
+      <p:sp>
+        <p:nvSpPr>
+          <p:cNvPr id="5" name="Datumsplatzhalter 4">
+            <a:extLst>
+              <a:ext uri="{FF2B5EF4-FFF2-40B4-BE49-F238E27FC236}">
+                <a16:creationId xmlns:a16="http://schemas.microsoft.com/office/drawing/2014/main" id="{135CA77C-97B0-DC89-DE46-9C01C1B748F9}"/>
+              </a:ext>
+            </a:extLst>
+          </p:cNvPr>
+          <p:cNvSpPr>
+            <a:spLocks noGrp="1"/>
+          </p:cNvSpPr>
+          <p:nvPr>
+            <p:ph type="dt" sz="half" idx="12"/>
+          </p:nvPr>
+        </p:nvSpPr>
+        <p:spPr/>
+        <p:txBody>
+          <a:bodyPr/>
+          <a:lstStyle/>
+          <a:p>
+            <a:r>
+              <a:rPr lang="de-DE"/>
+              <a:t>25.06.2026</a:t>
+            </a:r>
+          </a:p>
+        </p:txBody>
+      </p:sp>
+      <p:sp>
+        <p:nvSpPr>
+          <p:cNvPr id="8" name="Titel 1">
+            <a:extLst>
+              <a:ext uri="{FF2B5EF4-FFF2-40B4-BE49-F238E27FC236}">
+                <a16:creationId xmlns:a16="http://schemas.microsoft.com/office/drawing/2014/main" id="{0E28AB7D-ACDC-B820-A518-4C9D6ED03C67}"/>
+              </a:ext>
+            </a:extLst>
+          </p:cNvPr>
+          <p:cNvSpPr>
+            <a:spLocks noGrp="1"/>
+          </p:cNvSpPr>
+          <p:nvPr>
+            <p:ph type="title"/>
+          </p:nvPr>
+        </p:nvSpPr>
+        <p:spPr>
+          <a:xfrm>
+            <a:off x="4665616" y="2716438"/>
+            <a:ext cx="3590109" cy="1444082"/>
+          </a:xfrm>
+          <a:prstGeom prst="rect">
+            <a:avLst/>
+          </a:prstGeom>
+        </p:spPr>
+        <p:txBody>
+          <a:bodyPr anchor="ctr"/>
+          <a:lstStyle>
+            <a:lvl1pPr algn="l">
+              <a:defRPr sz="3200"/>
+            </a:lvl1pPr>
+          </a:lstStyle>
+          <a:p>
+            <a:r>
+              <a:rPr lang="de-DE"/>
+              <a:t>Mastertitelformat bearbeiten</a:t>
+            </a:r>
+          </a:p>
+        </p:txBody>
+      </p:sp>
+    </p:spTree>
+    <p:extLst>
+      <p:ext uri="{BB962C8B-B14F-4D97-AF65-F5344CB8AC3E}">
+        <p14:creationId xmlns:p14="http://schemas.microsoft.com/office/powerpoint/2010/main" val="2408501669"/>
+      </p:ext>
+    </p:extLst>
+  </p:cSld>
+  <p:clrMapOvr>
+    <a:masterClrMapping/>
+  </p:clrMapOvr>
+</p:sldLayout>
+</file>
+
+<file path=ppt/slideLayouts/slideLayout2.xml><?xml version="1.0" encoding="utf-8"?>
+<p:sldLayout xmlns:a="http://schemas.openxmlformats.org/drawingml/2006/main" xmlns:r="http://schemas.openxmlformats.org/officeDocument/2006/relationships" xmlns:p="http://schemas.openxmlformats.org/presentationml/2006/main" preserve="1">
+  <p:cSld name="2_Benutzerdefiniertes Layout">
+    <p:spTree>
+      <p:nvGrpSpPr>
+        <p:cNvPr id="1" name=""/>
+        <p:cNvGrpSpPr/>
+        <p:nvPr/>
+      </p:nvGrpSpPr>
+      <p:grpSpPr>
+        <a:xfrm>
+          <a:off x="0" y="0"/>
+          <a:ext cx="0" cy="0"/>
+          <a:chOff x="0" y="0"/>
+          <a:chExt cx="0" cy="0"/>
+        </a:xfrm>
+      </p:grpSpPr>
+      <p:pic>
+        <p:nvPicPr>
+          <p:cNvPr id="6" name="Picture 7">
+            <a:extLst>
+              <a:ext uri="{FF2B5EF4-FFF2-40B4-BE49-F238E27FC236}">
+                <a16:creationId xmlns:a16="http://schemas.microsoft.com/office/drawing/2014/main" id="{2222C908-A429-7650-ECA8-11037E79FC19}"/>
+              </a:ext>
+            </a:extLst>
+          </p:cNvPr>
+          <p:cNvPicPr/>
           <p:nvPr/>
-        </p:nvSpPr>
+        </p:nvPicPr>
+        <p:blipFill rotWithShape="1">
+          <a:blip r:embed="rId2">
+            <a:extLst>
+              <a:ext uri="{28A0092B-C50C-407E-A947-70E740481C1C}">
+                <a14:useLocalDpi xmlns:a14="http://schemas.microsoft.com/office/drawing/2010/main" val="0"/>
+              </a:ext>
+            </a:extLst>
+          </a:blip>
+          <a:srcRect t="74770" b="12767"/>
+          <a:stretch>
+            <a:fillRect/>
+          </a:stretch>
+        </p:blipFill>
         <p:spPr bwMode="auto">
           <a:xfrm>
-            <a:off x="609600" y="6450496"/>
-            <a:ext cx="6908800" cy="255104"/>
+            <a:off x="0" y="1656000"/>
+            <a:ext cx="4038600" cy="3589200"/>
           </a:xfrm>
           <a:prstGeom prst="rect">
             <a:avLst/>
           </a:prstGeom>
           <a:noFill/>
-          <a:ln w="9525">
+          <a:ln>
             <a:noFill/>
-            <a:miter lim="800000"/>
-            <a:headEnd/>
-            <a:tailEnd/>
           </a:ln>
+          <a:extLst>
+            <a:ext uri="{909E8E84-426E-40DD-AFC4-6F175D3DCCD1}">
+              <a14:hiddenFill xmlns:a14="http://schemas.microsoft.com/office/drawing/2010/main">
+                <a:solidFill>
+                  <a:srgbClr val="FFFFFF"/>
+                </a:solidFill>
+              </a14:hiddenFill>
+            </a:ext>
+            <a:ext uri="{91240B29-F687-4F45-9708-019B960494DF}">
+              <a14:hiddenLine xmlns:a14="http://schemas.microsoft.com/office/drawing/2010/main" w="9525">
+                <a:solidFill>
+                  <a:srgbClr val="000000"/>
+                </a:solidFill>
+                <a:miter lim="800000"/>
+                <a:headEnd/>
+                <a:tailEnd/>
+              </a14:hiddenLine>
+            </a:ext>
+          </a:extLst>
         </p:spPr>
-        <p:txBody>
-          <a:bodyPr/>
+      </p:pic>
+      <p:sp>
+        <p:nvSpPr>
+          <p:cNvPr id="2" name="Titel 1">
+            <a:extLst>
+              <a:ext uri="{FF2B5EF4-FFF2-40B4-BE49-F238E27FC236}">
+                <a16:creationId xmlns:a16="http://schemas.microsoft.com/office/drawing/2014/main" id="{EDCA2648-E994-E6D3-AF41-D6F53E8D59C0}"/>
+              </a:ext>
+            </a:extLst>
+          </p:cNvPr>
+          <p:cNvSpPr>
+            <a:spLocks noGrp="1"/>
+          </p:cNvSpPr>
+          <p:nvPr>
+            <p:ph type="title"/>
+          </p:nvPr>
+        </p:nvSpPr>
+        <p:spPr>
+          <a:xfrm>
+            <a:off x="348342" y="561068"/>
+            <a:ext cx="3590109" cy="712561"/>
+          </a:xfrm>
+          <a:prstGeom prst="rect">
+            <a:avLst/>
+          </a:prstGeom>
+        </p:spPr>
+        <p:txBody>
+          <a:bodyPr anchor="ctr"/>
+          <a:lstStyle>
+            <a:lvl1pPr algn="l">
+              <a:defRPr sz="3200"/>
+            </a:lvl1pPr>
+          </a:lstStyle>
+          <a:p>
+            <a:r>
+              <a:rPr lang="de-DE"/>
+              <a:t>Mastertitelformat bearbeiten</a:t>
+            </a:r>
+          </a:p>
+        </p:txBody>
+      </p:sp>
+      <p:sp>
+        <p:nvSpPr>
+          <p:cNvPr id="3" name="Foliennummernplatzhalter 2">
+            <a:extLst>
+              <a:ext uri="{FF2B5EF4-FFF2-40B4-BE49-F238E27FC236}">
+                <a16:creationId xmlns:a16="http://schemas.microsoft.com/office/drawing/2014/main" id="{BC4125B1-FB93-0A54-C1FC-012CFB2AD8A6}"/>
+              </a:ext>
+            </a:extLst>
+          </p:cNvPr>
+          <p:cNvSpPr>
+            <a:spLocks noGrp="1"/>
+          </p:cNvSpPr>
+          <p:nvPr>
+            <p:ph type="sldNum" sz="quarter" idx="10"/>
+          </p:nvPr>
+        </p:nvSpPr>
+        <p:spPr/>
+        <p:txBody>
+          <a:bodyPr/>
+          <a:lstStyle/>
+          <a:p>
+            <a:fld id="{80B4FCE6-DC73-4135-BC56-1F242D45A84C}" type="slidenum">
+              <a:rPr lang="de-DE" smtClean="0"/>
+              <a:t>‹Nr.›</a:t>
+            </a:fld>
+            <a:endParaRPr lang="de-DE"/>
+          </a:p>
+        </p:txBody>
+      </p:sp>
+      <p:sp>
+        <p:nvSpPr>
+          <p:cNvPr id="4" name="Fußzeilenplatzhalter 3">
+            <a:extLst>
+              <a:ext uri="{FF2B5EF4-FFF2-40B4-BE49-F238E27FC236}">
+                <a16:creationId xmlns:a16="http://schemas.microsoft.com/office/drawing/2014/main" id="{C59775D2-5919-D9B2-1D19-B697C0DC8CFE}"/>
+              </a:ext>
+            </a:extLst>
+          </p:cNvPr>
+          <p:cNvSpPr>
+            <a:spLocks noGrp="1"/>
+          </p:cNvSpPr>
+          <p:nvPr>
+            <p:ph type="ftr" sz="quarter" idx="11"/>
+          </p:nvPr>
+        </p:nvSpPr>
+        <p:spPr/>
+        <p:txBody>
+          <a:bodyPr/>
+          <a:lstStyle/>
+          <a:p>
+            <a:r>
+              <a:rPr lang="de-DE"/>
+              <a:t>Materialdiagnostik: Task 2</a:t>
+            </a:r>
+          </a:p>
+        </p:txBody>
+      </p:sp>
+      <p:sp>
+        <p:nvSpPr>
+          <p:cNvPr id="5" name="Datumsplatzhalter 4">
+            <a:extLst>
+              <a:ext uri="{FF2B5EF4-FFF2-40B4-BE49-F238E27FC236}">
+                <a16:creationId xmlns:a16="http://schemas.microsoft.com/office/drawing/2014/main" id="{1AE38025-E921-C3E6-B686-C475F88CE870}"/>
+              </a:ext>
+            </a:extLst>
+          </p:cNvPr>
+          <p:cNvSpPr>
+            <a:spLocks noGrp="1"/>
+          </p:cNvSpPr>
+          <p:nvPr>
+            <p:ph type="dt" sz="half" idx="12"/>
+          </p:nvPr>
+        </p:nvSpPr>
+        <p:spPr/>
+        <p:txBody>
+          <a:bodyPr/>
+          <a:lstStyle/>
+          <a:p>
+            <a:r>
+              <a:rPr lang="de-DE"/>
+              <a:t>25.06.2026</a:t>
+            </a:r>
+          </a:p>
+        </p:txBody>
+      </p:sp>
+      <p:sp>
+        <p:nvSpPr>
+          <p:cNvPr id="11" name="Textplatzhalter 10">
+            <a:extLst>
+              <a:ext uri="{FF2B5EF4-FFF2-40B4-BE49-F238E27FC236}">
+                <a16:creationId xmlns:a16="http://schemas.microsoft.com/office/drawing/2014/main" id="{7BE556C1-D820-A75A-539E-EEDFD22CDD64}"/>
+              </a:ext>
+            </a:extLst>
+          </p:cNvPr>
+          <p:cNvSpPr>
+            <a:spLocks noGrp="1"/>
+          </p:cNvSpPr>
+          <p:nvPr>
+            <p:ph type="body" sz="quarter" idx="13"/>
+          </p:nvPr>
+        </p:nvSpPr>
+        <p:spPr>
+          <a:xfrm>
+            <a:off x="4672148" y="1620000"/>
+            <a:ext cx="5747658" cy="4330337"/>
+          </a:xfrm>
+          <a:prstGeom prst="rect">
+            <a:avLst/>
+          </a:prstGeom>
+        </p:spPr>
+        <p:txBody>
+          <a:bodyPr/>
+          <a:lstStyle/>
+          <a:p>
+            <a:pPr lvl="0"/>
+            <a:r>
+              <a:rPr lang="de-DE"/>
+              <a:t>Mastertextformat bearbeiten</a:t>
+            </a:r>
+          </a:p>
+          <a:p>
+            <a:pPr lvl="1"/>
+            <a:r>
+              <a:rPr lang="de-DE"/>
+              <a:t>Zweite Ebene</a:t>
+            </a:r>
+          </a:p>
+          <a:p>
+            <a:pPr lvl="2"/>
+            <a:r>
+              <a:rPr lang="de-DE"/>
+              <a:t>Dritte Ebene</a:t>
+            </a:r>
+          </a:p>
+          <a:p>
+            <a:pPr lvl="3"/>
+            <a:r>
+              <a:rPr lang="de-DE"/>
+              <a:t>Vierte Ebene</a:t>
+            </a:r>
+          </a:p>
+          <a:p>
+            <a:pPr lvl="4"/>
+            <a:r>
+              <a:rPr lang="de-DE"/>
+              <a:t>Fünfte Ebene</a:t>
+            </a:r>
+          </a:p>
+        </p:txBody>
+      </p:sp>
+    </p:spTree>
+    <p:extLst>
+      <p:ext uri="{BB962C8B-B14F-4D97-AF65-F5344CB8AC3E}">
+        <p14:creationId xmlns:p14="http://schemas.microsoft.com/office/powerpoint/2010/main" val="2396546321"/>
+      </p:ext>
+    </p:extLst>
+  </p:cSld>
+  <p:clrMapOvr>
+    <a:masterClrMapping/>
+  </p:clrMapOvr>
+</p:sldLayout>
+</file>
+
+<file path=ppt/slideLayouts/slideLayout3.xml><?xml version="1.0" encoding="utf-8"?>
+<p:sldLayout xmlns:a="http://schemas.openxmlformats.org/drawingml/2006/main" xmlns:r="http://schemas.openxmlformats.org/officeDocument/2006/relationships" xmlns:p="http://schemas.openxmlformats.org/presentationml/2006/main" preserve="1">
+  <p:cSld name="3_Benutzerdefiniertes Layout">
+    <p:spTree>
+      <p:nvGrpSpPr>
+        <p:cNvPr id="1" name=""/>
+        <p:cNvGrpSpPr/>
+        <p:nvPr/>
+      </p:nvGrpSpPr>
+      <p:grpSpPr>
+        <a:xfrm>
+          <a:off x="0" y="0"/>
+          <a:ext cx="0" cy="0"/>
+          <a:chOff x="0" y="0"/>
+          <a:chExt cx="0" cy="0"/>
+        </a:xfrm>
+      </p:grpSpPr>
+      <p:sp>
+        <p:nvSpPr>
+          <p:cNvPr id="2" name="Titel 1">
+            <a:extLst>
+              <a:ext uri="{FF2B5EF4-FFF2-40B4-BE49-F238E27FC236}">
+                <a16:creationId xmlns:a16="http://schemas.microsoft.com/office/drawing/2014/main" id="{E68E03C5-7BDA-A77F-7DB0-658C45A5E0C4}"/>
+              </a:ext>
+            </a:extLst>
+          </p:cNvPr>
+          <p:cNvSpPr>
+            <a:spLocks noGrp="1"/>
+          </p:cNvSpPr>
+          <p:nvPr>
+            <p:ph type="title"/>
+          </p:nvPr>
+        </p:nvSpPr>
+        <p:spPr>
+          <a:xfrm>
+            <a:off x="341811" y="567600"/>
+            <a:ext cx="4315098" cy="706030"/>
+          </a:xfrm>
+          <a:prstGeom prst="rect">
+            <a:avLst/>
+          </a:prstGeom>
+        </p:spPr>
+        <p:txBody>
+          <a:bodyPr anchor="ctr"/>
           <a:lstStyle>
             <a:lvl1pPr>
-              <a:defRPr sz="2400">
+              <a:defRPr sz="2400"/>
+            </a:lvl1pPr>
+          </a:lstStyle>
+          <a:p>
+            <a:r>
+              <a:rPr lang="de-DE"/>
+              <a:t>Mastertitelformat bearbeiten</a:t>
+            </a:r>
+          </a:p>
+        </p:txBody>
+      </p:sp>
+      <p:sp>
+        <p:nvSpPr>
+          <p:cNvPr id="3" name="Foliennummernplatzhalter 2">
+            <a:extLst>
+              <a:ext uri="{FF2B5EF4-FFF2-40B4-BE49-F238E27FC236}">
+                <a16:creationId xmlns:a16="http://schemas.microsoft.com/office/drawing/2014/main" id="{2F163DC2-8D97-BB7D-E638-8BCDF8587551}"/>
+              </a:ext>
+            </a:extLst>
+          </p:cNvPr>
+          <p:cNvSpPr>
+            <a:spLocks noGrp="1"/>
+          </p:cNvSpPr>
+          <p:nvPr>
+            <p:ph type="sldNum" sz="quarter" idx="10"/>
+          </p:nvPr>
+        </p:nvSpPr>
+        <p:spPr/>
+        <p:txBody>
+          <a:bodyPr/>
+          <a:lstStyle/>
+          <a:p>
+            <a:fld id="{80B4FCE6-DC73-4135-BC56-1F242D45A84C}" type="slidenum">
+              <a:rPr lang="de-DE" smtClean="0"/>
+              <a:t>‹Nr.›</a:t>
+            </a:fld>
+            <a:endParaRPr lang="de-DE"/>
+          </a:p>
+        </p:txBody>
+      </p:sp>
+      <p:sp>
+        <p:nvSpPr>
+          <p:cNvPr id="4" name="Fußzeilenplatzhalter 3">
+            <a:extLst>
+              <a:ext uri="{FF2B5EF4-FFF2-40B4-BE49-F238E27FC236}">
+                <a16:creationId xmlns:a16="http://schemas.microsoft.com/office/drawing/2014/main" id="{74427F6E-DEF6-9732-439A-15C1079AC98E}"/>
+              </a:ext>
+            </a:extLst>
+          </p:cNvPr>
+          <p:cNvSpPr>
+            <a:spLocks noGrp="1"/>
+          </p:cNvSpPr>
+          <p:nvPr>
+            <p:ph type="ftr" sz="quarter" idx="11"/>
+          </p:nvPr>
+        </p:nvSpPr>
+        <p:spPr/>
+        <p:txBody>
+          <a:bodyPr/>
+          <a:lstStyle/>
+          <a:p>
+            <a:r>
+              <a:rPr lang="de-DE"/>
+              <a:t>Materialdiagnostik: Task 2</a:t>
+            </a:r>
+          </a:p>
+        </p:txBody>
+      </p:sp>
+      <p:sp>
+        <p:nvSpPr>
+          <p:cNvPr id="5" name="Datumsplatzhalter 4">
+            <a:extLst>
+              <a:ext uri="{FF2B5EF4-FFF2-40B4-BE49-F238E27FC236}">
+                <a16:creationId xmlns:a16="http://schemas.microsoft.com/office/drawing/2014/main" id="{9833FDA4-3C0A-D485-A83B-E93F011A19E7}"/>
+              </a:ext>
+            </a:extLst>
+          </p:cNvPr>
+          <p:cNvSpPr>
+            <a:spLocks noGrp="1"/>
+          </p:cNvSpPr>
+          <p:nvPr>
+            <p:ph type="dt" sz="half" idx="12"/>
+          </p:nvPr>
+        </p:nvSpPr>
+        <p:spPr/>
+        <p:txBody>
+          <a:bodyPr/>
+          <a:lstStyle/>
+          <a:p>
+            <a:r>
+              <a:rPr lang="de-DE"/>
+              <a:t>25.06.2026</a:t>
+            </a:r>
+          </a:p>
+        </p:txBody>
+      </p:sp>
+      <p:sp>
+        <p:nvSpPr>
+          <p:cNvPr id="7" name="Inhaltsplatzhalter 6">
+            <a:extLst>
+              <a:ext uri="{FF2B5EF4-FFF2-40B4-BE49-F238E27FC236}">
+                <a16:creationId xmlns:a16="http://schemas.microsoft.com/office/drawing/2014/main" id="{48C9B890-E4BD-AF52-A4AD-7A4FFFB1C674}"/>
+              </a:ext>
+            </a:extLst>
+          </p:cNvPr>
+          <p:cNvSpPr>
+            <a:spLocks noGrp="1"/>
+          </p:cNvSpPr>
+          <p:nvPr>
+            <p:ph sz="quarter" idx="13"/>
+          </p:nvPr>
+        </p:nvSpPr>
+        <p:spPr>
+          <a:xfrm>
+            <a:off x="341313" y="1620000"/>
+            <a:ext cx="5391104" cy="4316412"/>
+          </a:xfrm>
+          <a:prstGeom prst="rect">
+            <a:avLst/>
+          </a:prstGeom>
+        </p:spPr>
+        <p:txBody>
+          <a:bodyPr/>
+          <a:lstStyle/>
+          <a:p>
+            <a:pPr lvl="0"/>
+            <a:r>
+              <a:rPr lang="de-DE"/>
+              <a:t>Mastertextformat bearbeiten</a:t>
+            </a:r>
+          </a:p>
+          <a:p>
+            <a:pPr lvl="1"/>
+            <a:r>
+              <a:rPr lang="de-DE"/>
+              <a:t>Zweite Ebene</a:t>
+            </a:r>
+          </a:p>
+          <a:p>
+            <a:pPr lvl="2"/>
+            <a:r>
+              <a:rPr lang="de-DE"/>
+              <a:t>Dritte Ebene</a:t>
+            </a:r>
+          </a:p>
+          <a:p>
+            <a:pPr lvl="3"/>
+            <a:r>
+              <a:rPr lang="de-DE"/>
+              <a:t>Vierte Ebene</a:t>
+            </a:r>
+          </a:p>
+          <a:p>
+            <a:pPr lvl="4"/>
+            <a:r>
+              <a:rPr lang="de-DE"/>
+              <a:t>Fünfte Ebene</a:t>
+            </a:r>
+          </a:p>
+        </p:txBody>
+      </p:sp>
+      <p:sp>
+        <p:nvSpPr>
+          <p:cNvPr id="8" name="Inhaltsplatzhalter 6">
+            <a:extLst>
+              <a:ext uri="{FF2B5EF4-FFF2-40B4-BE49-F238E27FC236}">
+                <a16:creationId xmlns:a16="http://schemas.microsoft.com/office/drawing/2014/main" id="{9A74469E-8B25-F402-08AE-D6E8658AC6B1}"/>
+              </a:ext>
+            </a:extLst>
+          </p:cNvPr>
+          <p:cNvSpPr>
+            <a:spLocks noGrp="1"/>
+          </p:cNvSpPr>
+          <p:nvPr>
+            <p:ph sz="quarter" idx="14"/>
+          </p:nvPr>
+        </p:nvSpPr>
+        <p:spPr>
+          <a:xfrm>
+            <a:off x="6459584" y="1620000"/>
+            <a:ext cx="5391104" cy="4316412"/>
+          </a:xfrm>
+          <a:prstGeom prst="rect">
+            <a:avLst/>
+          </a:prstGeom>
+        </p:spPr>
+        <p:txBody>
+          <a:bodyPr/>
+          <a:lstStyle/>
+          <a:p>
+            <a:pPr lvl="0"/>
+            <a:r>
+              <a:rPr lang="de-DE"/>
+              <a:t>Mastertextformat bearbeiten</a:t>
+            </a:r>
+          </a:p>
+          <a:p>
+            <a:pPr lvl="1"/>
+            <a:r>
+              <a:rPr lang="de-DE"/>
+              <a:t>Zweite Ebene</a:t>
+            </a:r>
+          </a:p>
+          <a:p>
+            <a:pPr lvl="2"/>
+            <a:r>
+              <a:rPr lang="de-DE"/>
+              <a:t>Dritte Ebene</a:t>
+            </a:r>
+          </a:p>
+          <a:p>
+            <a:pPr lvl="3"/>
+            <a:r>
+              <a:rPr lang="de-DE"/>
+              <a:t>Vierte Ebene</a:t>
+            </a:r>
+          </a:p>
+          <a:p>
+            <a:pPr lvl="4"/>
+            <a:r>
+              <a:rPr lang="de-DE"/>
+              <a:t>Fünfte Ebene</a:t>
+            </a:r>
+          </a:p>
+        </p:txBody>
+      </p:sp>
+    </p:spTree>
+    <p:extLst>
+      <p:ext uri="{BB962C8B-B14F-4D97-AF65-F5344CB8AC3E}">
+        <p14:creationId xmlns:p14="http://schemas.microsoft.com/office/powerpoint/2010/main" val="2718874844"/>
+      </p:ext>
+    </p:extLst>
+  </p:cSld>
+  <p:clrMapOvr>
+    <a:masterClrMapping/>
+  </p:clrMapOvr>
+</p:sldLayout>
+</file>
+
+<file path=ppt/slideLayouts/slideLayout4.xml><?xml version="1.0" encoding="utf-8"?>
+<p:sldLayout xmlns:a="http://schemas.openxmlformats.org/drawingml/2006/main" xmlns:r="http://schemas.openxmlformats.org/officeDocument/2006/relationships" xmlns:p="http://schemas.openxmlformats.org/presentationml/2006/main" preserve="1">
+  <p:cSld name="4_Benutzerdefiniertes Layout">
+    <p:spTree>
+      <p:nvGrpSpPr>
+        <p:cNvPr id="1" name=""/>
+        <p:cNvGrpSpPr/>
+        <p:nvPr/>
+      </p:nvGrpSpPr>
+      <p:grpSpPr>
+        <a:xfrm>
+          <a:off x="0" y="0"/>
+          <a:ext cx="0" cy="0"/>
+          <a:chOff x="0" y="0"/>
+          <a:chExt cx="0" cy="0"/>
+        </a:xfrm>
+      </p:grpSpPr>
+      <p:sp>
+        <p:nvSpPr>
+          <p:cNvPr id="3" name="Foliennummernplatzhalter 2">
+            <a:extLst>
+              <a:ext uri="{FF2B5EF4-FFF2-40B4-BE49-F238E27FC236}">
+                <a16:creationId xmlns:a16="http://schemas.microsoft.com/office/drawing/2014/main" id="{C6044954-ED93-46FB-83FB-4A733E86723E}"/>
+              </a:ext>
+            </a:extLst>
+          </p:cNvPr>
+          <p:cNvSpPr>
+            <a:spLocks noGrp="1"/>
+          </p:cNvSpPr>
+          <p:nvPr>
+            <p:ph type="sldNum" sz="quarter" idx="10"/>
+          </p:nvPr>
+        </p:nvSpPr>
+        <p:spPr/>
+        <p:txBody>
+          <a:bodyPr/>
+          <a:lstStyle/>
+          <a:p>
+            <a:fld id="{80B4FCE6-DC73-4135-BC56-1F242D45A84C}" type="slidenum">
+              <a:rPr lang="de-DE" smtClean="0"/>
+              <a:t>‹Nr.›</a:t>
+            </a:fld>
+            <a:endParaRPr lang="de-DE"/>
+          </a:p>
+        </p:txBody>
+      </p:sp>
+      <p:sp>
+        <p:nvSpPr>
+          <p:cNvPr id="4" name="Fußzeilenplatzhalter 3">
+            <a:extLst>
+              <a:ext uri="{FF2B5EF4-FFF2-40B4-BE49-F238E27FC236}">
+                <a16:creationId xmlns:a16="http://schemas.microsoft.com/office/drawing/2014/main" id="{C6CC6F70-1A0A-8538-A145-259BBA1B332E}"/>
+              </a:ext>
+            </a:extLst>
+          </p:cNvPr>
+          <p:cNvSpPr>
+            <a:spLocks noGrp="1"/>
+          </p:cNvSpPr>
+          <p:nvPr>
+            <p:ph type="ftr" sz="quarter" idx="11"/>
+          </p:nvPr>
+        </p:nvSpPr>
+        <p:spPr/>
+        <p:txBody>
+          <a:bodyPr/>
+          <a:lstStyle/>
+          <a:p>
+            <a:r>
+              <a:rPr lang="de-DE"/>
+              <a:t>Materialdiagnostik: Task 2</a:t>
+            </a:r>
+          </a:p>
+        </p:txBody>
+      </p:sp>
+      <p:sp>
+        <p:nvSpPr>
+          <p:cNvPr id="5" name="Datumsplatzhalter 4">
+            <a:extLst>
+              <a:ext uri="{FF2B5EF4-FFF2-40B4-BE49-F238E27FC236}">
+                <a16:creationId xmlns:a16="http://schemas.microsoft.com/office/drawing/2014/main" id="{4BC4B84F-E88D-95C9-4F2A-678239DD52D5}"/>
+              </a:ext>
+            </a:extLst>
+          </p:cNvPr>
+          <p:cNvSpPr>
+            <a:spLocks noGrp="1"/>
+          </p:cNvSpPr>
+          <p:nvPr>
+            <p:ph type="dt" sz="half" idx="12"/>
+          </p:nvPr>
+        </p:nvSpPr>
+        <p:spPr/>
+        <p:txBody>
+          <a:bodyPr/>
+          <a:lstStyle/>
+          <a:p>
+            <a:r>
+              <a:rPr lang="de-DE"/>
+              <a:t>25.06.2026</a:t>
+            </a:r>
+          </a:p>
+        </p:txBody>
+      </p:sp>
+      <p:sp>
+        <p:nvSpPr>
+          <p:cNvPr id="6" name="Titel 1">
+            <a:extLst>
+              <a:ext uri="{FF2B5EF4-FFF2-40B4-BE49-F238E27FC236}">
+                <a16:creationId xmlns:a16="http://schemas.microsoft.com/office/drawing/2014/main" id="{84ECAC2C-EA91-2538-AA1B-D131492BAE74}"/>
+              </a:ext>
+            </a:extLst>
+          </p:cNvPr>
+          <p:cNvSpPr>
+            <a:spLocks noGrp="1"/>
+          </p:cNvSpPr>
+          <p:nvPr>
+            <p:ph type="title"/>
+          </p:nvPr>
+        </p:nvSpPr>
+        <p:spPr>
+          <a:xfrm>
+            <a:off x="341811" y="567600"/>
+            <a:ext cx="4315098" cy="706030"/>
+          </a:xfrm>
+          <a:prstGeom prst="rect">
+            <a:avLst/>
+          </a:prstGeom>
+        </p:spPr>
+        <p:txBody>
+          <a:bodyPr anchor="ctr"/>
+          <a:lstStyle>
+            <a:lvl1pPr>
+              <a:defRPr sz="2400"/>
+            </a:lvl1pPr>
+          </a:lstStyle>
+          <a:p>
+            <a:r>
+              <a:rPr lang="de-DE"/>
+              <a:t>Mastertitelformat bearbeiten</a:t>
+            </a:r>
+          </a:p>
+        </p:txBody>
+      </p:sp>
+      <p:sp>
+        <p:nvSpPr>
+          <p:cNvPr id="8" name="Diagrammplatzhalter 7">
+            <a:extLst>
+              <a:ext uri="{FF2B5EF4-FFF2-40B4-BE49-F238E27FC236}">
+                <a16:creationId xmlns:a16="http://schemas.microsoft.com/office/drawing/2014/main" id="{8F665CA4-B29F-61A8-C1F7-805E9C9E2AAD}"/>
+              </a:ext>
+            </a:extLst>
+          </p:cNvPr>
+          <p:cNvSpPr>
+            <a:spLocks noGrp="1"/>
+          </p:cNvSpPr>
+          <p:nvPr>
+            <p:ph type="chart" sz="quarter" idx="13"/>
+          </p:nvPr>
+        </p:nvSpPr>
+        <p:spPr>
+          <a:xfrm>
+            <a:off x="342000" y="1620000"/>
+            <a:ext cx="6464300" cy="4357688"/>
+          </a:xfrm>
+          <a:prstGeom prst="rect">
+            <a:avLst/>
+          </a:prstGeom>
+        </p:spPr>
+        <p:txBody>
+          <a:bodyPr/>
+          <a:lstStyle/>
+          <a:p>
+            <a:r>
+              <a:rPr lang="de-DE"/>
+              <a:t>Diagramm durch Klicken auf Symbol hinzufügen</a:t>
+            </a:r>
+          </a:p>
+        </p:txBody>
+      </p:sp>
+      <p:sp>
+        <p:nvSpPr>
+          <p:cNvPr id="10" name="Textplatzhalter 9">
+            <a:extLst>
+              <a:ext uri="{FF2B5EF4-FFF2-40B4-BE49-F238E27FC236}">
+                <a16:creationId xmlns:a16="http://schemas.microsoft.com/office/drawing/2014/main" id="{968CD71D-F381-DDC3-57C8-6E2E31AE9B70}"/>
+              </a:ext>
+            </a:extLst>
+          </p:cNvPr>
+          <p:cNvSpPr>
+            <a:spLocks noGrp="1"/>
+          </p:cNvSpPr>
+          <p:nvPr>
+            <p:ph type="body" sz="quarter" idx="14"/>
+          </p:nvPr>
+        </p:nvSpPr>
+        <p:spPr>
+          <a:xfrm>
+            <a:off x="7537450" y="1619250"/>
+            <a:ext cx="4313238" cy="4357688"/>
+          </a:xfrm>
+          <a:prstGeom prst="rect">
+            <a:avLst/>
+          </a:prstGeom>
+        </p:spPr>
+        <p:txBody>
+          <a:bodyPr/>
+          <a:lstStyle/>
+          <a:p>
+            <a:pPr lvl="0"/>
+            <a:r>
+              <a:rPr lang="de-DE"/>
+              <a:t>Mastertextformat bearbeiten</a:t>
+            </a:r>
+          </a:p>
+          <a:p>
+            <a:pPr lvl="1"/>
+            <a:r>
+              <a:rPr lang="de-DE"/>
+              <a:t>Zweite Ebene</a:t>
+            </a:r>
+          </a:p>
+          <a:p>
+            <a:pPr lvl="2"/>
+            <a:r>
+              <a:rPr lang="de-DE"/>
+              <a:t>Dritte Ebene</a:t>
+            </a:r>
+          </a:p>
+          <a:p>
+            <a:pPr lvl="3"/>
+            <a:r>
+              <a:rPr lang="de-DE"/>
+              <a:t>Vierte Ebene</a:t>
+            </a:r>
+          </a:p>
+          <a:p>
+            <a:pPr lvl="4"/>
+            <a:r>
+              <a:rPr lang="de-DE"/>
+              <a:t>Fünfte Ebene</a:t>
+            </a:r>
+          </a:p>
+        </p:txBody>
+      </p:sp>
+    </p:spTree>
+    <p:extLst>
+      <p:ext uri="{BB962C8B-B14F-4D97-AF65-F5344CB8AC3E}">
+        <p14:creationId xmlns:p14="http://schemas.microsoft.com/office/powerpoint/2010/main" val="1504715510"/>
+      </p:ext>
+    </p:extLst>
+  </p:cSld>
+  <p:clrMapOvr>
+    <a:masterClrMapping/>
+  </p:clrMapOvr>
+</p:sldLayout>
+</file>
+
+<file path=ppt/slideLayouts/slideLayout5.xml><?xml version="1.0" encoding="utf-8"?>
+<p:sldLayout xmlns:a="http://schemas.openxmlformats.org/drawingml/2006/main" xmlns:r="http://schemas.openxmlformats.org/officeDocument/2006/relationships" xmlns:p="http://schemas.openxmlformats.org/presentationml/2006/main" preserve="1">
+  <p:cSld name="5_Benutzerdefiniertes Layout">
+    <p:spTree>
+      <p:nvGrpSpPr>
+        <p:cNvPr id="1" name=""/>
+        <p:cNvGrpSpPr/>
+        <p:nvPr/>
+      </p:nvGrpSpPr>
+      <p:grpSpPr>
+        <a:xfrm>
+          <a:off x="0" y="0"/>
+          <a:ext cx="0" cy="0"/>
+          <a:chOff x="0" y="0"/>
+          <a:chExt cx="0" cy="0"/>
+        </a:xfrm>
+      </p:grpSpPr>
+      <p:sp>
+        <p:nvSpPr>
+          <p:cNvPr id="3" name="Foliennummernplatzhalter 2">
+            <a:extLst>
+              <a:ext uri="{FF2B5EF4-FFF2-40B4-BE49-F238E27FC236}">
+                <a16:creationId xmlns:a16="http://schemas.microsoft.com/office/drawing/2014/main" id="{298C56F7-04DC-07E6-E754-FAEBDCAFD6E5}"/>
+              </a:ext>
+            </a:extLst>
+          </p:cNvPr>
+          <p:cNvSpPr>
+            <a:spLocks noGrp="1"/>
+          </p:cNvSpPr>
+          <p:nvPr>
+            <p:ph type="sldNum" sz="quarter" idx="10"/>
+          </p:nvPr>
+        </p:nvSpPr>
+        <p:spPr/>
+        <p:txBody>
+          <a:bodyPr/>
+          <a:lstStyle/>
+          <a:p>
+            <a:fld id="{80B4FCE6-DC73-4135-BC56-1F242D45A84C}" type="slidenum">
+              <a:rPr lang="de-DE" smtClean="0"/>
+              <a:t>‹Nr.›</a:t>
+            </a:fld>
+            <a:endParaRPr lang="de-DE"/>
+          </a:p>
+        </p:txBody>
+      </p:sp>
+      <p:sp>
+        <p:nvSpPr>
+          <p:cNvPr id="4" name="Fußzeilenplatzhalter 3">
+            <a:extLst>
+              <a:ext uri="{FF2B5EF4-FFF2-40B4-BE49-F238E27FC236}">
+                <a16:creationId xmlns:a16="http://schemas.microsoft.com/office/drawing/2014/main" id="{E5B3395E-75D0-0881-9E63-D45B3C890C78}"/>
+              </a:ext>
+            </a:extLst>
+          </p:cNvPr>
+          <p:cNvSpPr>
+            <a:spLocks noGrp="1"/>
+          </p:cNvSpPr>
+          <p:nvPr>
+            <p:ph type="ftr" sz="quarter" idx="11"/>
+          </p:nvPr>
+        </p:nvSpPr>
+        <p:spPr/>
+        <p:txBody>
+          <a:bodyPr/>
+          <a:lstStyle/>
+          <a:p>
+            <a:r>
+              <a:rPr lang="de-DE"/>
+              <a:t>Materialdiagnostik: Task 2</a:t>
+            </a:r>
+          </a:p>
+        </p:txBody>
+      </p:sp>
+      <p:sp>
+        <p:nvSpPr>
+          <p:cNvPr id="5" name="Datumsplatzhalter 4">
+            <a:extLst>
+              <a:ext uri="{FF2B5EF4-FFF2-40B4-BE49-F238E27FC236}">
+                <a16:creationId xmlns:a16="http://schemas.microsoft.com/office/drawing/2014/main" id="{D388320E-D078-EA6A-9A8C-DD57443F9308}"/>
+              </a:ext>
+            </a:extLst>
+          </p:cNvPr>
+          <p:cNvSpPr>
+            <a:spLocks noGrp="1"/>
+          </p:cNvSpPr>
+          <p:nvPr>
+            <p:ph type="dt" sz="half" idx="12"/>
+          </p:nvPr>
+        </p:nvSpPr>
+        <p:spPr/>
+        <p:txBody>
+          <a:bodyPr/>
+          <a:lstStyle/>
+          <a:p>
+            <a:r>
+              <a:rPr lang="de-DE"/>
+              <a:t>25.06.2026</a:t>
+            </a:r>
+          </a:p>
+        </p:txBody>
+      </p:sp>
+      <p:sp>
+        <p:nvSpPr>
+          <p:cNvPr id="6" name="Titel 1">
+            <a:extLst>
+              <a:ext uri="{FF2B5EF4-FFF2-40B4-BE49-F238E27FC236}">
+                <a16:creationId xmlns:a16="http://schemas.microsoft.com/office/drawing/2014/main" id="{6501B65D-DEB8-9B99-668F-C2A8BA5977E3}"/>
+              </a:ext>
+            </a:extLst>
+          </p:cNvPr>
+          <p:cNvSpPr>
+            <a:spLocks noGrp="1"/>
+          </p:cNvSpPr>
+          <p:nvPr>
+            <p:ph type="title"/>
+          </p:nvPr>
+        </p:nvSpPr>
+        <p:spPr>
+          <a:xfrm>
+            <a:off x="341811" y="567600"/>
+            <a:ext cx="4315098" cy="706030"/>
+          </a:xfrm>
+          <a:prstGeom prst="rect">
+            <a:avLst/>
+          </a:prstGeom>
+        </p:spPr>
+        <p:txBody>
+          <a:bodyPr anchor="ctr"/>
+          <a:lstStyle>
+            <a:lvl1pPr>
+              <a:defRPr sz="2400"/>
+            </a:lvl1pPr>
+          </a:lstStyle>
+          <a:p>
+            <a:r>
+              <a:rPr lang="de-DE"/>
+              <a:t>Mastertitelformat bearbeiten</a:t>
+            </a:r>
+          </a:p>
+        </p:txBody>
+      </p:sp>
+      <p:sp>
+        <p:nvSpPr>
+          <p:cNvPr id="8" name="Tabellenplatzhalter 7">
+            <a:extLst>
+              <a:ext uri="{FF2B5EF4-FFF2-40B4-BE49-F238E27FC236}">
+                <a16:creationId xmlns:a16="http://schemas.microsoft.com/office/drawing/2014/main" id="{77EC83A4-CD88-BEBE-32B4-1CB0630E0C25}"/>
+              </a:ext>
+            </a:extLst>
+          </p:cNvPr>
+          <p:cNvSpPr>
+            <a:spLocks noGrp="1"/>
+          </p:cNvSpPr>
+          <p:nvPr>
+            <p:ph type="tbl" sz="quarter" idx="13"/>
+          </p:nvPr>
+        </p:nvSpPr>
+        <p:spPr>
+          <a:xfrm>
+            <a:off x="341313" y="1620000"/>
+            <a:ext cx="11509374" cy="4329112"/>
+          </a:xfrm>
+          <a:prstGeom prst="rect">
+            <a:avLst/>
+          </a:prstGeom>
+        </p:spPr>
+        <p:txBody>
+          <a:bodyPr/>
+          <a:lstStyle/>
+          <a:p>
+            <a:r>
+              <a:rPr lang="de-DE"/>
+              <a:t>Tabelle durch Klicken auf Symbol hinzufügen</a:t>
+            </a:r>
+          </a:p>
+        </p:txBody>
+      </p:sp>
+    </p:spTree>
+    <p:extLst>
+      <p:ext uri="{BB962C8B-B14F-4D97-AF65-F5344CB8AC3E}">
+        <p14:creationId xmlns:p14="http://schemas.microsoft.com/office/powerpoint/2010/main" val="2365388264"/>
+      </p:ext>
+    </p:extLst>
+  </p:cSld>
+  <p:clrMapOvr>
+    <a:masterClrMapping/>
+  </p:clrMapOvr>
+</p:sldLayout>
+</file>
+
+<file path=ppt/slideLayouts/slideLayout6.xml><?xml version="1.0" encoding="utf-8"?>
+<p:sldLayout xmlns:a="http://schemas.openxmlformats.org/drawingml/2006/main" xmlns:r="http://schemas.openxmlformats.org/officeDocument/2006/relationships" xmlns:p="http://schemas.openxmlformats.org/presentationml/2006/main" preserve="1">
+  <p:cSld name="6_Benutzerdefiniertes Layout">
+    <p:spTree>
+      <p:nvGrpSpPr>
+        <p:cNvPr id="1" name=""/>
+        <p:cNvGrpSpPr/>
+        <p:nvPr/>
+      </p:nvGrpSpPr>
+      <p:grpSpPr>
+        <a:xfrm>
+          <a:off x="0" y="0"/>
+          <a:ext cx="0" cy="0"/>
+          <a:chOff x="0" y="0"/>
+          <a:chExt cx="0" cy="0"/>
+        </a:xfrm>
+      </p:grpSpPr>
+      <p:sp>
+        <p:nvSpPr>
+          <p:cNvPr id="3" name="Foliennummernplatzhalter 2">
+            <a:extLst>
+              <a:ext uri="{FF2B5EF4-FFF2-40B4-BE49-F238E27FC236}">
+                <a16:creationId xmlns:a16="http://schemas.microsoft.com/office/drawing/2014/main" id="{A4C0288E-0BC3-A2B2-6635-8CA0B598348C}"/>
+              </a:ext>
+            </a:extLst>
+          </p:cNvPr>
+          <p:cNvSpPr>
+            <a:spLocks noGrp="1"/>
+          </p:cNvSpPr>
+          <p:nvPr>
+            <p:ph type="sldNum" sz="quarter" idx="10"/>
+          </p:nvPr>
+        </p:nvSpPr>
+        <p:spPr/>
+        <p:txBody>
+          <a:bodyPr/>
+          <a:lstStyle/>
+          <a:p>
+            <a:fld id="{80B4FCE6-DC73-4135-BC56-1F242D45A84C}" type="slidenum">
+              <a:rPr lang="de-DE" smtClean="0"/>
+              <a:t>‹Nr.›</a:t>
+            </a:fld>
+            <a:endParaRPr lang="de-DE"/>
+          </a:p>
+        </p:txBody>
+      </p:sp>
+      <p:sp>
+        <p:nvSpPr>
+          <p:cNvPr id="4" name="Fußzeilenplatzhalter 3">
+            <a:extLst>
+              <a:ext uri="{FF2B5EF4-FFF2-40B4-BE49-F238E27FC236}">
+                <a16:creationId xmlns:a16="http://schemas.microsoft.com/office/drawing/2014/main" id="{DE378F51-1F21-2A9E-140B-3E85C6EDA68C}"/>
+              </a:ext>
+            </a:extLst>
+          </p:cNvPr>
+          <p:cNvSpPr>
+            <a:spLocks noGrp="1"/>
+          </p:cNvSpPr>
+          <p:nvPr>
+            <p:ph type="ftr" sz="quarter" idx="11"/>
+          </p:nvPr>
+        </p:nvSpPr>
+        <p:spPr/>
+        <p:txBody>
+          <a:bodyPr/>
+          <a:lstStyle/>
+          <a:p>
+            <a:r>
+              <a:rPr lang="de-DE"/>
+              <a:t>Materialdiagnostik: Task 2</a:t>
+            </a:r>
+          </a:p>
+        </p:txBody>
+      </p:sp>
+      <p:sp>
+        <p:nvSpPr>
+          <p:cNvPr id="5" name="Datumsplatzhalter 4">
+            <a:extLst>
+              <a:ext uri="{FF2B5EF4-FFF2-40B4-BE49-F238E27FC236}">
+                <a16:creationId xmlns:a16="http://schemas.microsoft.com/office/drawing/2014/main" id="{5995910A-7460-9DA2-7D0D-21EA392FA163}"/>
+              </a:ext>
+            </a:extLst>
+          </p:cNvPr>
+          <p:cNvSpPr>
+            <a:spLocks noGrp="1"/>
+          </p:cNvSpPr>
+          <p:nvPr>
+            <p:ph type="dt" sz="half" idx="12"/>
+          </p:nvPr>
+        </p:nvSpPr>
+        <p:spPr/>
+        <p:txBody>
+          <a:bodyPr/>
+          <a:lstStyle/>
+          <a:p>
+            <a:r>
+              <a:rPr lang="de-DE"/>
+              <a:t>25.06.2026</a:t>
+            </a:r>
+          </a:p>
+        </p:txBody>
+      </p:sp>
+      <p:sp>
+        <p:nvSpPr>
+          <p:cNvPr id="6" name="Titel 1">
+            <a:extLst>
+              <a:ext uri="{FF2B5EF4-FFF2-40B4-BE49-F238E27FC236}">
+                <a16:creationId xmlns:a16="http://schemas.microsoft.com/office/drawing/2014/main" id="{18B7627B-6839-36FA-8BDF-10F29038E6C1}"/>
+              </a:ext>
+            </a:extLst>
+          </p:cNvPr>
+          <p:cNvSpPr>
+            <a:spLocks noGrp="1"/>
+          </p:cNvSpPr>
+          <p:nvPr>
+            <p:ph type="title"/>
+          </p:nvPr>
+        </p:nvSpPr>
+        <p:spPr>
+          <a:xfrm>
+            <a:off x="341811" y="567600"/>
+            <a:ext cx="4315098" cy="706030"/>
+          </a:xfrm>
+          <a:prstGeom prst="rect">
+            <a:avLst/>
+          </a:prstGeom>
+        </p:spPr>
+        <p:txBody>
+          <a:bodyPr anchor="ctr"/>
+          <a:lstStyle>
+            <a:lvl1pPr>
+              <a:defRPr sz="2400"/>
+            </a:lvl1pPr>
+          </a:lstStyle>
+          <a:p>
+            <a:r>
+              <a:rPr lang="de-DE"/>
+              <a:t>Mastertitelformat bearbeiten</a:t>
+            </a:r>
+          </a:p>
+        </p:txBody>
+      </p:sp>
+      <p:sp>
+        <p:nvSpPr>
+          <p:cNvPr id="8" name="Medienplatzhalter 7">
+            <a:extLst>
+              <a:ext uri="{FF2B5EF4-FFF2-40B4-BE49-F238E27FC236}">
+                <a16:creationId xmlns:a16="http://schemas.microsoft.com/office/drawing/2014/main" id="{8A710AA4-AAF2-4B75-C3F3-871BBE9241F8}"/>
+              </a:ext>
+            </a:extLst>
+          </p:cNvPr>
+          <p:cNvSpPr>
+            <a:spLocks noGrp="1"/>
+          </p:cNvSpPr>
+          <p:nvPr>
+            <p:ph type="media" sz="quarter" idx="13"/>
+          </p:nvPr>
+        </p:nvSpPr>
+        <p:spPr>
+          <a:xfrm>
+            <a:off x="342900" y="1620000"/>
+            <a:ext cx="11506200" cy="4364038"/>
+          </a:xfrm>
+          <a:prstGeom prst="rect">
+            <a:avLst/>
+          </a:prstGeom>
+        </p:spPr>
+        <p:txBody>
+          <a:bodyPr/>
+          <a:lstStyle/>
+          <a:p>
+            <a:r>
+              <a:rPr lang="de-DE"/>
+              <a:t>Mediaclip durch Klicken auf Symbol hinzufügen</a:t>
+            </a:r>
+          </a:p>
+        </p:txBody>
+      </p:sp>
+    </p:spTree>
+    <p:extLst>
+      <p:ext uri="{BB962C8B-B14F-4D97-AF65-F5344CB8AC3E}">
+        <p14:creationId xmlns:p14="http://schemas.microsoft.com/office/powerpoint/2010/main" val="1053121078"/>
+      </p:ext>
+    </p:extLst>
+  </p:cSld>
+  <p:clrMapOvr>
+    <a:masterClrMapping/>
+  </p:clrMapOvr>
+</p:sldLayout>
+</file>
+
+<file path=ppt/slideLayouts/slideLayout7.xml><?xml version="1.0" encoding="utf-8"?>
+<p:sldLayout xmlns:a="http://schemas.openxmlformats.org/drawingml/2006/main" xmlns:r="http://schemas.openxmlformats.org/officeDocument/2006/relationships" xmlns:p="http://schemas.openxmlformats.org/presentationml/2006/main" preserve="1">
+  <p:cSld name="7_Benutzerdefiniertes Layout">
+    <p:spTree>
+      <p:nvGrpSpPr>
+        <p:cNvPr id="1" name=""/>
+        <p:cNvGrpSpPr/>
+        <p:nvPr/>
+      </p:nvGrpSpPr>
+      <p:grpSpPr>
+        <a:xfrm>
+          <a:off x="0" y="0"/>
+          <a:ext cx="0" cy="0"/>
+          <a:chOff x="0" y="0"/>
+          <a:chExt cx="0" cy="0"/>
+        </a:xfrm>
+      </p:grpSpPr>
+      <p:sp>
+        <p:nvSpPr>
+          <p:cNvPr id="3" name="Foliennummernplatzhalter 2">
+            <a:extLst>
+              <a:ext uri="{FF2B5EF4-FFF2-40B4-BE49-F238E27FC236}">
+                <a16:creationId xmlns:a16="http://schemas.microsoft.com/office/drawing/2014/main" id="{F33115BF-78EF-27BB-F487-EADE5934B133}"/>
+              </a:ext>
+            </a:extLst>
+          </p:cNvPr>
+          <p:cNvSpPr>
+            <a:spLocks noGrp="1"/>
+          </p:cNvSpPr>
+          <p:nvPr>
+            <p:ph type="sldNum" sz="quarter" idx="10"/>
+          </p:nvPr>
+        </p:nvSpPr>
+        <p:spPr/>
+        <p:txBody>
+          <a:bodyPr/>
+          <a:lstStyle/>
+          <a:p>
+            <a:fld id="{80B4FCE6-DC73-4135-BC56-1F242D45A84C}" type="slidenum">
+              <a:rPr lang="de-DE" smtClean="0"/>
+              <a:t>‹Nr.›</a:t>
+            </a:fld>
+            <a:endParaRPr lang="de-DE"/>
+          </a:p>
+        </p:txBody>
+      </p:sp>
+      <p:sp>
+        <p:nvSpPr>
+          <p:cNvPr id="4" name="Fußzeilenplatzhalter 3">
+            <a:extLst>
+              <a:ext uri="{FF2B5EF4-FFF2-40B4-BE49-F238E27FC236}">
+                <a16:creationId xmlns:a16="http://schemas.microsoft.com/office/drawing/2014/main" id="{77968A7B-1911-8BE6-C669-DC5B4D85D1D4}"/>
+              </a:ext>
+            </a:extLst>
+          </p:cNvPr>
+          <p:cNvSpPr>
+            <a:spLocks noGrp="1"/>
+          </p:cNvSpPr>
+          <p:nvPr>
+            <p:ph type="ftr" sz="quarter" idx="11"/>
+          </p:nvPr>
+        </p:nvSpPr>
+        <p:spPr/>
+        <p:txBody>
+          <a:bodyPr/>
+          <a:lstStyle/>
+          <a:p>
+            <a:r>
+              <a:rPr lang="de-DE"/>
+              <a:t>Materialdiagnostik: Task 2</a:t>
+            </a:r>
+            <a:endParaRPr lang="de-DE" dirty="0"/>
+          </a:p>
+        </p:txBody>
+      </p:sp>
+      <p:sp>
+        <p:nvSpPr>
+          <p:cNvPr id="5" name="Datumsplatzhalter 4">
+            <a:extLst>
+              <a:ext uri="{FF2B5EF4-FFF2-40B4-BE49-F238E27FC236}">
+                <a16:creationId xmlns:a16="http://schemas.microsoft.com/office/drawing/2014/main" id="{51324397-1ED7-8CF8-6036-BBCE91679937}"/>
+              </a:ext>
+            </a:extLst>
+          </p:cNvPr>
+          <p:cNvSpPr>
+            <a:spLocks noGrp="1"/>
+          </p:cNvSpPr>
+          <p:nvPr>
+            <p:ph type="dt" sz="half" idx="12"/>
+          </p:nvPr>
+        </p:nvSpPr>
+        <p:spPr/>
+        <p:txBody>
+          <a:bodyPr/>
+          <a:lstStyle/>
+          <a:p>
+            <a:r>
+              <a:rPr lang="de-DE"/>
+              <a:t>25.06.2026</a:t>
+            </a:r>
+          </a:p>
+        </p:txBody>
+      </p:sp>
+      <p:sp>
+        <p:nvSpPr>
+          <p:cNvPr id="7" name="Inhaltsplatzhalter 6">
+            <a:extLst>
+              <a:ext uri="{FF2B5EF4-FFF2-40B4-BE49-F238E27FC236}">
+                <a16:creationId xmlns:a16="http://schemas.microsoft.com/office/drawing/2014/main" id="{7E6FF748-506D-DF48-0CE6-B5937A97C3BD}"/>
+              </a:ext>
+            </a:extLst>
+          </p:cNvPr>
+          <p:cNvSpPr>
+            <a:spLocks noGrp="1"/>
+          </p:cNvSpPr>
+          <p:nvPr>
+            <p:ph sz="quarter" idx="13"/>
+          </p:nvPr>
+        </p:nvSpPr>
+        <p:spPr>
+          <a:xfrm>
+            <a:off x="341811" y="1620000"/>
+            <a:ext cx="11512052" cy="4395788"/>
+          </a:xfrm>
+          <a:prstGeom prst="rect">
+            <a:avLst/>
+          </a:prstGeom>
+        </p:spPr>
+        <p:txBody>
+          <a:bodyPr/>
+          <a:lstStyle/>
+          <a:p>
+            <a:pPr lvl="0"/>
+            <a:r>
+              <a:rPr lang="de-DE" dirty="0"/>
+              <a:t>Mastertextformat bearbeiten</a:t>
+            </a:r>
+          </a:p>
+          <a:p>
+            <a:pPr lvl="1"/>
+            <a:r>
+              <a:rPr lang="de-DE" dirty="0"/>
+              <a:t>Zweite Ebene</a:t>
+            </a:r>
+          </a:p>
+          <a:p>
+            <a:pPr lvl="2"/>
+            <a:r>
+              <a:rPr lang="de-DE" dirty="0"/>
+              <a:t>Dritte Ebene</a:t>
+            </a:r>
+          </a:p>
+          <a:p>
+            <a:pPr lvl="3"/>
+            <a:r>
+              <a:rPr lang="de-DE" dirty="0"/>
+              <a:t>Vierte Ebene</a:t>
+            </a:r>
+          </a:p>
+          <a:p>
+            <a:pPr lvl="4"/>
+            <a:r>
+              <a:rPr lang="de-DE" dirty="0"/>
+              <a:t>Fünfte Ebene</a:t>
+            </a:r>
+          </a:p>
+        </p:txBody>
+      </p:sp>
+      <p:sp>
+        <p:nvSpPr>
+          <p:cNvPr id="8" name="Titel 1">
+            <a:extLst>
+              <a:ext uri="{FF2B5EF4-FFF2-40B4-BE49-F238E27FC236}">
+                <a16:creationId xmlns:a16="http://schemas.microsoft.com/office/drawing/2014/main" id="{21AF7B95-D724-2667-6A8F-48BC1B491D0E}"/>
+              </a:ext>
+            </a:extLst>
+          </p:cNvPr>
+          <p:cNvSpPr>
+            <a:spLocks noGrp="1"/>
+          </p:cNvSpPr>
+          <p:nvPr>
+            <p:ph type="title"/>
+          </p:nvPr>
+        </p:nvSpPr>
+        <p:spPr>
+          <a:xfrm>
+            <a:off x="341811" y="567600"/>
+            <a:ext cx="4315098" cy="706030"/>
+          </a:xfrm>
+          <a:prstGeom prst="rect">
+            <a:avLst/>
+          </a:prstGeom>
+        </p:spPr>
+        <p:txBody>
+          <a:bodyPr anchor="ctr"/>
+          <a:lstStyle>
+            <a:lvl1pPr>
+              <a:defRPr sz="2400"/>
+            </a:lvl1pPr>
+          </a:lstStyle>
+          <a:p>
+            <a:r>
+              <a:rPr lang="de-DE"/>
+              <a:t>Mastertitelformat bearbeiten</a:t>
+            </a:r>
+          </a:p>
+        </p:txBody>
+      </p:sp>
+    </p:spTree>
+    <p:extLst>
+      <p:ext uri="{BB962C8B-B14F-4D97-AF65-F5344CB8AC3E}">
+        <p14:creationId xmlns:p14="http://schemas.microsoft.com/office/powerpoint/2010/main" val="415779845"/>
+      </p:ext>
+    </p:extLst>
+  </p:cSld>
+  <p:clrMapOvr>
+    <a:masterClrMapping/>
+  </p:clrMapOvr>
+</p:sldLayout>
+</file>
+
+<file path=ppt/slideMasters/slideMaster1.xml><?xml version="1.0" encoding="utf-8"?>
+<p:sldMaster xmlns:a="http://schemas.openxmlformats.org/drawingml/2006/main" xmlns:r="http://schemas.openxmlformats.org/officeDocument/2006/relationships" xmlns:p="http://schemas.openxmlformats.org/presentationml/2006/main" preserve="1">
+  <p:cSld>
+    <p:bg>
+      <p:bgPr>
+        <a:gradFill flip="none" rotWithShape="1">
+          <a:gsLst>
+            <a:gs pos="0">
+              <a:schemeClr val="accent1">
+                <a:lumMod val="5000"/>
+                <a:lumOff val="95000"/>
+              </a:schemeClr>
+            </a:gs>
+            <a:gs pos="74000">
+              <a:schemeClr val="accent1">
+                <a:lumMod val="45000"/>
+                <a:lumOff val="55000"/>
+              </a:schemeClr>
+            </a:gs>
+            <a:gs pos="83000">
+              <a:schemeClr val="accent1">
+                <a:lumMod val="45000"/>
+                <a:lumOff val="55000"/>
+              </a:schemeClr>
+            </a:gs>
+            <a:gs pos="100000">
+              <a:schemeClr val="accent1">
+                <a:lumMod val="30000"/>
+                <a:lumOff val="70000"/>
+              </a:schemeClr>
+            </a:gs>
+          </a:gsLst>
+          <a:lin ang="5400000" scaled="1"/>
+          <a:tileRect/>
+        </a:gradFill>
+        <a:effectLst/>
+      </p:bgPr>
+    </p:bg>
+    <p:spTree>
+      <p:nvGrpSpPr>
+        <p:cNvPr id="1" name=""/>
+        <p:cNvGrpSpPr/>
+        <p:nvPr/>
+      </p:nvGrpSpPr>
+      <p:grpSpPr>
+        <a:xfrm>
+          <a:off x="0" y="0"/>
+          <a:ext cx="0" cy="0"/>
+          <a:chOff x="0" y="0"/>
+          <a:chExt cx="0" cy="0"/>
+        </a:xfrm>
+      </p:grpSpPr>
+      <p:pic>
+        <p:nvPicPr>
+          <p:cNvPr id="1029" name="Picture 8">
+            <a:extLst>
+              <a:ext uri="{FF2B5EF4-FFF2-40B4-BE49-F238E27FC236}">
+                <a16:creationId xmlns:a16="http://schemas.microsoft.com/office/drawing/2014/main" id="{24F5A3AF-D943-BD2A-8943-FC6AD197ADB6}"/>
+              </a:ext>
+            </a:extLst>
+          </p:cNvPr>
+          <p:cNvPicPr>
+            <a:picLocks noChangeAspect="1" noChangeArrowheads="1"/>
+          </p:cNvPicPr>
+          <p:nvPr/>
+        </p:nvPicPr>
+        <p:blipFill>
+          <a:blip r:embed="rId9">
+            <a:extLst>
+              <a:ext uri="{28A0092B-C50C-407E-A947-70E740481C1C}">
+                <a14:useLocalDpi xmlns:a14="http://schemas.microsoft.com/office/drawing/2010/main" val="0"/>
+              </a:ext>
+            </a:extLst>
+          </a:blip>
+          <a:srcRect/>
+          <a:stretch/>
+        </p:blipFill>
+        <p:spPr bwMode="auto">
+          <a:xfrm>
+            <a:off x="7937576" y="609600"/>
+            <a:ext cx="3644824" cy="622657"/>
+          </a:xfrm>
+          <a:prstGeom prst="rect">
+            <a:avLst/>
+          </a:prstGeom>
+          <a:noFill/>
+          <a:ln>
+            <a:noFill/>
+          </a:ln>
+          <a:extLst>
+            <a:ext uri="{909E8E84-426E-40DD-AFC4-6F175D3DCCD1}">
+              <a14:hiddenFill xmlns:a14="http://schemas.microsoft.com/office/drawing/2010/main">
                 <a:solidFill>
-                  <a:schemeClr val="tx1"/>
+                  <a:srgbClr val="FFFFFF"/>
                 </a:solidFill>
-                <a:latin typeface="Arial" panose="020B0604020202020204" pitchFamily="34" charset="0"/>
-                <a:ea typeface="ヒラギノ角ゴ Pro W3" charset="-128"/>
+              </a14:hiddenFill>
+            </a:ext>
+            <a:ext uri="{91240B29-F687-4F45-9708-019B960494DF}">
+              <a14:hiddenLine xmlns:a14="http://schemas.microsoft.com/office/drawing/2010/main" w="9525">
+                <a:solidFill>
+                  <a:srgbClr val="000000"/>
+                </a:solidFill>
+                <a:miter lim="800000"/>
+                <a:headEnd/>
+                <a:tailEnd/>
+              </a14:hiddenLine>
+            </a:ext>
+          </a:extLst>
+        </p:spPr>
+      </p:pic>
+      <p:sp>
+        <p:nvSpPr>
+          <p:cNvPr id="3" name="Foliennummernplatzhalter 2">
+            <a:extLst>
+              <a:ext uri="{FF2B5EF4-FFF2-40B4-BE49-F238E27FC236}">
+                <a16:creationId xmlns:a16="http://schemas.microsoft.com/office/drawing/2014/main" id="{C4F520D8-5DD0-8AC6-5A23-456771581E55}"/>
+              </a:ext>
+            </a:extLst>
+          </p:cNvPr>
+          <p:cNvSpPr>
+            <a:spLocks noGrp="1" noRot="1" noMove="1" noResize="1" noEditPoints="1" noAdjustHandles="1" noChangeArrowheads="1" noChangeShapeType="1"/>
+          </p:cNvSpPr>
+          <p:nvPr>
+            <p:ph type="sldNum" sz="quarter" idx="4"/>
+          </p:nvPr>
+        </p:nvSpPr>
+        <p:spPr>
+          <a:xfrm>
+            <a:off x="11582400" y="6447859"/>
+            <a:ext cx="496388" cy="365125"/>
+          </a:xfrm>
+          <a:prstGeom prst="rect">
+            <a:avLst/>
+          </a:prstGeom>
+        </p:spPr>
+        <p:txBody>
+          <a:bodyPr vert="horz" lIns="91440" tIns="45720" rIns="91440" bIns="45720" rtlCol="0" anchor="ctr"/>
+          <a:lstStyle>
+            <a:lvl1pPr algn="r">
+              <a:defRPr sz="1200" b="1">
+                <a:solidFill>
+                  <a:srgbClr val="A8CC2F"/>
+                </a:solidFill>
               </a:defRPr>
             </a:lvl1pPr>
-            <a:lvl2pPr marL="37931725" indent="-37474525">
-              <a:defRPr sz="2400">
-                <a:solidFill>
-                  <a:schemeClr val="tx1"/>
-                </a:solidFill>
-                <a:latin typeface="Arial" panose="020B0604020202020204" pitchFamily="34" charset="0"/>
-                <a:ea typeface="ヒラギノ角ゴ Pro W3" charset="-128"/>
-              </a:defRPr>
-            </a:lvl2pPr>
-            <a:lvl3pPr>
-              <a:defRPr sz="2400">
-                <a:solidFill>
-                  <a:schemeClr val="tx1"/>
-                </a:solidFill>
-                <a:latin typeface="Arial" panose="020B0604020202020204" pitchFamily="34" charset="0"/>
-                <a:ea typeface="ヒラギノ角ゴ Pro W3" charset="-128"/>
-              </a:defRPr>
-            </a:lvl3pPr>
-            <a:lvl4pPr>
-              <a:defRPr sz="2400">
-                <a:solidFill>
-                  <a:schemeClr val="tx1"/>
-                </a:solidFill>
-                <a:latin typeface="Arial" panose="020B0604020202020204" pitchFamily="34" charset="0"/>
-                <a:ea typeface="ヒラギノ角ゴ Pro W3" charset="-128"/>
-              </a:defRPr>
-            </a:lvl4pPr>
-            <a:lvl5pPr>
-              <a:defRPr sz="2400">
-                <a:solidFill>
-                  <a:schemeClr val="tx1"/>
-                </a:solidFill>
-                <a:latin typeface="Arial" panose="020B0604020202020204" pitchFamily="34" charset="0"/>
-                <a:ea typeface="ヒラギノ角ゴ Pro W3" charset="-128"/>
-              </a:defRPr>
-            </a:lvl5pPr>
-            <a:lvl6pPr marL="457200" eaLnBrk="0" fontAlgn="base" hangingPunct="0">
-              <a:spcBef>
-                <a:spcPct val="0"/>
-              </a:spcBef>
-              <a:spcAft>
-                <a:spcPct val="0"/>
-              </a:spcAft>
-              <a:defRPr sz="2400">
-                <a:solidFill>
-                  <a:schemeClr val="tx1"/>
-                </a:solidFill>
-                <a:latin typeface="Arial" panose="020B0604020202020204" pitchFamily="34" charset="0"/>
-                <a:ea typeface="ヒラギノ角ゴ Pro W3" charset="-128"/>
-              </a:defRPr>
-            </a:lvl6pPr>
-            <a:lvl7pPr marL="914400" eaLnBrk="0" fontAlgn="base" hangingPunct="0">
-              <a:spcBef>
-                <a:spcPct val="0"/>
-              </a:spcBef>
-              <a:spcAft>
-                <a:spcPct val="0"/>
-              </a:spcAft>
-              <a:defRPr sz="2400">
-                <a:solidFill>
-                  <a:schemeClr val="tx1"/>
-                </a:solidFill>
-                <a:latin typeface="Arial" panose="020B0604020202020204" pitchFamily="34" charset="0"/>
-                <a:ea typeface="ヒラギノ角ゴ Pro W3" charset="-128"/>
-              </a:defRPr>
-            </a:lvl7pPr>
-            <a:lvl8pPr marL="1371600" eaLnBrk="0" fontAlgn="base" hangingPunct="0">
-              <a:spcBef>
-                <a:spcPct val="0"/>
-              </a:spcBef>
-              <a:spcAft>
-                <a:spcPct val="0"/>
-              </a:spcAft>
-              <a:defRPr sz="2400">
-                <a:solidFill>
-                  <a:schemeClr val="tx1"/>
-                </a:solidFill>
-                <a:latin typeface="Arial" panose="020B0604020202020204" pitchFamily="34" charset="0"/>
-                <a:ea typeface="ヒラギノ角ゴ Pro W3" charset="-128"/>
-              </a:defRPr>
-            </a:lvl8pPr>
-            <a:lvl9pPr marL="1828800" eaLnBrk="0" fontAlgn="base" hangingPunct="0">
-              <a:spcBef>
-                <a:spcPct val="0"/>
-              </a:spcBef>
-              <a:spcAft>
-                <a:spcPct val="0"/>
-              </a:spcAft>
-              <a:defRPr sz="2400">
-                <a:solidFill>
-                  <a:schemeClr val="tx1"/>
-                </a:solidFill>
-                <a:latin typeface="Arial" panose="020B0604020202020204" pitchFamily="34" charset="0"/>
-                <a:ea typeface="ヒラギノ角ゴ Pro W3" charset="-128"/>
-              </a:defRPr>
-            </a:lvl9pPr>
           </a:lstStyle>
           <a:p>
             <a:pPr>
               <a:defRPr/>
             </a:pPr>
-            <a:r>
-              <a:rPr lang="de-DE" altLang="de-DE" sz="1000" dirty="0">
+            <a:fld id="{AF7B6FBB-3871-4A64-9491-1B11EE455FFC}" type="slidenum">
+              <a:rPr lang="de-DE" altLang="de-DE" smtClean="0"/>
+              <a:pPr>
+                <a:defRPr/>
+              </a:pPr>
+              <a:t>‹Nr.›</a:t>
+            </a:fld>
+            <a:endParaRPr lang="de-DE" altLang="de-DE" dirty="0"/>
+          </a:p>
+        </p:txBody>
+      </p:sp>
+      <p:sp>
+        <p:nvSpPr>
+          <p:cNvPr id="4" name="Fußzeilenplatzhalter 3">
+            <a:extLst>
+              <a:ext uri="{FF2B5EF4-FFF2-40B4-BE49-F238E27FC236}">
+                <a16:creationId xmlns:a16="http://schemas.microsoft.com/office/drawing/2014/main" id="{0CA301AD-975A-4725-14C1-3B11D71EE0DE}"/>
+              </a:ext>
+            </a:extLst>
+          </p:cNvPr>
+          <p:cNvSpPr>
+            <a:spLocks noGrp="1" noRot="1" noMove="1" noResize="1" noEditPoints="1" noAdjustHandles="1" noChangeArrowheads="1" noChangeShapeType="1"/>
+          </p:cNvSpPr>
+          <p:nvPr>
+            <p:ph type="ftr" sz="quarter" idx="3"/>
+          </p:nvPr>
+        </p:nvSpPr>
+        <p:spPr>
+          <a:xfrm>
+            <a:off x="4038600" y="6447858"/>
+            <a:ext cx="4114800" cy="365125"/>
+          </a:xfrm>
+          <a:prstGeom prst="rect">
+            <a:avLst/>
+          </a:prstGeom>
+        </p:spPr>
+        <p:txBody>
+          <a:bodyPr vert="horz" lIns="91440" tIns="45720" rIns="91440" bIns="45720" rtlCol="0" anchor="ctr"/>
+          <a:lstStyle>
+            <a:lvl1pPr algn="ctr">
+              <a:defRPr sz="1200" b="1">
                 <a:solidFill>
                   <a:srgbClr val="A8CC2F"/>
                 </a:solidFill>
-              </a:rPr>
+              </a:defRPr>
+            </a:lvl1pPr>
+          </a:lstStyle>
+          <a:p>
+            <a:r>
+              <a:rPr lang="de-DE"/>
               <a:t>Materialdiagnostik: Task 2</a:t>
             </a:r>
           </a:p>
         </p:txBody>
       </p:sp>
+      <p:sp>
+        <p:nvSpPr>
+          <p:cNvPr id="5" name="Datumsplatzhalter 4">
+            <a:extLst>
+              <a:ext uri="{FF2B5EF4-FFF2-40B4-BE49-F238E27FC236}">
+                <a16:creationId xmlns:a16="http://schemas.microsoft.com/office/drawing/2014/main" id="{41824E65-93DD-275C-14CB-0DD245806FD8}"/>
+              </a:ext>
+            </a:extLst>
+          </p:cNvPr>
+          <p:cNvSpPr>
+            <a:spLocks noGrp="1" noRot="1" noMove="1" noResize="1" noEditPoints="1" noAdjustHandles="1" noChangeArrowheads="1" noChangeShapeType="1"/>
+          </p:cNvSpPr>
+          <p:nvPr>
+            <p:ph type="dt" sz="half" idx="2"/>
+          </p:nvPr>
+        </p:nvSpPr>
+        <p:spPr>
+          <a:xfrm>
+            <a:off x="113212" y="6447857"/>
+            <a:ext cx="951411" cy="365125"/>
+          </a:xfrm>
+          <a:prstGeom prst="rect">
+            <a:avLst/>
+          </a:prstGeom>
+        </p:spPr>
+        <p:txBody>
+          <a:bodyPr vert="horz" lIns="91440" tIns="45720" rIns="91440" bIns="45720" rtlCol="0" anchor="ctr"/>
+          <a:lstStyle>
+            <a:lvl1pPr algn="l">
+              <a:defRPr sz="1200">
+                <a:solidFill>
+                  <a:schemeClr val="tx1">
+                    <a:tint val="82000"/>
+                  </a:schemeClr>
+                </a:solidFill>
+              </a:defRPr>
+            </a:lvl1pPr>
+          </a:lstStyle>
+          <a:p>
+            <a:r>
+              <a:rPr lang="de-DE"/>
+              <a:t>25.06.2026</a:t>
+            </a:r>
+          </a:p>
+        </p:txBody>
+      </p:sp>
     </p:spTree>
+    <p:extLst>
+      <p:ext uri="{BB962C8B-B14F-4D97-AF65-F5344CB8AC3E}">
+        <p14:creationId xmlns:p14="http://schemas.microsoft.com/office/powerpoint/2010/main" val="1599670847"/>
+      </p:ext>
+    </p:extLst>
   </p:cSld>
   <p:clrMap bg1="lt1" tx1="dk1" bg2="lt2" tx2="dk2" accent1="accent1" accent2="accent2" accent3="accent3" accent4="accent4" accent5="accent5" accent6="accent6" hlink="hlink" folHlink="folHlink"/>
   <p:sldLayoutIdLst>
-    <p:sldLayoutId id="2147483721" r:id="rId1"/>
-    <p:sldLayoutId id="2147483722" r:id="rId2"/>
-    <p:sldLayoutId id="2147483723" r:id="rId3"/>
-    <p:sldLayoutId id="2147483724" r:id="rId4"/>
-    <p:sldLayoutId id="2147483725" r:id="rId5"/>
-    <p:sldLayoutId id="2147483726" r:id="rId6"/>
-    <p:sldLayoutId id="2147483727" r:id="rId7"/>
-    <p:sldLayoutId id="2147483731" r:id="rId8"/>
-    <p:sldLayoutId id="2147483728" r:id="rId9"/>
-    <p:sldLayoutId id="2147483729" r:id="rId10"/>
-    <p:sldLayoutId id="2147483730" r:id="rId11"/>
+    <p:sldLayoutId id="2147483745" r:id="rId1"/>
+    <p:sldLayoutId id="2147483746" r:id="rId2"/>
+    <p:sldLayoutId id="2147483747" r:id="rId3"/>
+    <p:sldLayoutId id="2147483748" r:id="rId4"/>
+    <p:sldLayoutId id="2147483749" r:id="rId5"/>
+    <p:sldLayoutId id="2147483750" r:id="rId6"/>
+    <p:sldLayoutId id="2147483751" r:id="rId7"/>
   </p:sldLayoutIdLst>
-  <p:hf hdr="0" ftr="0" dt="0"/>
+  <p:hf hdr="0"/>
   <p:txStyles>
     <p:titleStyle>
       <a:lvl1pPr algn="l" rtl="0" eaLnBrk="1" fontAlgn="base" hangingPunct="1">
@@ -3644,7 +3230,7 @@
         <a:spcAft>
           <a:spcPct val="0"/>
         </a:spcAft>
-        <a:defRPr sz="3200" b="1">
+        <a:defRPr b="1">
           <a:solidFill>
             <a:srgbClr val="A8CC2F"/>
           </a:solidFill>
@@ -4057,30 +3643,69 @@
       </p:grpSpPr>
       <p:sp>
         <p:nvSpPr>
-          <p:cNvPr id="2" name="Untertitel 1">
-            <a:extLst>
-              <a:ext uri="{FF2B5EF4-FFF2-40B4-BE49-F238E27FC236}">
-                <a16:creationId xmlns:a16="http://schemas.microsoft.com/office/drawing/2014/main" id="{B127D0AE-943F-5B24-AF1D-9467215FE8B7}"/>
-              </a:ext>
-            </a:extLst>
-          </p:cNvPr>
-          <p:cNvSpPr>
-            <a:spLocks noGrp="1"/>
-          </p:cNvSpPr>
-          <p:nvPr>
-            <p:ph type="subTitle" idx="1"/>
+          <p:cNvPr id="3" name="Titel 2">
+            <a:extLst>
+              <a:ext uri="{FF2B5EF4-FFF2-40B4-BE49-F238E27FC236}">
+                <a16:creationId xmlns:a16="http://schemas.microsoft.com/office/drawing/2014/main" id="{CB476EBB-4D93-C7B4-2E1A-4A6262020142}"/>
+              </a:ext>
+            </a:extLst>
+          </p:cNvPr>
+          <p:cNvSpPr>
+            <a:spLocks noGrp="1"/>
+          </p:cNvSpPr>
+          <p:nvPr>
+            <p:ph type="title"/>
           </p:nvPr>
         </p:nvSpPr>
         <p:spPr>
           <a:xfrm>
-            <a:off x="1828800" y="3494690"/>
-            <a:ext cx="8534400" cy="1752600"/>
+            <a:off x="4470883" y="2288322"/>
+            <a:ext cx="5392784" cy="1444082"/>
           </a:xfrm>
         </p:spPr>
         <p:txBody>
           <a:bodyPr/>
           <a:lstStyle/>
           <a:p>
+            <a:r>
+              <a:rPr lang="de-DE" sz="4800" dirty="0"/>
+              <a:t>Seminaraufgabe 2</a:t>
+            </a:r>
+          </a:p>
+        </p:txBody>
+      </p:sp>
+      <p:sp>
+        <p:nvSpPr>
+          <p:cNvPr id="2" name="Untertitel 1">
+            <a:extLst>
+              <a:ext uri="{FF2B5EF4-FFF2-40B4-BE49-F238E27FC236}">
+                <a16:creationId xmlns:a16="http://schemas.microsoft.com/office/drawing/2014/main" id="{B127D0AE-943F-5B24-AF1D-9467215FE8B7}"/>
+              </a:ext>
+            </a:extLst>
+          </p:cNvPr>
+          <p:cNvSpPr>
+            <a:spLocks noGrp="1"/>
+          </p:cNvSpPr>
+          <p:nvPr>
+            <p:ph type="subTitle" idx="4294967295"/>
+          </p:nvPr>
+        </p:nvSpPr>
+        <p:spPr>
+          <a:xfrm>
+            <a:off x="4470883" y="3732404"/>
+            <a:ext cx="4063517" cy="1752600"/>
+          </a:xfrm>
+          <a:prstGeom prst="rect">
+            <a:avLst/>
+          </a:prstGeom>
+        </p:spPr>
+        <p:txBody>
+          <a:bodyPr/>
+          <a:lstStyle/>
+          <a:p>
+            <a:pPr marL="0" indent="0">
+              <a:buNone/>
+            </a:pPr>
             <a:r>
               <a:rPr lang="de-DE" sz="2000" b="1" dirty="0">
                 <a:solidFill>
@@ -4089,23 +3714,10 @@
                   </a:schemeClr>
                 </a:solidFill>
                 <a:effectLst/>
-                <a:latin typeface="Menlo" panose="020B0609030804020204" pitchFamily="49" charset="0"/>
               </a:rPr>
-              <a:t>Benjamin </a:t>
-            </a:r>
-            <a:r>
-              <a:rPr lang="de-DE" sz="2000" b="1" dirty="0" err="1">
-                <a:solidFill>
-                  <a:schemeClr val="bg1">
-                    <a:lumMod val="50000"/>
-                  </a:schemeClr>
-                </a:solidFill>
-                <a:effectLst/>
-                <a:latin typeface="Menlo" panose="020B0609030804020204" pitchFamily="49" charset="0"/>
-              </a:rPr>
-              <a:t>Gielczynski</a:t>
-            </a:r>
-            <a:r>
+              <a:t>Benjamin Gielczynski, </a:t>
+            </a:r>
+            <a:br>
               <a:rPr lang="de-DE" sz="2000" b="1" dirty="0">
                 <a:solidFill>
                   <a:schemeClr val="bg1">
@@ -4113,9 +3725,81 @@
                   </a:schemeClr>
                 </a:solidFill>
                 <a:effectLst/>
-                <a:latin typeface="Menlo" panose="020B0609030804020204" pitchFamily="49" charset="0"/>
               </a:rPr>
-              <a:t>, David von Rüden, Tim Giese, Victor Domke, Simon Brockhoff</a:t>
+            </a:br>
+            <a:r>
+              <a:rPr lang="de-DE" sz="2000" b="1" dirty="0">
+                <a:solidFill>
+                  <a:schemeClr val="bg1">
+                    <a:lumMod val="50000"/>
+                  </a:schemeClr>
+                </a:solidFill>
+                <a:effectLst/>
+              </a:rPr>
+              <a:t>David von Rüden, </a:t>
+            </a:r>
+            <a:br>
+              <a:rPr lang="de-DE" sz="2000" b="1" dirty="0">
+                <a:solidFill>
+                  <a:schemeClr val="bg1">
+                    <a:lumMod val="50000"/>
+                  </a:schemeClr>
+                </a:solidFill>
+                <a:effectLst/>
+              </a:rPr>
+            </a:br>
+            <a:r>
+              <a:rPr lang="de-DE" sz="2000" b="1" dirty="0">
+                <a:solidFill>
+                  <a:schemeClr val="bg1">
+                    <a:lumMod val="50000"/>
+                  </a:schemeClr>
+                </a:solidFill>
+                <a:effectLst/>
+              </a:rPr>
+              <a:t>Tim Giese, </a:t>
+            </a:r>
+            <a:br>
+              <a:rPr lang="de-DE" sz="2000" b="1" dirty="0">
+                <a:solidFill>
+                  <a:schemeClr val="bg1">
+                    <a:lumMod val="50000"/>
+                  </a:schemeClr>
+                </a:solidFill>
+                <a:effectLst/>
+              </a:rPr>
+            </a:br>
+            <a:r>
+              <a:rPr lang="de-DE" sz="2000" b="1" dirty="0">
+                <a:solidFill>
+                  <a:schemeClr val="bg1">
+                    <a:lumMod val="50000"/>
+                  </a:schemeClr>
+                </a:solidFill>
+                <a:effectLst/>
+              </a:rPr>
+              <a:t>Victor Domke, </a:t>
+            </a:r>
+            <a:br>
+              <a:rPr lang="de-DE" sz="2000" b="1" dirty="0">
+                <a:solidFill>
+                  <a:schemeClr val="bg1">
+                    <a:lumMod val="50000"/>
+                  </a:schemeClr>
+                </a:solidFill>
+                <a:effectLst/>
+              </a:rPr>
+            </a:br>
+            <a:r>
+              <a:rPr lang="de-DE" sz="2000" b="1" dirty="0">
+                <a:solidFill>
+                  <a:schemeClr val="bg1">
+                    <a:lumMod val="50000"/>
+                  </a:schemeClr>
+                </a:solidFill>
+                <a:effectLst/>
+              </a:rPr>
+              <a:t>Simon Brockhoff</a:t>
             </a:r>
             <a:endParaRPr lang="de-DE" sz="2000" b="0" dirty="0">
               <a:solidFill>
@@ -4124,42 +3808,7 @@
                 </a:schemeClr>
               </a:solidFill>
               <a:effectLst/>
-              <a:latin typeface="Menlo" panose="020B0609030804020204" pitchFamily="49" charset="0"/>
             </a:endParaRPr>
-          </a:p>
-        </p:txBody>
-      </p:sp>
-      <p:sp>
-        <p:nvSpPr>
-          <p:cNvPr id="3" name="Titel 2">
-            <a:extLst>
-              <a:ext uri="{FF2B5EF4-FFF2-40B4-BE49-F238E27FC236}">
-                <a16:creationId xmlns:a16="http://schemas.microsoft.com/office/drawing/2014/main" id="{CB476EBB-4D93-C7B4-2E1A-4A6262020142}"/>
-              </a:ext>
-            </a:extLst>
-          </p:cNvPr>
-          <p:cNvSpPr>
-            <a:spLocks noGrp="1"/>
-          </p:cNvSpPr>
-          <p:nvPr>
-            <p:ph type="title"/>
-          </p:nvPr>
-        </p:nvSpPr>
-        <p:spPr>
-          <a:xfrm>
-            <a:off x="1187231" y="2350377"/>
-            <a:ext cx="9817538" cy="1144313"/>
-          </a:xfrm>
-        </p:spPr>
-        <p:txBody>
-          <a:bodyPr/>
-          <a:lstStyle/>
-          <a:p>
-            <a:pPr algn="ctr"/>
-            <a:r>
-              <a:rPr lang="de-DE" sz="4800" dirty="0"/>
-              <a:t>Team 3: Seminaraufgabe 2</a:t>
-            </a:r>
           </a:p>
         </p:txBody>
       </p:sp>
@@ -4201,18 +3850,18 @@
       </p:grpSpPr>
       <p:sp>
         <p:nvSpPr>
-          <p:cNvPr id="5" name="Titel 4">
-            <a:extLst>
-              <a:ext uri="{FF2B5EF4-FFF2-40B4-BE49-F238E27FC236}">
-                <a16:creationId xmlns:a16="http://schemas.microsoft.com/office/drawing/2014/main" id="{D757B5A5-6051-FFCC-0340-6B2A2309AADC}"/>
-              </a:ext>
-            </a:extLst>
-          </p:cNvPr>
-          <p:cNvSpPr>
-            <a:spLocks noGrp="1"/>
-          </p:cNvSpPr>
-          <p:nvPr>
-            <p:ph type="title"/>
+          <p:cNvPr id="4" name="Foliennummernplatzhalter 3">
+            <a:extLst>
+              <a:ext uri="{FF2B5EF4-FFF2-40B4-BE49-F238E27FC236}">
+                <a16:creationId xmlns:a16="http://schemas.microsoft.com/office/drawing/2014/main" id="{953E53DE-A460-5286-4612-B8186AA66233}"/>
+              </a:ext>
+            </a:extLst>
+          </p:cNvPr>
+          <p:cNvSpPr>
+            <a:spLocks noGrp="1"/>
+          </p:cNvSpPr>
+          <p:nvPr>
+            <p:ph type="sldNum" sz="quarter" idx="10"/>
           </p:nvPr>
         </p:nvSpPr>
         <p:spPr/>
@@ -4220,18 +3869,17 @@
           <a:bodyPr/>
           <a:lstStyle/>
           <a:p>
-            <a:r>
-              <a:rPr lang="de-DE" dirty="0"/>
-              <a:t>Visualisierung:</a:t>
-            </a:r>
-            <a:br>
-              <a:rPr lang="de-DE" dirty="0"/>
-            </a:br>
-            <a:r>
-              <a:rPr lang="de-DE" sz="2400" dirty="0"/>
-              <a:t>Ansicht einer Position beider Channel</a:t>
-            </a:r>
-            <a:endParaRPr lang="de-DE" dirty="0"/>
+            <a:pPr>
+              <a:defRPr/>
+            </a:pPr>
+            <a:fld id="{A0424531-ACBB-43B0-9536-C2FB0D769E6C}" type="slidenum">
+              <a:rPr lang="de-DE" altLang="de-DE" smtClean="0"/>
+              <a:pPr>
+                <a:defRPr/>
+              </a:pPr>
+              <a:t>10</a:t>
+            </a:fld>
+            <a:endParaRPr lang="de-DE" altLang="de-DE" dirty="0"/>
           </a:p>
         </p:txBody>
       </p:sp>
@@ -4248,20 +3896,20 @@
             <a:picLocks noGrp="1" noChangeAspect="1"/>
           </p:cNvPicPr>
           <p:nvPr>
-            <p:ph idx="1"/>
+            <p:ph sz="quarter" idx="13"/>
           </p:nvPr>
         </p:nvPicPr>
         <p:blipFill rotWithShape="1">
-          <a:blip r:embed="rId2"/>
-          <a:srcRect b="66742"/>
+          <a:blip r:embed="rId3"/>
+          <a:srcRect b="66758"/>
           <a:stretch>
             <a:fillRect/>
           </a:stretch>
         </p:blipFill>
         <p:spPr bwMode="auto">
           <a:xfrm>
-            <a:off x="201201" y="1510004"/>
-            <a:ext cx="11381199" cy="4877888"/>
+            <a:off x="343200" y="1361595"/>
+            <a:ext cx="11505600" cy="4928805"/>
           </a:xfrm>
           <a:prstGeom prst="rect">
             <a:avLst/>
@@ -4293,18 +3941,59 @@
       </p:pic>
       <p:sp>
         <p:nvSpPr>
-          <p:cNvPr id="4" name="Foliennummernplatzhalter 3">
-            <a:extLst>
-              <a:ext uri="{FF2B5EF4-FFF2-40B4-BE49-F238E27FC236}">
-                <a16:creationId xmlns:a16="http://schemas.microsoft.com/office/drawing/2014/main" id="{953E53DE-A460-5286-4612-B8186AA66233}"/>
-              </a:ext>
-            </a:extLst>
-          </p:cNvPr>
-          <p:cNvSpPr>
-            <a:spLocks noGrp="1"/>
-          </p:cNvSpPr>
-          <p:nvPr>
-            <p:ph type="sldNum" sz="quarter" idx="10"/>
+          <p:cNvPr id="5" name="Titel 4">
+            <a:extLst>
+              <a:ext uri="{FF2B5EF4-FFF2-40B4-BE49-F238E27FC236}">
+                <a16:creationId xmlns:a16="http://schemas.microsoft.com/office/drawing/2014/main" id="{D757B5A5-6051-FFCC-0340-6B2A2309AADC}"/>
+              </a:ext>
+            </a:extLst>
+          </p:cNvPr>
+          <p:cNvSpPr>
+            <a:spLocks noGrp="1"/>
+          </p:cNvSpPr>
+          <p:nvPr>
+            <p:ph type="title"/>
+          </p:nvPr>
+        </p:nvSpPr>
+        <p:spPr>
+          <a:xfrm>
+            <a:off x="341811" y="567600"/>
+            <a:ext cx="5009678" cy="706030"/>
+          </a:xfrm>
+        </p:spPr>
+        <p:txBody>
+          <a:bodyPr/>
+          <a:lstStyle/>
+          <a:p>
+            <a:r>
+              <a:rPr lang="de-DE" sz="3200" dirty="0"/>
+              <a:t>Visualisierung</a:t>
+            </a:r>
+            <a:br>
+              <a:rPr lang="de-DE" dirty="0"/>
+            </a:br>
+            <a:r>
+              <a:rPr lang="de-DE" sz="2400" dirty="0"/>
+              <a:t>Ansicht einer Position beider Channel</a:t>
+            </a:r>
+            <a:endParaRPr lang="de-DE" dirty="0"/>
+          </a:p>
+        </p:txBody>
+      </p:sp>
+      <p:sp>
+        <p:nvSpPr>
+          <p:cNvPr id="2" name="Datumsplatzhalter 1">
+            <a:extLst>
+              <a:ext uri="{FF2B5EF4-FFF2-40B4-BE49-F238E27FC236}">
+                <a16:creationId xmlns:a16="http://schemas.microsoft.com/office/drawing/2014/main" id="{CE98F3A7-4DE5-447B-E8E2-5AA1A1F5B2C0}"/>
+              </a:ext>
+            </a:extLst>
+          </p:cNvPr>
+          <p:cNvSpPr>
+            <a:spLocks noGrp="1"/>
+          </p:cNvSpPr>
+          <p:nvPr>
+            <p:ph type="dt" sz="half" idx="12"/>
           </p:nvPr>
         </p:nvSpPr>
         <p:spPr/>
@@ -4312,17 +4001,39 @@
           <a:bodyPr/>
           <a:lstStyle/>
           <a:p>
-            <a:pPr>
-              <a:defRPr/>
-            </a:pPr>
-            <a:fld id="{A0424531-ACBB-43B0-9536-C2FB0D769E6C}" type="slidenum">
-              <a:rPr lang="de-DE" altLang="de-DE" smtClean="0"/>
-              <a:pPr>
-                <a:defRPr/>
-              </a:pPr>
-              <a:t>10</a:t>
-            </a:fld>
-            <a:endParaRPr lang="de-DE" altLang="de-DE" dirty="0"/>
+            <a:r>
+              <a:rPr lang="de-DE"/>
+              <a:t>25.06.2026</a:t>
+            </a:r>
+          </a:p>
+        </p:txBody>
+      </p:sp>
+      <p:sp>
+        <p:nvSpPr>
+          <p:cNvPr id="6" name="Fußzeilenplatzhalter 5">
+            <a:extLst>
+              <a:ext uri="{FF2B5EF4-FFF2-40B4-BE49-F238E27FC236}">
+                <a16:creationId xmlns:a16="http://schemas.microsoft.com/office/drawing/2014/main" id="{8AEF4587-D828-91EE-B123-AA8CB8A7F45A}"/>
+              </a:ext>
+            </a:extLst>
+          </p:cNvPr>
+          <p:cNvSpPr>
+            <a:spLocks noGrp="1"/>
+          </p:cNvSpPr>
+          <p:nvPr>
+            <p:ph type="ftr" sz="quarter" idx="11"/>
+          </p:nvPr>
+        </p:nvSpPr>
+        <p:spPr/>
+        <p:txBody>
+          <a:bodyPr/>
+          <a:lstStyle/>
+          <a:p>
+            <a:r>
+              <a:rPr lang="de-DE"/>
+              <a:t>Materialdiagnostik: Task 2</a:t>
+            </a:r>
+            <a:endParaRPr lang="de-DE" dirty="0"/>
           </a:p>
         </p:txBody>
       </p:sp>
@@ -4358,42 +4069,36 @@
       </p:grpSpPr>
       <p:sp>
         <p:nvSpPr>
-          <p:cNvPr id="2" name="Titel 1">
-            <a:extLst>
-              <a:ext uri="{FF2B5EF4-FFF2-40B4-BE49-F238E27FC236}">
-                <a16:creationId xmlns:a16="http://schemas.microsoft.com/office/drawing/2014/main" id="{CF324D3E-0F2F-AB0F-B173-23CAC68258D5}"/>
-              </a:ext>
-            </a:extLst>
-          </p:cNvPr>
-          <p:cNvSpPr>
-            <a:spLocks noGrp="1"/>
-          </p:cNvSpPr>
-          <p:nvPr>
-            <p:ph type="title"/>
-          </p:nvPr>
-        </p:nvSpPr>
-        <p:spPr>
-          <a:xfrm>
-            <a:off x="914400" y="609600"/>
-            <a:ext cx="7137918" cy="1143000"/>
-          </a:xfrm>
-        </p:spPr>
-        <p:txBody>
-          <a:bodyPr/>
-          <a:lstStyle/>
-          <a:p>
-            <a:r>
-              <a:rPr lang="de-DE" dirty="0"/>
-              <a:t>Visualisierung:</a:t>
-            </a:r>
-            <a:br>
-              <a:rPr lang="de-DE" dirty="0"/>
-            </a:br>
-            <a:r>
-              <a:rPr lang="de-DE" sz="2400" dirty="0"/>
-              <a:t>Unterschiedlich viele Messungen der Zahnräder</a:t>
-            </a:r>
-            <a:endParaRPr lang="de-DE" dirty="0"/>
+          <p:cNvPr id="4" name="Foliennummernplatzhalter 3">
+            <a:extLst>
+              <a:ext uri="{FF2B5EF4-FFF2-40B4-BE49-F238E27FC236}">
+                <a16:creationId xmlns:a16="http://schemas.microsoft.com/office/drawing/2014/main" id="{18FD1414-35C8-6A57-2C40-93B37217933C}"/>
+              </a:ext>
+            </a:extLst>
+          </p:cNvPr>
+          <p:cNvSpPr>
+            <a:spLocks noGrp="1"/>
+          </p:cNvSpPr>
+          <p:nvPr>
+            <p:ph type="sldNum" sz="quarter" idx="10"/>
+          </p:nvPr>
+        </p:nvSpPr>
+        <p:spPr/>
+        <p:txBody>
+          <a:bodyPr/>
+          <a:lstStyle/>
+          <a:p>
+            <a:pPr>
+              <a:defRPr/>
+            </a:pPr>
+            <a:fld id="{A0424531-ACBB-43B0-9536-C2FB0D769E6C}" type="slidenum">
+              <a:rPr lang="de-DE" altLang="de-DE" smtClean="0"/>
+              <a:pPr>
+                <a:defRPr/>
+              </a:pPr>
+              <a:t>11</a:t>
+            </a:fld>
+            <a:endParaRPr lang="de-DE" altLang="de-DE" dirty="0"/>
           </a:p>
         </p:txBody>
       </p:sp>
@@ -4410,20 +4115,20 @@
             <a:picLocks noGrp="1" noChangeAspect="1"/>
           </p:cNvPicPr>
           <p:nvPr>
-            <p:ph idx="1"/>
+            <p:ph sz="quarter" idx="13"/>
           </p:nvPr>
         </p:nvPicPr>
         <p:blipFill rotWithShape="1">
           <a:blip r:embed="rId2"/>
-          <a:srcRect t="33031" b="33123"/>
+          <a:srcRect t="33412" b="33339"/>
           <a:stretch>
             <a:fillRect/>
           </a:stretch>
         </p:blipFill>
         <p:spPr bwMode="auto">
           <a:xfrm>
-            <a:off x="117225" y="1472681"/>
-            <a:ext cx="11465175" cy="5000764"/>
+            <a:off x="343200" y="1360800"/>
+            <a:ext cx="11505600" cy="4929857"/>
           </a:xfrm>
           <a:prstGeom prst="rect">
             <a:avLst/>
@@ -4455,18 +4160,59 @@
       </p:pic>
       <p:sp>
         <p:nvSpPr>
-          <p:cNvPr id="4" name="Foliennummernplatzhalter 3">
-            <a:extLst>
-              <a:ext uri="{FF2B5EF4-FFF2-40B4-BE49-F238E27FC236}">
-                <a16:creationId xmlns:a16="http://schemas.microsoft.com/office/drawing/2014/main" id="{18FD1414-35C8-6A57-2C40-93B37217933C}"/>
-              </a:ext>
-            </a:extLst>
-          </p:cNvPr>
-          <p:cNvSpPr>
-            <a:spLocks noGrp="1"/>
-          </p:cNvSpPr>
-          <p:nvPr>
-            <p:ph type="sldNum" sz="quarter" idx="10"/>
+          <p:cNvPr id="2" name="Titel 1">
+            <a:extLst>
+              <a:ext uri="{FF2B5EF4-FFF2-40B4-BE49-F238E27FC236}">
+                <a16:creationId xmlns:a16="http://schemas.microsoft.com/office/drawing/2014/main" id="{CF324D3E-0F2F-AB0F-B173-23CAC68258D5}"/>
+              </a:ext>
+            </a:extLst>
+          </p:cNvPr>
+          <p:cNvSpPr>
+            <a:spLocks noGrp="1"/>
+          </p:cNvSpPr>
+          <p:nvPr>
+            <p:ph type="title"/>
+          </p:nvPr>
+        </p:nvSpPr>
+        <p:spPr>
+          <a:xfrm>
+            <a:off x="341811" y="567600"/>
+            <a:ext cx="6328812" cy="706030"/>
+          </a:xfrm>
+        </p:spPr>
+        <p:txBody>
+          <a:bodyPr/>
+          <a:lstStyle/>
+          <a:p>
+            <a:r>
+              <a:rPr lang="de-DE" sz="3200" dirty="0"/>
+              <a:t>Visualisierung</a:t>
+            </a:r>
+            <a:br>
+              <a:rPr lang="de-DE" dirty="0"/>
+            </a:br>
+            <a:r>
+              <a:rPr lang="de-DE" sz="2400" dirty="0"/>
+              <a:t>Unterschiedlich viele Messungen der Zahnräder</a:t>
+            </a:r>
+            <a:endParaRPr lang="de-DE" dirty="0"/>
+          </a:p>
+        </p:txBody>
+      </p:sp>
+      <p:sp>
+        <p:nvSpPr>
+          <p:cNvPr id="3" name="Datumsplatzhalter 2">
+            <a:extLst>
+              <a:ext uri="{FF2B5EF4-FFF2-40B4-BE49-F238E27FC236}">
+                <a16:creationId xmlns:a16="http://schemas.microsoft.com/office/drawing/2014/main" id="{10DEE32E-D555-A5C0-5E56-51A5968FB217}"/>
+              </a:ext>
+            </a:extLst>
+          </p:cNvPr>
+          <p:cNvSpPr>
+            <a:spLocks noGrp="1"/>
+          </p:cNvSpPr>
+          <p:nvPr>
+            <p:ph type="dt" sz="half" idx="12"/>
           </p:nvPr>
         </p:nvSpPr>
         <p:spPr/>
@@ -4474,17 +4220,39 @@
           <a:bodyPr/>
           <a:lstStyle/>
           <a:p>
-            <a:pPr>
-              <a:defRPr/>
-            </a:pPr>
-            <a:fld id="{A0424531-ACBB-43B0-9536-C2FB0D769E6C}" type="slidenum">
-              <a:rPr lang="de-DE" altLang="de-DE" smtClean="0"/>
-              <a:pPr>
-                <a:defRPr/>
-              </a:pPr>
-              <a:t>11</a:t>
-            </a:fld>
-            <a:endParaRPr lang="de-DE" altLang="de-DE" dirty="0"/>
+            <a:r>
+              <a:rPr lang="de-DE"/>
+              <a:t>25.06.2026</a:t>
+            </a:r>
+          </a:p>
+        </p:txBody>
+      </p:sp>
+      <p:sp>
+        <p:nvSpPr>
+          <p:cNvPr id="5" name="Fußzeilenplatzhalter 4">
+            <a:extLst>
+              <a:ext uri="{FF2B5EF4-FFF2-40B4-BE49-F238E27FC236}">
+                <a16:creationId xmlns:a16="http://schemas.microsoft.com/office/drawing/2014/main" id="{769D6D17-25F8-CC0D-9807-336DAF75B7C5}"/>
+              </a:ext>
+            </a:extLst>
+          </p:cNvPr>
+          <p:cNvSpPr>
+            <a:spLocks noGrp="1"/>
+          </p:cNvSpPr>
+          <p:nvPr>
+            <p:ph type="ftr" sz="quarter" idx="11"/>
+          </p:nvPr>
+        </p:nvSpPr>
+        <p:spPr/>
+        <p:txBody>
+          <a:bodyPr/>
+          <a:lstStyle/>
+          <a:p>
+            <a:r>
+              <a:rPr lang="de-DE"/>
+              <a:t>Materialdiagnostik: Task 2</a:t>
+            </a:r>
+            <a:endParaRPr lang="de-DE" dirty="0"/>
           </a:p>
         </p:txBody>
       </p:sp>
@@ -4526,42 +4294,36 @@
       </p:grpSpPr>
       <p:sp>
         <p:nvSpPr>
-          <p:cNvPr id="2" name="Titel 1">
-            <a:extLst>
-              <a:ext uri="{FF2B5EF4-FFF2-40B4-BE49-F238E27FC236}">
-                <a16:creationId xmlns:a16="http://schemas.microsoft.com/office/drawing/2014/main" id="{10501F1A-FCB7-133D-6F5D-FABA9A2F000C}"/>
-              </a:ext>
-            </a:extLst>
-          </p:cNvPr>
-          <p:cNvSpPr>
-            <a:spLocks noGrp="1"/>
-          </p:cNvSpPr>
-          <p:nvPr>
-            <p:ph type="title"/>
-          </p:nvPr>
-        </p:nvSpPr>
-        <p:spPr>
-          <a:xfrm>
-            <a:off x="914400" y="609600"/>
-            <a:ext cx="7137918" cy="1143000"/>
-          </a:xfrm>
-        </p:spPr>
-        <p:txBody>
-          <a:bodyPr/>
-          <a:lstStyle/>
-          <a:p>
-            <a:r>
-              <a:rPr lang="de-DE" dirty="0"/>
-              <a:t>Visualisierung:</a:t>
-            </a:r>
-            <a:br>
-              <a:rPr lang="de-DE" dirty="0"/>
-            </a:br>
-            <a:r>
-              <a:rPr lang="de-DE" sz="2400" dirty="0"/>
-              <a:t>Unterschiedlich viele Messungen der Zahnräder</a:t>
-            </a:r>
-            <a:endParaRPr lang="de-DE" dirty="0"/>
+          <p:cNvPr id="4" name="Foliennummernplatzhalter 3">
+            <a:extLst>
+              <a:ext uri="{FF2B5EF4-FFF2-40B4-BE49-F238E27FC236}">
+                <a16:creationId xmlns:a16="http://schemas.microsoft.com/office/drawing/2014/main" id="{A702F702-44A1-66E4-2B59-8E21067E4DCF}"/>
+              </a:ext>
+            </a:extLst>
+          </p:cNvPr>
+          <p:cNvSpPr>
+            <a:spLocks noGrp="1"/>
+          </p:cNvSpPr>
+          <p:nvPr>
+            <p:ph type="sldNum" sz="quarter" idx="10"/>
+          </p:nvPr>
+        </p:nvSpPr>
+        <p:spPr/>
+        <p:txBody>
+          <a:bodyPr/>
+          <a:lstStyle/>
+          <a:p>
+            <a:pPr>
+              <a:defRPr/>
+            </a:pPr>
+            <a:fld id="{A0424531-ACBB-43B0-9536-C2FB0D769E6C}" type="slidenum">
+              <a:rPr lang="de-DE" altLang="de-DE" smtClean="0"/>
+              <a:pPr>
+                <a:defRPr/>
+              </a:pPr>
+              <a:t>12</a:t>
+            </a:fld>
+            <a:endParaRPr lang="de-DE" altLang="de-DE" dirty="0"/>
           </a:p>
         </p:txBody>
       </p:sp>
@@ -4578,20 +4340,20 @@
             <a:picLocks noGrp="1" noChangeAspect="1"/>
           </p:cNvPicPr>
           <p:nvPr>
-            <p:ph idx="1"/>
+            <p:ph sz="quarter" idx="13"/>
           </p:nvPr>
         </p:nvPicPr>
         <p:blipFill rotWithShape="1">
           <a:blip r:embed="rId2"/>
-          <a:srcRect t="66668" b="-15547"/>
+          <a:srcRect t="66831"/>
           <a:stretch>
             <a:fillRect/>
           </a:stretch>
         </p:blipFill>
         <p:spPr bwMode="auto">
           <a:xfrm>
-            <a:off x="117225" y="1502230"/>
-            <a:ext cx="11465175" cy="7221892"/>
+            <a:off x="341809" y="1360800"/>
+            <a:ext cx="11505600" cy="4918008"/>
           </a:xfrm>
           <a:prstGeom prst="rect">
             <a:avLst/>
@@ -4623,18 +4385,58 @@
       </p:pic>
       <p:sp>
         <p:nvSpPr>
-          <p:cNvPr id="4" name="Foliennummernplatzhalter 3">
-            <a:extLst>
-              <a:ext uri="{FF2B5EF4-FFF2-40B4-BE49-F238E27FC236}">
-                <a16:creationId xmlns:a16="http://schemas.microsoft.com/office/drawing/2014/main" id="{A702F702-44A1-66E4-2B59-8E21067E4DCF}"/>
-              </a:ext>
-            </a:extLst>
-          </p:cNvPr>
-          <p:cNvSpPr>
-            <a:spLocks noGrp="1"/>
-          </p:cNvSpPr>
-          <p:nvPr>
-            <p:ph type="sldNum" sz="quarter" idx="10"/>
+          <p:cNvPr id="2" name="Titel 1">
+            <a:extLst>
+              <a:ext uri="{FF2B5EF4-FFF2-40B4-BE49-F238E27FC236}">
+                <a16:creationId xmlns:a16="http://schemas.microsoft.com/office/drawing/2014/main" id="{10501F1A-FCB7-133D-6F5D-FABA9A2F000C}"/>
+              </a:ext>
+            </a:extLst>
+          </p:cNvPr>
+          <p:cNvSpPr>
+            <a:spLocks noGrp="1"/>
+          </p:cNvSpPr>
+          <p:nvPr>
+            <p:ph type="title"/>
+          </p:nvPr>
+        </p:nvSpPr>
+        <p:spPr>
+          <a:xfrm>
+            <a:off x="341810" y="567600"/>
+            <a:ext cx="6306327" cy="706030"/>
+          </a:xfrm>
+        </p:spPr>
+        <p:txBody>
+          <a:bodyPr/>
+          <a:lstStyle/>
+          <a:p>
+            <a:r>
+              <a:rPr lang="de-DE" sz="3200" dirty="0"/>
+              <a:t>Visualisierung</a:t>
+            </a:r>
+            <a:br>
+              <a:rPr lang="de-DE" dirty="0"/>
+            </a:br>
+            <a:r>
+              <a:rPr lang="de-DE" dirty="0"/>
+              <a:t>Durchschnitt-Methode</a:t>
+            </a:r>
+          </a:p>
+        </p:txBody>
+      </p:sp>
+      <p:sp>
+        <p:nvSpPr>
+          <p:cNvPr id="3" name="Datumsplatzhalter 2">
+            <a:extLst>
+              <a:ext uri="{FF2B5EF4-FFF2-40B4-BE49-F238E27FC236}">
+                <a16:creationId xmlns:a16="http://schemas.microsoft.com/office/drawing/2014/main" id="{A6F37E5F-3907-6F85-DAC7-339604EB1496}"/>
+              </a:ext>
+            </a:extLst>
+          </p:cNvPr>
+          <p:cNvSpPr>
+            <a:spLocks noGrp="1"/>
+          </p:cNvSpPr>
+          <p:nvPr>
+            <p:ph type="dt" sz="half" idx="12"/>
           </p:nvPr>
         </p:nvSpPr>
         <p:spPr/>
@@ -4642,17 +4444,39 @@
           <a:bodyPr/>
           <a:lstStyle/>
           <a:p>
-            <a:pPr>
-              <a:defRPr/>
-            </a:pPr>
-            <a:fld id="{A0424531-ACBB-43B0-9536-C2FB0D769E6C}" type="slidenum">
-              <a:rPr lang="de-DE" altLang="de-DE" smtClean="0"/>
-              <a:pPr>
-                <a:defRPr/>
-              </a:pPr>
-              <a:t>12</a:t>
-            </a:fld>
-            <a:endParaRPr lang="de-DE" altLang="de-DE" dirty="0"/>
+            <a:r>
+              <a:rPr lang="de-DE"/>
+              <a:t>25.06.2026</a:t>
+            </a:r>
+          </a:p>
+        </p:txBody>
+      </p:sp>
+      <p:sp>
+        <p:nvSpPr>
+          <p:cNvPr id="5" name="Fußzeilenplatzhalter 4">
+            <a:extLst>
+              <a:ext uri="{FF2B5EF4-FFF2-40B4-BE49-F238E27FC236}">
+                <a16:creationId xmlns:a16="http://schemas.microsoft.com/office/drawing/2014/main" id="{B326B563-4C74-A0AC-BD19-B0D9D3AA03C6}"/>
+              </a:ext>
+            </a:extLst>
+          </p:cNvPr>
+          <p:cNvSpPr>
+            <a:spLocks noGrp="1"/>
+          </p:cNvSpPr>
+          <p:nvPr>
+            <p:ph type="ftr" sz="quarter" idx="11"/>
+          </p:nvPr>
+        </p:nvSpPr>
+        <p:spPr/>
+        <p:txBody>
+          <a:bodyPr/>
+          <a:lstStyle/>
+          <a:p>
+            <a:r>
+              <a:rPr lang="de-DE"/>
+              <a:t>Materialdiagnostik: Task 2</a:t>
+            </a:r>
+            <a:endParaRPr lang="de-DE" dirty="0"/>
           </a:p>
         </p:txBody>
       </p:sp>
@@ -4694,55 +4518,6 @@
       </p:grpSpPr>
       <p:sp>
         <p:nvSpPr>
-          <p:cNvPr id="2" name="Titel 1">
-            <a:extLst>
-              <a:ext uri="{FF2B5EF4-FFF2-40B4-BE49-F238E27FC236}">
-                <a16:creationId xmlns:a16="http://schemas.microsoft.com/office/drawing/2014/main" id="{77D077AA-8134-0C8E-A018-B8169899F662}"/>
-              </a:ext>
-            </a:extLst>
-          </p:cNvPr>
-          <p:cNvSpPr>
-            <a:spLocks noGrp="1"/>
-          </p:cNvSpPr>
-          <p:nvPr>
-            <p:ph type="title"/>
-          </p:nvPr>
-        </p:nvSpPr>
-        <p:spPr>
-          <a:xfrm>
-            <a:off x="914400" y="609600"/>
-            <a:ext cx="7137918" cy="1143000"/>
-          </a:xfrm>
-        </p:spPr>
-        <p:txBody>
-          <a:bodyPr/>
-          <a:lstStyle/>
-          <a:p>
-            <a:r>
-              <a:rPr lang="de-DE" dirty="0"/>
-              <a:t>Visualisierung:</a:t>
-            </a:r>
-            <a:br>
-              <a:rPr lang="de-DE" dirty="0"/>
-            </a:br>
-            <a:r>
-              <a:rPr lang="de-DE" sz="2400" dirty="0"/>
-              <a:t>Ausgewählte „</a:t>
-            </a:r>
-            <a:r>
-              <a:rPr lang="de-DE" sz="2400" dirty="0" err="1"/>
-              <a:t>mID</a:t>
-            </a:r>
-            <a:r>
-              <a:rPr lang="de-DE" sz="2400" dirty="0"/>
-              <a:t>“ für Z01 und Z04</a:t>
-            </a:r>
-            <a:endParaRPr lang="de-DE" dirty="0"/>
-          </a:p>
-        </p:txBody>
-      </p:sp>
-      <p:sp>
-        <p:nvSpPr>
           <p:cNvPr id="4" name="Foliennummernplatzhalter 3">
             <a:extLst>
               <a:ext uri="{FF2B5EF4-FFF2-40B4-BE49-F238E27FC236}">
@@ -4776,6 +4551,55 @@
           </a:p>
         </p:txBody>
       </p:sp>
+      <p:sp>
+        <p:nvSpPr>
+          <p:cNvPr id="2" name="Titel 1">
+            <a:extLst>
+              <a:ext uri="{FF2B5EF4-FFF2-40B4-BE49-F238E27FC236}">
+                <a16:creationId xmlns:a16="http://schemas.microsoft.com/office/drawing/2014/main" id="{77D077AA-8134-0C8E-A018-B8169899F662}"/>
+              </a:ext>
+            </a:extLst>
+          </p:cNvPr>
+          <p:cNvSpPr>
+            <a:spLocks noGrp="1"/>
+          </p:cNvSpPr>
+          <p:nvPr>
+            <p:ph type="title"/>
+          </p:nvPr>
+        </p:nvSpPr>
+        <p:spPr>
+          <a:xfrm>
+            <a:off x="341811" y="567600"/>
+            <a:ext cx="4844786" cy="706030"/>
+          </a:xfrm>
+        </p:spPr>
+        <p:txBody>
+          <a:bodyPr/>
+          <a:lstStyle/>
+          <a:p>
+            <a:r>
+              <a:rPr lang="de-DE" sz="3200" dirty="0"/>
+              <a:t>Visualisierung</a:t>
+            </a:r>
+            <a:br>
+              <a:rPr lang="de-DE" dirty="0"/>
+            </a:br>
+            <a:r>
+              <a:rPr lang="de-DE" sz="2400" dirty="0"/>
+              <a:t>Ausgewählte „</a:t>
+            </a:r>
+            <a:r>
+              <a:rPr lang="de-DE" sz="2400" dirty="0" err="1"/>
+              <a:t>mID</a:t>
+            </a:r>
+            <a:r>
+              <a:rPr lang="de-DE" sz="2400" dirty="0"/>
+              <a:t>“ für Z01 und Z04</a:t>
+            </a:r>
+            <a:endParaRPr lang="de-DE" dirty="0"/>
+          </a:p>
+        </p:txBody>
+      </p:sp>
       <p:pic>
         <p:nvPicPr>
           <p:cNvPr id="5" name="Grafik 4">
@@ -4792,21 +4616,78 @@
         </p:nvPicPr>
         <p:blipFill>
           <a:blip r:embed="rId2"/>
-          <a:srcRect b="75018"/>
+          <a:srcRect t="-36" b="75054"/>
           <a:stretch>
             <a:fillRect/>
           </a:stretch>
         </p:blipFill>
         <p:spPr>
           <a:xfrm>
-            <a:off x="796585" y="1609918"/>
-            <a:ext cx="10598829" cy="4718695"/>
+            <a:off x="341810" y="1360799"/>
+            <a:ext cx="11505600" cy="5122398"/>
           </a:xfrm>
           <a:prstGeom prst="rect">
             <a:avLst/>
           </a:prstGeom>
         </p:spPr>
       </p:pic>
+      <p:sp>
+        <p:nvSpPr>
+          <p:cNvPr id="6" name="Datumsplatzhalter 5">
+            <a:extLst>
+              <a:ext uri="{FF2B5EF4-FFF2-40B4-BE49-F238E27FC236}">
+                <a16:creationId xmlns:a16="http://schemas.microsoft.com/office/drawing/2014/main" id="{71B4C461-0198-1068-BC96-763CE6D3F62D}"/>
+              </a:ext>
+            </a:extLst>
+          </p:cNvPr>
+          <p:cNvSpPr>
+            <a:spLocks noGrp="1"/>
+          </p:cNvSpPr>
+          <p:nvPr>
+            <p:ph type="dt" sz="half" idx="12"/>
+          </p:nvPr>
+        </p:nvSpPr>
+        <p:spPr/>
+        <p:txBody>
+          <a:bodyPr/>
+          <a:lstStyle/>
+          <a:p>
+            <a:r>
+              <a:rPr lang="de-DE"/>
+              <a:t>25.06.2026</a:t>
+            </a:r>
+          </a:p>
+        </p:txBody>
+      </p:sp>
+      <p:sp>
+        <p:nvSpPr>
+          <p:cNvPr id="7" name="Fußzeilenplatzhalter 6">
+            <a:extLst>
+              <a:ext uri="{FF2B5EF4-FFF2-40B4-BE49-F238E27FC236}">
+                <a16:creationId xmlns:a16="http://schemas.microsoft.com/office/drawing/2014/main" id="{577BF275-4CD1-7013-A879-C0A89D49357B}"/>
+              </a:ext>
+            </a:extLst>
+          </p:cNvPr>
+          <p:cNvSpPr>
+            <a:spLocks noGrp="1"/>
+          </p:cNvSpPr>
+          <p:nvPr>
+            <p:ph type="ftr" sz="quarter" idx="11"/>
+          </p:nvPr>
+        </p:nvSpPr>
+        <p:spPr/>
+        <p:txBody>
+          <a:bodyPr/>
+          <a:lstStyle/>
+          <a:p>
+            <a:r>
+              <a:rPr lang="de-DE"/>
+              <a:t>Materialdiagnostik: Task 2</a:t>
+            </a:r>
+            <a:endParaRPr lang="de-DE" dirty="0"/>
+          </a:p>
+        </p:txBody>
+      </p:sp>
     </p:spTree>
     <p:extLst>
       <p:ext uri="{BB962C8B-B14F-4D97-AF65-F5344CB8AC3E}">
@@ -4845,59 +4726,6 @@
       </p:grpSpPr>
       <p:sp>
         <p:nvSpPr>
-          <p:cNvPr id="2" name="Titel 1">
-            <a:extLst>
-              <a:ext uri="{FF2B5EF4-FFF2-40B4-BE49-F238E27FC236}">
-                <a16:creationId xmlns:a16="http://schemas.microsoft.com/office/drawing/2014/main" id="{11DF8090-BADC-27B4-F673-12947654E7F5}"/>
-              </a:ext>
-            </a:extLst>
-          </p:cNvPr>
-          <p:cNvSpPr>
-            <a:spLocks noGrp="1"/>
-          </p:cNvSpPr>
-          <p:nvPr>
-            <p:ph type="title"/>
-          </p:nvPr>
-        </p:nvSpPr>
-        <p:spPr>
-          <a:xfrm>
-            <a:off x="914400" y="609600"/>
-            <a:ext cx="7137918" cy="1143000"/>
-          </a:xfrm>
-        </p:spPr>
-        <p:txBody>
-          <a:bodyPr/>
-          <a:lstStyle/>
-          <a:p>
-            <a:r>
-              <a:rPr lang="de-DE" dirty="0"/>
-              <a:t>Visualisierung:</a:t>
-            </a:r>
-            <a:br>
-              <a:rPr lang="de-DE" dirty="0"/>
-            </a:br>
-            <a:r>
-              <a:rPr lang="de-DE" sz="2400" dirty="0" err="1"/>
-              <a:t>Duchschnitts</a:t>
-            </a:r>
-            <a:r>
-              <a:rPr lang="de-DE" sz="2400" dirty="0"/>
-              <a:t>-Methode mit beiden „</a:t>
-            </a:r>
-            <a:r>
-              <a:rPr lang="de-DE" sz="2400" dirty="0" err="1"/>
-              <a:t>rID</a:t>
-            </a:r>
-            <a:r>
-              <a:rPr lang="de-DE" sz="2400" dirty="0"/>
-              <a:t>“</a:t>
-            </a:r>
-            <a:endParaRPr lang="de-DE" dirty="0"/>
-          </a:p>
-        </p:txBody>
-      </p:sp>
-      <p:sp>
-        <p:nvSpPr>
           <p:cNvPr id="4" name="Foliennummernplatzhalter 3">
             <a:extLst>
               <a:ext uri="{FF2B5EF4-FFF2-40B4-BE49-F238E27FC236}">
@@ -4931,6 +4759,55 @@
           </a:p>
         </p:txBody>
       </p:sp>
+      <p:sp>
+        <p:nvSpPr>
+          <p:cNvPr id="2" name="Titel 1">
+            <a:extLst>
+              <a:ext uri="{FF2B5EF4-FFF2-40B4-BE49-F238E27FC236}">
+                <a16:creationId xmlns:a16="http://schemas.microsoft.com/office/drawing/2014/main" id="{11DF8090-BADC-27B4-F673-12947654E7F5}"/>
+              </a:ext>
+            </a:extLst>
+          </p:cNvPr>
+          <p:cNvSpPr>
+            <a:spLocks noGrp="1"/>
+          </p:cNvSpPr>
+          <p:nvPr>
+            <p:ph type="title"/>
+          </p:nvPr>
+        </p:nvSpPr>
+        <p:spPr>
+          <a:xfrm>
+            <a:off x="341810" y="567600"/>
+            <a:ext cx="5354451" cy="706030"/>
+          </a:xfrm>
+        </p:spPr>
+        <p:txBody>
+          <a:bodyPr/>
+          <a:lstStyle/>
+          <a:p>
+            <a:r>
+              <a:rPr lang="de-DE" sz="3200" dirty="0"/>
+              <a:t>Visualisierung</a:t>
+            </a:r>
+            <a:br>
+              <a:rPr lang="de-DE" dirty="0"/>
+            </a:br>
+            <a:r>
+              <a:rPr lang="de-DE" sz="2400" dirty="0"/>
+              <a:t>Durchschnitts-Methode mit beiden „</a:t>
+            </a:r>
+            <a:r>
+              <a:rPr lang="de-DE" sz="2400" dirty="0" err="1"/>
+              <a:t>rID</a:t>
+            </a:r>
+            <a:r>
+              <a:rPr lang="de-DE" sz="2400" dirty="0"/>
+              <a:t>“</a:t>
+            </a:r>
+            <a:endParaRPr lang="de-DE" dirty="0"/>
+          </a:p>
+        </p:txBody>
+      </p:sp>
       <p:pic>
         <p:nvPicPr>
           <p:cNvPr id="5" name="Grafik 4">
@@ -4947,21 +4824,78 @@
         </p:nvPicPr>
         <p:blipFill>
           <a:blip r:embed="rId2"/>
-          <a:srcRect t="75053" b="-35"/>
+          <a:srcRect l="67" t="74907" r="-67" b="111"/>
           <a:stretch>
             <a:fillRect/>
           </a:stretch>
         </p:blipFill>
         <p:spPr>
           <a:xfrm>
-            <a:off x="796585" y="1609918"/>
-            <a:ext cx="10598829" cy="4718695"/>
+            <a:off x="343200" y="1360800"/>
+            <a:ext cx="11505600" cy="5122398"/>
           </a:xfrm>
           <a:prstGeom prst="rect">
             <a:avLst/>
           </a:prstGeom>
         </p:spPr>
       </p:pic>
+      <p:sp>
+        <p:nvSpPr>
+          <p:cNvPr id="6" name="Datumsplatzhalter 5">
+            <a:extLst>
+              <a:ext uri="{FF2B5EF4-FFF2-40B4-BE49-F238E27FC236}">
+                <a16:creationId xmlns:a16="http://schemas.microsoft.com/office/drawing/2014/main" id="{9CD15804-53A8-F6A6-4020-8B7067A69EC8}"/>
+              </a:ext>
+            </a:extLst>
+          </p:cNvPr>
+          <p:cNvSpPr>
+            <a:spLocks noGrp="1"/>
+          </p:cNvSpPr>
+          <p:nvPr>
+            <p:ph type="dt" sz="half" idx="12"/>
+          </p:nvPr>
+        </p:nvSpPr>
+        <p:spPr/>
+        <p:txBody>
+          <a:bodyPr/>
+          <a:lstStyle/>
+          <a:p>
+            <a:r>
+              <a:rPr lang="de-DE"/>
+              <a:t>25.06.2026</a:t>
+            </a:r>
+          </a:p>
+        </p:txBody>
+      </p:sp>
+      <p:sp>
+        <p:nvSpPr>
+          <p:cNvPr id="7" name="Fußzeilenplatzhalter 6">
+            <a:extLst>
+              <a:ext uri="{FF2B5EF4-FFF2-40B4-BE49-F238E27FC236}">
+                <a16:creationId xmlns:a16="http://schemas.microsoft.com/office/drawing/2014/main" id="{61398641-4C2C-6031-67B2-033E0BC9BEAF}"/>
+              </a:ext>
+            </a:extLst>
+          </p:cNvPr>
+          <p:cNvSpPr>
+            <a:spLocks noGrp="1"/>
+          </p:cNvSpPr>
+          <p:nvPr>
+            <p:ph type="ftr" sz="quarter" idx="11"/>
+          </p:nvPr>
+        </p:nvSpPr>
+        <p:spPr/>
+        <p:txBody>
+          <a:bodyPr/>
+          <a:lstStyle/>
+          <a:p>
+            <a:r>
+              <a:rPr lang="de-DE"/>
+              <a:t>Materialdiagnostik: Task 2</a:t>
+            </a:r>
+            <a:endParaRPr lang="de-DE" dirty="0"/>
+          </a:p>
+        </p:txBody>
+      </p:sp>
     </p:spTree>
     <p:extLst>
       <p:ext uri="{BB962C8B-B14F-4D97-AF65-F5344CB8AC3E}">
@@ -5000,47 +4934,6 @@
       </p:grpSpPr>
       <p:sp>
         <p:nvSpPr>
-          <p:cNvPr id="2" name="Titel 1">
-            <a:extLst>
-              <a:ext uri="{FF2B5EF4-FFF2-40B4-BE49-F238E27FC236}">
-                <a16:creationId xmlns:a16="http://schemas.microsoft.com/office/drawing/2014/main" id="{6697FF2F-4ABD-DBF1-1A9F-CD59B441583D}"/>
-              </a:ext>
-            </a:extLst>
-          </p:cNvPr>
-          <p:cNvSpPr>
-            <a:spLocks noGrp="1"/>
-          </p:cNvSpPr>
-          <p:nvPr>
-            <p:ph type="title"/>
-          </p:nvPr>
-        </p:nvSpPr>
-        <p:spPr>
-          <a:xfrm>
-            <a:off x="914400" y="609600"/>
-            <a:ext cx="7137918" cy="1143000"/>
-          </a:xfrm>
-        </p:spPr>
-        <p:txBody>
-          <a:bodyPr/>
-          <a:lstStyle/>
-          <a:p>
-            <a:r>
-              <a:rPr lang="de-DE" dirty="0"/>
-              <a:t>Visualisierung:</a:t>
-            </a:r>
-            <a:br>
-              <a:rPr lang="de-DE" dirty="0"/>
-            </a:br>
-            <a:r>
-              <a:rPr lang="de-DE" sz="2400" dirty="0"/>
-              <a:t>Kompletter Datensatz ohne Durchschnitt</a:t>
-            </a:r>
-            <a:endParaRPr lang="de-DE" dirty="0"/>
-          </a:p>
-        </p:txBody>
-      </p:sp>
-      <p:sp>
-        <p:nvSpPr>
           <p:cNvPr id="4" name="Foliennummernplatzhalter 3">
             <a:extLst>
               <a:ext uri="{FF2B5EF4-FFF2-40B4-BE49-F238E27FC236}">
@@ -5071,6 +4964,58 @@
               <a:t>15</a:t>
             </a:fld>
             <a:endParaRPr lang="de-DE" altLang="de-DE" dirty="0"/>
+          </a:p>
+        </p:txBody>
+      </p:sp>
+      <p:sp>
+        <p:nvSpPr>
+          <p:cNvPr id="2" name="Titel 1">
+            <a:extLst>
+              <a:ext uri="{FF2B5EF4-FFF2-40B4-BE49-F238E27FC236}">
+                <a16:creationId xmlns:a16="http://schemas.microsoft.com/office/drawing/2014/main" id="{6697FF2F-4ABD-DBF1-1A9F-CD59B441583D}"/>
+              </a:ext>
+            </a:extLst>
+          </p:cNvPr>
+          <p:cNvSpPr>
+            <a:spLocks noGrp="1"/>
+          </p:cNvSpPr>
+          <p:nvPr>
+            <p:ph type="title"/>
+          </p:nvPr>
+        </p:nvSpPr>
+        <p:spPr>
+          <a:xfrm>
+            <a:off x="341810" y="567600"/>
+            <a:ext cx="5391927" cy="706030"/>
+          </a:xfrm>
+        </p:spPr>
+        <p:txBody>
+          <a:bodyPr/>
+          <a:lstStyle/>
+          <a:p>
+            <a:r>
+              <a:rPr lang="de-DE" sz="3200" dirty="0"/>
+              <a:t>Visualisierung</a:t>
+            </a:r>
+            <a:br>
+              <a:rPr lang="de-DE" dirty="0"/>
+            </a:br>
+            <a:r>
+              <a:rPr lang="de-DE" sz="2400" dirty="0"/>
+              <a:t>Kompletter Datensatz </a:t>
+            </a:r>
+            <a:r>
+              <a:rPr lang="de-DE" dirty="0"/>
+              <a:t>mit allen „</a:t>
+            </a:r>
+            <a:r>
+              <a:rPr lang="de-DE" dirty="0" err="1"/>
+              <a:t>mID</a:t>
+            </a:r>
+            <a:r>
+              <a:rPr lang="de-DE" dirty="0"/>
+              <a:t>“</a:t>
+            </a:r>
           </a:p>
         </p:txBody>
       </p:sp>
@@ -5097,14 +5042,71 @@
         </p:blipFill>
         <p:spPr>
           <a:xfrm>
-            <a:off x="796585" y="1609918"/>
-            <a:ext cx="10598829" cy="4718695"/>
+            <a:off x="341810" y="1360799"/>
+            <a:ext cx="11505600" cy="5122398"/>
           </a:xfrm>
           <a:prstGeom prst="rect">
             <a:avLst/>
           </a:prstGeom>
         </p:spPr>
       </p:pic>
+      <p:sp>
+        <p:nvSpPr>
+          <p:cNvPr id="6" name="Datumsplatzhalter 5">
+            <a:extLst>
+              <a:ext uri="{FF2B5EF4-FFF2-40B4-BE49-F238E27FC236}">
+                <a16:creationId xmlns:a16="http://schemas.microsoft.com/office/drawing/2014/main" id="{6285D009-B3CD-3F2A-D8EE-96546325CCDB}"/>
+              </a:ext>
+            </a:extLst>
+          </p:cNvPr>
+          <p:cNvSpPr>
+            <a:spLocks noGrp="1"/>
+          </p:cNvSpPr>
+          <p:nvPr>
+            <p:ph type="dt" sz="half" idx="12"/>
+          </p:nvPr>
+        </p:nvSpPr>
+        <p:spPr/>
+        <p:txBody>
+          <a:bodyPr/>
+          <a:lstStyle/>
+          <a:p>
+            <a:r>
+              <a:rPr lang="de-DE"/>
+              <a:t>25.06.2026</a:t>
+            </a:r>
+          </a:p>
+        </p:txBody>
+      </p:sp>
+      <p:sp>
+        <p:nvSpPr>
+          <p:cNvPr id="7" name="Fußzeilenplatzhalter 6">
+            <a:extLst>
+              <a:ext uri="{FF2B5EF4-FFF2-40B4-BE49-F238E27FC236}">
+                <a16:creationId xmlns:a16="http://schemas.microsoft.com/office/drawing/2014/main" id="{F90F7BFF-E634-F432-B716-E8CCB89A7606}"/>
+              </a:ext>
+            </a:extLst>
+          </p:cNvPr>
+          <p:cNvSpPr>
+            <a:spLocks noGrp="1"/>
+          </p:cNvSpPr>
+          <p:nvPr>
+            <p:ph type="ftr" sz="quarter" idx="11"/>
+          </p:nvPr>
+        </p:nvSpPr>
+        <p:spPr/>
+        <p:txBody>
+          <a:bodyPr/>
+          <a:lstStyle/>
+          <a:p>
+            <a:r>
+              <a:rPr lang="de-DE"/>
+              <a:t>Materialdiagnostik: Task 2</a:t>
+            </a:r>
+            <a:endParaRPr lang="de-DE" dirty="0"/>
+          </a:p>
+        </p:txBody>
+      </p:sp>
     </p:spTree>
     <p:extLst>
       <p:ext uri="{BB962C8B-B14F-4D97-AF65-F5344CB8AC3E}">
@@ -5137,68 +5139,6 @@
       </p:grpSpPr>
       <p:sp>
         <p:nvSpPr>
-          <p:cNvPr id="2" name="Titel 1">
-            <a:extLst>
-              <a:ext uri="{FF2B5EF4-FFF2-40B4-BE49-F238E27FC236}">
-                <a16:creationId xmlns:a16="http://schemas.microsoft.com/office/drawing/2014/main" id="{C254BBB6-51EB-B8DF-B124-F43AAB73DC5D}"/>
-              </a:ext>
-            </a:extLst>
-          </p:cNvPr>
-          <p:cNvSpPr>
-            <a:spLocks noGrp="1"/>
-          </p:cNvSpPr>
-          <p:nvPr>
-            <p:ph type="title"/>
-          </p:nvPr>
-        </p:nvSpPr>
-        <p:spPr/>
-        <p:txBody>
-          <a:bodyPr/>
-          <a:lstStyle/>
-          <a:p>
-            <a:r>
-              <a:rPr lang="de-DE" dirty="0"/>
-              <a:t>Ergebnisse:</a:t>
-            </a:r>
-          </a:p>
-        </p:txBody>
-      </p:sp>
-      <p:sp>
-        <p:nvSpPr>
-          <p:cNvPr id="3" name="Inhaltsplatzhalter 2">
-            <a:extLst>
-              <a:ext uri="{FF2B5EF4-FFF2-40B4-BE49-F238E27FC236}">
-                <a16:creationId xmlns:a16="http://schemas.microsoft.com/office/drawing/2014/main" id="{EC792880-C870-78F8-FD9F-3732660E48D9}"/>
-              </a:ext>
-            </a:extLst>
-          </p:cNvPr>
-          <p:cNvSpPr>
-            <a:spLocks noGrp="1"/>
-          </p:cNvSpPr>
-          <p:nvPr>
-            <p:ph idx="1"/>
-          </p:nvPr>
-        </p:nvSpPr>
-        <p:spPr/>
-        <p:txBody>
-          <a:bodyPr/>
-          <a:lstStyle/>
-          <a:p>
-            <a:r>
-              <a:rPr lang="de-DE" dirty="0"/>
-              <a:t>Wir erkennen durch die extrahierten Merkmale, die durch die PCA auf zwei Achsen darstellbar gemacht worden sind, dass Z05 deutlich aus dem Muster der restlichen Zahnräder fällt.</a:t>
-            </a:r>
-          </a:p>
-          <a:p>
-            <a:r>
-              <a:rPr lang="de-DE" dirty="0"/>
-              <a:t>Wir haben demnach die Signale für eine Automatisierung vorbereitet…</a:t>
-            </a:r>
-          </a:p>
-        </p:txBody>
-      </p:sp>
-      <p:sp>
-        <p:nvSpPr>
           <p:cNvPr id="4" name="Foliennummernplatzhalter 3">
             <a:extLst>
               <a:ext uri="{FF2B5EF4-FFF2-40B4-BE49-F238E27FC236}">
@@ -5229,6 +5169,133 @@
               <a:t>16</a:t>
             </a:fld>
             <a:endParaRPr lang="de-DE" altLang="de-DE" dirty="0"/>
+          </a:p>
+        </p:txBody>
+      </p:sp>
+      <p:sp>
+        <p:nvSpPr>
+          <p:cNvPr id="3" name="Inhaltsplatzhalter 2">
+            <a:extLst>
+              <a:ext uri="{FF2B5EF4-FFF2-40B4-BE49-F238E27FC236}">
+                <a16:creationId xmlns:a16="http://schemas.microsoft.com/office/drawing/2014/main" id="{EC792880-C870-78F8-FD9F-3732660E48D9}"/>
+              </a:ext>
+            </a:extLst>
+          </p:cNvPr>
+          <p:cNvSpPr>
+            <a:spLocks noGrp="1"/>
+          </p:cNvSpPr>
+          <p:nvPr>
+            <p:ph sz="quarter" idx="13"/>
+          </p:nvPr>
+        </p:nvSpPr>
+        <p:spPr/>
+        <p:txBody>
+          <a:bodyPr/>
+          <a:lstStyle/>
+          <a:p>
+            <a:pPr>
+              <a:buFont typeface="Arial" panose="020B0604020202020204" pitchFamily="34" charset="0"/>
+              <a:buChar char="•"/>
+            </a:pPr>
+            <a:r>
+              <a:rPr lang="de-DE" dirty="0"/>
+              <a:t>Die PCA-Darstellung der extrahierten Merkmale zeigt, dass Z05 klar separiert von den übrigen Zahnrädern liegt. Dies deutet darauf hin, dass sich dessen Signalcharakteristik signifikant unterscheidet. </a:t>
+            </a:r>
+          </a:p>
+          <a:p>
+            <a:pPr>
+              <a:buFont typeface="Arial" panose="020B0604020202020204" pitchFamily="34" charset="0"/>
+              <a:buChar char="•"/>
+            </a:pPr>
+            <a:r>
+              <a:rPr lang="de-DE" dirty="0"/>
+              <a:t>Damit konnten die Signale in eine Merkmalsform überführt werden, die sich grundsätzlich für eine automatisierte Klassifikation oder Anomalie Erkennung eignet.</a:t>
+            </a:r>
+          </a:p>
+        </p:txBody>
+      </p:sp>
+      <p:sp>
+        <p:nvSpPr>
+          <p:cNvPr id="2" name="Titel 1">
+            <a:extLst>
+              <a:ext uri="{FF2B5EF4-FFF2-40B4-BE49-F238E27FC236}">
+                <a16:creationId xmlns:a16="http://schemas.microsoft.com/office/drawing/2014/main" id="{C254BBB6-51EB-B8DF-B124-F43AAB73DC5D}"/>
+              </a:ext>
+            </a:extLst>
+          </p:cNvPr>
+          <p:cNvSpPr>
+            <a:spLocks noGrp="1"/>
+          </p:cNvSpPr>
+          <p:nvPr>
+            <p:ph type="title"/>
+          </p:nvPr>
+        </p:nvSpPr>
+        <p:spPr/>
+        <p:txBody>
+          <a:bodyPr/>
+          <a:lstStyle/>
+          <a:p>
+            <a:r>
+              <a:rPr lang="de-DE" sz="3200" dirty="0"/>
+              <a:t>Ergebnisse</a:t>
+            </a:r>
+          </a:p>
+        </p:txBody>
+      </p:sp>
+      <p:sp>
+        <p:nvSpPr>
+          <p:cNvPr id="5" name="Datumsplatzhalter 4">
+            <a:extLst>
+              <a:ext uri="{FF2B5EF4-FFF2-40B4-BE49-F238E27FC236}">
+                <a16:creationId xmlns:a16="http://schemas.microsoft.com/office/drawing/2014/main" id="{A1BB0821-ACF4-FAAA-FCFD-FE000BACD3BE}"/>
+              </a:ext>
+            </a:extLst>
+          </p:cNvPr>
+          <p:cNvSpPr>
+            <a:spLocks noGrp="1"/>
+          </p:cNvSpPr>
+          <p:nvPr>
+            <p:ph type="dt" sz="half" idx="12"/>
+          </p:nvPr>
+        </p:nvSpPr>
+        <p:spPr/>
+        <p:txBody>
+          <a:bodyPr/>
+          <a:lstStyle/>
+          <a:p>
+            <a:r>
+              <a:rPr lang="de-DE"/>
+              <a:t>25.06.2026</a:t>
+            </a:r>
+          </a:p>
+        </p:txBody>
+      </p:sp>
+      <p:sp>
+        <p:nvSpPr>
+          <p:cNvPr id="6" name="Fußzeilenplatzhalter 5">
+            <a:extLst>
+              <a:ext uri="{FF2B5EF4-FFF2-40B4-BE49-F238E27FC236}">
+                <a16:creationId xmlns:a16="http://schemas.microsoft.com/office/drawing/2014/main" id="{44504410-AB8A-471C-1D33-002F641A2C98}"/>
+              </a:ext>
+            </a:extLst>
+          </p:cNvPr>
+          <p:cNvSpPr>
+            <a:spLocks noGrp="1"/>
+          </p:cNvSpPr>
+          <p:nvPr>
+            <p:ph type="ftr" sz="quarter" idx="11"/>
+          </p:nvPr>
+        </p:nvSpPr>
+        <p:spPr/>
+        <p:txBody>
+          <a:bodyPr/>
+          <a:lstStyle/>
+          <a:p>
+            <a:r>
+              <a:rPr lang="de-DE"/>
+              <a:t>Materialdiagnostik: Task 2</a:t>
+            </a:r>
+            <a:endParaRPr lang="de-DE" dirty="0"/>
           </a:p>
         </p:txBody>
       </p:sp>
@@ -5270,59 +5337,6 @@
       </p:grpSpPr>
       <p:sp>
         <p:nvSpPr>
-          <p:cNvPr id="2" name="Titel 1">
-            <a:extLst>
-              <a:ext uri="{FF2B5EF4-FFF2-40B4-BE49-F238E27FC236}">
-                <a16:creationId xmlns:a16="http://schemas.microsoft.com/office/drawing/2014/main" id="{855CE2B4-9BA0-9AC0-F40D-53D5E9298211}"/>
-              </a:ext>
-            </a:extLst>
-          </p:cNvPr>
-          <p:cNvSpPr>
-            <a:spLocks noGrp="1"/>
-          </p:cNvSpPr>
-          <p:nvPr>
-            <p:ph type="title"/>
-          </p:nvPr>
-        </p:nvSpPr>
-        <p:spPr>
-          <a:xfrm>
-            <a:off x="914400" y="609600"/>
-            <a:ext cx="7137918" cy="1143000"/>
-          </a:xfrm>
-        </p:spPr>
-        <p:txBody>
-          <a:bodyPr/>
-          <a:lstStyle/>
-          <a:p>
-            <a:r>
-              <a:rPr lang="de-DE" dirty="0"/>
-              <a:t>Visualisierung:</a:t>
-            </a:r>
-            <a:br>
-              <a:rPr lang="de-DE" dirty="0"/>
-            </a:br>
-            <a:r>
-              <a:rPr lang="de-DE" sz="2400" dirty="0" err="1"/>
-              <a:t>Duchschnitts</a:t>
-            </a:r>
-            <a:r>
-              <a:rPr lang="de-DE" sz="2400" dirty="0"/>
-              <a:t>-Methode mit beiden „</a:t>
-            </a:r>
-            <a:r>
-              <a:rPr lang="de-DE" sz="2400" dirty="0" err="1"/>
-              <a:t>rID</a:t>
-            </a:r>
-            <a:r>
-              <a:rPr lang="de-DE" sz="2400" dirty="0"/>
-              <a:t>“</a:t>
-            </a:r>
-            <a:endParaRPr lang="de-DE" dirty="0"/>
-          </a:p>
-        </p:txBody>
-      </p:sp>
-      <p:sp>
-        <p:nvSpPr>
           <p:cNvPr id="4" name="Foliennummernplatzhalter 3">
             <a:extLst>
               <a:ext uri="{FF2B5EF4-FFF2-40B4-BE49-F238E27FC236}">
@@ -5353,6 +5367,40 @@
               <a:t>17</a:t>
             </a:fld>
             <a:endParaRPr lang="de-DE" altLang="de-DE" dirty="0"/>
+          </a:p>
+        </p:txBody>
+      </p:sp>
+      <p:sp>
+        <p:nvSpPr>
+          <p:cNvPr id="2" name="Titel 1">
+            <a:extLst>
+              <a:ext uri="{FF2B5EF4-FFF2-40B4-BE49-F238E27FC236}">
+                <a16:creationId xmlns:a16="http://schemas.microsoft.com/office/drawing/2014/main" id="{855CE2B4-9BA0-9AC0-F40D-53D5E9298211}"/>
+              </a:ext>
+            </a:extLst>
+          </p:cNvPr>
+          <p:cNvSpPr>
+            <a:spLocks noGrp="1"/>
+          </p:cNvSpPr>
+          <p:nvPr>
+            <p:ph type="title"/>
+          </p:nvPr>
+        </p:nvSpPr>
+        <p:spPr>
+          <a:xfrm>
+            <a:off x="341811" y="567600"/>
+            <a:ext cx="5264510" cy="706030"/>
+          </a:xfrm>
+        </p:spPr>
+        <p:txBody>
+          <a:bodyPr/>
+          <a:lstStyle/>
+          <a:p>
+            <a:r>
+              <a:rPr lang="de-DE" sz="3200" dirty="0"/>
+              <a:t>Ergebnisse</a:t>
+            </a:r>
+            <a:endParaRPr lang="de-DE" dirty="0"/>
           </a:p>
         </p:txBody>
       </p:sp>
@@ -5379,8 +5427,8 @@
         </p:blipFill>
         <p:spPr>
           <a:xfrm>
-            <a:off x="796585" y="1609918"/>
-            <a:ext cx="10598829" cy="4718695"/>
+            <a:off x="341810" y="1360799"/>
+            <a:ext cx="11505600" cy="5122398"/>
           </a:xfrm>
           <a:prstGeom prst="rect">
             <a:avLst/>
@@ -5401,7 +5449,7 @@
         </p:nvSpPr>
         <p:spPr bwMode="auto">
           <a:xfrm>
-            <a:off x="2921877" y="1609918"/>
+            <a:off x="2840636" y="1533302"/>
             <a:ext cx="3584026" cy="2432147"/>
           </a:xfrm>
           <a:prstGeom prst="ellipse">
@@ -5410,7 +5458,7 @@
           <a:noFill/>
           <a:ln w="38100" cap="flat" cmpd="sng" algn="ctr">
             <a:solidFill>
-              <a:srgbClr val="FF0000"/>
+              <a:srgbClr val="FFC000"/>
             </a:solidFill>
             <a:prstDash val="solid"/>
             <a:round/>
@@ -5472,8 +5520,8 @@
         </p:nvSpPr>
         <p:spPr bwMode="auto">
           <a:xfrm>
-            <a:off x="7690923" y="1608459"/>
-            <a:ext cx="3584026" cy="2432147"/>
+            <a:off x="7685880" y="1472182"/>
+            <a:ext cx="4096389" cy="2357805"/>
           </a:xfrm>
           <a:prstGeom prst="ellipse">
             <a:avLst/>
@@ -5481,7 +5529,7 @@
           <a:noFill/>
           <a:ln w="38100" cap="flat" cmpd="sng" algn="ctr">
             <a:solidFill>
-              <a:srgbClr val="FF0000"/>
+              <a:srgbClr val="FFC000"/>
             </a:solidFill>
             <a:prstDash val="solid"/>
             <a:round/>
@@ -5545,8 +5593,8 @@
         </p:nvCxnSpPr>
         <p:spPr bwMode="auto">
           <a:xfrm>
-            <a:off x="1579418" y="2992582"/>
-            <a:ext cx="4416137" cy="1849582"/>
+            <a:off x="734518" y="2563318"/>
+            <a:ext cx="5306518" cy="2315980"/>
           </a:xfrm>
           <a:prstGeom prst="line">
             <a:avLst/>
@@ -5582,8 +5630,8 @@
         </p:nvCxnSpPr>
         <p:spPr bwMode="auto">
           <a:xfrm>
-            <a:off x="6730450" y="3429000"/>
-            <a:ext cx="4452557" cy="611606"/>
+            <a:off x="6475751" y="3357797"/>
+            <a:ext cx="5306518" cy="694821"/>
           </a:xfrm>
           <a:prstGeom prst="line">
             <a:avLst/>
@@ -5603,6 +5651,205 @@
           <a:effectLst/>
         </p:spPr>
       </p:cxnSp>
+      <p:sp>
+        <p:nvSpPr>
+          <p:cNvPr id="16" name="Ellipse 15">
+            <a:extLst>
+              <a:ext uri="{FF2B5EF4-FFF2-40B4-BE49-F238E27FC236}">
+                <a16:creationId xmlns:a16="http://schemas.microsoft.com/office/drawing/2014/main" id="{F2D93268-F655-8E29-AEDD-BEC246926421}"/>
+              </a:ext>
+            </a:extLst>
+          </p:cNvPr>
+          <p:cNvSpPr/>
+          <p:nvPr/>
+        </p:nvSpPr>
+        <p:spPr bwMode="auto">
+          <a:xfrm>
+            <a:off x="734518" y="3777521"/>
+            <a:ext cx="3814997" cy="2315980"/>
+          </a:xfrm>
+          <a:prstGeom prst="ellipse">
+            <a:avLst/>
+          </a:prstGeom>
+          <a:noFill/>
+          <a:ln w="38100" cap="flat" cmpd="sng" algn="ctr">
+            <a:solidFill>
+              <a:srgbClr val="00B050"/>
+            </a:solidFill>
+            <a:prstDash val="solid"/>
+            <a:round/>
+            <a:headEnd type="none" w="med" len="med"/>
+            <a:tailEnd type="none" w="med" len="med"/>
+          </a:ln>
+          <a:effectLst/>
+        </p:spPr>
+        <p:txBody>
+          <a:bodyPr vert="horz" wrap="square" lIns="91440" tIns="45720" rIns="91440" bIns="45720" numCol="1" rtlCol="0" anchor="t" anchorCtr="0" compatLnSpc="1">
+            <a:prstTxWarp prst="textNoShape">
+              <a:avLst/>
+            </a:prstTxWarp>
+          </a:bodyPr>
+          <a:lstStyle/>
+          <a:p>
+            <a:pPr marL="0" marR="0" indent="0" algn="l" defTabSz="914400" rtl="0" eaLnBrk="0" fontAlgn="base" latinLnBrk="0" hangingPunct="0">
+              <a:lnSpc>
+                <a:spcPct val="100000"/>
+              </a:lnSpc>
+              <a:spcBef>
+                <a:spcPct val="0"/>
+              </a:spcBef>
+              <a:spcAft>
+                <a:spcPct val="0"/>
+              </a:spcAft>
+              <a:buClrTx/>
+              <a:buSzTx/>
+              <a:buFontTx/>
+              <a:buNone/>
+              <a:tabLst/>
+            </a:pPr>
+            <a:endParaRPr kumimoji="0" lang="de-DE" sz="2400" b="0" i="0" u="none" strike="noStrike" cap="none" normalizeH="0" baseline="0">
+              <a:ln>
+                <a:noFill/>
+              </a:ln>
+              <a:solidFill>
+                <a:schemeClr val="tx1"/>
+              </a:solidFill>
+              <a:effectLst/>
+              <a:latin typeface="Arial" pitchFamily="-109" charset="0"/>
+              <a:ea typeface="ヒラギノ角ゴ Pro W3" pitchFamily="-109" charset="-128"/>
+              <a:cs typeface="ヒラギノ角ゴ Pro W3" pitchFamily="-109" charset="-128"/>
+            </a:endParaRPr>
+          </a:p>
+        </p:txBody>
+      </p:sp>
+      <p:sp>
+        <p:nvSpPr>
+          <p:cNvPr id="18" name="Ellipse 17">
+            <a:extLst>
+              <a:ext uri="{FF2B5EF4-FFF2-40B4-BE49-F238E27FC236}">
+                <a16:creationId xmlns:a16="http://schemas.microsoft.com/office/drawing/2014/main" id="{B54FFD05-4AA3-52DA-5754-BAC5D449CAED}"/>
+              </a:ext>
+            </a:extLst>
+          </p:cNvPr>
+          <p:cNvSpPr/>
+          <p:nvPr/>
+        </p:nvSpPr>
+        <p:spPr bwMode="auto">
+          <a:xfrm>
+            <a:off x="6244373" y="3758771"/>
+            <a:ext cx="4203771" cy="2514613"/>
+          </a:xfrm>
+          <a:prstGeom prst="ellipse">
+            <a:avLst/>
+          </a:prstGeom>
+          <a:noFill/>
+          <a:ln w="38100" cap="flat" cmpd="sng" algn="ctr">
+            <a:solidFill>
+              <a:srgbClr val="00B050"/>
+            </a:solidFill>
+            <a:prstDash val="solid"/>
+            <a:round/>
+            <a:headEnd type="none" w="med" len="med"/>
+            <a:tailEnd type="none" w="med" len="med"/>
+          </a:ln>
+          <a:effectLst/>
+        </p:spPr>
+        <p:txBody>
+          <a:bodyPr vert="horz" wrap="square" lIns="91440" tIns="45720" rIns="91440" bIns="45720" numCol="1" rtlCol="0" anchor="t" anchorCtr="0" compatLnSpc="1">
+            <a:prstTxWarp prst="textNoShape">
+              <a:avLst/>
+            </a:prstTxWarp>
+          </a:bodyPr>
+          <a:lstStyle/>
+          <a:p>
+            <a:pPr marL="0" marR="0" indent="0" algn="l" defTabSz="914400" rtl="0" eaLnBrk="0" fontAlgn="base" latinLnBrk="0" hangingPunct="0">
+              <a:lnSpc>
+                <a:spcPct val="100000"/>
+              </a:lnSpc>
+              <a:spcBef>
+                <a:spcPct val="0"/>
+              </a:spcBef>
+              <a:spcAft>
+                <a:spcPct val="0"/>
+              </a:spcAft>
+              <a:buClrTx/>
+              <a:buSzTx/>
+              <a:buFontTx/>
+              <a:buNone/>
+              <a:tabLst/>
+            </a:pPr>
+            <a:endParaRPr kumimoji="0" lang="de-DE" sz="2400" b="0" i="0" u="none" strike="noStrike" cap="none" normalizeH="0" baseline="0">
+              <a:ln>
+                <a:noFill/>
+              </a:ln>
+              <a:solidFill>
+                <a:schemeClr val="tx1"/>
+              </a:solidFill>
+              <a:effectLst/>
+              <a:latin typeface="Arial" pitchFamily="-109" charset="0"/>
+              <a:ea typeface="ヒラギノ角ゴ Pro W3" pitchFamily="-109" charset="-128"/>
+              <a:cs typeface="ヒラギノ角ゴ Pro W3" pitchFamily="-109" charset="-128"/>
+            </a:endParaRPr>
+          </a:p>
+        </p:txBody>
+      </p:sp>
+      <p:sp>
+        <p:nvSpPr>
+          <p:cNvPr id="19" name="Datumsplatzhalter 18">
+            <a:extLst>
+              <a:ext uri="{FF2B5EF4-FFF2-40B4-BE49-F238E27FC236}">
+                <a16:creationId xmlns:a16="http://schemas.microsoft.com/office/drawing/2014/main" id="{05DF70C5-E878-2CD5-F644-CF5B1E5CE975}"/>
+              </a:ext>
+            </a:extLst>
+          </p:cNvPr>
+          <p:cNvSpPr>
+            <a:spLocks noGrp="1"/>
+          </p:cNvSpPr>
+          <p:nvPr>
+            <p:ph type="dt" sz="half" idx="12"/>
+          </p:nvPr>
+        </p:nvSpPr>
+        <p:spPr/>
+        <p:txBody>
+          <a:bodyPr/>
+          <a:lstStyle/>
+          <a:p>
+            <a:r>
+              <a:rPr lang="de-DE"/>
+              <a:t>25.06.2026</a:t>
+            </a:r>
+          </a:p>
+        </p:txBody>
+      </p:sp>
+      <p:sp>
+        <p:nvSpPr>
+          <p:cNvPr id="20" name="Fußzeilenplatzhalter 19">
+            <a:extLst>
+              <a:ext uri="{FF2B5EF4-FFF2-40B4-BE49-F238E27FC236}">
+                <a16:creationId xmlns:a16="http://schemas.microsoft.com/office/drawing/2014/main" id="{BC8C3934-629F-B7C3-1416-9C60B85BAAC1}"/>
+              </a:ext>
+            </a:extLst>
+          </p:cNvPr>
+          <p:cNvSpPr>
+            <a:spLocks noGrp="1"/>
+          </p:cNvSpPr>
+          <p:nvPr>
+            <p:ph type="ftr" sz="quarter" idx="11"/>
+          </p:nvPr>
+        </p:nvSpPr>
+        <p:spPr/>
+        <p:txBody>
+          <a:bodyPr/>
+          <a:lstStyle/>
+          <a:p>
+            <a:r>
+              <a:rPr lang="de-DE"/>
+              <a:t>Materialdiagnostik: Task 2</a:t>
+            </a:r>
+            <a:endParaRPr lang="de-DE" dirty="0"/>
+          </a:p>
+        </p:txBody>
+      </p:sp>
     </p:spTree>
     <p:extLst>
       <p:ext uri="{BB962C8B-B14F-4D97-AF65-F5344CB8AC3E}">
@@ -5687,6 +5934,60 @@
                                   </p:childTnLst>
                                 </p:cTn>
                               </p:par>
+                              <p:par>
+                                <p:cTn id="9" presetID="1" presetClass="entr" presetSubtype="0" fill="hold" grpId="0" nodeType="withEffect">
+                                  <p:stCondLst>
+                                    <p:cond delay="0"/>
+                                  </p:stCondLst>
+                                  <p:childTnLst>
+                                    <p:set>
+                                      <p:cBhvr>
+                                        <p:cTn id="10" dur="1" fill="hold">
+                                          <p:stCondLst>
+                                            <p:cond delay="0"/>
+                                          </p:stCondLst>
+                                        </p:cTn>
+                                        <p:tgtEl>
+                                          <p:spTgt spid="18"/>
+                                        </p:tgtEl>
+                                        <p:attrNameLst>
+                                          <p:attrName>style.visibility</p:attrName>
+                                        </p:attrNameLst>
+                                      </p:cBhvr>
+                                      <p:to>
+                                        <p:strVal val="visible"/>
+                                      </p:to>
+                                    </p:set>
+                                  </p:childTnLst>
+                                </p:cTn>
+                              </p:par>
+                              <p:par>
+                                <p:cTn id="11" presetID="1" presetClass="entr" presetSubtype="0" fill="hold" grpId="0" nodeType="withEffect">
+                                  <p:stCondLst>
+                                    <p:cond delay="0"/>
+                                  </p:stCondLst>
+                                  <p:childTnLst>
+                                    <p:set>
+                                      <p:cBhvr>
+                                        <p:cTn id="12" dur="1" fill="hold">
+                                          <p:stCondLst>
+                                            <p:cond delay="0"/>
+                                          </p:stCondLst>
+                                        </p:cTn>
+                                        <p:tgtEl>
+                                          <p:spTgt spid="16"/>
+                                        </p:tgtEl>
+                                        <p:attrNameLst>
+                                          <p:attrName>style.visibility</p:attrName>
+                                        </p:attrNameLst>
+                                      </p:cBhvr>
+                                      <p:to>
+                                        <p:strVal val="visible"/>
+                                      </p:to>
+                                    </p:set>
+                                  </p:childTnLst>
+                                </p:cTn>
+                              </p:par>
                             </p:childTnLst>
                           </p:cTn>
                         </p:par>
@@ -5694,26 +5995,26 @@
                     </p:cTn>
                   </p:par>
                   <p:par>
-                    <p:cTn id="9" fill="hold">
+                    <p:cTn id="13" fill="hold">
                       <p:stCondLst>
                         <p:cond delay="indefinite"/>
                       </p:stCondLst>
                       <p:childTnLst>
                         <p:par>
-                          <p:cTn id="10" fill="hold">
+                          <p:cTn id="14" fill="hold">
                             <p:stCondLst>
                               <p:cond delay="0"/>
                             </p:stCondLst>
                             <p:childTnLst>
                               <p:par>
-                                <p:cTn id="11" presetID="1" presetClass="exit" presetSubtype="0" fill="hold" grpId="1" nodeType="clickEffect">
+                                <p:cTn id="15" presetID="1" presetClass="exit" presetSubtype="0" fill="hold" grpId="1" nodeType="clickEffect">
                                   <p:stCondLst>
                                     <p:cond delay="0"/>
                                   </p:stCondLst>
                                   <p:childTnLst>
                                     <p:set>
                                       <p:cBhvr>
-                                        <p:cTn id="12" dur="1" fill="hold">
+                                        <p:cTn id="16" dur="1" fill="hold">
                                           <p:stCondLst>
                                             <p:cond delay="0"/>
                                           </p:stCondLst>
@@ -5733,20 +6034,74 @@
                                 </p:cTn>
                               </p:par>
                               <p:par>
-                                <p:cTn id="13" presetID="1" presetClass="exit" presetSubtype="0" fill="hold" grpId="1" nodeType="withEffect">
+                                <p:cTn id="17" presetID="1" presetClass="exit" presetSubtype="0" fill="hold" grpId="1" nodeType="withEffect">
                                   <p:stCondLst>
                                     <p:cond delay="0"/>
                                   </p:stCondLst>
                                   <p:childTnLst>
                                     <p:set>
                                       <p:cBhvr>
-                                        <p:cTn id="14" dur="1" fill="hold">
+                                        <p:cTn id="18" dur="1" fill="hold">
                                           <p:stCondLst>
                                             <p:cond delay="0"/>
                                           </p:stCondLst>
                                         </p:cTn>
                                         <p:tgtEl>
                                           <p:spTgt spid="6"/>
+                                        </p:tgtEl>
+                                        <p:attrNameLst>
+                                          <p:attrName>style.visibility</p:attrName>
+                                        </p:attrNameLst>
+                                      </p:cBhvr>
+                                      <p:to>
+                                        <p:strVal val="hidden"/>
+                                      </p:to>
+                                    </p:set>
+                                  </p:childTnLst>
+                                </p:cTn>
+                              </p:par>
+                              <p:par>
+                                <p:cTn id="19" presetID="1" presetClass="exit" presetSubtype="0" fill="hold" grpId="1" nodeType="withEffect">
+                                  <p:stCondLst>
+                                    <p:cond delay="0"/>
+                                  </p:stCondLst>
+                                  <p:childTnLst>
+                                    <p:set>
+                                      <p:cBhvr>
+                                        <p:cTn id="20" dur="1" fill="hold">
+                                          <p:stCondLst>
+                                            <p:cond delay="0"/>
+                                          </p:stCondLst>
+                                        </p:cTn>
+                                        <p:tgtEl>
+                                          <p:spTgt spid="18"/>
+                                        </p:tgtEl>
+                                        <p:attrNameLst>
+                                          <p:attrName>style.visibility</p:attrName>
+                                        </p:attrNameLst>
+                                      </p:cBhvr>
+                                      <p:to>
+                                        <p:strVal val="hidden"/>
+                                      </p:to>
+                                    </p:set>
+                                  </p:childTnLst>
+                                </p:cTn>
+                              </p:par>
+                              <p:par>
+                                <p:cTn id="21" presetID="1" presetClass="exit" presetSubtype="0" fill="hold" grpId="1" nodeType="withEffect">
+                                  <p:stCondLst>
+                                    <p:cond delay="0"/>
+                                  </p:stCondLst>
+                                  <p:childTnLst>
+                                    <p:set>
+                                      <p:cBhvr>
+                                        <p:cTn id="22" dur="1" fill="hold">
+                                          <p:stCondLst>
+                                            <p:cond delay="0"/>
+                                          </p:stCondLst>
+                                        </p:cTn>
+                                        <p:tgtEl>
+                                          <p:spTgt spid="16"/>
                                         </p:tgtEl>
                                         <p:attrNameLst>
                                           <p:attrName>style.visibility</p:attrName>
@@ -5766,26 +6121,26 @@
                     </p:cTn>
                   </p:par>
                   <p:par>
-                    <p:cTn id="15" fill="hold">
+                    <p:cTn id="23" fill="hold">
                       <p:stCondLst>
                         <p:cond delay="indefinite"/>
                       </p:stCondLst>
                       <p:childTnLst>
                         <p:par>
-                          <p:cTn id="16" fill="hold">
+                          <p:cTn id="24" fill="hold">
                             <p:stCondLst>
                               <p:cond delay="0"/>
                             </p:stCondLst>
                             <p:childTnLst>
                               <p:par>
-                                <p:cTn id="17" presetID="1" presetClass="entr" presetSubtype="0" fill="hold" nodeType="clickEffect">
+                                <p:cTn id="25" presetID="1" presetClass="entr" presetSubtype="0" fill="hold" nodeType="clickEffect">
                                   <p:stCondLst>
                                     <p:cond delay="0"/>
                                   </p:stCondLst>
                                   <p:childTnLst>
                                     <p:set>
                                       <p:cBhvr>
-                                        <p:cTn id="18" dur="1" fill="hold">
+                                        <p:cTn id="26" dur="1" fill="hold">
                                           <p:stCondLst>
                                             <p:cond delay="0"/>
                                           </p:stCondLst>
@@ -5805,14 +6160,14 @@
                                 </p:cTn>
                               </p:par>
                               <p:par>
-                                <p:cTn id="19" presetID="1" presetClass="entr" presetSubtype="0" fill="hold" nodeType="withEffect">
+                                <p:cTn id="27" presetID="1" presetClass="entr" presetSubtype="0" fill="hold" nodeType="withEffect">
                                   <p:stCondLst>
                                     <p:cond delay="0"/>
                                   </p:stCondLst>
                                   <p:childTnLst>
                                     <p:set>
                                       <p:cBhvr>
-                                        <p:cTn id="20" dur="1" fill="hold">
+                                        <p:cTn id="28" dur="1" fill="hold">
                                           <p:stCondLst>
                                             <p:cond delay="0"/>
                                           </p:stCondLst>
@@ -5863,6 +6218,10 @@
       <p:bldP spid="3" grpId="1" animBg="1"/>
       <p:bldP spid="6" grpId="0" animBg="1"/>
       <p:bldP spid="6" grpId="1" animBg="1"/>
+      <p:bldP spid="16" grpId="0" animBg="1"/>
+      <p:bldP spid="16" grpId="1" animBg="1"/>
+      <p:bldP spid="18" grpId="0" animBg="1"/>
+      <p:bldP spid="18" grpId="1" animBg="1"/>
     </p:bldLst>
   </p:timing>
 </p:sld>
@@ -5887,18 +6246,18 @@
       </p:grpSpPr>
       <p:sp>
         <p:nvSpPr>
-          <p:cNvPr id="6" name="Untertitel 5">
-            <a:extLst>
-              <a:ext uri="{FF2B5EF4-FFF2-40B4-BE49-F238E27FC236}">
-                <a16:creationId xmlns:a16="http://schemas.microsoft.com/office/drawing/2014/main" id="{8E05B92F-5D29-4DF0-F112-74C93A8CC531}"/>
-              </a:ext>
-            </a:extLst>
-          </p:cNvPr>
-          <p:cNvSpPr>
-            <a:spLocks noGrp="1"/>
-          </p:cNvSpPr>
-          <p:nvPr>
-            <p:ph type="subTitle" idx="1"/>
+          <p:cNvPr id="2" name="Titel 1">
+            <a:extLst>
+              <a:ext uri="{FF2B5EF4-FFF2-40B4-BE49-F238E27FC236}">
+                <a16:creationId xmlns:a16="http://schemas.microsoft.com/office/drawing/2014/main" id="{77E9BDB3-AF05-698B-206C-6C9919554531}"/>
+              </a:ext>
+            </a:extLst>
+          </p:cNvPr>
+          <p:cNvSpPr>
+            <a:spLocks noGrp="1"/>
+          </p:cNvSpPr>
+          <p:nvPr>
+            <p:ph type="title"/>
           </p:nvPr>
         </p:nvSpPr>
         <p:spPr/>
@@ -5908,72 +6267,8 @@
           <a:p>
             <a:r>
               <a:rPr lang="de-DE" dirty="0"/>
-              <a:t>Ende (Benny noch fertig </a:t>
-            </a:r>
-            <a:r>
-              <a:rPr lang="de-DE"/>
-              <a:t>machen auch Folie 1)</a:t>
-            </a:r>
-          </a:p>
-        </p:txBody>
-      </p:sp>
-      <p:sp>
-        <p:nvSpPr>
-          <p:cNvPr id="5" name="Titel 4">
-            <a:extLst>
-              <a:ext uri="{FF2B5EF4-FFF2-40B4-BE49-F238E27FC236}">
-                <a16:creationId xmlns:a16="http://schemas.microsoft.com/office/drawing/2014/main" id="{34C6A74A-6374-BE37-E58E-71A93F657616}"/>
-              </a:ext>
-            </a:extLst>
-          </p:cNvPr>
-          <p:cNvSpPr>
-            <a:spLocks noGrp="1"/>
-          </p:cNvSpPr>
-          <p:nvPr>
-            <p:ph type="title"/>
-          </p:nvPr>
-        </p:nvSpPr>
-        <p:spPr/>
-        <p:txBody>
-          <a:bodyPr/>
-          <a:lstStyle/>
-          <a:p>
-            <a:endParaRPr lang="de-DE" dirty="0"/>
-          </a:p>
-        </p:txBody>
-      </p:sp>
-      <p:sp>
-        <p:nvSpPr>
-          <p:cNvPr id="4" name="Foliennummernplatzhalter 3">
-            <a:extLst>
-              <a:ext uri="{FF2B5EF4-FFF2-40B4-BE49-F238E27FC236}">
-                <a16:creationId xmlns:a16="http://schemas.microsoft.com/office/drawing/2014/main" id="{D7332567-6737-1C8C-A05C-902704591A63}"/>
-              </a:ext>
-            </a:extLst>
-          </p:cNvPr>
-          <p:cNvSpPr>
-            <a:spLocks noGrp="1"/>
-          </p:cNvSpPr>
-          <p:nvPr>
-            <p:ph type="sldNum" sz="quarter" idx="10"/>
-          </p:nvPr>
-        </p:nvSpPr>
-        <p:spPr/>
-        <p:txBody>
-          <a:bodyPr/>
-          <a:lstStyle/>
-          <a:p>
-            <a:pPr>
-              <a:defRPr/>
-            </a:pPr>
-            <a:fld id="{A0424531-ACBB-43B0-9536-C2FB0D769E6C}" type="slidenum">
-              <a:rPr lang="de-DE" altLang="de-DE" smtClean="0"/>
-              <a:pPr>
-                <a:defRPr/>
-              </a:pPr>
-              <a:t>18</a:t>
-            </a:fld>
-            <a:endParaRPr lang="de-DE" altLang="de-DE" dirty="0"/>
+              <a:t>Ende</a:t>
+            </a:r>
           </a:p>
         </p:txBody>
       </p:sp>
@@ -6055,68 +6350,173 @@
             <a:spLocks noGrp="1"/>
           </p:cNvSpPr>
           <p:nvPr>
-            <p:ph idx="1"/>
+            <p:ph type="body" sz="quarter" idx="13"/>
           </p:nvPr>
         </p:nvSpPr>
         <p:spPr>
           <a:xfrm>
-            <a:off x="914400" y="1545265"/>
-            <a:ext cx="10668000" cy="4114800"/>
+            <a:off x="4838289" y="1627906"/>
+            <a:ext cx="5747658" cy="3602187"/>
           </a:xfrm>
         </p:spPr>
         <p:txBody>
           <a:bodyPr/>
           <a:lstStyle/>
           <a:p>
-            <a:r>
-              <a:rPr lang="de-DE" sz="2000" dirty="0"/>
+            <a:pPr>
+              <a:buFont typeface="Arial" panose="020B0604020202020204" pitchFamily="34" charset="0"/>
+              <a:buChar char="•"/>
+            </a:pPr>
+            <a:r>
+              <a:rPr lang="de-DE" sz="2800" dirty="0"/>
               <a:t>Ziel</a:t>
             </a:r>
           </a:p>
           <a:p>
-            <a:r>
-              <a:rPr lang="de-DE" sz="2000" dirty="0"/>
+            <a:pPr>
+              <a:buFont typeface="Arial" panose="020B0604020202020204" pitchFamily="34" charset="0"/>
+              <a:buChar char="•"/>
+            </a:pPr>
+            <a:r>
+              <a:rPr lang="de-DE" sz="2800" dirty="0"/>
               <a:t>Merkmal-Extraktion</a:t>
             </a:r>
           </a:p>
           <a:p>
-            <a:r>
-              <a:rPr lang="de-DE" sz="2000" dirty="0"/>
+            <a:pPr>
+              <a:buFont typeface="Arial" panose="020B0604020202020204" pitchFamily="34" charset="0"/>
+              <a:buChar char="•"/>
+            </a:pPr>
+            <a:r>
+              <a:rPr lang="de-DE" sz="2800" dirty="0"/>
               <a:t>Explorative Datenanalyse</a:t>
             </a:r>
-            <a:endParaRPr lang="de-DE" sz="1600" dirty="0"/>
-          </a:p>
-          <a:p>
-            <a:r>
-              <a:rPr lang="de-DE" sz="2000" dirty="0"/>
+            <a:endParaRPr lang="de-DE" sz="2000" dirty="0"/>
+          </a:p>
+          <a:p>
+            <a:pPr>
+              <a:buFont typeface="Arial" panose="020B0604020202020204" pitchFamily="34" charset="0"/>
+              <a:buChar char="•"/>
+            </a:pPr>
+            <a:r>
+              <a:rPr lang="de-DE" sz="2800" dirty="0"/>
               <a:t>Standardisierung</a:t>
             </a:r>
           </a:p>
           <a:p>
-            <a:r>
-              <a:rPr lang="de-DE" sz="2000" dirty="0"/>
+            <a:pPr>
+              <a:buFont typeface="Arial" panose="020B0604020202020204" pitchFamily="34" charset="0"/>
+              <a:buChar char="•"/>
+            </a:pPr>
+            <a:r>
+              <a:rPr lang="de-DE" sz="2800" dirty="0"/>
               <a:t>Hauptkomponentenanalyse </a:t>
             </a:r>
           </a:p>
           <a:p>
-            <a:pPr lvl="1"/>
-            <a:r>
-              <a:rPr lang="de-DE" sz="1600" dirty="0"/>
-              <a:t>PCA</a:t>
-            </a:r>
-            <a:endParaRPr lang="de-DE" sz="2200" dirty="0"/>
-          </a:p>
-          <a:p>
-            <a:r>
-              <a:rPr lang="de-DE" sz="2000" dirty="0"/>
+            <a:pPr>
+              <a:buFont typeface="Arial" panose="020B0604020202020204" pitchFamily="34" charset="0"/>
+              <a:buChar char="•"/>
+            </a:pPr>
+            <a:r>
+              <a:rPr lang="de-DE" sz="2800" dirty="0"/>
               <a:t>Visualisierung</a:t>
             </a:r>
-            <a:endParaRPr lang="de-DE" sz="1800" dirty="0"/>
-          </a:p>
-          <a:p>
-            <a:r>
-              <a:rPr lang="de-DE" sz="2000" dirty="0"/>
+            <a:endParaRPr lang="de-DE" dirty="0"/>
+          </a:p>
+          <a:p>
+            <a:pPr>
+              <a:buFont typeface="Arial" panose="020B0604020202020204" pitchFamily="34" charset="0"/>
+              <a:buChar char="•"/>
+            </a:pPr>
+            <a:r>
+              <a:rPr lang="de-DE" sz="2800" dirty="0"/>
               <a:t>Ergebnisse</a:t>
+            </a:r>
+          </a:p>
+        </p:txBody>
+      </p:sp>
+      <p:sp>
+        <p:nvSpPr>
+          <p:cNvPr id="4" name="Foliennummernplatzhalter 3">
+            <a:extLst>
+              <a:ext uri="{FF2B5EF4-FFF2-40B4-BE49-F238E27FC236}">
+                <a16:creationId xmlns:a16="http://schemas.microsoft.com/office/drawing/2014/main" id="{6F571C89-E11C-49E9-88F9-60110C29C197}"/>
+              </a:ext>
+            </a:extLst>
+          </p:cNvPr>
+          <p:cNvSpPr>
+            <a:spLocks noGrp="1"/>
+          </p:cNvSpPr>
+          <p:nvPr>
+            <p:ph type="sldNum" sz="quarter" idx="10"/>
+          </p:nvPr>
+        </p:nvSpPr>
+        <p:spPr/>
+        <p:txBody>
+          <a:bodyPr/>
+          <a:lstStyle/>
+          <a:p>
+            <a:fld id="{80B4FCE6-DC73-4135-BC56-1F242D45A84C}" type="slidenum">
+              <a:rPr lang="de-DE" smtClean="0"/>
+              <a:t>2</a:t>
+            </a:fld>
+            <a:endParaRPr lang="de-DE"/>
+          </a:p>
+        </p:txBody>
+      </p:sp>
+      <p:sp>
+        <p:nvSpPr>
+          <p:cNvPr id="6" name="Datumsplatzhalter 5">
+            <a:extLst>
+              <a:ext uri="{FF2B5EF4-FFF2-40B4-BE49-F238E27FC236}">
+                <a16:creationId xmlns:a16="http://schemas.microsoft.com/office/drawing/2014/main" id="{2ADE982B-BFE5-5848-F763-33D2FC31C6DC}"/>
+              </a:ext>
+            </a:extLst>
+          </p:cNvPr>
+          <p:cNvSpPr>
+            <a:spLocks noGrp="1"/>
+          </p:cNvSpPr>
+          <p:nvPr>
+            <p:ph type="dt" sz="half" idx="12"/>
+          </p:nvPr>
+        </p:nvSpPr>
+        <p:spPr/>
+        <p:txBody>
+          <a:bodyPr/>
+          <a:lstStyle/>
+          <a:p>
+            <a:r>
+              <a:rPr lang="de-DE"/>
+              <a:t>25.06.2026</a:t>
+            </a:r>
+          </a:p>
+        </p:txBody>
+      </p:sp>
+      <p:sp>
+        <p:nvSpPr>
+          <p:cNvPr id="7" name="Fußzeilenplatzhalter 6">
+            <a:extLst>
+              <a:ext uri="{FF2B5EF4-FFF2-40B4-BE49-F238E27FC236}">
+                <a16:creationId xmlns:a16="http://schemas.microsoft.com/office/drawing/2014/main" id="{9D942951-2681-5B98-DB4E-AACA25F87A2D}"/>
+              </a:ext>
+            </a:extLst>
+          </p:cNvPr>
+          <p:cNvSpPr>
+            <a:spLocks noGrp="1"/>
+          </p:cNvSpPr>
+          <p:nvPr>
+            <p:ph type="ftr" sz="quarter" idx="11"/>
+          </p:nvPr>
+        </p:nvSpPr>
+        <p:spPr/>
+        <p:txBody>
+          <a:bodyPr/>
+          <a:lstStyle/>
+          <a:p>
+            <a:r>
+              <a:rPr lang="de-DE"/>
+              <a:t>Materialdiagnostik: Task 2</a:t>
             </a:r>
           </a:p>
         </p:txBody>
@@ -6153,69 +6553,6 @@
       </p:grpSpPr>
       <p:sp>
         <p:nvSpPr>
-          <p:cNvPr id="2" name="Titel 1">
-            <a:extLst>
-              <a:ext uri="{FF2B5EF4-FFF2-40B4-BE49-F238E27FC236}">
-                <a16:creationId xmlns:a16="http://schemas.microsoft.com/office/drawing/2014/main" id="{EEDBBAAD-698E-2BBD-EFF1-ADB56162D5C1}"/>
-              </a:ext>
-            </a:extLst>
-          </p:cNvPr>
-          <p:cNvSpPr>
-            <a:spLocks noGrp="1"/>
-          </p:cNvSpPr>
-          <p:nvPr>
-            <p:ph type="title"/>
-          </p:nvPr>
-        </p:nvSpPr>
-        <p:spPr/>
-        <p:txBody>
-          <a:bodyPr/>
-          <a:lstStyle/>
-          <a:p>
-            <a:r>
-              <a:rPr lang="de-DE" dirty="0"/>
-              <a:t>Ziel</a:t>
-            </a:r>
-          </a:p>
-        </p:txBody>
-      </p:sp>
-      <p:sp>
-        <p:nvSpPr>
-          <p:cNvPr id="3" name="Inhaltsplatzhalter 2">
-            <a:extLst>
-              <a:ext uri="{FF2B5EF4-FFF2-40B4-BE49-F238E27FC236}">
-                <a16:creationId xmlns:a16="http://schemas.microsoft.com/office/drawing/2014/main" id="{9C68DE30-D93E-3C7A-A549-46E39921BF6A}"/>
-              </a:ext>
-            </a:extLst>
-          </p:cNvPr>
-          <p:cNvSpPr>
-            <a:spLocks noGrp="1"/>
-          </p:cNvSpPr>
-          <p:nvPr>
-            <p:ph idx="1"/>
-          </p:nvPr>
-        </p:nvSpPr>
-        <p:spPr/>
-        <p:txBody>
-          <a:bodyPr/>
-          <a:lstStyle/>
-          <a:p>
-            <a:r>
-              <a:rPr lang="de-DE" dirty="0"/>
-              <a:t>Beschädigtes Zahnrad automatisiert anhand von verschiedenen Merkmalen klassifizieren (Im großen)</a:t>
-            </a:r>
-          </a:p>
-          <a:p>
-            <a:pPr lvl="1"/>
-            <a:r>
-              <a:rPr lang="de-DE" dirty="0"/>
-              <a:t>In diesem Task ist unser Ziel die Vorbereitung für die Automatisierung</a:t>
-            </a:r>
-          </a:p>
-        </p:txBody>
-      </p:sp>
-      <p:sp>
-        <p:nvSpPr>
           <p:cNvPr id="4" name="Foliennummernplatzhalter 3">
             <a:extLst>
               <a:ext uri="{FF2B5EF4-FFF2-40B4-BE49-F238E27FC236}">
@@ -6246,6 +6583,147 @@
               <a:t>3</a:t>
             </a:fld>
             <a:endParaRPr lang="de-DE" altLang="de-DE" dirty="0"/>
+          </a:p>
+        </p:txBody>
+      </p:sp>
+      <p:sp>
+        <p:nvSpPr>
+          <p:cNvPr id="3" name="Inhaltsplatzhalter 2">
+            <a:extLst>
+              <a:ext uri="{FF2B5EF4-FFF2-40B4-BE49-F238E27FC236}">
+                <a16:creationId xmlns:a16="http://schemas.microsoft.com/office/drawing/2014/main" id="{9C68DE30-D93E-3C7A-A549-46E39921BF6A}"/>
+              </a:ext>
+            </a:extLst>
+          </p:cNvPr>
+          <p:cNvSpPr>
+            <a:spLocks noGrp="1"/>
+          </p:cNvSpPr>
+          <p:nvPr>
+            <p:ph sz="quarter" idx="13"/>
+          </p:nvPr>
+        </p:nvSpPr>
+        <p:spPr>
+          <a:prstGeom prst="rect">
+            <a:avLst/>
+          </a:prstGeom>
+        </p:spPr>
+        <p:txBody>
+          <a:bodyPr/>
+          <a:lstStyle/>
+          <a:p>
+            <a:pPr>
+              <a:buFont typeface="Arial" panose="020B0604020202020204" pitchFamily="34" charset="0"/>
+              <a:buChar char="•"/>
+            </a:pPr>
+            <a:r>
+              <a:rPr lang="de-DE" dirty="0"/>
+              <a:t>Automatische Klassifizierung beschädigter Zahnräder anhand von Merkmalen (Features)</a:t>
+            </a:r>
+          </a:p>
+          <a:p>
+            <a:pPr>
+              <a:buFont typeface="Arial" panose="020B0604020202020204" pitchFamily="34" charset="0"/>
+              <a:buChar char="•"/>
+            </a:pPr>
+            <a:endParaRPr lang="de-DE" dirty="0"/>
+          </a:p>
+          <a:p>
+            <a:pPr>
+              <a:buFont typeface="Arial" panose="020B0604020202020204" pitchFamily="34" charset="0"/>
+              <a:buChar char="•"/>
+            </a:pPr>
+            <a:r>
+              <a:rPr lang="de-DE" dirty="0"/>
+              <a:t>In diesem Task ist unser Ziel die Vorbereitung für die Automatisierung</a:t>
+            </a:r>
+          </a:p>
+        </p:txBody>
+      </p:sp>
+      <p:sp>
+        <p:nvSpPr>
+          <p:cNvPr id="2" name="Titel 1">
+            <a:extLst>
+              <a:ext uri="{FF2B5EF4-FFF2-40B4-BE49-F238E27FC236}">
+                <a16:creationId xmlns:a16="http://schemas.microsoft.com/office/drawing/2014/main" id="{EEDBBAAD-698E-2BBD-EFF1-ADB56162D5C1}"/>
+              </a:ext>
+            </a:extLst>
+          </p:cNvPr>
+          <p:cNvSpPr>
+            <a:spLocks noGrp="1"/>
+          </p:cNvSpPr>
+          <p:nvPr>
+            <p:ph type="title"/>
+          </p:nvPr>
+        </p:nvSpPr>
+        <p:spPr/>
+        <p:txBody>
+          <a:bodyPr/>
+          <a:lstStyle/>
+          <a:p>
+            <a:r>
+              <a:rPr lang="de-DE" sz="3200" dirty="0">
+                <a:latin typeface="Arial" panose="020B0604020202020204" pitchFamily="34" charset="0"/>
+                <a:cs typeface="Arial" panose="020B0604020202020204" pitchFamily="34" charset="0"/>
+              </a:rPr>
+              <a:t>Ziel</a:t>
+            </a:r>
+          </a:p>
+        </p:txBody>
+      </p:sp>
+      <p:sp>
+        <p:nvSpPr>
+          <p:cNvPr id="8" name="Datumsplatzhalter 7">
+            <a:extLst>
+              <a:ext uri="{FF2B5EF4-FFF2-40B4-BE49-F238E27FC236}">
+                <a16:creationId xmlns:a16="http://schemas.microsoft.com/office/drawing/2014/main" id="{EC3D51E1-5F7F-CC79-B190-7E596C240B7F}"/>
+              </a:ext>
+            </a:extLst>
+          </p:cNvPr>
+          <p:cNvSpPr>
+            <a:spLocks noGrp="1"/>
+          </p:cNvSpPr>
+          <p:nvPr>
+            <p:ph type="dt" sz="half" idx="12"/>
+          </p:nvPr>
+        </p:nvSpPr>
+        <p:spPr/>
+        <p:txBody>
+          <a:bodyPr/>
+          <a:lstStyle/>
+          <a:p>
+            <a:r>
+              <a:rPr lang="de-DE"/>
+              <a:t>25.06.2026</a:t>
+            </a:r>
+          </a:p>
+        </p:txBody>
+      </p:sp>
+      <p:sp>
+        <p:nvSpPr>
+          <p:cNvPr id="9" name="Fußzeilenplatzhalter 8">
+            <a:extLst>
+              <a:ext uri="{FF2B5EF4-FFF2-40B4-BE49-F238E27FC236}">
+                <a16:creationId xmlns:a16="http://schemas.microsoft.com/office/drawing/2014/main" id="{F03726B5-E16A-44C4-B810-6AFDF6B91428}"/>
+              </a:ext>
+            </a:extLst>
+          </p:cNvPr>
+          <p:cNvSpPr>
+            <a:spLocks noGrp="1"/>
+          </p:cNvSpPr>
+          <p:nvPr>
+            <p:ph type="ftr" sz="quarter" idx="11"/>
+          </p:nvPr>
+        </p:nvSpPr>
+        <p:spPr/>
+        <p:txBody>
+          <a:bodyPr/>
+          <a:lstStyle/>
+          <a:p>
+            <a:r>
+              <a:rPr lang="de-DE"/>
+              <a:t>Materialdiagnostik: Task 2</a:t>
+            </a:r>
+            <a:endParaRPr lang="de-DE" dirty="0"/>
           </a:p>
         </p:txBody>
       </p:sp>
@@ -6281,326 +6759,6 @@
       </p:grpSpPr>
       <p:sp>
         <p:nvSpPr>
-          <p:cNvPr id="5" name="Titel 4">
-            <a:extLst>
-              <a:ext uri="{FF2B5EF4-FFF2-40B4-BE49-F238E27FC236}">
-                <a16:creationId xmlns:a16="http://schemas.microsoft.com/office/drawing/2014/main" id="{FF548E49-692C-4BBE-8063-A0FA8DCFE074}"/>
-              </a:ext>
-            </a:extLst>
-          </p:cNvPr>
-          <p:cNvSpPr>
-            <a:spLocks noGrp="1"/>
-          </p:cNvSpPr>
-          <p:nvPr>
-            <p:ph type="title"/>
-          </p:nvPr>
-        </p:nvSpPr>
-        <p:spPr/>
-        <p:txBody>
-          <a:bodyPr/>
-          <a:lstStyle/>
-          <a:p>
-            <a:r>
-              <a:rPr kumimoji="0" lang="de-DE" sz="3200" b="1" i="0" u="none" strike="noStrike" kern="0" cap="none" spc="0" normalizeH="0" baseline="0" noProof="0" dirty="0" err="1">
-                <a:ln>
-                  <a:noFill/>
-                </a:ln>
-                <a:solidFill>
-                  <a:srgbClr val="A8CC2F"/>
-                </a:solidFill>
-                <a:effectLst/>
-                <a:uLnTx/>
-                <a:uFillTx/>
-                <a:latin typeface="Arial"/>
-                <a:ea typeface="ヒラギノ角ゴ Pro W3"/>
-              </a:rPr>
-              <a:t>Mekmalanalyse</a:t>
-            </a:r>
-            <a:r>
-              <a:rPr kumimoji="0" lang="de-DE" sz="3200" b="1" i="0" u="none" strike="noStrike" kern="0" cap="none" spc="0" normalizeH="0" baseline="0" noProof="0" dirty="0">
-                <a:ln>
-                  <a:noFill/>
-                </a:ln>
-                <a:solidFill>
-                  <a:srgbClr val="A8CC2F"/>
-                </a:solidFill>
-                <a:effectLst/>
-                <a:uLnTx/>
-                <a:uFillTx/>
-                <a:latin typeface="Arial"/>
-                <a:ea typeface="ヒラギノ角ゴ Pro W3"/>
-              </a:rPr>
-              <a:t>:</a:t>
-            </a:r>
-            <a:br>
-              <a:rPr kumimoji="0" lang="de-DE" sz="3200" b="1" i="0" u="none" strike="noStrike" kern="0" cap="none" spc="0" normalizeH="0" baseline="0" noProof="0" dirty="0">
-                <a:ln>
-                  <a:noFill/>
-                </a:ln>
-                <a:solidFill>
-                  <a:srgbClr val="A8CC2F"/>
-                </a:solidFill>
-                <a:effectLst/>
-                <a:uLnTx/>
-                <a:uFillTx/>
-                <a:latin typeface="Arial"/>
-                <a:ea typeface="ヒラギノ角ゴ Pro W3"/>
-              </a:rPr>
-            </a:br>
-            <a:r>
-              <a:rPr kumimoji="0" lang="de-DE" sz="2400" b="1" i="0" u="none" strike="noStrike" kern="0" cap="none" spc="0" normalizeH="0" baseline="0" noProof="0" dirty="0">
-                <a:ln>
-                  <a:noFill/>
-                </a:ln>
-                <a:solidFill>
-                  <a:srgbClr val="A8CC2F"/>
-                </a:solidFill>
-                <a:effectLst/>
-                <a:uLnTx/>
-                <a:uFillTx/>
-                <a:latin typeface="Arial"/>
-                <a:ea typeface="ヒラギノ角ゴ Pro W3"/>
-              </a:rPr>
-              <a:t>Feature </a:t>
-            </a:r>
-            <a:r>
-              <a:rPr kumimoji="0" lang="de-DE" sz="2400" b="1" i="0" u="none" strike="noStrike" kern="0" cap="none" spc="0" normalizeH="0" baseline="0" noProof="0" dirty="0" err="1">
-                <a:ln>
-                  <a:noFill/>
-                </a:ln>
-                <a:solidFill>
-                  <a:srgbClr val="A8CC2F"/>
-                </a:solidFill>
-                <a:effectLst/>
-                <a:uLnTx/>
-                <a:uFillTx/>
-                <a:latin typeface="Arial"/>
-                <a:ea typeface="ヒラギノ角ゴ Pro W3"/>
-              </a:rPr>
-              <a:t>Extraction</a:t>
-            </a:r>
-            <a:endParaRPr lang="de-DE" dirty="0"/>
-          </a:p>
-        </p:txBody>
-      </p:sp>
-      <p:sp>
-        <p:nvSpPr>
-          <p:cNvPr id="10" name="Inhaltsplatzhalter 9">
-            <a:extLst>
-              <a:ext uri="{FF2B5EF4-FFF2-40B4-BE49-F238E27FC236}">
-                <a16:creationId xmlns:a16="http://schemas.microsoft.com/office/drawing/2014/main" id="{7B8D0937-7521-B2D4-9DC6-F495F659D7E3}"/>
-              </a:ext>
-            </a:extLst>
-          </p:cNvPr>
-          <p:cNvSpPr>
-            <a:spLocks noGrp="1"/>
-          </p:cNvSpPr>
-          <p:nvPr>
-            <p:ph idx="1"/>
-          </p:nvPr>
-        </p:nvSpPr>
-        <p:spPr/>
-        <p:txBody>
-          <a:bodyPr/>
-          <a:lstStyle/>
-          <a:p>
-            <a:pPr algn="l" fontAlgn="base">
-              <a:spcAft>
-                <a:spcPts val="300"/>
-              </a:spcAft>
-              <a:buFont typeface="Arial" panose="020B0604020202020204" pitchFamily="34" charset="0"/>
-              <a:buChar char="•"/>
-            </a:pPr>
-            <a:r>
-              <a:rPr lang="de-DE" dirty="0">
-                <a:latin typeface="gg sans"/>
-              </a:rPr>
-              <a:t>Gruppieren der Features</a:t>
-            </a:r>
-            <a:r>
-              <a:rPr lang="de-DE" b="0" i="0" dirty="0">
-                <a:effectLst/>
-                <a:latin typeface="gg sans"/>
-              </a:rPr>
-              <a:t> </a:t>
-            </a:r>
-          </a:p>
-          <a:p>
-            <a:pPr lvl="1">
-              <a:spcAft>
-                <a:spcPts val="300"/>
-              </a:spcAft>
-              <a:buFont typeface="Arial" panose="020B0604020202020204" pitchFamily="34" charset="0"/>
-              <a:buChar char="•"/>
-            </a:pPr>
-            <a:r>
-              <a:rPr lang="de-DE" b="0" i="0" dirty="0">
-                <a:effectLst/>
-                <a:latin typeface="inherit"/>
-              </a:rPr>
-              <a:t>Zeitbereich: RMS Energy, Zero Crossing Rate </a:t>
-            </a:r>
-            <a:br>
-              <a:rPr lang="de-DE" b="0" i="0" dirty="0">
-                <a:effectLst/>
-                <a:latin typeface="inherit"/>
-              </a:rPr>
-            </a:br>
-            <a:r>
-              <a:rPr lang="de-DE" b="0" i="0" dirty="0">
-                <a:effectLst/>
-                <a:latin typeface="inherit"/>
-              </a:rPr>
-              <a:t>	→ Wie stark ist das Signal, wie viele schnelle Wechsel gibt es?</a:t>
-            </a:r>
-          </a:p>
-          <a:p>
-            <a:pPr lvl="1">
-              <a:spcAft>
-                <a:spcPts val="300"/>
-              </a:spcAft>
-              <a:buFont typeface="Arial" panose="020B0604020202020204" pitchFamily="34" charset="0"/>
-              <a:buChar char="•"/>
-            </a:pPr>
-            <a:r>
-              <a:rPr lang="de-DE" b="0" i="0" dirty="0">
-                <a:effectLst/>
-                <a:latin typeface="inherit"/>
-              </a:rPr>
-              <a:t>Frequenzbereich: </a:t>
-            </a:r>
-            <a:r>
-              <a:rPr lang="de-DE" b="0" i="0" dirty="0" err="1">
-                <a:effectLst/>
-                <a:latin typeface="inherit"/>
-              </a:rPr>
-              <a:t>Spectral</a:t>
-            </a:r>
-            <a:r>
-              <a:rPr lang="de-DE" b="0" i="0" dirty="0">
-                <a:effectLst/>
-                <a:latin typeface="inherit"/>
-              </a:rPr>
-              <a:t> </a:t>
-            </a:r>
-            <a:r>
-              <a:rPr lang="de-DE" b="0" i="0" dirty="0" err="1">
-                <a:effectLst/>
-                <a:latin typeface="inherit"/>
-              </a:rPr>
-              <a:t>Centroid</a:t>
-            </a:r>
-            <a:r>
-              <a:rPr lang="de-DE" b="0" i="0" dirty="0">
-                <a:effectLst/>
-                <a:latin typeface="inherit"/>
-              </a:rPr>
-              <a:t>, </a:t>
-            </a:r>
-            <a:r>
-              <a:rPr lang="de-DE" b="0" i="0" dirty="0" err="1">
-                <a:effectLst/>
-                <a:latin typeface="inherit"/>
-              </a:rPr>
-              <a:t>Bandwidth</a:t>
-            </a:r>
-            <a:r>
-              <a:rPr lang="de-DE" b="0" i="0" dirty="0">
-                <a:effectLst/>
-                <a:latin typeface="inherit"/>
-              </a:rPr>
-              <a:t>, Rolloff, </a:t>
-            </a:r>
-            <a:r>
-              <a:rPr lang="de-DE" b="0" i="0" dirty="0" err="1">
-                <a:effectLst/>
-                <a:latin typeface="inherit"/>
-              </a:rPr>
-              <a:t>Contrast</a:t>
-            </a:r>
-            <a:r>
-              <a:rPr lang="de-DE" b="0" i="0" dirty="0">
-                <a:effectLst/>
-                <a:latin typeface="inherit"/>
-              </a:rPr>
-              <a:t> </a:t>
-            </a:r>
-            <a:br>
-              <a:rPr lang="de-DE" b="0" i="0" dirty="0">
-                <a:effectLst/>
-                <a:latin typeface="inherit"/>
-              </a:rPr>
-            </a:br>
-            <a:r>
-              <a:rPr lang="de-DE" b="0" i="0" dirty="0">
-                <a:effectLst/>
-                <a:latin typeface="inherit"/>
-              </a:rPr>
-              <a:t>	→ Wo liegt Energie im Frequenzspektrum, wie breit/auffällig ist sie verteilt?</a:t>
-            </a:r>
-          </a:p>
-          <a:p>
-            <a:pPr lvl="1">
-              <a:spcAft>
-                <a:spcPts val="300"/>
-              </a:spcAft>
-              <a:buFont typeface="Arial" panose="020B0604020202020204" pitchFamily="34" charset="0"/>
-              <a:buChar char="•"/>
-            </a:pPr>
-            <a:r>
-              <a:rPr lang="de-DE" b="0" i="0" dirty="0">
-                <a:effectLst/>
-                <a:latin typeface="inherit"/>
-              </a:rPr>
-              <a:t>MFCCs / Delta-MFCCs: </a:t>
-            </a:r>
-            <a:br>
-              <a:rPr lang="de-DE" b="0" i="0" dirty="0">
-                <a:effectLst/>
-                <a:latin typeface="inherit"/>
-              </a:rPr>
-            </a:br>
-            <a:r>
-              <a:rPr lang="de-DE" b="0" i="0" dirty="0">
-                <a:effectLst/>
-                <a:latin typeface="inherit"/>
-              </a:rPr>
-              <a:t>	→ Kompakte Beschreibung der spektralen Form und ihrer Veränderung.</a:t>
-            </a:r>
-          </a:p>
-          <a:p>
-            <a:pPr lvl="1">
-              <a:spcAft>
-                <a:spcPts val="300"/>
-              </a:spcAft>
-              <a:buFont typeface="Arial" panose="020B0604020202020204" pitchFamily="34" charset="0"/>
-              <a:buChar char="•"/>
-            </a:pPr>
-            <a:r>
-              <a:rPr lang="de-DE" b="0" i="0" dirty="0">
-                <a:effectLst/>
-                <a:latin typeface="inherit"/>
-              </a:rPr>
-              <a:t>Chroma: </a:t>
-            </a:r>
-            <a:br>
-              <a:rPr lang="de-DE" b="0" i="0" dirty="0">
-                <a:effectLst/>
-                <a:latin typeface="inherit"/>
-              </a:rPr>
-            </a:br>
-            <a:r>
-              <a:rPr lang="de-DE" b="0" i="0" dirty="0">
-                <a:effectLst/>
-                <a:latin typeface="inherit"/>
-              </a:rPr>
-              <a:t>	→ Erfasst wiederkehrende spektrale Muster; bei technischen Signalen weniger intuitiv, aber 	als Mustermerkmal nutzbar.</a:t>
-            </a:r>
-          </a:p>
-        </p:txBody>
-      </p:sp>
-      <p:sp>
-        <p:nvSpPr>
           <p:cNvPr id="4" name="Foliennummernplatzhalter 3">
             <a:extLst>
               <a:ext uri="{FF2B5EF4-FFF2-40B4-BE49-F238E27FC236}">
@@ -6631,6 +6789,276 @@
               <a:t>4</a:t>
             </a:fld>
             <a:endParaRPr lang="de-DE" altLang="de-DE" dirty="0"/>
+          </a:p>
+        </p:txBody>
+      </p:sp>
+      <p:sp>
+        <p:nvSpPr>
+          <p:cNvPr id="10" name="Inhaltsplatzhalter 9">
+            <a:extLst>
+              <a:ext uri="{FF2B5EF4-FFF2-40B4-BE49-F238E27FC236}">
+                <a16:creationId xmlns:a16="http://schemas.microsoft.com/office/drawing/2014/main" id="{7B8D0937-7521-B2D4-9DC6-F495F659D7E3}"/>
+              </a:ext>
+            </a:extLst>
+          </p:cNvPr>
+          <p:cNvSpPr>
+            <a:spLocks noGrp="1"/>
+          </p:cNvSpPr>
+          <p:nvPr>
+            <p:ph sz="quarter" idx="13"/>
+          </p:nvPr>
+        </p:nvSpPr>
+        <p:spPr/>
+        <p:txBody>
+          <a:bodyPr/>
+          <a:lstStyle/>
+          <a:p>
+            <a:pPr algn="l" fontAlgn="base">
+              <a:spcAft>
+                <a:spcPts val="300"/>
+              </a:spcAft>
+              <a:buFont typeface="Arial" panose="020B0604020202020204" pitchFamily="34" charset="0"/>
+              <a:buChar char="•"/>
+            </a:pPr>
+            <a:r>
+              <a:rPr lang="de-DE" dirty="0"/>
+              <a:t>Gruppieren der Features</a:t>
+            </a:r>
+            <a:r>
+              <a:rPr lang="de-DE" b="0" i="0" dirty="0">
+                <a:effectLst/>
+              </a:rPr>
+              <a:t> </a:t>
+            </a:r>
+          </a:p>
+          <a:p>
+            <a:pPr lvl="1">
+              <a:spcAft>
+                <a:spcPts val="300"/>
+              </a:spcAft>
+              <a:buFont typeface="Arial" panose="020B0604020202020204" pitchFamily="34" charset="0"/>
+              <a:buChar char="•"/>
+            </a:pPr>
+            <a:r>
+              <a:rPr lang="de-DE" b="0" i="0" dirty="0">
+                <a:effectLst/>
+              </a:rPr>
+              <a:t>Zeitbereich: RMS Energy, Zero Crossing Rate</a:t>
+            </a:r>
+          </a:p>
+          <a:p>
+            <a:pPr lvl="2">
+              <a:spcAft>
+                <a:spcPts val="300"/>
+              </a:spcAft>
+              <a:buFont typeface="Arial" panose="020B0604020202020204" pitchFamily="34" charset="0"/>
+              <a:buChar char="•"/>
+            </a:pPr>
+            <a:r>
+              <a:rPr lang="de-DE" b="0" i="0" dirty="0">
+                <a:effectLst/>
+              </a:rPr>
+              <a:t>Wie stark ist das Signal, wie viele schnelle Wechsel gibt es?</a:t>
+            </a:r>
+          </a:p>
+          <a:p>
+            <a:pPr lvl="1">
+              <a:spcAft>
+                <a:spcPts val="300"/>
+              </a:spcAft>
+              <a:buFont typeface="Arial" panose="020B0604020202020204" pitchFamily="34" charset="0"/>
+              <a:buChar char="•"/>
+            </a:pPr>
+            <a:r>
+              <a:rPr lang="de-DE" b="0" i="0" dirty="0">
+                <a:effectLst/>
+              </a:rPr>
+              <a:t>Frequenzbereich: Spectral Centroid, Bandwidth, Rolloff, Contrast </a:t>
+            </a:r>
+            <a:endParaRPr lang="de-DE" dirty="0"/>
+          </a:p>
+          <a:p>
+            <a:pPr lvl="2">
+              <a:spcAft>
+                <a:spcPts val="300"/>
+              </a:spcAft>
+              <a:buFont typeface="Arial" panose="020B0604020202020204" pitchFamily="34" charset="0"/>
+              <a:buChar char="•"/>
+            </a:pPr>
+            <a:r>
+              <a:rPr lang="de-DE" b="0" i="0" dirty="0">
+                <a:effectLst/>
+              </a:rPr>
+              <a:t>Wo liegt Energie im Frequenzspektrum, wie breit/auffällig ist sie verteilt?</a:t>
+            </a:r>
+          </a:p>
+          <a:p>
+            <a:pPr lvl="1">
+              <a:spcAft>
+                <a:spcPts val="300"/>
+              </a:spcAft>
+              <a:buFont typeface="Arial" panose="020B0604020202020204" pitchFamily="34" charset="0"/>
+              <a:buChar char="•"/>
+            </a:pPr>
+            <a:r>
+              <a:rPr lang="de-DE" b="0" i="0" dirty="0">
+                <a:effectLst/>
+              </a:rPr>
+              <a:t>MFCCs / Delta-MFCCs:</a:t>
+            </a:r>
+          </a:p>
+          <a:p>
+            <a:pPr lvl="2">
+              <a:spcAft>
+                <a:spcPts val="300"/>
+              </a:spcAft>
+              <a:buFont typeface="Arial" panose="020B0604020202020204" pitchFamily="34" charset="0"/>
+              <a:buChar char="•"/>
+            </a:pPr>
+            <a:r>
+              <a:rPr lang="de-DE" b="0" i="0" dirty="0">
+                <a:effectLst/>
+              </a:rPr>
+              <a:t>Kompakte Beschreibung der spektralen Form und ihrer Veränderung.</a:t>
+            </a:r>
+          </a:p>
+          <a:p>
+            <a:pPr lvl="1">
+              <a:spcAft>
+                <a:spcPts val="300"/>
+              </a:spcAft>
+              <a:buFont typeface="Arial" panose="020B0604020202020204" pitchFamily="34" charset="0"/>
+              <a:buChar char="•"/>
+            </a:pPr>
+            <a:r>
+              <a:rPr lang="de-DE" b="0" i="0" dirty="0">
+                <a:effectLst/>
+              </a:rPr>
+              <a:t>Chroma:</a:t>
+            </a:r>
+          </a:p>
+          <a:p>
+            <a:pPr lvl="2">
+              <a:spcAft>
+                <a:spcPts val="300"/>
+              </a:spcAft>
+              <a:buFont typeface="Arial" panose="020B0604020202020204" pitchFamily="34" charset="0"/>
+              <a:buChar char="•"/>
+            </a:pPr>
+            <a:r>
+              <a:rPr lang="de-DE" b="0" i="0" dirty="0">
+                <a:effectLst/>
+              </a:rPr>
+              <a:t>Erfasst wiederkehrende spektrale Muster; bei technischen Signalen weniger intuitiv, </a:t>
+            </a:r>
+            <a:br>
+              <a:rPr lang="de-DE" b="0" i="0" dirty="0">
+                <a:effectLst/>
+              </a:rPr>
+            </a:br>
+            <a:r>
+              <a:rPr lang="de-DE" b="0" i="0" dirty="0">
+                <a:effectLst/>
+              </a:rPr>
+              <a:t>aber als Mustermerkmal nutzbar.</a:t>
+            </a:r>
+          </a:p>
+        </p:txBody>
+      </p:sp>
+      <p:sp>
+        <p:nvSpPr>
+          <p:cNvPr id="5" name="Titel 4">
+            <a:extLst>
+              <a:ext uri="{FF2B5EF4-FFF2-40B4-BE49-F238E27FC236}">
+                <a16:creationId xmlns:a16="http://schemas.microsoft.com/office/drawing/2014/main" id="{FF548E49-692C-4BBE-8063-A0FA8DCFE074}"/>
+              </a:ext>
+            </a:extLst>
+          </p:cNvPr>
+          <p:cNvSpPr>
+            <a:spLocks noGrp="1"/>
+          </p:cNvSpPr>
+          <p:nvPr>
+            <p:ph type="title"/>
+          </p:nvPr>
+        </p:nvSpPr>
+        <p:spPr/>
+        <p:txBody>
+          <a:bodyPr/>
+          <a:lstStyle/>
+          <a:p>
+            <a:r>
+              <a:rPr kumimoji="0" lang="de-DE" sz="3200" b="1" i="0" u="none" strike="noStrike" kern="0" cap="none" spc="0" normalizeH="0" baseline="0" noProof="0" dirty="0">
+                <a:ln>
+                  <a:noFill/>
+                </a:ln>
+                <a:solidFill>
+                  <a:srgbClr val="A8CC2F"/>
+                </a:solidFill>
+                <a:effectLst/>
+                <a:uLnTx/>
+                <a:uFillTx/>
+                <a:ea typeface="ヒラギノ角ゴ Pro W3"/>
+              </a:rPr>
+              <a:t>Merkmal-Extraktion</a:t>
+            </a:r>
+            <a:endParaRPr lang="de-DE" dirty="0"/>
+          </a:p>
+        </p:txBody>
+      </p:sp>
+      <p:sp>
+        <p:nvSpPr>
+          <p:cNvPr id="6" name="Datumsplatzhalter 5">
+            <a:extLst>
+              <a:ext uri="{FF2B5EF4-FFF2-40B4-BE49-F238E27FC236}">
+                <a16:creationId xmlns:a16="http://schemas.microsoft.com/office/drawing/2014/main" id="{AD575DA6-9507-24A3-D823-ACF99B904417}"/>
+              </a:ext>
+            </a:extLst>
+          </p:cNvPr>
+          <p:cNvSpPr>
+            <a:spLocks noGrp="1"/>
+          </p:cNvSpPr>
+          <p:nvPr>
+            <p:ph type="dt" sz="half" idx="12"/>
+          </p:nvPr>
+        </p:nvSpPr>
+        <p:spPr/>
+        <p:txBody>
+          <a:bodyPr/>
+          <a:lstStyle/>
+          <a:p>
+            <a:r>
+              <a:rPr lang="de-DE"/>
+              <a:t>25.06.2026</a:t>
+            </a:r>
+          </a:p>
+        </p:txBody>
+      </p:sp>
+      <p:sp>
+        <p:nvSpPr>
+          <p:cNvPr id="7" name="Fußzeilenplatzhalter 6">
+            <a:extLst>
+              <a:ext uri="{FF2B5EF4-FFF2-40B4-BE49-F238E27FC236}">
+                <a16:creationId xmlns:a16="http://schemas.microsoft.com/office/drawing/2014/main" id="{B06C2A5A-D44E-21C3-8924-01BF5842EAE8}"/>
+              </a:ext>
+            </a:extLst>
+          </p:cNvPr>
+          <p:cNvSpPr>
+            <a:spLocks noGrp="1"/>
+          </p:cNvSpPr>
+          <p:nvPr>
+            <p:ph type="ftr" sz="quarter" idx="11"/>
+          </p:nvPr>
+        </p:nvSpPr>
+        <p:spPr/>
+        <p:txBody>
+          <a:bodyPr/>
+          <a:lstStyle/>
+          <a:p>
+            <a:r>
+              <a:rPr lang="de-DE"/>
+              <a:t>Materialdiagnostik: Task 2</a:t>
+            </a:r>
+            <a:endParaRPr lang="de-DE" dirty="0"/>
           </a:p>
         </p:txBody>
       </p:sp>
@@ -6686,127 +7114,28 @@
             <p:ph type="title"/>
           </p:nvPr>
         </p:nvSpPr>
-        <p:spPr/>
-        <p:txBody>
-          <a:bodyPr/>
-          <a:lstStyle/>
-          <a:p>
-            <a:r>
-              <a:rPr lang="de-DE" dirty="0" err="1"/>
-              <a:t>Mekmalsanalyse</a:t>
-            </a:r>
-            <a:r>
-              <a:rPr lang="de-DE" dirty="0"/>
-              <a:t>:</a:t>
-            </a:r>
-            <a:br>
-              <a:rPr lang="de-DE" dirty="0"/>
-            </a:br>
-            <a:r>
-              <a:rPr kumimoji="0" lang="de-DE" sz="2400" b="1" i="0" u="none" strike="noStrike" kern="0" cap="none" spc="0" normalizeH="0" baseline="0" noProof="0" dirty="0">
-                <a:ln>
-                  <a:noFill/>
-                </a:ln>
-                <a:solidFill>
-                  <a:srgbClr val="A8CC2F"/>
-                </a:solidFill>
-                <a:effectLst/>
-                <a:uLnTx/>
-                <a:uFillTx/>
-                <a:latin typeface="Arial"/>
-                <a:ea typeface="ヒラギノ角ゴ Pro W3"/>
-              </a:rPr>
-              <a:t>Feature </a:t>
-            </a:r>
-            <a:r>
-              <a:rPr kumimoji="0" lang="de-DE" sz="2400" b="1" i="0" u="none" strike="noStrike" kern="0" cap="none" spc="0" normalizeH="0" baseline="0" noProof="0" dirty="0" err="1">
-                <a:ln>
-                  <a:noFill/>
-                </a:ln>
-                <a:solidFill>
-                  <a:srgbClr val="A8CC2F"/>
-                </a:solidFill>
-                <a:effectLst/>
-                <a:uLnTx/>
-                <a:uFillTx/>
-                <a:latin typeface="Arial"/>
-                <a:ea typeface="ヒラギノ角ゴ Pro W3"/>
-              </a:rPr>
-              <a:t>Extraction</a:t>
-            </a:r>
-            <a:r>
-              <a:rPr kumimoji="0" lang="de-DE" sz="2400" b="1" i="0" u="none" strike="noStrike" kern="0" cap="none" spc="0" normalizeH="0" baseline="0" noProof="0" dirty="0">
-                <a:ln>
-                  <a:noFill/>
-                </a:ln>
-                <a:solidFill>
-                  <a:srgbClr val="A8CC2F"/>
-                </a:solidFill>
-                <a:effectLst/>
-                <a:uLnTx/>
-                <a:uFillTx/>
-                <a:latin typeface="Arial"/>
-                <a:ea typeface="ヒラギノ角ゴ Pro W3"/>
-              </a:rPr>
-              <a:t>: </a:t>
-            </a:r>
-            <a:r>
-              <a:rPr lang="de-DE" sz="2400" dirty="0"/>
-              <a:t>Code</a:t>
-            </a:r>
-            <a:endParaRPr lang="de-DE" dirty="0"/>
-          </a:p>
-        </p:txBody>
-      </p:sp>
-      <p:sp>
-        <p:nvSpPr>
-          <p:cNvPr id="10" name="Inhaltsplatzhalter 9">
-            <a:extLst>
-              <a:ext uri="{FF2B5EF4-FFF2-40B4-BE49-F238E27FC236}">
-                <a16:creationId xmlns:a16="http://schemas.microsoft.com/office/drawing/2014/main" id="{854D615C-F8E5-5FC5-C401-2791DF60C45B}"/>
-              </a:ext>
-            </a:extLst>
-          </p:cNvPr>
-          <p:cNvSpPr>
-            <a:spLocks noGrp="1"/>
-          </p:cNvSpPr>
-          <p:nvPr>
-            <p:ph idx="1"/>
-          </p:nvPr>
-        </p:nvSpPr>
         <p:spPr>
           <a:xfrm>
-            <a:off x="914400" y="1981200"/>
-            <a:ext cx="3304903" cy="4114800"/>
+            <a:off x="341811" y="567600"/>
+            <a:ext cx="4315098" cy="706030"/>
           </a:xfrm>
         </p:spPr>
         <p:txBody>
-          <a:bodyPr/>
-          <a:lstStyle/>
-          <a:p>
-            <a:r>
-              <a:rPr lang="de-DE" dirty="0"/>
-              <a:t>Library: </a:t>
-            </a:r>
-            <a:r>
-              <a:rPr lang="de-DE" dirty="0" err="1"/>
-              <a:t>librosa</a:t>
-            </a:r>
-            <a:endParaRPr lang="de-DE" dirty="0"/>
-          </a:p>
-          <a:p>
-            <a:pPr lvl="1"/>
-            <a:r>
-              <a:rPr lang="de-DE" dirty="0"/>
-              <a:t>Berechnen der Merkmale </a:t>
-            </a:r>
-            <a:br>
-              <a:rPr lang="de-DE" dirty="0"/>
-            </a:br>
-            <a:r>
-              <a:rPr lang="de-DE" dirty="0"/>
-              <a:t> </a:t>
-            </a:r>
+          <a:bodyPr anchor="ctr">
+            <a:normAutofit/>
+          </a:bodyPr>
+          <a:lstStyle/>
+          <a:p>
+            <a:pPr>
+              <a:lnSpc>
+                <a:spcPct val="90000"/>
+              </a:lnSpc>
+            </a:pPr>
+            <a:r>
+              <a:rPr lang="de-DE" sz="3200" dirty="0"/>
+              <a:t>Merkmal-Extraktion</a:t>
+            </a:r>
+            <a:endParaRPr lang="de-DE" sz="2200" dirty="0"/>
           </a:p>
         </p:txBody>
       </p:sp>
@@ -6826,22 +7155,100 @@
             <p:ph type="sldNum" sz="quarter" idx="10"/>
           </p:nvPr>
         </p:nvSpPr>
-        <p:spPr/>
-        <p:txBody>
-          <a:bodyPr/>
+        <p:spPr>
+          <a:xfrm>
+            <a:off x="11582400" y="6447859"/>
+            <a:ext cx="496388" cy="365125"/>
+          </a:xfrm>
+        </p:spPr>
+        <p:txBody>
+          <a:bodyPr anchor="ctr">
+            <a:normAutofit/>
+          </a:bodyPr>
           <a:lstStyle/>
           <a:p>
             <a:pPr>
+              <a:spcAft>
+                <a:spcPts val="600"/>
+              </a:spcAft>
               <a:defRPr/>
             </a:pPr>
             <a:fld id="{A0424531-ACBB-43B0-9536-C2FB0D769E6C}" type="slidenum">
               <a:rPr lang="de-DE" altLang="de-DE" smtClean="0"/>
               <a:pPr>
+                <a:spcAft>
+                  <a:spcPts val="600"/>
+                </a:spcAft>
                 <a:defRPr/>
               </a:pPr>
               <a:t>5</a:t>
             </a:fld>
-            <a:endParaRPr lang="de-DE" altLang="de-DE" dirty="0"/>
+            <a:endParaRPr lang="de-DE" altLang="de-DE"/>
+          </a:p>
+        </p:txBody>
+      </p:sp>
+      <p:sp>
+        <p:nvSpPr>
+          <p:cNvPr id="10" name="Inhaltsplatzhalter 9">
+            <a:extLst>
+              <a:ext uri="{FF2B5EF4-FFF2-40B4-BE49-F238E27FC236}">
+                <a16:creationId xmlns:a16="http://schemas.microsoft.com/office/drawing/2014/main" id="{854D615C-F8E5-5FC5-C401-2791DF60C45B}"/>
+              </a:ext>
+            </a:extLst>
+          </p:cNvPr>
+          <p:cNvSpPr>
+            <a:spLocks noGrp="1"/>
+          </p:cNvSpPr>
+          <p:nvPr>
+            <p:ph sz="quarter" idx="13"/>
+          </p:nvPr>
+        </p:nvSpPr>
+        <p:spPr>
+          <a:xfrm>
+            <a:off x="341313" y="1620000"/>
+            <a:ext cx="5391104" cy="4316412"/>
+          </a:xfrm>
+        </p:spPr>
+        <p:txBody>
+          <a:bodyPr>
+            <a:normAutofit/>
+          </a:bodyPr>
+          <a:lstStyle/>
+          <a:p>
+            <a:pPr>
+              <a:buFont typeface="Arial" panose="020B0604020202020204" pitchFamily="34" charset="0"/>
+              <a:buChar char="•"/>
+            </a:pPr>
+            <a:r>
+              <a:rPr lang="de-DE" dirty="0"/>
+              <a:t>Library: „</a:t>
+            </a:r>
+            <a:r>
+              <a:rPr lang="de-DE" dirty="0" err="1"/>
+              <a:t>librosa</a:t>
+            </a:r>
+            <a:r>
+              <a:rPr lang="de-DE" dirty="0"/>
+              <a:t>“</a:t>
+            </a:r>
+            <a:endParaRPr lang="de-DE" sz="2000" dirty="0"/>
+          </a:p>
+          <a:p>
+            <a:pPr lvl="1">
+              <a:buFont typeface="Arial" panose="020B0604020202020204" pitchFamily="34" charset="0"/>
+              <a:buChar char="•"/>
+            </a:pPr>
+            <a:r>
+              <a:rPr lang="de-DE" dirty="0"/>
+              <a:t>Berechnen der Merkmale </a:t>
+            </a:r>
+            <a:br>
+              <a:rPr lang="de-DE" dirty="0"/>
+            </a:br>
+            <a:r>
+              <a:rPr lang="de-DE" dirty="0"/>
+              <a:t> </a:t>
+            </a:r>
           </a:p>
         </p:txBody>
       </p:sp>
@@ -6867,14 +7274,71 @@
         </p:blipFill>
         <p:spPr>
           <a:xfrm>
-            <a:off x="4399752" y="2129246"/>
-            <a:ext cx="7571631" cy="3391989"/>
+            <a:off x="5500455" y="2133600"/>
+            <a:ext cx="6350233" cy="2857604"/>
           </a:xfrm>
           <a:prstGeom prst="rect">
             <a:avLst/>
           </a:prstGeom>
+          <a:noFill/>
         </p:spPr>
       </p:pic>
+      <p:sp>
+        <p:nvSpPr>
+          <p:cNvPr id="3" name="Datumsplatzhalter 2">
+            <a:extLst>
+              <a:ext uri="{FF2B5EF4-FFF2-40B4-BE49-F238E27FC236}">
+                <a16:creationId xmlns:a16="http://schemas.microsoft.com/office/drawing/2014/main" id="{B976C4FB-8771-9C12-EC14-FF917FA91936}"/>
+              </a:ext>
+            </a:extLst>
+          </p:cNvPr>
+          <p:cNvSpPr>
+            <a:spLocks noGrp="1"/>
+          </p:cNvSpPr>
+          <p:nvPr>
+            <p:ph type="dt" sz="half" idx="12"/>
+          </p:nvPr>
+        </p:nvSpPr>
+        <p:spPr/>
+        <p:txBody>
+          <a:bodyPr/>
+          <a:lstStyle/>
+          <a:p>
+            <a:r>
+              <a:rPr lang="de-DE"/>
+              <a:t>25.06.2026</a:t>
+            </a:r>
+          </a:p>
+        </p:txBody>
+      </p:sp>
+      <p:sp>
+        <p:nvSpPr>
+          <p:cNvPr id="6" name="Fußzeilenplatzhalter 5">
+            <a:extLst>
+              <a:ext uri="{FF2B5EF4-FFF2-40B4-BE49-F238E27FC236}">
+                <a16:creationId xmlns:a16="http://schemas.microsoft.com/office/drawing/2014/main" id="{43258A7A-FB46-C9EE-27DB-D5BFD61A3880}"/>
+              </a:ext>
+            </a:extLst>
+          </p:cNvPr>
+          <p:cNvSpPr>
+            <a:spLocks noGrp="1"/>
+          </p:cNvSpPr>
+          <p:nvPr>
+            <p:ph type="ftr" sz="quarter" idx="11"/>
+          </p:nvPr>
+        </p:nvSpPr>
+        <p:spPr/>
+        <p:txBody>
+          <a:bodyPr/>
+          <a:lstStyle/>
+          <a:p>
+            <a:r>
+              <a:rPr lang="de-DE"/>
+              <a:t>Materialdiagnostik: Task 2</a:t>
+            </a:r>
+          </a:p>
+        </p:txBody>
+      </p:sp>
     </p:spTree>
     <p:extLst>
       <p:ext uri="{BB962C8B-B14F-4D97-AF65-F5344CB8AC3E}">
@@ -6913,159 +7377,6 @@
       </p:grpSpPr>
       <p:sp>
         <p:nvSpPr>
-          <p:cNvPr id="5" name="Titel 4">
-            <a:extLst>
-              <a:ext uri="{FF2B5EF4-FFF2-40B4-BE49-F238E27FC236}">
-                <a16:creationId xmlns:a16="http://schemas.microsoft.com/office/drawing/2014/main" id="{898D85CC-7045-19F5-6B89-A95D6A5F2312}"/>
-              </a:ext>
-            </a:extLst>
-          </p:cNvPr>
-          <p:cNvSpPr>
-            <a:spLocks noGrp="1"/>
-          </p:cNvSpPr>
-          <p:nvPr>
-            <p:ph type="title"/>
-          </p:nvPr>
-        </p:nvSpPr>
-        <p:spPr/>
-        <p:txBody>
-          <a:bodyPr/>
-          <a:lstStyle/>
-          <a:p>
-            <a:r>
-              <a:rPr lang="de-DE" dirty="0"/>
-              <a:t>Hauptkomponentenanalyse:</a:t>
-            </a:r>
-            <a:br>
-              <a:rPr kumimoji="0" lang="de-DE" sz="3200" b="1" i="0" u="none" strike="noStrike" kern="0" cap="none" spc="0" normalizeH="0" baseline="0" noProof="0" dirty="0">
-                <a:ln>
-                  <a:noFill/>
-                </a:ln>
-                <a:solidFill>
-                  <a:srgbClr val="A8CC2F"/>
-                </a:solidFill>
-                <a:effectLst/>
-                <a:uLnTx/>
-                <a:uFillTx/>
-                <a:latin typeface="Arial"/>
-                <a:ea typeface="ヒラギノ角ゴ Pro W3"/>
-              </a:rPr>
-            </a:br>
-            <a:r>
-              <a:rPr kumimoji="0" lang="de-DE" sz="2400" b="1" i="0" u="none" strike="noStrike" kern="0" cap="none" spc="0" normalizeH="0" baseline="0" noProof="0" dirty="0">
-                <a:ln>
-                  <a:noFill/>
-                </a:ln>
-                <a:solidFill>
-                  <a:srgbClr val="A8CC2F"/>
-                </a:solidFill>
-                <a:effectLst/>
-                <a:uLnTx/>
-                <a:uFillTx/>
-                <a:latin typeface="Arial"/>
-                <a:ea typeface="ヒラギノ角ゴ Pro W3"/>
-              </a:rPr>
-              <a:t>Standardisierung</a:t>
-            </a:r>
-            <a:endParaRPr lang="de-DE" dirty="0"/>
-          </a:p>
-        </p:txBody>
-      </p:sp>
-      <p:sp>
-        <p:nvSpPr>
-          <p:cNvPr id="10" name="Inhaltsplatzhalter 9">
-            <a:extLst>
-              <a:ext uri="{FF2B5EF4-FFF2-40B4-BE49-F238E27FC236}">
-                <a16:creationId xmlns:a16="http://schemas.microsoft.com/office/drawing/2014/main" id="{3CFC55D7-9A46-28B7-DCDC-9006970AADA8}"/>
-              </a:ext>
-            </a:extLst>
-          </p:cNvPr>
-          <p:cNvSpPr>
-            <a:spLocks noGrp="1"/>
-          </p:cNvSpPr>
-          <p:nvPr>
-            <p:ph idx="1"/>
-          </p:nvPr>
-        </p:nvSpPr>
-        <p:spPr/>
-        <p:txBody>
-          <a:bodyPr/>
-          <a:lstStyle/>
-          <a:p>
-            <a:pPr algn="l" fontAlgn="base">
-              <a:spcAft>
-                <a:spcPts val="300"/>
-              </a:spcAft>
-              <a:buFont typeface="Arial" panose="020B0604020202020204" pitchFamily="34" charset="0"/>
-              <a:buChar char="•"/>
-            </a:pPr>
-            <a:r>
-              <a:rPr lang="de-DE" b="0" i="0" dirty="0">
-                <a:effectLst/>
-                <a:latin typeface="gg sans"/>
-              </a:rPr>
-              <a:t>Merkmale haben unterschiedliche Einheiten und Größenordnungen</a:t>
-            </a:r>
-          </a:p>
-          <a:p>
-            <a:pPr marL="457200" lvl="1" indent="0">
-              <a:spcAft>
-                <a:spcPts val="300"/>
-              </a:spcAft>
-              <a:buNone/>
-            </a:pPr>
-            <a:r>
-              <a:rPr lang="de-DE" b="0" i="0" dirty="0">
-                <a:effectLst/>
-                <a:latin typeface="gg sans"/>
-                <a:sym typeface="Wingdings" panose="05000000000000000000" pitchFamily="2" charset="2"/>
-              </a:rPr>
-              <a:t> </a:t>
-            </a:r>
-            <a:r>
-              <a:rPr lang="de-DE" b="0" i="0" dirty="0">
-                <a:effectLst/>
-                <a:latin typeface="gg sans"/>
-              </a:rPr>
-              <a:t>Standardisieren auf Mittelwert 0 und Standardabweichung 1</a:t>
-            </a:r>
-          </a:p>
-          <a:p>
-            <a:pPr marL="457200" lvl="1" indent="0">
-              <a:spcAft>
-                <a:spcPts val="300"/>
-              </a:spcAft>
-              <a:buNone/>
-            </a:pPr>
-            <a:r>
-              <a:rPr lang="de-DE" dirty="0">
-                <a:latin typeface="gg sans"/>
-                <a:sym typeface="Wingdings" panose="05000000000000000000" pitchFamily="2" charset="2"/>
-              </a:rPr>
-              <a:t> </a:t>
-            </a:r>
-            <a:r>
-              <a:rPr lang="de-DE" dirty="0">
-                <a:latin typeface="gg sans"/>
-              </a:rPr>
-              <a:t>z.B.</a:t>
-            </a:r>
-            <a:r>
-              <a:rPr lang="de-DE" b="0" i="0" dirty="0">
-                <a:effectLst/>
-                <a:latin typeface="gg sans"/>
-              </a:rPr>
-              <a:t> Frequenzwerte nicht automatisch wichtiger als kleinere dimensionslose Werte</a:t>
-            </a:r>
-            <a:endParaRPr lang="de-DE" b="0" i="0" dirty="0">
-              <a:effectLst/>
-              <a:latin typeface="inherit"/>
-            </a:endParaRPr>
-          </a:p>
-        </p:txBody>
-      </p:sp>
-      <p:sp>
-        <p:nvSpPr>
           <p:cNvPr id="4" name="Foliennummernplatzhalter 3">
             <a:extLst>
               <a:ext uri="{FF2B5EF4-FFF2-40B4-BE49-F238E27FC236}">
@@ -7096,6 +7407,117 @@
               <a:t>6</a:t>
             </a:fld>
             <a:endParaRPr lang="de-DE" altLang="de-DE" dirty="0"/>
+          </a:p>
+        </p:txBody>
+      </p:sp>
+      <p:sp>
+        <p:nvSpPr>
+          <p:cNvPr id="10" name="Inhaltsplatzhalter 9">
+            <a:extLst>
+              <a:ext uri="{FF2B5EF4-FFF2-40B4-BE49-F238E27FC236}">
+                <a16:creationId xmlns:a16="http://schemas.microsoft.com/office/drawing/2014/main" id="{3CFC55D7-9A46-28B7-DCDC-9006970AADA8}"/>
+              </a:ext>
+            </a:extLst>
+          </p:cNvPr>
+          <p:cNvSpPr>
+            <a:spLocks noGrp="1"/>
+          </p:cNvSpPr>
+          <p:nvPr>
+            <p:ph sz="quarter" idx="13"/>
+          </p:nvPr>
+        </p:nvSpPr>
+        <p:spPr/>
+        <p:txBody>
+          <a:bodyPr/>
+          <a:lstStyle/>
+          <a:p>
+            <a:pPr algn="l" fontAlgn="base">
+              <a:spcAft>
+                <a:spcPts val="300"/>
+              </a:spcAft>
+              <a:buFont typeface="Arial" panose="020B0604020202020204" pitchFamily="34" charset="0"/>
+              <a:buChar char="•"/>
+            </a:pPr>
+            <a:r>
+              <a:rPr lang="de-DE" b="0" i="0" dirty="0">
+                <a:effectLst/>
+              </a:rPr>
+              <a:t>Merkmale haben unterschiedliche Einheiten und Größenordnungen</a:t>
+            </a:r>
+          </a:p>
+          <a:p>
+            <a:pPr lvl="1">
+              <a:spcAft>
+                <a:spcPts val="300"/>
+              </a:spcAft>
+              <a:buFont typeface="Arial" panose="020B0604020202020204" pitchFamily="34" charset="0"/>
+              <a:buChar char="•"/>
+            </a:pPr>
+            <a:r>
+              <a:rPr lang="de-DE" b="0" i="0" dirty="0">
+                <a:effectLst/>
+              </a:rPr>
+              <a:t>Standardisieren auf Mittelwert 0 und Standardabweichung 1</a:t>
+            </a:r>
+          </a:p>
+          <a:p>
+            <a:pPr lvl="1">
+              <a:spcAft>
+                <a:spcPts val="300"/>
+              </a:spcAft>
+              <a:buFont typeface="Arial" panose="020B0604020202020204" pitchFamily="34" charset="0"/>
+              <a:buChar char="•"/>
+            </a:pPr>
+            <a:r>
+              <a:rPr lang="de-DE" dirty="0"/>
+              <a:t>Da z.B.</a:t>
+            </a:r>
+            <a:r>
+              <a:rPr lang="de-DE" b="0" i="0" dirty="0">
+                <a:effectLst/>
+              </a:rPr>
+              <a:t> Frequenzwerte nicht automatisch wichtiger als kleinere dimensionslose Werte sind</a:t>
+            </a:r>
+          </a:p>
+        </p:txBody>
+      </p:sp>
+      <p:sp>
+        <p:nvSpPr>
+          <p:cNvPr id="5" name="Titel 4">
+            <a:extLst>
+              <a:ext uri="{FF2B5EF4-FFF2-40B4-BE49-F238E27FC236}">
+                <a16:creationId xmlns:a16="http://schemas.microsoft.com/office/drawing/2014/main" id="{898D85CC-7045-19F5-6B89-A95D6A5F2312}"/>
+              </a:ext>
+            </a:extLst>
+          </p:cNvPr>
+          <p:cNvSpPr>
+            <a:spLocks noGrp="1"/>
+          </p:cNvSpPr>
+          <p:nvPr>
+            <p:ph type="title"/>
+          </p:nvPr>
+        </p:nvSpPr>
+        <p:spPr/>
+        <p:txBody>
+          <a:bodyPr/>
+          <a:lstStyle/>
+          <a:p>
+            <a:r>
+              <a:rPr kumimoji="0" lang="de-DE" sz="3200" b="1" i="0" u="none" strike="noStrike" kern="0" cap="none" spc="0" normalizeH="0" baseline="0" noProof="0" dirty="0">
+                <a:ln>
+                  <a:noFill/>
+                </a:ln>
+                <a:solidFill>
+                  <a:srgbClr val="A8CC2F"/>
+                </a:solidFill>
+                <a:effectLst/>
+                <a:uLnTx/>
+                <a:uFillTx/>
+                <a:ea typeface="ヒラギノ角ゴ Pro W3"/>
+              </a:rPr>
+              <a:t>Standardisierung</a:t>
+            </a:r>
+            <a:endParaRPr lang="de-DE" dirty="0"/>
           </a:p>
         </p:txBody>
       </p:sp>
@@ -7121,14 +7543,71 @@
         </p:blipFill>
         <p:spPr>
           <a:xfrm>
-            <a:off x="1426710" y="4119965"/>
-            <a:ext cx="8885690" cy="1044030"/>
+            <a:off x="1162788" y="3699361"/>
+            <a:ext cx="9866424" cy="1159262"/>
           </a:xfrm>
           <a:prstGeom prst="rect">
             <a:avLst/>
           </a:prstGeom>
         </p:spPr>
       </p:pic>
+      <p:sp>
+        <p:nvSpPr>
+          <p:cNvPr id="6" name="Datumsplatzhalter 5">
+            <a:extLst>
+              <a:ext uri="{FF2B5EF4-FFF2-40B4-BE49-F238E27FC236}">
+                <a16:creationId xmlns:a16="http://schemas.microsoft.com/office/drawing/2014/main" id="{38EAA6FE-52E8-2872-6AAC-AF23B87F158D}"/>
+              </a:ext>
+            </a:extLst>
+          </p:cNvPr>
+          <p:cNvSpPr>
+            <a:spLocks noGrp="1"/>
+          </p:cNvSpPr>
+          <p:nvPr>
+            <p:ph type="dt" sz="half" idx="12"/>
+          </p:nvPr>
+        </p:nvSpPr>
+        <p:spPr/>
+        <p:txBody>
+          <a:bodyPr/>
+          <a:lstStyle/>
+          <a:p>
+            <a:r>
+              <a:rPr lang="de-DE"/>
+              <a:t>25.06.2026</a:t>
+            </a:r>
+          </a:p>
+        </p:txBody>
+      </p:sp>
+      <p:sp>
+        <p:nvSpPr>
+          <p:cNvPr id="7" name="Fußzeilenplatzhalter 6">
+            <a:extLst>
+              <a:ext uri="{FF2B5EF4-FFF2-40B4-BE49-F238E27FC236}">
+                <a16:creationId xmlns:a16="http://schemas.microsoft.com/office/drawing/2014/main" id="{F0CF3568-ABC8-8799-4537-678150D7687D}"/>
+              </a:ext>
+            </a:extLst>
+          </p:cNvPr>
+          <p:cNvSpPr>
+            <a:spLocks noGrp="1"/>
+          </p:cNvSpPr>
+          <p:nvPr>
+            <p:ph type="ftr" sz="quarter" idx="11"/>
+          </p:nvPr>
+        </p:nvSpPr>
+        <p:spPr/>
+        <p:txBody>
+          <a:bodyPr/>
+          <a:lstStyle/>
+          <a:p>
+            <a:r>
+              <a:rPr lang="de-DE"/>
+              <a:t>Materialdiagnostik: Task 2</a:t>
+            </a:r>
+            <a:endParaRPr lang="de-DE" dirty="0"/>
+          </a:p>
+        </p:txBody>
+      </p:sp>
     </p:spTree>
     <p:extLst>
       <p:ext uri="{BB962C8B-B14F-4D97-AF65-F5344CB8AC3E}">
@@ -7167,18 +7646,18 @@
       </p:grpSpPr>
       <p:sp>
         <p:nvSpPr>
-          <p:cNvPr id="5" name="Titel 4">
-            <a:extLst>
-              <a:ext uri="{FF2B5EF4-FFF2-40B4-BE49-F238E27FC236}">
-                <a16:creationId xmlns:a16="http://schemas.microsoft.com/office/drawing/2014/main" id="{A45EFF85-64A8-E302-6981-1B6B7F7F8DDD}"/>
-              </a:ext>
-            </a:extLst>
-          </p:cNvPr>
-          <p:cNvSpPr>
-            <a:spLocks noGrp="1"/>
-          </p:cNvSpPr>
-          <p:nvPr>
-            <p:ph type="title"/>
+          <p:cNvPr id="4" name="Foliennummernplatzhalter 3">
+            <a:extLst>
+              <a:ext uri="{FF2B5EF4-FFF2-40B4-BE49-F238E27FC236}">
+                <a16:creationId xmlns:a16="http://schemas.microsoft.com/office/drawing/2014/main" id="{4261BA00-8F21-42B1-B753-4444F47505B5}"/>
+              </a:ext>
+            </a:extLst>
+          </p:cNvPr>
+          <p:cNvSpPr>
+            <a:spLocks noGrp="1"/>
+          </p:cNvSpPr>
+          <p:nvPr>
+            <p:ph type="sldNum" sz="quarter" idx="10"/>
           </p:nvPr>
         </p:nvSpPr>
         <p:spPr/>
@@ -7186,18 +7665,17 @@
           <a:bodyPr/>
           <a:lstStyle/>
           <a:p>
-            <a:r>
-              <a:rPr lang="de-DE" dirty="0"/>
-              <a:t>Explorative Datenanalyse:</a:t>
-            </a:r>
-            <a:br>
-              <a:rPr lang="de-DE" dirty="0"/>
-            </a:br>
-            <a:r>
-              <a:rPr lang="de-DE" sz="2400" dirty="0"/>
-              <a:t>Boxplot-Analyse</a:t>
-            </a:r>
-            <a:endParaRPr lang="de-DE" dirty="0"/>
+            <a:pPr>
+              <a:defRPr/>
+            </a:pPr>
+            <a:fld id="{A0424531-ACBB-43B0-9536-C2FB0D769E6C}" type="slidenum">
+              <a:rPr lang="de-DE" altLang="de-DE" smtClean="0"/>
+              <a:pPr>
+                <a:defRPr/>
+              </a:pPr>
+              <a:t>7</a:t>
+            </a:fld>
+            <a:endParaRPr lang="de-DE" altLang="de-DE" dirty="0"/>
           </a:p>
         </p:txBody>
       </p:sp>
@@ -7214,20 +7692,20 @@
             <a:picLocks noGrp="1" noChangeAspect="1"/>
           </p:cNvPicPr>
           <p:nvPr>
-            <p:ph idx="1"/>
+            <p:ph sz="quarter" idx="13"/>
           </p:nvPr>
         </p:nvPicPr>
         <p:blipFill rotWithShape="1">
           <a:blip r:embed="rId2"/>
-          <a:srcRect b="48812"/>
+          <a:srcRect b="46888"/>
           <a:stretch>
             <a:fillRect/>
           </a:stretch>
         </p:blipFill>
         <p:spPr bwMode="auto">
           <a:xfrm>
-            <a:off x="111772" y="1873899"/>
-            <a:ext cx="11968455" cy="4038599"/>
+            <a:off x="343622" y="1414962"/>
+            <a:ext cx="11504756" cy="4028076"/>
           </a:xfrm>
           <a:prstGeom prst="rect">
             <a:avLst/>
@@ -7259,18 +7737,51 @@
       </p:pic>
       <p:sp>
         <p:nvSpPr>
-          <p:cNvPr id="4" name="Foliennummernplatzhalter 3">
-            <a:extLst>
-              <a:ext uri="{FF2B5EF4-FFF2-40B4-BE49-F238E27FC236}">
-                <a16:creationId xmlns:a16="http://schemas.microsoft.com/office/drawing/2014/main" id="{4261BA00-8F21-42B1-B753-4444F47505B5}"/>
-              </a:ext>
-            </a:extLst>
-          </p:cNvPr>
-          <p:cNvSpPr>
-            <a:spLocks noGrp="1"/>
-          </p:cNvSpPr>
-          <p:nvPr>
-            <p:ph type="sldNum" sz="quarter" idx="10"/>
+          <p:cNvPr id="5" name="Titel 4">
+            <a:extLst>
+              <a:ext uri="{FF2B5EF4-FFF2-40B4-BE49-F238E27FC236}">
+                <a16:creationId xmlns:a16="http://schemas.microsoft.com/office/drawing/2014/main" id="{A45EFF85-64A8-E302-6981-1B6B7F7F8DDD}"/>
+              </a:ext>
+            </a:extLst>
+          </p:cNvPr>
+          <p:cNvSpPr>
+            <a:spLocks noGrp="1"/>
+          </p:cNvSpPr>
+          <p:nvPr>
+            <p:ph type="title"/>
+          </p:nvPr>
+        </p:nvSpPr>
+        <p:spPr>
+          <a:xfrm>
+            <a:off x="341811" y="567600"/>
+            <a:ext cx="4500012" cy="706030"/>
+          </a:xfrm>
+        </p:spPr>
+        <p:txBody>
+          <a:bodyPr/>
+          <a:lstStyle/>
+          <a:p>
+            <a:r>
+              <a:rPr lang="de-DE" sz="3200" dirty="0"/>
+              <a:t>Explorative Datenanalyse</a:t>
+            </a:r>
+          </a:p>
+        </p:txBody>
+      </p:sp>
+      <p:sp>
+        <p:nvSpPr>
+          <p:cNvPr id="2" name="Datumsplatzhalter 1">
+            <a:extLst>
+              <a:ext uri="{FF2B5EF4-FFF2-40B4-BE49-F238E27FC236}">
+                <a16:creationId xmlns:a16="http://schemas.microsoft.com/office/drawing/2014/main" id="{CEF0FCFB-49D3-B0D3-1565-3799B0181601}"/>
+              </a:ext>
+            </a:extLst>
+          </p:cNvPr>
+          <p:cNvSpPr>
+            <a:spLocks noGrp="1"/>
+          </p:cNvSpPr>
+          <p:nvPr>
+            <p:ph type="dt" sz="half" idx="12"/>
           </p:nvPr>
         </p:nvSpPr>
         <p:spPr/>
@@ -7278,17 +7789,39 @@
           <a:bodyPr/>
           <a:lstStyle/>
           <a:p>
-            <a:pPr>
-              <a:defRPr/>
-            </a:pPr>
-            <a:fld id="{A0424531-ACBB-43B0-9536-C2FB0D769E6C}" type="slidenum">
-              <a:rPr lang="de-DE" altLang="de-DE" smtClean="0"/>
-              <a:pPr>
-                <a:defRPr/>
-              </a:pPr>
-              <a:t>7</a:t>
-            </a:fld>
-            <a:endParaRPr lang="de-DE" altLang="de-DE" dirty="0"/>
+            <a:r>
+              <a:rPr lang="de-DE"/>
+              <a:t>25.06.2026</a:t>
+            </a:r>
+          </a:p>
+        </p:txBody>
+      </p:sp>
+      <p:sp>
+        <p:nvSpPr>
+          <p:cNvPr id="6" name="Fußzeilenplatzhalter 5">
+            <a:extLst>
+              <a:ext uri="{FF2B5EF4-FFF2-40B4-BE49-F238E27FC236}">
+                <a16:creationId xmlns:a16="http://schemas.microsoft.com/office/drawing/2014/main" id="{C652A9E7-E0BD-8249-90D0-97B3A7CD27DF}"/>
+              </a:ext>
+            </a:extLst>
+          </p:cNvPr>
+          <p:cNvSpPr>
+            <a:spLocks noGrp="1"/>
+          </p:cNvSpPr>
+          <p:nvPr>
+            <p:ph type="ftr" sz="quarter" idx="11"/>
+          </p:nvPr>
+        </p:nvSpPr>
+        <p:spPr/>
+        <p:txBody>
+          <a:bodyPr/>
+          <a:lstStyle/>
+          <a:p>
+            <a:r>
+              <a:rPr lang="de-DE"/>
+              <a:t>Materialdiagnostik: Task 2</a:t>
+            </a:r>
+            <a:endParaRPr lang="de-DE" dirty="0"/>
           </a:p>
         </p:txBody>
       </p:sp>
@@ -7330,18 +7863,18 @@
       </p:grpSpPr>
       <p:sp>
         <p:nvSpPr>
-          <p:cNvPr id="5" name="Titel 4">
-            <a:extLst>
-              <a:ext uri="{FF2B5EF4-FFF2-40B4-BE49-F238E27FC236}">
-                <a16:creationId xmlns:a16="http://schemas.microsoft.com/office/drawing/2014/main" id="{23FF9676-A75A-6AB8-50C5-C4EED7B6A7C1}"/>
-              </a:ext>
-            </a:extLst>
-          </p:cNvPr>
-          <p:cNvSpPr>
-            <a:spLocks noGrp="1"/>
-          </p:cNvSpPr>
-          <p:nvPr>
-            <p:ph type="title"/>
+          <p:cNvPr id="4" name="Foliennummernplatzhalter 3">
+            <a:extLst>
+              <a:ext uri="{FF2B5EF4-FFF2-40B4-BE49-F238E27FC236}">
+                <a16:creationId xmlns:a16="http://schemas.microsoft.com/office/drawing/2014/main" id="{668000FF-5C0D-F793-7E08-F6647F058BF1}"/>
+              </a:ext>
+            </a:extLst>
+          </p:cNvPr>
+          <p:cNvSpPr>
+            <a:spLocks noGrp="1"/>
+          </p:cNvSpPr>
+          <p:nvPr>
+            <p:ph type="sldNum" sz="quarter" idx="10"/>
           </p:nvPr>
         </p:nvSpPr>
         <p:spPr/>
@@ -7349,18 +7882,17 @@
           <a:bodyPr/>
           <a:lstStyle/>
           <a:p>
-            <a:r>
-              <a:rPr lang="de-DE" dirty="0"/>
-              <a:t>Explorative Datenanalyse:</a:t>
-            </a:r>
-            <a:br>
-              <a:rPr lang="de-DE" dirty="0"/>
-            </a:br>
-            <a:r>
-              <a:rPr lang="de-DE" sz="2400" dirty="0"/>
-              <a:t>Boxplot-Analyse</a:t>
-            </a:r>
-            <a:endParaRPr lang="de-DE" dirty="0"/>
+            <a:pPr>
+              <a:defRPr/>
+            </a:pPr>
+            <a:fld id="{A0424531-ACBB-43B0-9536-C2FB0D769E6C}" type="slidenum">
+              <a:rPr lang="de-DE" altLang="de-DE" smtClean="0"/>
+              <a:pPr>
+                <a:defRPr/>
+              </a:pPr>
+              <a:t>8</a:t>
+            </a:fld>
+            <a:endParaRPr lang="de-DE" altLang="de-DE" dirty="0"/>
           </a:p>
         </p:txBody>
       </p:sp>
@@ -7377,20 +7909,20 @@
             <a:picLocks noGrp="1" noChangeAspect="1"/>
           </p:cNvPicPr>
           <p:nvPr>
-            <p:ph idx="1"/>
+            <p:ph sz="quarter" idx="13"/>
           </p:nvPr>
         </p:nvPicPr>
         <p:blipFill rotWithShape="1">
           <a:blip r:embed="rId2"/>
-          <a:srcRect t="52986"/>
+          <a:srcRect t="53112"/>
           <a:stretch>
             <a:fillRect/>
           </a:stretch>
         </p:blipFill>
         <p:spPr bwMode="auto">
           <a:xfrm>
-            <a:off x="161730" y="1589818"/>
-            <a:ext cx="11868540" cy="3678364"/>
+            <a:off x="343200" y="1650836"/>
+            <a:ext cx="11505600" cy="3556327"/>
           </a:xfrm>
           <a:prstGeom prst="rect">
             <a:avLst/>
@@ -7422,36 +7954,35 @@
       </p:pic>
       <p:sp>
         <p:nvSpPr>
-          <p:cNvPr id="4" name="Foliennummernplatzhalter 3">
-            <a:extLst>
-              <a:ext uri="{FF2B5EF4-FFF2-40B4-BE49-F238E27FC236}">
-                <a16:creationId xmlns:a16="http://schemas.microsoft.com/office/drawing/2014/main" id="{668000FF-5C0D-F793-7E08-F6647F058BF1}"/>
-              </a:ext>
-            </a:extLst>
-          </p:cNvPr>
-          <p:cNvSpPr>
-            <a:spLocks noGrp="1"/>
-          </p:cNvSpPr>
-          <p:nvPr>
-            <p:ph type="sldNum" sz="quarter" idx="10"/>
-          </p:nvPr>
-        </p:nvSpPr>
-        <p:spPr/>
-        <p:txBody>
-          <a:bodyPr/>
-          <a:lstStyle/>
-          <a:p>
-            <a:pPr>
-              <a:defRPr/>
-            </a:pPr>
-            <a:fld id="{A0424531-ACBB-43B0-9536-C2FB0D769E6C}" type="slidenum">
-              <a:rPr lang="de-DE" altLang="de-DE" smtClean="0"/>
-              <a:pPr>
-                <a:defRPr/>
-              </a:pPr>
-              <a:t>8</a:t>
-            </a:fld>
-            <a:endParaRPr lang="de-DE" altLang="de-DE" dirty="0"/>
+          <p:cNvPr id="5" name="Titel 4">
+            <a:extLst>
+              <a:ext uri="{FF2B5EF4-FFF2-40B4-BE49-F238E27FC236}">
+                <a16:creationId xmlns:a16="http://schemas.microsoft.com/office/drawing/2014/main" id="{23FF9676-A75A-6AB8-50C5-C4EED7B6A7C1}"/>
+              </a:ext>
+            </a:extLst>
+          </p:cNvPr>
+          <p:cNvSpPr>
+            <a:spLocks noGrp="1"/>
+          </p:cNvSpPr>
+          <p:nvPr>
+            <p:ph type="title"/>
+          </p:nvPr>
+        </p:nvSpPr>
+        <p:spPr>
+          <a:xfrm>
+            <a:off x="341811" y="567600"/>
+            <a:ext cx="4544982" cy="706030"/>
+          </a:xfrm>
+        </p:spPr>
+        <p:txBody>
+          <a:bodyPr/>
+          <a:lstStyle/>
+          <a:p>
+            <a:r>
+              <a:rPr lang="de-DE" sz="3200" dirty="0"/>
+              <a:t>Explorative Datenanalyse</a:t>
+            </a:r>
+            <a:endParaRPr lang="de-DE" dirty="0"/>
           </a:p>
         </p:txBody>
       </p:sp>
@@ -7469,7 +8000,7 @@
         </p:nvSpPr>
         <p:spPr>
           <a:xfrm>
-            <a:off x="467591" y="5434445"/>
+            <a:off x="625186" y="5486910"/>
             <a:ext cx="10941627" cy="461665"/>
           </a:xfrm>
           <a:prstGeom prst="rect">
@@ -7484,17 +8015,80 @@
           <a:lstStyle/>
           <a:p>
             <a:r>
-              <a:rPr lang="de-DE" dirty="0"/>
+              <a:rPr lang="de-DE" dirty="0">
+                <a:latin typeface="+mn-lt"/>
+              </a:rPr>
               <a:t>Prüfen: </a:t>
             </a:r>
             <a:r>
-              <a:rPr lang="de-DE" dirty="0" err="1"/>
+              <a:rPr lang="de-DE" dirty="0" err="1">
+                <a:latin typeface="+mn-lt"/>
+              </a:rPr>
               <a:t>specture</a:t>
             </a:r>
             <a:r>
-              <a:rPr lang="de-DE" dirty="0"/>
+              <a:rPr lang="de-DE" dirty="0">
+                <a:latin typeface="+mn-lt"/>
+              </a:rPr>
               <a:t> Rolloff … (Tim)</a:t>
             </a:r>
+          </a:p>
+        </p:txBody>
+      </p:sp>
+      <p:sp>
+        <p:nvSpPr>
+          <p:cNvPr id="2" name="Datumsplatzhalter 1">
+            <a:extLst>
+              <a:ext uri="{FF2B5EF4-FFF2-40B4-BE49-F238E27FC236}">
+                <a16:creationId xmlns:a16="http://schemas.microsoft.com/office/drawing/2014/main" id="{BE9FD257-CB15-1E41-8906-263322E6C4EE}"/>
+              </a:ext>
+            </a:extLst>
+          </p:cNvPr>
+          <p:cNvSpPr>
+            <a:spLocks noGrp="1"/>
+          </p:cNvSpPr>
+          <p:nvPr>
+            <p:ph type="dt" sz="half" idx="12"/>
+          </p:nvPr>
+        </p:nvSpPr>
+        <p:spPr/>
+        <p:txBody>
+          <a:bodyPr/>
+          <a:lstStyle/>
+          <a:p>
+            <a:r>
+              <a:rPr lang="de-DE"/>
+              <a:t>25.06.2026</a:t>
+            </a:r>
+          </a:p>
+        </p:txBody>
+      </p:sp>
+      <p:sp>
+        <p:nvSpPr>
+          <p:cNvPr id="7" name="Fußzeilenplatzhalter 6">
+            <a:extLst>
+              <a:ext uri="{FF2B5EF4-FFF2-40B4-BE49-F238E27FC236}">
+                <a16:creationId xmlns:a16="http://schemas.microsoft.com/office/drawing/2014/main" id="{6F3361E2-F2B2-2257-211E-2EC99788AC7F}"/>
+              </a:ext>
+            </a:extLst>
+          </p:cNvPr>
+          <p:cNvSpPr>
+            <a:spLocks noGrp="1"/>
+          </p:cNvSpPr>
+          <p:nvPr>
+            <p:ph type="ftr" sz="quarter" idx="11"/>
+          </p:nvPr>
+        </p:nvSpPr>
+        <p:spPr/>
+        <p:txBody>
+          <a:bodyPr/>
+          <a:lstStyle/>
+          <a:p>
+            <a:r>
+              <a:rPr lang="de-DE"/>
+              <a:t>Materialdiagnostik: Task 2</a:t>
+            </a:r>
+            <a:endParaRPr lang="de-DE" dirty="0"/>
           </a:p>
         </p:txBody>
       </p:sp>
@@ -7536,81 +8130,6 @@
       </p:grpSpPr>
       <p:sp>
         <p:nvSpPr>
-          <p:cNvPr id="5" name="Titel 4">
-            <a:extLst>
-              <a:ext uri="{FF2B5EF4-FFF2-40B4-BE49-F238E27FC236}">
-                <a16:creationId xmlns:a16="http://schemas.microsoft.com/office/drawing/2014/main" id="{0C57D15E-CCA8-224B-43C2-BF840F74E7FD}"/>
-              </a:ext>
-            </a:extLst>
-          </p:cNvPr>
-          <p:cNvSpPr>
-            <a:spLocks noGrp="1"/>
-          </p:cNvSpPr>
-          <p:nvPr>
-            <p:ph type="title"/>
-          </p:nvPr>
-        </p:nvSpPr>
-        <p:spPr/>
-        <p:txBody>
-          <a:bodyPr/>
-          <a:lstStyle/>
-          <a:p>
-            <a:r>
-              <a:rPr lang="de-DE" dirty="0">
-                <a:latin typeface="Arial"/>
-                <a:ea typeface="ヒラギノ角ゴ Pro W3"/>
-              </a:rPr>
-              <a:t>Hauptkomponentenanalyse:</a:t>
-            </a:r>
-            <a:br>
-              <a:rPr lang="de-DE" dirty="0">
-                <a:latin typeface="Arial"/>
-                <a:ea typeface="ヒラギノ角ゴ Pro W3"/>
-              </a:rPr>
-            </a:br>
-            <a:r>
-              <a:rPr lang="de-DE" sz="2400" dirty="0">
-                <a:latin typeface="Arial"/>
-                <a:ea typeface="ヒラギノ角ゴ Pro W3"/>
-              </a:rPr>
-              <a:t>(PCA)</a:t>
-            </a:r>
-            <a:endParaRPr lang="de-DE" dirty="0"/>
-          </a:p>
-        </p:txBody>
-      </p:sp>
-      <p:pic>
-        <p:nvPicPr>
-          <p:cNvPr id="3" name="Inhaltsplatzhalter 2" descr="Ein Bild, das Text, Screenshot, Schrift enthält.&#10;&#10;KI-generierte Inhalte können fehlerhaft sein.">
-            <a:extLst>
-              <a:ext uri="{FF2B5EF4-FFF2-40B4-BE49-F238E27FC236}">
-                <a16:creationId xmlns:a16="http://schemas.microsoft.com/office/drawing/2014/main" id="{FA97D665-B2B0-6A98-0F8B-3D58A024C42B}"/>
-              </a:ext>
-            </a:extLst>
-          </p:cNvPr>
-          <p:cNvPicPr>
-            <a:picLocks noGrp="1" noChangeAspect="1"/>
-          </p:cNvPicPr>
-          <p:nvPr>
-            <p:ph idx="1"/>
-          </p:nvPr>
-        </p:nvPicPr>
-        <p:blipFill rotWithShape="1">
-          <a:blip r:embed="rId3"/>
-          <a:srcRect t="46176"/>
-          <a:stretch>
-            <a:fillRect/>
-          </a:stretch>
-        </p:blipFill>
-        <p:spPr>
-          <a:xfrm>
-            <a:off x="929754" y="4086807"/>
-            <a:ext cx="9722412" cy="1545729"/>
-          </a:xfrm>
-        </p:spPr>
-      </p:pic>
-      <p:sp>
-        <p:nvSpPr>
           <p:cNvPr id="4" name="Foliennummernplatzhalter 3">
             <a:extLst>
               <a:ext uri="{FF2B5EF4-FFF2-40B4-BE49-F238E27FC236}">
@@ -7644,6 +8163,71 @@
           </a:p>
         </p:txBody>
       </p:sp>
+      <p:pic>
+        <p:nvPicPr>
+          <p:cNvPr id="3" name="Inhaltsplatzhalter 2" descr="Ein Bild, das Text, Screenshot, Schrift enthält.&#10;&#10;KI-generierte Inhalte können fehlerhaft sein.">
+            <a:extLst>
+              <a:ext uri="{FF2B5EF4-FFF2-40B4-BE49-F238E27FC236}">
+                <a16:creationId xmlns:a16="http://schemas.microsoft.com/office/drawing/2014/main" id="{FA97D665-B2B0-6A98-0F8B-3D58A024C42B}"/>
+              </a:ext>
+            </a:extLst>
+          </p:cNvPr>
+          <p:cNvPicPr>
+            <a:picLocks noGrp="1" noChangeAspect="1"/>
+          </p:cNvPicPr>
+          <p:nvPr>
+            <p:ph sz="quarter" idx="13"/>
+          </p:nvPr>
+        </p:nvPicPr>
+        <p:blipFill rotWithShape="1">
+          <a:blip r:embed="rId3"/>
+          <a:stretch>
+            <a:fillRect/>
+          </a:stretch>
+        </p:blipFill>
+        <p:spPr>
+          <a:xfrm>
+            <a:off x="1162200" y="3048854"/>
+            <a:ext cx="9867600" cy="2914686"/>
+          </a:xfrm>
+        </p:spPr>
+      </p:pic>
+      <p:sp>
+        <p:nvSpPr>
+          <p:cNvPr id="5" name="Titel 4">
+            <a:extLst>
+              <a:ext uri="{FF2B5EF4-FFF2-40B4-BE49-F238E27FC236}">
+                <a16:creationId xmlns:a16="http://schemas.microsoft.com/office/drawing/2014/main" id="{0C57D15E-CCA8-224B-43C2-BF840F74E7FD}"/>
+              </a:ext>
+            </a:extLst>
+          </p:cNvPr>
+          <p:cNvSpPr>
+            <a:spLocks noGrp="1"/>
+          </p:cNvSpPr>
+          <p:nvPr>
+            <p:ph type="title"/>
+          </p:nvPr>
+        </p:nvSpPr>
+        <p:spPr>
+          <a:xfrm>
+            <a:off x="341810" y="567600"/>
+            <a:ext cx="5646759" cy="706030"/>
+          </a:xfrm>
+        </p:spPr>
+        <p:txBody>
+          <a:bodyPr/>
+          <a:lstStyle/>
+          <a:p>
+            <a:r>
+              <a:rPr lang="de-DE" sz="3200" dirty="0">
+                <a:ea typeface="ヒラギノ角ゴ Pro W3"/>
+              </a:rPr>
+              <a:t>Hauptkomponentenanalyse</a:t>
+            </a:r>
+            <a:endParaRPr lang="de-DE" dirty="0"/>
+          </a:p>
+        </p:txBody>
+      </p:sp>
       <p:sp>
         <p:nvSpPr>
           <p:cNvPr id="6" name="Inhaltsplatzhalter 9">
@@ -7660,7 +8244,7 @@
         </p:nvSpPr>
         <p:spPr bwMode="auto">
           <a:xfrm>
-            <a:off x="914400" y="1981200"/>
+            <a:off x="341811" y="1509009"/>
             <a:ext cx="9737766" cy="2105607"/>
           </a:xfrm>
           <a:prstGeom prst="rect">
@@ -7854,11 +8438,72 @@
             </a:lvl9pPr>
           </a:lstStyle>
           <a:p>
+            <a:pPr>
+              <a:buFont typeface="Arial" panose="020B0604020202020204" pitchFamily="34" charset="0"/>
+              <a:buChar char="•"/>
+            </a:pPr>
             <a:r>
               <a:rPr lang="de-DE" dirty="0"/>
               <a:t>PCA fasst viele Merkmale in zwei Hauptachsen zusammen, die möglichst viel Varianz erklären. Dadurch können wir sehen, ob sich Zahnradzustände räumlich trennen.</a:t>
             </a:r>
             <a:endParaRPr lang="de-DE" kern="0" dirty="0"/>
+          </a:p>
+        </p:txBody>
+      </p:sp>
+      <p:sp>
+        <p:nvSpPr>
+          <p:cNvPr id="2" name="Datumsplatzhalter 1">
+            <a:extLst>
+              <a:ext uri="{FF2B5EF4-FFF2-40B4-BE49-F238E27FC236}">
+                <a16:creationId xmlns:a16="http://schemas.microsoft.com/office/drawing/2014/main" id="{D3CA445C-F940-E013-1AC9-1A366EEA3614}"/>
+              </a:ext>
+            </a:extLst>
+          </p:cNvPr>
+          <p:cNvSpPr>
+            <a:spLocks noGrp="1"/>
+          </p:cNvSpPr>
+          <p:nvPr>
+            <p:ph type="dt" sz="half" idx="12"/>
+          </p:nvPr>
+        </p:nvSpPr>
+        <p:spPr/>
+        <p:txBody>
+          <a:bodyPr/>
+          <a:lstStyle/>
+          <a:p>
+            <a:r>
+              <a:rPr lang="de-DE"/>
+              <a:t>25.06.2026</a:t>
+            </a:r>
+          </a:p>
+        </p:txBody>
+      </p:sp>
+      <p:sp>
+        <p:nvSpPr>
+          <p:cNvPr id="7" name="Fußzeilenplatzhalter 6">
+            <a:extLst>
+              <a:ext uri="{FF2B5EF4-FFF2-40B4-BE49-F238E27FC236}">
+                <a16:creationId xmlns:a16="http://schemas.microsoft.com/office/drawing/2014/main" id="{6ABEE24C-37F3-78D2-21C6-88F44D571121}"/>
+              </a:ext>
+            </a:extLst>
+          </p:cNvPr>
+          <p:cNvSpPr>
+            <a:spLocks noGrp="1"/>
+          </p:cNvSpPr>
+          <p:nvPr>
+            <p:ph type="ftr" sz="quarter" idx="11"/>
+          </p:nvPr>
+        </p:nvSpPr>
+        <p:spPr/>
+        <p:txBody>
+          <a:bodyPr/>
+          <a:lstStyle/>
+          <a:p>
+            <a:r>
+              <a:rPr lang="de-DE"/>
+              <a:t>Materialdiagnostik: Task 2</a:t>
+            </a:r>
+            <a:endParaRPr lang="de-DE" dirty="0"/>
           </a:p>
         </p:txBody>
       </p:sp>
@@ -7876,7 +8521,7 @@
 </file>
 
 <file path=ppt/theme/theme1.xml><?xml version="1.0" encoding="utf-8"?>
-<a:theme xmlns:a="http://schemas.openxmlformats.org/drawingml/2006/main" name="B-TU_Design">
+<a:theme xmlns:a="http://schemas.openxmlformats.org/drawingml/2006/main" name="B-TU_Design_new">
   <a:themeElements>
     <a:clrScheme name="Leere Präsentation 1">
       <a:dk1>
@@ -7916,16 +8561,76 @@
         <a:srgbClr val="99CC00"/>
       </a:folHlink>
     </a:clrScheme>
-    <a:fontScheme name="Leere Präsentation">
+    <a:fontScheme name="Office 2007 - 2010">
       <a:majorFont>
-        <a:latin typeface="Arial"/>
-        <a:ea typeface="ヒラギノ角ゴ Pro W3"/>
-        <a:cs typeface="ヒラギノ角ゴ Pro W3"/>
+        <a:latin typeface="Calibri"/>
+        <a:ea typeface=""/>
+        <a:cs typeface=""/>
+        <a:font script="Jpan" typeface="ＭＳ Ｐゴシック"/>
+        <a:font script="Hang" typeface="맑은 고딕"/>
+        <a:font script="Hans" typeface="宋体"/>
+        <a:font script="Hant" typeface="新細明體"/>
+        <a:font script="Arab" typeface="Times New Roman"/>
+        <a:font script="Hebr" typeface="Times New Roman"/>
+        <a:font script="Thai" typeface="Angsana New"/>
+        <a:font script="Ethi" typeface="Nyala"/>
+        <a:font script="Beng" typeface="Vrinda"/>
+        <a:font script="Gujr" typeface="Shruti"/>
+        <a:font script="Khmr" typeface="MoolBoran"/>
+        <a:font script="Knda" typeface="Tunga"/>
+        <a:font script="Guru" typeface="Raavi"/>
+        <a:font script="Cans" typeface="Euphemia"/>
+        <a:font script="Cher" typeface="Plantagenet Cherokee"/>
+        <a:font script="Yiii" typeface="Microsoft Yi Baiti"/>
+        <a:font script="Tibt" typeface="Microsoft Himalaya"/>
+        <a:font script="Thaa" typeface="MV Boli"/>
+        <a:font script="Deva" typeface="Mangal"/>
+        <a:font script="Telu" typeface="Gautami"/>
+        <a:font script="Taml" typeface="Latha"/>
+        <a:font script="Syrc" typeface="Estrangelo Edessa"/>
+        <a:font script="Orya" typeface="Kalinga"/>
+        <a:font script="Mlym" typeface="Kartika"/>
+        <a:font script="Laoo" typeface="DokChampa"/>
+        <a:font script="Sinh" typeface="Iskoola Pota"/>
+        <a:font script="Mong" typeface="Mongolian Baiti"/>
+        <a:font script="Viet" typeface="Times New Roman"/>
+        <a:font script="Uigh" typeface="Microsoft Uighur"/>
+        <a:font script="Geor" typeface="Sylfaen"/>
       </a:majorFont>
       <a:minorFont>
-        <a:latin typeface="Arial"/>
-        <a:ea typeface="ヒラギノ角ゴ Pro W3"/>
-        <a:cs typeface="ヒラギノ角ゴ Pro W3"/>
+        <a:latin typeface="Calibri"/>
+        <a:ea typeface=""/>
+        <a:cs typeface=""/>
+        <a:font script="Jpan" typeface="ＭＳ Ｐゴシック"/>
+        <a:font script="Hang" typeface="맑은 고딕"/>
+        <a:font script="Hans" typeface="宋体"/>
+        <a:font script="Hant" typeface="新細明體"/>
+        <a:font script="Arab" typeface="Arial"/>
+        <a:font script="Hebr" typeface="Arial"/>
+        <a:font script="Thai" typeface="Cordia New"/>
+        <a:font script="Ethi" typeface="Nyala"/>
+        <a:font script="Beng" typeface="Vrinda"/>
+        <a:font script="Gujr" typeface="Shruti"/>
+        <a:font script="Khmr" typeface="DaunPenh"/>
+        <a:font script="Knda" typeface="Tunga"/>
+        <a:font script="Guru" typeface="Raavi"/>
+        <a:font script="Cans" typeface="Euphemia"/>
+        <a:font script="Cher" typeface="Plantagenet Cherokee"/>
+        <a:font script="Yiii" typeface="Microsoft Yi Baiti"/>
+        <a:font script="Tibt" typeface="Microsoft Himalaya"/>
+        <a:font script="Thaa" typeface="MV Boli"/>
+        <a:font script="Deva" typeface="Mangal"/>
+        <a:font script="Telu" typeface="Gautami"/>
+        <a:font script="Taml" typeface="Latha"/>
+        <a:font script="Syrc" typeface="Estrangelo Edessa"/>
+        <a:font script="Orya" typeface="Kalinga"/>
+        <a:font script="Mlym" typeface="Kartika"/>
+        <a:font script="Laoo" typeface="DokChampa"/>
+        <a:font script="Sinh" typeface="Iskoola Pota"/>
+        <a:font script="Mong" typeface="Mongolian Baiti"/>
+        <a:font script="Viet" typeface="Arial"/>
+        <a:font script="Uigh" typeface="Microsoft Uighur"/>
+        <a:font script="Geor" typeface="Sylfaen"/>
       </a:minorFont>
     </a:fontScheme>
     <a:fmtScheme name="Office">
@@ -8717,7 +9422,7 @@
   </a:extraClrSchemeLst>
   <a:extLst>
     <a:ext uri="{05A4C25C-085E-4340-85A3-A5531E510DB2}">
-      <thm15:themeFamily xmlns:thm15="http://schemas.microsoft.com/office/thememl/2012/main" name="B-TU_Design" id="{F0532450-6947-47A6-81BF-02E1F018A2A7}" vid="{AA793E9C-2381-410C-B7B6-98D03D23E979}"/>
+      <thm15:themeFamily xmlns:thm15="http://schemas.microsoft.com/office/thememl/2012/main" name="B-TU_Design_new" id="{646A7671-C426-4EDE-91D9-79A1794CE4D5}" vid="{0D282BB0-0299-4ACE-B272-414AB2767CE9}"/>
     </a:ext>
   </a:extLst>
 </a:theme>
@@ -9036,4 +9741,319 @@
     </a:ext>
   </a:extLst>
 </a:theme>
+</file>
+
+<file path=ppt/theme/theme3.xml><?xml version="1.0" encoding="utf-8"?>
+<a:theme xmlns:a="http://schemas.openxmlformats.org/drawingml/2006/main" name="Office">
+  <a:themeElements>
+    <a:clrScheme name="Office">
+      <a:dk1>
+        <a:sysClr val="windowText" lastClr="000000"/>
+      </a:dk1>
+      <a:lt1>
+        <a:sysClr val="window" lastClr="FFFFFF"/>
+      </a:lt1>
+      <a:dk2>
+        <a:srgbClr val="0E2841"/>
+      </a:dk2>
+      <a:lt2>
+        <a:srgbClr val="E8E8E8"/>
+      </a:lt2>
+      <a:accent1>
+        <a:srgbClr val="156082"/>
+      </a:accent1>
+      <a:accent2>
+        <a:srgbClr val="E97132"/>
+      </a:accent2>
+      <a:accent3>
+        <a:srgbClr val="196B24"/>
+      </a:accent3>
+      <a:accent4>
+        <a:srgbClr val="0F9ED5"/>
+      </a:accent4>
+      <a:accent5>
+        <a:srgbClr val="A02B93"/>
+      </a:accent5>
+      <a:accent6>
+        <a:srgbClr val="4EA72E"/>
+      </a:accent6>
+      <a:hlink>
+        <a:srgbClr val="467886"/>
+      </a:hlink>
+      <a:folHlink>
+        <a:srgbClr val="96607D"/>
+      </a:folHlink>
+    </a:clrScheme>
+    <a:fontScheme name="Office">
+      <a:majorFont>
+        <a:latin typeface="Aptos Display" panose="02110004020202020204"/>
+        <a:ea typeface=""/>
+        <a:cs typeface=""/>
+        <a:font script="Jpan" typeface="游ゴシック Light"/>
+        <a:font script="Hang" typeface="맑은 고딕"/>
+        <a:font script="Hans" typeface="等线 Light"/>
+        <a:font script="Hant" typeface="新細明體"/>
+        <a:font script="Arab" typeface="Times New Roman"/>
+        <a:font script="Hebr" typeface="Times New Roman"/>
+        <a:font script="Thai" typeface="Angsana New"/>
+        <a:font script="Ethi" typeface="Nyala"/>
+        <a:font script="Beng" typeface="Vrinda"/>
+        <a:font script="Gujr" typeface="Shruti"/>
+        <a:font script="Khmr" typeface="MoolBoran"/>
+        <a:font script="Knda" typeface="Tunga"/>
+        <a:font script="Guru" typeface="Raavi"/>
+        <a:font script="Cans" typeface="Euphemia"/>
+        <a:font script="Cher" typeface="Plantagenet Cherokee"/>
+        <a:font script="Yiii" typeface="Microsoft Yi Baiti"/>
+        <a:font script="Tibt" typeface="Microsoft Himalaya"/>
+        <a:font script="Thaa" typeface="MV Boli"/>
+        <a:font script="Deva" typeface="Mangal"/>
+        <a:font script="Telu" typeface="Gautami"/>
+        <a:font script="Taml" typeface="Latha"/>
+        <a:font script="Syrc" typeface="Estrangelo Edessa"/>
+        <a:font script="Orya" typeface="Kalinga"/>
+        <a:font script="Mlym" typeface="Kartika"/>
+        <a:font script="Laoo" typeface="DokChampa"/>
+        <a:font script="Sinh" typeface="Iskoola Pota"/>
+        <a:font script="Mong" typeface="Mongolian Baiti"/>
+        <a:font script="Viet" typeface="Times New Roman"/>
+        <a:font script="Uigh" typeface="Microsoft Uighur"/>
+        <a:font script="Geor" typeface="Sylfaen"/>
+        <a:font script="Armn" typeface="Arial"/>
+        <a:font script="Bugi" typeface="Leelawadee UI"/>
+        <a:font script="Bopo" typeface="Microsoft JhengHei"/>
+        <a:font script="Java" typeface="Javanese Text"/>
+        <a:font script="Lisu" typeface="Segoe UI"/>
+        <a:font script="Mymr" typeface="Myanmar Text"/>
+        <a:font script="Nkoo" typeface="Ebrima"/>
+        <a:font script="Olck" typeface="Nirmala UI"/>
+        <a:font script="Osma" typeface="Ebrima"/>
+        <a:font script="Phag" typeface="Phagspa"/>
+        <a:font script="Syrn" typeface="Estrangelo Edessa"/>
+        <a:font script="Syrj" typeface="Estrangelo Edessa"/>
+        <a:font script="Syre" typeface="Estrangelo Edessa"/>
+        <a:font script="Sora" typeface="Nirmala UI"/>
+        <a:font script="Tale" typeface="Microsoft Tai Le"/>
+        <a:font script="Talu" typeface="Microsoft New Tai Lue"/>
+        <a:font script="Tfng" typeface="Ebrima"/>
+      </a:majorFont>
+      <a:minorFont>
+        <a:latin typeface="Aptos" panose="02110004020202020204"/>
+        <a:ea typeface=""/>
+        <a:cs typeface=""/>
+        <a:font script="Jpan" typeface="游ゴシック"/>
+        <a:font script="Hang" typeface="맑은 고딕"/>
+        <a:font script="Hans" typeface="等线"/>
+        <a:font script="Hant" typeface="新細明體"/>
+        <a:font script="Arab" typeface="Arial"/>
+        <a:font script="Hebr" typeface="Arial"/>
+        <a:font script="Thai" typeface="Cordia New"/>
+        <a:font script="Ethi" typeface="Nyala"/>
+        <a:font script="Beng" typeface="Vrinda"/>
+        <a:font script="Gujr" typeface="Shruti"/>
+        <a:font script="Khmr" typeface="DaunPenh"/>
+        <a:font script="Knda" typeface="Tunga"/>
+        <a:font script="Guru" typeface="Raavi"/>
+        <a:font script="Cans" typeface="Euphemia"/>
+        <a:font script="Cher" typeface="Plantagenet Cherokee"/>
+        <a:font script="Yiii" typeface="Microsoft Yi Baiti"/>
+        <a:font script="Tibt" typeface="Microsoft Himalaya"/>
+        <a:font script="Thaa" typeface="MV Boli"/>
+        <a:font script="Deva" typeface="Mangal"/>
+        <a:font script="Telu" typeface="Gautami"/>
+        <a:font script="Taml" typeface="Latha"/>
+        <a:font script="Syrc" typeface="Estrangelo Edessa"/>
+        <a:font script="Orya" typeface="Kalinga"/>
+        <a:font script="Mlym" typeface="Kartika"/>
+        <a:font script="Laoo" typeface="DokChampa"/>
+        <a:font script="Sinh" typeface="Iskoola Pota"/>
+        <a:font script="Mong" typeface="Mongolian Baiti"/>
+        <a:font script="Viet" typeface="Arial"/>
+        <a:font script="Uigh" typeface="Microsoft Uighur"/>
+        <a:font script="Geor" typeface="Sylfaen"/>
+        <a:font script="Armn" typeface="Arial"/>
+        <a:font script="Bugi" typeface="Leelawadee UI"/>
+        <a:font script="Bopo" typeface="Microsoft JhengHei"/>
+        <a:font script="Java" typeface="Javanese Text"/>
+        <a:font script="Lisu" typeface="Segoe UI"/>
+        <a:font script="Mymr" typeface="Myanmar Text"/>
+        <a:font script="Nkoo" typeface="Ebrima"/>
+        <a:font script="Olck" typeface="Nirmala UI"/>
+        <a:font script="Osma" typeface="Ebrima"/>
+        <a:font script="Phag" typeface="Phagspa"/>
+        <a:font script="Syrn" typeface="Estrangelo Edessa"/>
+        <a:font script="Syrj" typeface="Estrangelo Edessa"/>
+        <a:font script="Syre" typeface="Estrangelo Edessa"/>
+        <a:font script="Sora" typeface="Nirmala UI"/>
+        <a:font script="Tale" typeface="Microsoft Tai Le"/>
+        <a:font script="Talu" typeface="Microsoft New Tai Lue"/>
+        <a:font script="Tfng" typeface="Ebrima"/>
+      </a:minorFont>
+    </a:fontScheme>
+    <a:fmtScheme name="Office">
+      <a:fillStyleLst>
+        <a:solidFill>
+          <a:schemeClr val="phClr"/>
+        </a:solidFill>
+        <a:gradFill rotWithShape="1">
+          <a:gsLst>
+            <a:gs pos="0">
+              <a:schemeClr val="phClr">
+                <a:lumMod val="110000"/>
+                <a:satMod val="105000"/>
+                <a:tint val="67000"/>
+              </a:schemeClr>
+            </a:gs>
+            <a:gs pos="50000">
+              <a:schemeClr val="phClr">
+                <a:lumMod val="105000"/>
+                <a:satMod val="103000"/>
+                <a:tint val="73000"/>
+              </a:schemeClr>
+            </a:gs>
+            <a:gs pos="100000">
+              <a:schemeClr val="phClr">
+                <a:lumMod val="105000"/>
+                <a:satMod val="109000"/>
+                <a:tint val="81000"/>
+              </a:schemeClr>
+            </a:gs>
+          </a:gsLst>
+          <a:lin ang="5400000" scaled="0"/>
+        </a:gradFill>
+        <a:gradFill rotWithShape="1">
+          <a:gsLst>
+            <a:gs pos="0">
+              <a:schemeClr val="phClr">
+                <a:satMod val="103000"/>
+                <a:lumMod val="102000"/>
+                <a:tint val="94000"/>
+              </a:schemeClr>
+            </a:gs>
+            <a:gs pos="50000">
+              <a:schemeClr val="phClr">
+                <a:satMod val="110000"/>
+                <a:lumMod val="100000"/>
+                <a:shade val="100000"/>
+              </a:schemeClr>
+            </a:gs>
+            <a:gs pos="100000">
+              <a:schemeClr val="phClr">
+                <a:lumMod val="99000"/>
+                <a:satMod val="120000"/>
+                <a:shade val="78000"/>
+              </a:schemeClr>
+            </a:gs>
+          </a:gsLst>
+          <a:lin ang="5400000" scaled="0"/>
+        </a:gradFill>
+      </a:fillStyleLst>
+      <a:lnStyleLst>
+        <a:ln w="12700" cap="flat" cmpd="sng" algn="ctr">
+          <a:solidFill>
+            <a:schemeClr val="phClr"/>
+          </a:solidFill>
+          <a:prstDash val="solid"/>
+          <a:miter lim="800000"/>
+        </a:ln>
+        <a:ln w="19050" cap="flat" cmpd="sng" algn="ctr">
+          <a:solidFill>
+            <a:schemeClr val="phClr"/>
+          </a:solidFill>
+          <a:prstDash val="solid"/>
+          <a:miter lim="800000"/>
+        </a:ln>
+        <a:ln w="25400" cap="flat" cmpd="sng" algn="ctr">
+          <a:solidFill>
+            <a:schemeClr val="phClr"/>
+          </a:solidFill>
+          <a:prstDash val="solid"/>
+          <a:miter lim="800000"/>
+        </a:ln>
+      </a:lnStyleLst>
+      <a:effectStyleLst>
+        <a:effectStyle>
+          <a:effectLst/>
+        </a:effectStyle>
+        <a:effectStyle>
+          <a:effectLst/>
+        </a:effectStyle>
+        <a:effectStyle>
+          <a:effectLst>
+            <a:outerShdw blurRad="57150" dist="19050" dir="5400000" algn="ctr" rotWithShape="0">
+              <a:srgbClr val="000000">
+                <a:alpha val="63000"/>
+              </a:srgbClr>
+            </a:outerShdw>
+          </a:effectLst>
+        </a:effectStyle>
+      </a:effectStyleLst>
+      <a:bgFillStyleLst>
+        <a:solidFill>
+          <a:schemeClr val="phClr"/>
+        </a:solidFill>
+        <a:solidFill>
+          <a:schemeClr val="phClr">
+            <a:tint val="95000"/>
+            <a:satMod val="170000"/>
+          </a:schemeClr>
+        </a:solidFill>
+        <a:gradFill rotWithShape="1">
+          <a:gsLst>
+            <a:gs pos="0">
+              <a:schemeClr val="phClr">
+                <a:tint val="93000"/>
+                <a:satMod val="150000"/>
+                <a:shade val="98000"/>
+                <a:lumMod val="102000"/>
+              </a:schemeClr>
+            </a:gs>
+            <a:gs pos="50000">
+              <a:schemeClr val="phClr">
+                <a:tint val="98000"/>
+                <a:satMod val="130000"/>
+                <a:shade val="90000"/>
+                <a:lumMod val="103000"/>
+              </a:schemeClr>
+            </a:gs>
+            <a:gs pos="100000">
+              <a:schemeClr val="phClr">
+                <a:shade val="63000"/>
+                <a:satMod val="120000"/>
+              </a:schemeClr>
+            </a:gs>
+          </a:gsLst>
+          <a:lin ang="5400000" scaled="0"/>
+        </a:gradFill>
+      </a:bgFillStyleLst>
+    </a:fmtScheme>
+  </a:themeElements>
+  <a:objectDefaults>
+    <a:lnDef>
+      <a:spPr/>
+      <a:bodyPr/>
+      <a:lstStyle/>
+      <a:style>
+        <a:lnRef idx="2">
+          <a:schemeClr val="accent1"/>
+        </a:lnRef>
+        <a:fillRef idx="0">
+          <a:schemeClr val="accent1"/>
+        </a:fillRef>
+        <a:effectRef idx="1">
+          <a:schemeClr val="accent1"/>
+        </a:effectRef>
+        <a:fontRef idx="minor">
+          <a:schemeClr val="tx1"/>
+        </a:fontRef>
+      </a:style>
+    </a:lnDef>
+  </a:objectDefaults>
+  <a:extraClrSchemeLst/>
+  <a:extLst>
+    <a:ext uri="{05A4C25C-085E-4340-85A3-A5531E510DB2}">
+      <thm15:themeFamily xmlns:thm15="http://schemas.microsoft.com/office/thememl/2012/main" name="Office Theme" id="{2E142A2C-CD16-42D6-873A-C26D2A0506FA}" vid="{1BDDFF52-6CD6-40A5-AB3C-68EB2F1E4D0A}"/>
+    </a:ext>
+  </a:extLst>
+</a:theme>
 </file>
--- a/Task_2/Task2Powerpoint.pptx
+++ b/Task_2/Task2Powerpoint.pptx
@@ -273,7 +273,7 @@
           <a:p>
             <a:fld id="{75AB4CA9-CCE6-4DE5-84AD-E1F7B6CB5CBB}" type="datetimeFigureOut">
               <a:rPr lang="de-DE" smtClean="0"/>
-              <a:t>20.06.2026</a:t>
+              <a:t>22.06.26</a:t>
             </a:fld>
             <a:endParaRPr lang="de-DE"/>
           </a:p>
@@ -450,7 +450,7 @@
           <a:p>
             <a:fld id="{52D5829F-2F94-0B44-A96D-AE852A87AC61}" type="datetimeFigureOut">
               <a:rPr lang="de-DE" smtClean="0"/>
-              <a:t>20.06.2026</a:t>
+              <a:t>22.06.26</a:t>
             </a:fld>
             <a:endParaRPr lang="de-DE"/>
           </a:p>
@@ -745,13 +745,6 @@
           </p:nvPr>
         </p:nvSpPr>
         <p:spPr/>
-        <p:txBody>
-          <a:bodyPr/>
-          <a:lstStyle/>
-          <a:p>
-            <a:endParaRPr lang="de-DE"/>
-          </a:p>
-        </p:txBody>
       </p:sp>
       <p:sp>
         <p:nvSpPr>
@@ -768,7 +761,13 @@
           <a:bodyPr/>
           <a:lstStyle/>
           <a:p>
-            <a:endParaRPr lang="de-DE"/>
+            <a:r>
+              <a:rPr lang="de-DE" dirty="0"/>
+              <a:t>(S)</a:t>
+            </a:r>
+          </a:p>
+          <a:p>
+            <a:endParaRPr lang="de-DE" dirty="0"/>
           </a:p>
         </p:txBody>
       </p:sp>
@@ -789,7 +788,7 @@
           <a:p>
             <a:fld id="{0492B7F2-6741-7346-B13A-366117EE2BBB}" type="slidenum">
               <a:rPr lang="de-DE" smtClean="0"/>
-              <a:t>2</a:t>
+              <a:t>1</a:t>
             </a:fld>
             <a:endParaRPr lang="de-DE"/>
           </a:p>
@@ -798,7 +797,909 @@
     </p:spTree>
     <p:extLst>
       <p:ext uri="{BB962C8B-B14F-4D97-AF65-F5344CB8AC3E}">
-        <p14:creationId xmlns:p14="http://schemas.microsoft.com/office/powerpoint/2010/main" val="2591093164"/>
+        <p14:creationId xmlns:p14="http://schemas.microsoft.com/office/powerpoint/2010/main" val="192921906"/>
+      </p:ext>
+    </p:extLst>
+  </p:cSld>
+  <p:clrMapOvr>
+    <a:masterClrMapping/>
+  </p:clrMapOvr>
+</p:notes>
+</file>
+
+<file path=ppt/notesSlides/notesSlide10.xml><?xml version="1.0" encoding="utf-8"?>
+<p:notes xmlns:a="http://schemas.openxmlformats.org/drawingml/2006/main" xmlns:r="http://schemas.openxmlformats.org/officeDocument/2006/relationships" xmlns:p="http://schemas.openxmlformats.org/presentationml/2006/main">
+  <p:cSld>
+    <p:spTree>
+      <p:nvGrpSpPr>
+        <p:cNvPr id="1" name=""/>
+        <p:cNvGrpSpPr/>
+        <p:nvPr/>
+      </p:nvGrpSpPr>
+      <p:grpSpPr>
+        <a:xfrm>
+          <a:off x="0" y="0"/>
+          <a:ext cx="0" cy="0"/>
+          <a:chOff x="0" y="0"/>
+          <a:chExt cx="0" cy="0"/>
+        </a:xfrm>
+      </p:grpSpPr>
+      <p:sp>
+        <p:nvSpPr>
+          <p:cNvPr id="2" name="Folienbildplatzhalter 1"/>
+          <p:cNvSpPr>
+            <a:spLocks noGrp="1" noRot="1" noChangeAspect="1"/>
+          </p:cNvSpPr>
+          <p:nvPr>
+            <p:ph type="sldImg"/>
+          </p:nvPr>
+        </p:nvSpPr>
+        <p:spPr/>
+        <p:txBody>
+          <a:bodyPr/>
+          <a:lstStyle/>
+          <a:p>
+            <a:endParaRPr lang="de-DE"/>
+          </a:p>
+        </p:txBody>
+      </p:sp>
+      <p:sp>
+        <p:nvSpPr>
+          <p:cNvPr id="3" name="Notizenplatzhalter 2"/>
+          <p:cNvSpPr>
+            <a:spLocks noGrp="1"/>
+          </p:cNvSpPr>
+          <p:nvPr>
+            <p:ph type="body" idx="1"/>
+          </p:nvPr>
+        </p:nvSpPr>
+        <p:spPr/>
+        <p:txBody>
+          <a:bodyPr/>
+          <a:lstStyle/>
+          <a:p>
+            <a:pPr marL="0" marR="0" lvl="0" indent="0" algn="l" defTabSz="914400" rtl="0" eaLnBrk="1" fontAlgn="auto" latinLnBrk="0" hangingPunct="1">
+              <a:lnSpc>
+                <a:spcPct val="100000"/>
+              </a:lnSpc>
+              <a:spcBef>
+                <a:spcPts val="0"/>
+              </a:spcBef>
+              <a:spcAft>
+                <a:spcPts val="0"/>
+              </a:spcAft>
+              <a:buClrTx/>
+              <a:buSzTx/>
+              <a:buFontTx/>
+              <a:buNone/>
+              <a:tabLst/>
+              <a:defRPr/>
+            </a:pPr>
+            <a:r>
+              <a:rPr lang="de-DE" dirty="0"/>
+              <a:t>(S)</a:t>
+            </a:r>
+          </a:p>
+          <a:p>
+            <a:pPr marL="0" marR="0" lvl="0" indent="0" algn="l" defTabSz="914400" rtl="0" eaLnBrk="1" fontAlgn="auto" latinLnBrk="0" hangingPunct="1">
+              <a:lnSpc>
+                <a:spcPct val="100000"/>
+              </a:lnSpc>
+              <a:spcBef>
+                <a:spcPts val="0"/>
+              </a:spcBef>
+              <a:spcAft>
+                <a:spcPts val="0"/>
+              </a:spcAft>
+              <a:buClrTx/>
+              <a:buSzTx/>
+              <a:buFontTx/>
+              <a:buNone/>
+              <a:tabLst/>
+              <a:defRPr/>
+            </a:pPr>
+            <a:r>
+              <a:rPr lang="de-DE" dirty="0" err="1"/>
+              <a:t>mID</a:t>
+            </a:r>
+            <a:r>
+              <a:rPr lang="de-DE" dirty="0"/>
+              <a:t>: Z01-Z05 = 0000 und </a:t>
+            </a:r>
+            <a:r>
+              <a:rPr lang="de-DE" dirty="0" err="1"/>
+              <a:t>rID</a:t>
+            </a:r>
+            <a:r>
+              <a:rPr lang="de-DE" dirty="0"/>
+              <a:t> = 00000 und Pos = 00</a:t>
+            </a:r>
+          </a:p>
+        </p:txBody>
+      </p:sp>
+      <p:sp>
+        <p:nvSpPr>
+          <p:cNvPr id="4" name="Foliennummernplatzhalter 3"/>
+          <p:cNvSpPr>
+            <a:spLocks noGrp="1"/>
+          </p:cNvSpPr>
+          <p:nvPr>
+            <p:ph type="sldNum" sz="quarter" idx="5"/>
+          </p:nvPr>
+        </p:nvSpPr>
+        <p:spPr/>
+        <p:txBody>
+          <a:bodyPr/>
+          <a:lstStyle/>
+          <a:p>
+            <a:fld id="{0492B7F2-6741-7346-B13A-366117EE2BBB}" type="slidenum">
+              <a:rPr lang="de-DE" smtClean="0"/>
+              <a:t>10</a:t>
+            </a:fld>
+            <a:endParaRPr lang="de-DE"/>
+          </a:p>
+        </p:txBody>
+      </p:sp>
+    </p:spTree>
+    <p:extLst>
+      <p:ext uri="{BB962C8B-B14F-4D97-AF65-F5344CB8AC3E}">
+        <p14:creationId xmlns:p14="http://schemas.microsoft.com/office/powerpoint/2010/main" val="4205122503"/>
+      </p:ext>
+    </p:extLst>
+  </p:cSld>
+  <p:clrMapOvr>
+    <a:masterClrMapping/>
+  </p:clrMapOvr>
+</p:notes>
+</file>
+
+<file path=ppt/notesSlides/notesSlide11.xml><?xml version="1.0" encoding="utf-8"?>
+<p:notes xmlns:a="http://schemas.openxmlformats.org/drawingml/2006/main" xmlns:r="http://schemas.openxmlformats.org/officeDocument/2006/relationships" xmlns:p="http://schemas.openxmlformats.org/presentationml/2006/main">
+  <p:cSld>
+    <p:spTree>
+      <p:nvGrpSpPr>
+        <p:cNvPr id="1" name=""/>
+        <p:cNvGrpSpPr/>
+        <p:nvPr/>
+      </p:nvGrpSpPr>
+      <p:grpSpPr>
+        <a:xfrm>
+          <a:off x="0" y="0"/>
+          <a:ext cx="0" cy="0"/>
+          <a:chOff x="0" y="0"/>
+          <a:chExt cx="0" cy="0"/>
+        </a:xfrm>
+      </p:grpSpPr>
+      <p:sp>
+        <p:nvSpPr>
+          <p:cNvPr id="2" name="Folienbildplatzhalter 1"/>
+          <p:cNvSpPr>
+            <a:spLocks noGrp="1" noRot="1" noChangeAspect="1"/>
+          </p:cNvSpPr>
+          <p:nvPr>
+            <p:ph type="sldImg"/>
+          </p:nvPr>
+        </p:nvSpPr>
+        <p:spPr/>
+      </p:sp>
+      <p:sp>
+        <p:nvSpPr>
+          <p:cNvPr id="3" name="Notizenplatzhalter 2"/>
+          <p:cNvSpPr>
+            <a:spLocks noGrp="1"/>
+          </p:cNvSpPr>
+          <p:nvPr>
+            <p:ph type="body" idx="1"/>
+          </p:nvPr>
+        </p:nvSpPr>
+        <p:spPr/>
+        <p:txBody>
+          <a:bodyPr/>
+          <a:lstStyle/>
+          <a:p>
+            <a:pPr marL="0" marR="0" lvl="0" indent="0" algn="l" defTabSz="914400" rtl="0" eaLnBrk="1" fontAlgn="auto" latinLnBrk="0" hangingPunct="1">
+              <a:lnSpc>
+                <a:spcPct val="100000"/>
+              </a:lnSpc>
+              <a:spcBef>
+                <a:spcPts val="0"/>
+              </a:spcBef>
+              <a:spcAft>
+                <a:spcPts val="0"/>
+              </a:spcAft>
+              <a:buClrTx/>
+              <a:buSzTx/>
+              <a:buFontTx/>
+              <a:buNone/>
+              <a:tabLst/>
+              <a:defRPr/>
+            </a:pPr>
+            <a:r>
+              <a:rPr lang="de-DE" dirty="0"/>
+              <a:t>B</a:t>
+            </a:r>
+          </a:p>
+          <a:p>
+            <a:endParaRPr lang="de-DE" dirty="0"/>
+          </a:p>
+        </p:txBody>
+      </p:sp>
+      <p:sp>
+        <p:nvSpPr>
+          <p:cNvPr id="4" name="Foliennummernplatzhalter 3"/>
+          <p:cNvSpPr>
+            <a:spLocks noGrp="1"/>
+          </p:cNvSpPr>
+          <p:nvPr>
+            <p:ph type="sldNum" sz="quarter" idx="5"/>
+          </p:nvPr>
+        </p:nvSpPr>
+        <p:spPr/>
+        <p:txBody>
+          <a:bodyPr/>
+          <a:lstStyle/>
+          <a:p>
+            <a:fld id="{0492B7F2-6741-7346-B13A-366117EE2BBB}" type="slidenum">
+              <a:rPr lang="de-DE" smtClean="0"/>
+              <a:t>11</a:t>
+            </a:fld>
+            <a:endParaRPr lang="de-DE"/>
+          </a:p>
+        </p:txBody>
+      </p:sp>
+    </p:spTree>
+    <p:extLst>
+      <p:ext uri="{BB962C8B-B14F-4D97-AF65-F5344CB8AC3E}">
+        <p14:creationId xmlns:p14="http://schemas.microsoft.com/office/powerpoint/2010/main" val="2471118457"/>
+      </p:ext>
+    </p:extLst>
+  </p:cSld>
+  <p:clrMapOvr>
+    <a:masterClrMapping/>
+  </p:clrMapOvr>
+</p:notes>
+</file>
+
+<file path=ppt/notesSlides/notesSlide12.xml><?xml version="1.0" encoding="utf-8"?>
+<p:notes xmlns:a="http://schemas.openxmlformats.org/drawingml/2006/main" xmlns:r="http://schemas.openxmlformats.org/officeDocument/2006/relationships" xmlns:p="http://schemas.openxmlformats.org/presentationml/2006/main">
+  <p:cSld>
+    <p:spTree>
+      <p:nvGrpSpPr>
+        <p:cNvPr id="1" name=""/>
+        <p:cNvGrpSpPr/>
+        <p:nvPr/>
+      </p:nvGrpSpPr>
+      <p:grpSpPr>
+        <a:xfrm>
+          <a:off x="0" y="0"/>
+          <a:ext cx="0" cy="0"/>
+          <a:chOff x="0" y="0"/>
+          <a:chExt cx="0" cy="0"/>
+        </a:xfrm>
+      </p:grpSpPr>
+      <p:sp>
+        <p:nvSpPr>
+          <p:cNvPr id="2" name="Folienbildplatzhalter 1"/>
+          <p:cNvSpPr>
+            <a:spLocks noGrp="1" noRot="1" noChangeAspect="1"/>
+          </p:cNvSpPr>
+          <p:nvPr>
+            <p:ph type="sldImg"/>
+          </p:nvPr>
+        </p:nvSpPr>
+        <p:spPr/>
+      </p:sp>
+      <p:sp>
+        <p:nvSpPr>
+          <p:cNvPr id="3" name="Notizenplatzhalter 2"/>
+          <p:cNvSpPr>
+            <a:spLocks noGrp="1"/>
+          </p:cNvSpPr>
+          <p:nvPr>
+            <p:ph type="body" idx="1"/>
+          </p:nvPr>
+        </p:nvSpPr>
+        <p:spPr/>
+        <p:txBody>
+          <a:bodyPr/>
+          <a:lstStyle/>
+          <a:p>
+            <a:r>
+              <a:rPr lang="de-DE" dirty="0"/>
+              <a:t>B</a:t>
+            </a:r>
+          </a:p>
+        </p:txBody>
+      </p:sp>
+      <p:sp>
+        <p:nvSpPr>
+          <p:cNvPr id="4" name="Foliennummernplatzhalter 3"/>
+          <p:cNvSpPr>
+            <a:spLocks noGrp="1"/>
+          </p:cNvSpPr>
+          <p:nvPr>
+            <p:ph type="sldNum" sz="quarter" idx="5"/>
+          </p:nvPr>
+        </p:nvSpPr>
+        <p:spPr/>
+        <p:txBody>
+          <a:bodyPr/>
+          <a:lstStyle/>
+          <a:p>
+            <a:fld id="{0492B7F2-6741-7346-B13A-366117EE2BBB}" type="slidenum">
+              <a:rPr lang="de-DE" smtClean="0"/>
+              <a:t>12</a:t>
+            </a:fld>
+            <a:endParaRPr lang="de-DE"/>
+          </a:p>
+        </p:txBody>
+      </p:sp>
+    </p:spTree>
+    <p:extLst>
+      <p:ext uri="{BB962C8B-B14F-4D97-AF65-F5344CB8AC3E}">
+        <p14:creationId xmlns:p14="http://schemas.microsoft.com/office/powerpoint/2010/main" val="1568025164"/>
+      </p:ext>
+    </p:extLst>
+  </p:cSld>
+  <p:clrMapOvr>
+    <a:masterClrMapping/>
+  </p:clrMapOvr>
+</p:notes>
+</file>
+
+<file path=ppt/notesSlides/notesSlide13.xml><?xml version="1.0" encoding="utf-8"?>
+<p:notes xmlns:a="http://schemas.openxmlformats.org/drawingml/2006/main" xmlns:r="http://schemas.openxmlformats.org/officeDocument/2006/relationships" xmlns:p="http://schemas.openxmlformats.org/presentationml/2006/main">
+  <p:cSld>
+    <p:spTree>
+      <p:nvGrpSpPr>
+        <p:cNvPr id="1" name=""/>
+        <p:cNvGrpSpPr/>
+        <p:nvPr/>
+      </p:nvGrpSpPr>
+      <p:grpSpPr>
+        <a:xfrm>
+          <a:off x="0" y="0"/>
+          <a:ext cx="0" cy="0"/>
+          <a:chOff x="0" y="0"/>
+          <a:chExt cx="0" cy="0"/>
+        </a:xfrm>
+      </p:grpSpPr>
+      <p:sp>
+        <p:nvSpPr>
+          <p:cNvPr id="2" name="Folienbildplatzhalter 1"/>
+          <p:cNvSpPr>
+            <a:spLocks noGrp="1" noRot="1" noChangeAspect="1"/>
+          </p:cNvSpPr>
+          <p:nvPr>
+            <p:ph type="sldImg"/>
+          </p:nvPr>
+        </p:nvSpPr>
+        <p:spPr/>
+      </p:sp>
+      <p:sp>
+        <p:nvSpPr>
+          <p:cNvPr id="3" name="Notizenplatzhalter 2"/>
+          <p:cNvSpPr>
+            <a:spLocks noGrp="1"/>
+          </p:cNvSpPr>
+          <p:nvPr>
+            <p:ph type="body" idx="1"/>
+          </p:nvPr>
+        </p:nvSpPr>
+        <p:spPr/>
+        <p:txBody>
+          <a:bodyPr/>
+          <a:lstStyle/>
+          <a:p>
+            <a:r>
+              <a:rPr lang="de-DE" dirty="0"/>
+              <a:t>B</a:t>
+            </a:r>
+          </a:p>
+        </p:txBody>
+      </p:sp>
+      <p:sp>
+        <p:nvSpPr>
+          <p:cNvPr id="4" name="Foliennummernplatzhalter 3"/>
+          <p:cNvSpPr>
+            <a:spLocks noGrp="1"/>
+          </p:cNvSpPr>
+          <p:nvPr>
+            <p:ph type="sldNum" sz="quarter" idx="5"/>
+          </p:nvPr>
+        </p:nvSpPr>
+        <p:spPr/>
+        <p:txBody>
+          <a:bodyPr/>
+          <a:lstStyle/>
+          <a:p>
+            <a:fld id="{0492B7F2-6741-7346-B13A-366117EE2BBB}" type="slidenum">
+              <a:rPr lang="de-DE" smtClean="0"/>
+              <a:t>13</a:t>
+            </a:fld>
+            <a:endParaRPr lang="de-DE"/>
+          </a:p>
+        </p:txBody>
+      </p:sp>
+    </p:spTree>
+    <p:extLst>
+      <p:ext uri="{BB962C8B-B14F-4D97-AF65-F5344CB8AC3E}">
+        <p14:creationId xmlns:p14="http://schemas.microsoft.com/office/powerpoint/2010/main" val="2133910754"/>
+      </p:ext>
+    </p:extLst>
+  </p:cSld>
+  <p:clrMapOvr>
+    <a:masterClrMapping/>
+  </p:clrMapOvr>
+</p:notes>
+</file>
+
+<file path=ppt/notesSlides/notesSlide14.xml><?xml version="1.0" encoding="utf-8"?>
+<p:notes xmlns:a="http://schemas.openxmlformats.org/drawingml/2006/main" xmlns:r="http://schemas.openxmlformats.org/officeDocument/2006/relationships" xmlns:p="http://schemas.openxmlformats.org/presentationml/2006/main">
+  <p:cSld>
+    <p:spTree>
+      <p:nvGrpSpPr>
+        <p:cNvPr id="1" name=""/>
+        <p:cNvGrpSpPr/>
+        <p:nvPr/>
+      </p:nvGrpSpPr>
+      <p:grpSpPr>
+        <a:xfrm>
+          <a:off x="0" y="0"/>
+          <a:ext cx="0" cy="0"/>
+          <a:chOff x="0" y="0"/>
+          <a:chExt cx="0" cy="0"/>
+        </a:xfrm>
+      </p:grpSpPr>
+      <p:sp>
+        <p:nvSpPr>
+          <p:cNvPr id="2" name="Folienbildplatzhalter 1"/>
+          <p:cNvSpPr>
+            <a:spLocks noGrp="1" noRot="1" noChangeAspect="1"/>
+          </p:cNvSpPr>
+          <p:nvPr>
+            <p:ph type="sldImg"/>
+          </p:nvPr>
+        </p:nvSpPr>
+        <p:spPr/>
+      </p:sp>
+      <p:sp>
+        <p:nvSpPr>
+          <p:cNvPr id="3" name="Notizenplatzhalter 2"/>
+          <p:cNvSpPr>
+            <a:spLocks noGrp="1"/>
+          </p:cNvSpPr>
+          <p:nvPr>
+            <p:ph type="body" idx="1"/>
+          </p:nvPr>
+        </p:nvSpPr>
+        <p:spPr/>
+        <p:txBody>
+          <a:bodyPr/>
+          <a:lstStyle/>
+          <a:p>
+            <a:r>
+              <a:rPr lang="de-DE" dirty="0"/>
+              <a:t>B</a:t>
+            </a:r>
+          </a:p>
+        </p:txBody>
+      </p:sp>
+      <p:sp>
+        <p:nvSpPr>
+          <p:cNvPr id="4" name="Foliennummernplatzhalter 3"/>
+          <p:cNvSpPr>
+            <a:spLocks noGrp="1"/>
+          </p:cNvSpPr>
+          <p:nvPr>
+            <p:ph type="sldNum" sz="quarter" idx="5"/>
+          </p:nvPr>
+        </p:nvSpPr>
+        <p:spPr/>
+        <p:txBody>
+          <a:bodyPr/>
+          <a:lstStyle/>
+          <a:p>
+            <a:fld id="{0492B7F2-6741-7346-B13A-366117EE2BBB}" type="slidenum">
+              <a:rPr lang="de-DE" smtClean="0"/>
+              <a:t>14</a:t>
+            </a:fld>
+            <a:endParaRPr lang="de-DE"/>
+          </a:p>
+        </p:txBody>
+      </p:sp>
+    </p:spTree>
+    <p:extLst>
+      <p:ext uri="{BB962C8B-B14F-4D97-AF65-F5344CB8AC3E}">
+        <p14:creationId xmlns:p14="http://schemas.microsoft.com/office/powerpoint/2010/main" val="3954313880"/>
+      </p:ext>
+    </p:extLst>
+  </p:cSld>
+  <p:clrMapOvr>
+    <a:masterClrMapping/>
+  </p:clrMapOvr>
+</p:notes>
+</file>
+
+<file path=ppt/notesSlides/notesSlide15.xml><?xml version="1.0" encoding="utf-8"?>
+<p:notes xmlns:a="http://schemas.openxmlformats.org/drawingml/2006/main" xmlns:r="http://schemas.openxmlformats.org/officeDocument/2006/relationships" xmlns:p="http://schemas.openxmlformats.org/presentationml/2006/main">
+  <p:cSld>
+    <p:spTree>
+      <p:nvGrpSpPr>
+        <p:cNvPr id="1" name=""/>
+        <p:cNvGrpSpPr/>
+        <p:nvPr/>
+      </p:nvGrpSpPr>
+      <p:grpSpPr>
+        <a:xfrm>
+          <a:off x="0" y="0"/>
+          <a:ext cx="0" cy="0"/>
+          <a:chOff x="0" y="0"/>
+          <a:chExt cx="0" cy="0"/>
+        </a:xfrm>
+      </p:grpSpPr>
+      <p:sp>
+        <p:nvSpPr>
+          <p:cNvPr id="2" name="Folienbildplatzhalter 1"/>
+          <p:cNvSpPr>
+            <a:spLocks noGrp="1" noRot="1" noChangeAspect="1"/>
+          </p:cNvSpPr>
+          <p:nvPr>
+            <p:ph type="sldImg"/>
+          </p:nvPr>
+        </p:nvSpPr>
+        <p:spPr/>
+      </p:sp>
+      <p:sp>
+        <p:nvSpPr>
+          <p:cNvPr id="3" name="Notizenplatzhalter 2"/>
+          <p:cNvSpPr>
+            <a:spLocks noGrp="1"/>
+          </p:cNvSpPr>
+          <p:nvPr>
+            <p:ph type="body" idx="1"/>
+          </p:nvPr>
+        </p:nvSpPr>
+        <p:spPr/>
+        <p:txBody>
+          <a:bodyPr/>
+          <a:lstStyle/>
+          <a:p>
+            <a:r>
+              <a:rPr lang="de-DE" dirty="0"/>
+              <a:t>B</a:t>
+            </a:r>
+          </a:p>
+        </p:txBody>
+      </p:sp>
+      <p:sp>
+        <p:nvSpPr>
+          <p:cNvPr id="4" name="Foliennummernplatzhalter 3"/>
+          <p:cNvSpPr>
+            <a:spLocks noGrp="1"/>
+          </p:cNvSpPr>
+          <p:nvPr>
+            <p:ph type="sldNum" sz="quarter" idx="5"/>
+          </p:nvPr>
+        </p:nvSpPr>
+        <p:spPr/>
+        <p:txBody>
+          <a:bodyPr/>
+          <a:lstStyle/>
+          <a:p>
+            <a:fld id="{0492B7F2-6741-7346-B13A-366117EE2BBB}" type="slidenum">
+              <a:rPr lang="de-DE" smtClean="0"/>
+              <a:t>15</a:t>
+            </a:fld>
+            <a:endParaRPr lang="de-DE"/>
+          </a:p>
+        </p:txBody>
+      </p:sp>
+    </p:spTree>
+    <p:extLst>
+      <p:ext uri="{BB962C8B-B14F-4D97-AF65-F5344CB8AC3E}">
+        <p14:creationId xmlns:p14="http://schemas.microsoft.com/office/powerpoint/2010/main" val="2265726828"/>
+      </p:ext>
+    </p:extLst>
+  </p:cSld>
+  <p:clrMapOvr>
+    <a:masterClrMapping/>
+  </p:clrMapOvr>
+</p:notes>
+</file>
+
+<file path=ppt/notesSlides/notesSlide16.xml><?xml version="1.0" encoding="utf-8"?>
+<p:notes xmlns:a="http://schemas.openxmlformats.org/drawingml/2006/main" xmlns:r="http://schemas.openxmlformats.org/officeDocument/2006/relationships" xmlns:p="http://schemas.openxmlformats.org/presentationml/2006/main">
+  <p:cSld>
+    <p:spTree>
+      <p:nvGrpSpPr>
+        <p:cNvPr id="1" name=""/>
+        <p:cNvGrpSpPr/>
+        <p:nvPr/>
+      </p:nvGrpSpPr>
+      <p:grpSpPr>
+        <a:xfrm>
+          <a:off x="0" y="0"/>
+          <a:ext cx="0" cy="0"/>
+          <a:chOff x="0" y="0"/>
+          <a:chExt cx="0" cy="0"/>
+        </a:xfrm>
+      </p:grpSpPr>
+      <p:sp>
+        <p:nvSpPr>
+          <p:cNvPr id="2" name="Folienbildplatzhalter 1"/>
+          <p:cNvSpPr>
+            <a:spLocks noGrp="1" noRot="1" noChangeAspect="1"/>
+          </p:cNvSpPr>
+          <p:nvPr>
+            <p:ph type="sldImg"/>
+          </p:nvPr>
+        </p:nvSpPr>
+        <p:spPr/>
+      </p:sp>
+      <p:sp>
+        <p:nvSpPr>
+          <p:cNvPr id="3" name="Notizenplatzhalter 2"/>
+          <p:cNvSpPr>
+            <a:spLocks noGrp="1"/>
+          </p:cNvSpPr>
+          <p:nvPr>
+            <p:ph type="body" idx="1"/>
+          </p:nvPr>
+        </p:nvSpPr>
+        <p:spPr/>
+        <p:txBody>
+          <a:bodyPr/>
+          <a:lstStyle/>
+          <a:p>
+            <a:r>
+              <a:rPr lang="de-DE" dirty="0"/>
+              <a:t>V</a:t>
+            </a:r>
+          </a:p>
+        </p:txBody>
+      </p:sp>
+      <p:sp>
+        <p:nvSpPr>
+          <p:cNvPr id="4" name="Foliennummernplatzhalter 3"/>
+          <p:cNvSpPr>
+            <a:spLocks noGrp="1"/>
+          </p:cNvSpPr>
+          <p:nvPr>
+            <p:ph type="sldNum" sz="quarter" idx="5"/>
+          </p:nvPr>
+        </p:nvSpPr>
+        <p:spPr/>
+        <p:txBody>
+          <a:bodyPr/>
+          <a:lstStyle/>
+          <a:p>
+            <a:fld id="{0492B7F2-6741-7346-B13A-366117EE2BBB}" type="slidenum">
+              <a:rPr lang="de-DE" smtClean="0"/>
+              <a:t>16</a:t>
+            </a:fld>
+            <a:endParaRPr lang="de-DE"/>
+          </a:p>
+        </p:txBody>
+      </p:sp>
+    </p:spTree>
+    <p:extLst>
+      <p:ext uri="{BB962C8B-B14F-4D97-AF65-F5344CB8AC3E}">
+        <p14:creationId xmlns:p14="http://schemas.microsoft.com/office/powerpoint/2010/main" val="3001266698"/>
+      </p:ext>
+    </p:extLst>
+  </p:cSld>
+  <p:clrMapOvr>
+    <a:masterClrMapping/>
+  </p:clrMapOvr>
+</p:notes>
+</file>
+
+<file path=ppt/notesSlides/notesSlide17.xml><?xml version="1.0" encoding="utf-8"?>
+<p:notes xmlns:a="http://schemas.openxmlformats.org/drawingml/2006/main" xmlns:r="http://schemas.openxmlformats.org/officeDocument/2006/relationships" xmlns:p="http://schemas.openxmlformats.org/presentationml/2006/main">
+  <p:cSld>
+    <p:spTree>
+      <p:nvGrpSpPr>
+        <p:cNvPr id="1" name=""/>
+        <p:cNvGrpSpPr/>
+        <p:nvPr/>
+      </p:nvGrpSpPr>
+      <p:grpSpPr>
+        <a:xfrm>
+          <a:off x="0" y="0"/>
+          <a:ext cx="0" cy="0"/>
+          <a:chOff x="0" y="0"/>
+          <a:chExt cx="0" cy="0"/>
+        </a:xfrm>
+      </p:grpSpPr>
+      <p:sp>
+        <p:nvSpPr>
+          <p:cNvPr id="2" name="Folienbildplatzhalter 1"/>
+          <p:cNvSpPr>
+            <a:spLocks noGrp="1" noRot="1" noChangeAspect="1"/>
+          </p:cNvSpPr>
+          <p:nvPr>
+            <p:ph type="sldImg"/>
+          </p:nvPr>
+        </p:nvSpPr>
+        <p:spPr/>
+      </p:sp>
+      <p:sp>
+        <p:nvSpPr>
+          <p:cNvPr id="3" name="Notizenplatzhalter 2"/>
+          <p:cNvSpPr>
+            <a:spLocks noGrp="1"/>
+          </p:cNvSpPr>
+          <p:nvPr>
+            <p:ph type="body" idx="1"/>
+          </p:nvPr>
+        </p:nvSpPr>
+        <p:spPr/>
+        <p:txBody>
+          <a:bodyPr/>
+          <a:lstStyle/>
+          <a:p>
+            <a:pPr marL="0" marR="0" lvl="0" indent="0" algn="l" defTabSz="914400" rtl="0" eaLnBrk="1" fontAlgn="auto" latinLnBrk="0" hangingPunct="1">
+              <a:lnSpc>
+                <a:spcPct val="100000"/>
+              </a:lnSpc>
+              <a:spcBef>
+                <a:spcPts val="0"/>
+              </a:spcBef>
+              <a:spcAft>
+                <a:spcPts val="0"/>
+              </a:spcAft>
+              <a:buClrTx/>
+              <a:buSzTx/>
+              <a:buFontTx/>
+              <a:buNone/>
+              <a:tabLst/>
+              <a:defRPr/>
+            </a:pPr>
+            <a:r>
+              <a:rPr lang="de-DE" dirty="0"/>
+              <a:t>V</a:t>
+            </a:r>
+          </a:p>
+          <a:p>
+            <a:endParaRPr lang="de-DE" dirty="0"/>
+          </a:p>
+        </p:txBody>
+      </p:sp>
+      <p:sp>
+        <p:nvSpPr>
+          <p:cNvPr id="4" name="Foliennummernplatzhalter 3"/>
+          <p:cNvSpPr>
+            <a:spLocks noGrp="1"/>
+          </p:cNvSpPr>
+          <p:nvPr>
+            <p:ph type="sldNum" sz="quarter" idx="5"/>
+          </p:nvPr>
+        </p:nvSpPr>
+        <p:spPr/>
+        <p:txBody>
+          <a:bodyPr/>
+          <a:lstStyle/>
+          <a:p>
+            <a:fld id="{0492B7F2-6741-7346-B13A-366117EE2BBB}" type="slidenum">
+              <a:rPr lang="de-DE" smtClean="0"/>
+              <a:t>17</a:t>
+            </a:fld>
+            <a:endParaRPr lang="de-DE"/>
+          </a:p>
+        </p:txBody>
+      </p:sp>
+    </p:spTree>
+    <p:extLst>
+      <p:ext uri="{BB962C8B-B14F-4D97-AF65-F5344CB8AC3E}">
+        <p14:creationId xmlns:p14="http://schemas.microsoft.com/office/powerpoint/2010/main" val="1794829908"/>
+      </p:ext>
+    </p:extLst>
+  </p:cSld>
+  <p:clrMapOvr>
+    <a:masterClrMapping/>
+  </p:clrMapOvr>
+</p:notes>
+</file>
+
+<file path=ppt/notesSlides/notesSlide18.xml><?xml version="1.0" encoding="utf-8"?>
+<p:notes xmlns:a="http://schemas.openxmlformats.org/drawingml/2006/main" xmlns:r="http://schemas.openxmlformats.org/officeDocument/2006/relationships" xmlns:p="http://schemas.openxmlformats.org/presentationml/2006/main">
+  <p:cSld>
+    <p:spTree>
+      <p:nvGrpSpPr>
+        <p:cNvPr id="1" name=""/>
+        <p:cNvGrpSpPr/>
+        <p:nvPr/>
+      </p:nvGrpSpPr>
+      <p:grpSpPr>
+        <a:xfrm>
+          <a:off x="0" y="0"/>
+          <a:ext cx="0" cy="0"/>
+          <a:chOff x="0" y="0"/>
+          <a:chExt cx="0" cy="0"/>
+        </a:xfrm>
+      </p:grpSpPr>
+      <p:sp>
+        <p:nvSpPr>
+          <p:cNvPr id="2" name="Folienbildplatzhalter 1"/>
+          <p:cNvSpPr>
+            <a:spLocks noGrp="1" noRot="1" noChangeAspect="1"/>
+          </p:cNvSpPr>
+          <p:nvPr>
+            <p:ph type="sldImg"/>
+          </p:nvPr>
+        </p:nvSpPr>
+        <p:spPr/>
+      </p:sp>
+      <p:sp>
+        <p:nvSpPr>
+          <p:cNvPr id="3" name="Notizenplatzhalter 2"/>
+          <p:cNvSpPr>
+            <a:spLocks noGrp="1"/>
+          </p:cNvSpPr>
+          <p:nvPr>
+            <p:ph type="body" idx="1"/>
+          </p:nvPr>
+        </p:nvSpPr>
+        <p:spPr/>
+        <p:txBody>
+          <a:bodyPr/>
+          <a:lstStyle/>
+          <a:p>
+            <a:pPr marL="0" marR="0" lvl="0" indent="0" algn="l" defTabSz="914400" rtl="0" eaLnBrk="1" fontAlgn="auto" latinLnBrk="0" hangingPunct="1">
+              <a:lnSpc>
+                <a:spcPct val="100000"/>
+              </a:lnSpc>
+              <a:spcBef>
+                <a:spcPts val="0"/>
+              </a:spcBef>
+              <a:spcAft>
+                <a:spcPts val="0"/>
+              </a:spcAft>
+              <a:buClrTx/>
+              <a:buSzTx/>
+              <a:buFontTx/>
+              <a:buNone/>
+              <a:tabLst/>
+              <a:defRPr/>
+            </a:pPr>
+            <a:r>
+              <a:rPr lang="de-DE" dirty="0"/>
+              <a:t>V</a:t>
+            </a:r>
+          </a:p>
+          <a:p>
+            <a:endParaRPr lang="de-DE" dirty="0"/>
+          </a:p>
+        </p:txBody>
+      </p:sp>
+      <p:sp>
+        <p:nvSpPr>
+          <p:cNvPr id="4" name="Foliennummernplatzhalter 3"/>
+          <p:cNvSpPr>
+            <a:spLocks noGrp="1"/>
+          </p:cNvSpPr>
+          <p:nvPr>
+            <p:ph type="sldNum" sz="quarter" idx="5"/>
+          </p:nvPr>
+        </p:nvSpPr>
+        <p:spPr/>
+        <p:txBody>
+          <a:bodyPr/>
+          <a:lstStyle/>
+          <a:p>
+            <a:fld id="{0492B7F2-6741-7346-B13A-366117EE2BBB}" type="slidenum">
+              <a:rPr lang="de-DE" smtClean="0"/>
+              <a:t>18</a:t>
+            </a:fld>
+            <a:endParaRPr lang="de-DE"/>
+          </a:p>
+        </p:txBody>
+      </p:sp>
+    </p:spTree>
+    <p:extLst>
+      <p:ext uri="{BB962C8B-B14F-4D97-AF65-F5344CB8AC3E}">
+        <p14:creationId xmlns:p14="http://schemas.microsoft.com/office/powerpoint/2010/main" val="177677867"/>
       </p:ext>
     </p:extLst>
   </p:cSld>
@@ -861,90 +1762,8 @@
           <a:p>
             <a:r>
               <a:rPr lang="de-DE" dirty="0"/>
-              <a:t>1. Spektrale Merkmale (Frequenzbereich)</a:t>
-            </a:r>
-          </a:p>
-          <a:p>
-            <a:pPr lvl="1"/>
-            <a:r>
-              <a:rPr lang="de-DE" dirty="0"/>
-              <a:t>MFCCs (13 Koeffizienten): Bilden die Spektraleinhüllende auf der Mel-Skala ab </a:t>
-            </a:r>
-          </a:p>
-          <a:p>
-            <a:pPr lvl="1"/>
-            <a:r>
-              <a:rPr lang="de-DE" dirty="0"/>
-              <a:t>Spectral Centroid (Schwerpunkt): Gibt an, bei welcher Frequenz der "Masseschwerpunkt" des Spektrums liegt. Maß für die "Helligkeit" des Klangs.</a:t>
-            </a:r>
-          </a:p>
-          <a:p>
-            <a:pPr lvl="1"/>
-            <a:r>
-              <a:rPr lang="de-DE" dirty="0"/>
-              <a:t>Spectral Bandwidth (Bandbreite): Beschreibt die Spreizung des Spektrums um den Schwerpunkt</a:t>
-            </a:r>
-          </a:p>
-          <a:p>
-            <a:pPr lvl="1"/>
-            <a:r>
-              <a:rPr lang="de-DE" dirty="0"/>
-              <a:t>Spectral Roll-off: Die Frequenz, unter der ein bestimmter Prozentsatz (meist 85%) der Spektralenergie liegt</a:t>
-            </a:r>
-          </a:p>
-          <a:p>
-            <a:pPr lvl="1"/>
-            <a:r>
-              <a:rPr lang="de-DE" dirty="0"/>
-              <a:t>Spectral Contrast: Misst den Unterschied zwischen Spitzen und Tälern im Spektrum.</a:t>
-            </a:r>
-          </a:p>
-          <a:p>
-            <a:pPr lvl="1"/>
-            <a:r>
-              <a:rPr lang="de-DE" dirty="0"/>
-              <a:t>Chroma Features (STFT/CENS): Projizieren das gesamte Spektrum auf 12 Halbtonklassen</a:t>
-            </a:r>
-          </a:p>
-          <a:p>
-            <a:r>
-              <a:rPr lang="de-DE" dirty="0"/>
-              <a:t>2. Zeitbereichs-Merkmale</a:t>
-            </a:r>
-          </a:p>
-          <a:p>
-            <a:pPr lvl="1"/>
-            <a:r>
-              <a:rPr lang="de-DE" dirty="0"/>
-              <a:t>Zero Crossing Rate (ZCR): Die Rate, mit der das Signal die Nulllinie kreuzt. Ein Maß für die Frequenz und Impulsivität (Rauschen)</a:t>
-            </a:r>
-          </a:p>
-          <a:p>
-            <a:pPr lvl="1"/>
-            <a:r>
-              <a:rPr lang="de-DE" dirty="0"/>
-              <a:t>Frame Energy (RMS): Der quadratische Mittelwert der Amplitude.</a:t>
-            </a:r>
-          </a:p>
-          <a:p>
-            <a:r>
-              <a:rPr lang="de-DE" dirty="0"/>
-              <a:t>3. Dynamische Merkmale</a:t>
-            </a:r>
-          </a:p>
-          <a:p>
-            <a:pPr lvl="1"/>
-            <a:r>
-              <a:rPr lang="de-DE" dirty="0"/>
-              <a:t>Delta-Features: Die erste zeitliche Ableitung der MFCCs.</a:t>
-            </a:r>
-          </a:p>
-          <a:p>
-            <a:pPr lvl="1"/>
-            <a:endParaRPr lang="de-DE" dirty="0"/>
-          </a:p>
-          <a:p>
-            <a:endParaRPr lang="de-DE" dirty="0"/>
+              <a:t>(S)</a:t>
+            </a:r>
           </a:p>
         </p:txBody>
       </p:sp>
@@ -965,7 +1784,7 @@
           <a:p>
             <a:fld id="{0492B7F2-6741-7346-B13A-366117EE2BBB}" type="slidenum">
               <a:rPr lang="de-DE" smtClean="0"/>
-              <a:t>4</a:t>
+              <a:t>2</a:t>
             </a:fld>
             <a:endParaRPr lang="de-DE"/>
           </a:p>
@@ -974,7 +1793,7 @@
     </p:spTree>
     <p:extLst>
       <p:ext uri="{BB962C8B-B14F-4D97-AF65-F5344CB8AC3E}">
-        <p14:creationId xmlns:p14="http://schemas.microsoft.com/office/powerpoint/2010/main" val="1014031099"/>
+        <p14:creationId xmlns:p14="http://schemas.microsoft.com/office/powerpoint/2010/main" val="2591093164"/>
       </p:ext>
     </p:extLst>
   </p:cSld>
@@ -989,13 +1808,7 @@
   <p:cSld>
     <p:spTree>
       <p:nvGrpSpPr>
-        <p:cNvPr id="1" name="">
-          <a:extLst>
-            <a:ext uri="{FF2B5EF4-FFF2-40B4-BE49-F238E27FC236}">
-              <a16:creationId xmlns:a16="http://schemas.microsoft.com/office/drawing/2014/main" id="{8C49F389-D4E0-D2D0-D0E3-FEDCB6012685}"/>
-            </a:ext>
-          </a:extLst>
-        </p:cNvPr>
+        <p:cNvPr id="1" name=""/>
         <p:cNvGrpSpPr/>
         <p:nvPr/>
       </p:nvGrpSpPr>
@@ -1009,13 +1822,7 @@
       </p:grpSpPr>
       <p:sp>
         <p:nvSpPr>
-          <p:cNvPr id="2" name="Folienbildplatzhalter 1">
-            <a:extLst>
-              <a:ext uri="{FF2B5EF4-FFF2-40B4-BE49-F238E27FC236}">
-                <a16:creationId xmlns:a16="http://schemas.microsoft.com/office/drawing/2014/main" id="{31C17418-FDE2-F315-1FCC-C0AE13826ED7}"/>
-              </a:ext>
-            </a:extLst>
-          </p:cNvPr>
+          <p:cNvPr id="2" name="Folienbildplatzhalter 1"/>
           <p:cNvSpPr>
             <a:spLocks noGrp="1" noRot="1" noChangeAspect="1"/>
           </p:cNvSpPr>
@@ -1024,23 +1831,10 @@
           </p:nvPr>
         </p:nvSpPr>
         <p:spPr/>
-        <p:txBody>
-          <a:bodyPr/>
-          <a:lstStyle/>
-          <a:p>
-            <a:endParaRPr lang="de-DE"/>
-          </a:p>
-        </p:txBody>
-      </p:sp>
-      <p:sp>
-        <p:nvSpPr>
-          <p:cNvPr id="3" name="Notizenplatzhalter 2">
-            <a:extLst>
-              <a:ext uri="{FF2B5EF4-FFF2-40B4-BE49-F238E27FC236}">
-                <a16:creationId xmlns:a16="http://schemas.microsoft.com/office/drawing/2014/main" id="{72DD5A0F-089C-81AB-670E-7E39A76EBC0D}"/>
-              </a:ext>
-            </a:extLst>
-          </p:cNvPr>
+      </p:sp>
+      <p:sp>
+        <p:nvSpPr>
+          <p:cNvPr id="3" name="Notizenplatzhalter 2"/>
           <p:cNvSpPr>
             <a:spLocks noGrp="1"/>
           </p:cNvSpPr>
@@ -1053,19 +1847,16 @@
           <a:bodyPr/>
           <a:lstStyle/>
           <a:p>
-            <a:endParaRPr lang="de-DE" dirty="0"/>
-          </a:p>
-        </p:txBody>
-      </p:sp>
-      <p:sp>
-        <p:nvSpPr>
-          <p:cNvPr id="4" name="Foliennummernplatzhalter 3">
-            <a:extLst>
-              <a:ext uri="{FF2B5EF4-FFF2-40B4-BE49-F238E27FC236}">
-                <a16:creationId xmlns:a16="http://schemas.microsoft.com/office/drawing/2014/main" id="{AA57F3D0-5F1F-FB96-9DEC-006699FAA684}"/>
-              </a:ext>
-            </a:extLst>
-          </p:cNvPr>
+            <a:r>
+              <a:rPr lang="de-DE" dirty="0"/>
+              <a:t>(S)</a:t>
+            </a:r>
+          </a:p>
+        </p:txBody>
+      </p:sp>
+      <p:sp>
+        <p:nvSpPr>
+          <p:cNvPr id="4" name="Foliennummernplatzhalter 3"/>
           <p:cNvSpPr>
             <a:spLocks noGrp="1"/>
           </p:cNvSpPr>
@@ -1080,7 +1871,7 @@
           <a:p>
             <a:fld id="{0492B7F2-6741-7346-B13A-366117EE2BBB}" type="slidenum">
               <a:rPr lang="de-DE" smtClean="0"/>
-              <a:t>6</a:t>
+              <a:t>3</a:t>
             </a:fld>
             <a:endParaRPr lang="de-DE"/>
           </a:p>
@@ -1089,7 +1880,7 @@
     </p:spTree>
     <p:extLst>
       <p:ext uri="{BB962C8B-B14F-4D97-AF65-F5344CB8AC3E}">
-        <p14:creationId xmlns:p14="http://schemas.microsoft.com/office/powerpoint/2010/main" val="2678451260"/>
+        <p14:creationId xmlns:p14="http://schemas.microsoft.com/office/powerpoint/2010/main" val="4078869145"/>
       </p:ext>
     </p:extLst>
   </p:cSld>
@@ -1104,13 +1895,7 @@
   <p:cSld>
     <p:spTree>
       <p:nvGrpSpPr>
-        <p:cNvPr id="1" name="">
-          <a:extLst>
-            <a:ext uri="{FF2B5EF4-FFF2-40B4-BE49-F238E27FC236}">
-              <a16:creationId xmlns:a16="http://schemas.microsoft.com/office/drawing/2014/main" id="{7D3763EF-EA1A-0B8A-1379-0A6160E522A8}"/>
-            </a:ext>
-          </a:extLst>
-        </p:cNvPr>
+        <p:cNvPr id="1" name=""/>
         <p:cNvGrpSpPr/>
         <p:nvPr/>
       </p:nvGrpSpPr>
@@ -1124,13 +1909,7 @@
       </p:grpSpPr>
       <p:sp>
         <p:nvSpPr>
-          <p:cNvPr id="2" name="Folienbildplatzhalter 1">
-            <a:extLst>
-              <a:ext uri="{FF2B5EF4-FFF2-40B4-BE49-F238E27FC236}">
-                <a16:creationId xmlns:a16="http://schemas.microsoft.com/office/drawing/2014/main" id="{ED6D235D-AA7B-F048-6715-4D5C7A058148}"/>
-              </a:ext>
-            </a:extLst>
-          </p:cNvPr>
+          <p:cNvPr id="2" name="Folienbildplatzhalter 1"/>
           <p:cNvSpPr>
             <a:spLocks noGrp="1" noRot="1" noChangeAspect="1"/>
           </p:cNvSpPr>
@@ -1149,13 +1928,7 @@
       </p:sp>
       <p:sp>
         <p:nvSpPr>
-          <p:cNvPr id="3" name="Notizenplatzhalter 2">
-            <a:extLst>
-              <a:ext uri="{FF2B5EF4-FFF2-40B4-BE49-F238E27FC236}">
-                <a16:creationId xmlns:a16="http://schemas.microsoft.com/office/drawing/2014/main" id="{42AAE592-F1C0-8F4D-517A-D2570ED297B8}"/>
-              </a:ext>
-            </a:extLst>
-          </p:cNvPr>
+          <p:cNvPr id="3" name="Notizenplatzhalter 2"/>
           <p:cNvSpPr>
             <a:spLocks noGrp="1"/>
           </p:cNvSpPr>
@@ -1168,19 +1941,104 @@
           <a:bodyPr/>
           <a:lstStyle/>
           <a:p>
+            <a:r>
+              <a:rPr lang="de-DE" dirty="0"/>
+              <a:t>(D)</a:t>
+            </a:r>
+          </a:p>
+          <a:p>
+            <a:r>
+              <a:rPr lang="de-DE" dirty="0"/>
+              <a:t>1. Spektrale Merkmale (Frequenzbereich)</a:t>
+            </a:r>
+          </a:p>
+          <a:p>
+            <a:pPr lvl="1"/>
+            <a:r>
+              <a:rPr lang="de-DE" dirty="0"/>
+              <a:t>MFCCs (13 Koeffizienten): Bilden die Spektraleinhüllende auf der Mel-Skala ab </a:t>
+            </a:r>
+          </a:p>
+          <a:p>
+            <a:pPr lvl="1"/>
+            <a:r>
+              <a:rPr lang="de-DE" dirty="0"/>
+              <a:t>Spectral Centroid (Schwerpunkt): Gibt an, bei welcher Frequenz der "Masseschwerpunkt" des Spektrums liegt. Maß für die "Helligkeit" des Klangs.</a:t>
+            </a:r>
+          </a:p>
+          <a:p>
+            <a:pPr lvl="1"/>
+            <a:r>
+              <a:rPr lang="de-DE" dirty="0"/>
+              <a:t>Spectral Bandwidth (Bandbreite): Beschreibt die Spreizung des Spektrums um den Schwerpunkt</a:t>
+            </a:r>
+          </a:p>
+          <a:p>
+            <a:pPr lvl="1"/>
+            <a:r>
+              <a:rPr lang="de-DE" dirty="0"/>
+              <a:t>Spectral Roll-off: Die Frequenz, unter der ein bestimmter Prozentsatz (meist 85%) der Spektralenergie liegt</a:t>
+            </a:r>
+          </a:p>
+          <a:p>
+            <a:pPr lvl="1"/>
+            <a:r>
+              <a:rPr lang="de-DE" dirty="0"/>
+              <a:t>Spectral Contrast: Misst den Unterschied zwischen Spitzen und Tälern im Spektrum.</a:t>
+            </a:r>
+          </a:p>
+          <a:p>
+            <a:pPr lvl="1"/>
+            <a:r>
+              <a:rPr lang="de-DE" dirty="0"/>
+              <a:t>Chroma Features (STFT/CENS): Projizieren das gesamte Spektrum auf 12 Halbtonklassen</a:t>
+            </a:r>
+          </a:p>
+          <a:p>
+            <a:r>
+              <a:rPr lang="de-DE" dirty="0"/>
+              <a:t>2. Zeitbereichs-Merkmale</a:t>
+            </a:r>
+          </a:p>
+          <a:p>
+            <a:pPr lvl="1"/>
+            <a:r>
+              <a:rPr lang="de-DE" dirty="0"/>
+              <a:t>Zero Crossing Rate (ZCR): Die Rate, mit der das Signal die Nulllinie kreuzt. Ein Maß für die Frequenz und Impulsivität (Rauschen)</a:t>
+            </a:r>
+          </a:p>
+          <a:p>
+            <a:pPr lvl="1"/>
+            <a:r>
+              <a:rPr lang="de-DE" dirty="0"/>
+              <a:t>Frame Energy (RMS): Der quadratische Mittelwert der Amplitude.</a:t>
+            </a:r>
+          </a:p>
+          <a:p>
+            <a:r>
+              <a:rPr lang="de-DE" dirty="0"/>
+              <a:t>3. Dynamische Merkmale</a:t>
+            </a:r>
+          </a:p>
+          <a:p>
+            <a:pPr lvl="1"/>
+            <a:r>
+              <a:rPr lang="de-DE" dirty="0"/>
+              <a:t>Delta-Features: Die erste zeitliche Ableitung der MFCCs.</a:t>
+            </a:r>
+          </a:p>
+          <a:p>
+            <a:pPr lvl="1"/>
             <a:endParaRPr lang="de-DE" dirty="0"/>
           </a:p>
-        </p:txBody>
-      </p:sp>
-      <p:sp>
-        <p:nvSpPr>
-          <p:cNvPr id="4" name="Foliennummernplatzhalter 3">
-            <a:extLst>
-              <a:ext uri="{FF2B5EF4-FFF2-40B4-BE49-F238E27FC236}">
-                <a16:creationId xmlns:a16="http://schemas.microsoft.com/office/drawing/2014/main" id="{A438551F-788D-EDA4-E8B5-EFFC99D96854}"/>
-              </a:ext>
-            </a:extLst>
-          </p:cNvPr>
+          <a:p>
+            <a:endParaRPr lang="de-DE" dirty="0"/>
+          </a:p>
+        </p:txBody>
+      </p:sp>
+      <p:sp>
+        <p:nvSpPr>
+          <p:cNvPr id="4" name="Foliennummernplatzhalter 3"/>
           <p:cNvSpPr>
             <a:spLocks noGrp="1"/>
           </p:cNvSpPr>
@@ -1195,7 +2053,7 @@
           <a:p>
             <a:fld id="{0492B7F2-6741-7346-B13A-366117EE2BBB}" type="slidenum">
               <a:rPr lang="de-DE" smtClean="0"/>
-              <a:t>9</a:t>
+              <a:t>4</a:t>
             </a:fld>
             <a:endParaRPr lang="de-DE"/>
           </a:p>
@@ -1204,7 +2062,7 @@
     </p:spTree>
     <p:extLst>
       <p:ext uri="{BB962C8B-B14F-4D97-AF65-F5344CB8AC3E}">
-        <p14:creationId xmlns:p14="http://schemas.microsoft.com/office/powerpoint/2010/main" val="1770632462"/>
+        <p14:creationId xmlns:p14="http://schemas.microsoft.com/office/powerpoint/2010/main" val="1014031099"/>
       </p:ext>
     </p:extLst>
   </p:cSld>
@@ -1242,13 +2100,6 @@
           </p:nvPr>
         </p:nvSpPr>
         <p:spPr/>
-        <p:txBody>
-          <a:bodyPr/>
-          <a:lstStyle/>
-          <a:p>
-            <a:endParaRPr lang="de-DE"/>
-          </a:p>
-        </p:txBody>
       </p:sp>
       <p:sp>
         <p:nvSpPr>
@@ -1267,15 +2118,7 @@
           <a:p>
             <a:r>
               <a:rPr lang="de-DE" dirty="0"/>
-              <a:t>mID: Z01-Z05 = 0000 und </a:t>
-            </a:r>
-            <a:r>
-              <a:rPr lang="de-DE" dirty="0" err="1"/>
-              <a:t>rID</a:t>
-            </a:r>
-            <a:r>
-              <a:rPr lang="de-DE" dirty="0"/>
-              <a:t> = 00000 und Pos = 00</a:t>
+              <a:t>(D)</a:t>
             </a:r>
           </a:p>
         </p:txBody>
@@ -1297,7 +2140,7 @@
           <a:p>
             <a:fld id="{0492B7F2-6741-7346-B13A-366117EE2BBB}" type="slidenum">
               <a:rPr lang="de-DE" smtClean="0"/>
-              <a:t>10</a:t>
+              <a:t>5</a:t>
             </a:fld>
             <a:endParaRPr lang="de-DE"/>
           </a:p>
@@ -1306,7 +2149,427 @@
     </p:spTree>
     <p:extLst>
       <p:ext uri="{BB962C8B-B14F-4D97-AF65-F5344CB8AC3E}">
-        <p14:creationId xmlns:p14="http://schemas.microsoft.com/office/powerpoint/2010/main" val="4205122503"/>
+        <p14:creationId xmlns:p14="http://schemas.microsoft.com/office/powerpoint/2010/main" val="3211991302"/>
+      </p:ext>
+    </p:extLst>
+  </p:cSld>
+  <p:clrMapOvr>
+    <a:masterClrMapping/>
+  </p:clrMapOvr>
+</p:notes>
+</file>
+
+<file path=ppt/notesSlides/notesSlide6.xml><?xml version="1.0" encoding="utf-8"?>
+<p:notes xmlns:a="http://schemas.openxmlformats.org/drawingml/2006/main" xmlns:r="http://schemas.openxmlformats.org/officeDocument/2006/relationships" xmlns:p="http://schemas.openxmlformats.org/presentationml/2006/main">
+  <p:cSld>
+    <p:spTree>
+      <p:nvGrpSpPr>
+        <p:cNvPr id="1" name="">
+          <a:extLst>
+            <a:ext uri="{FF2B5EF4-FFF2-40B4-BE49-F238E27FC236}">
+              <a16:creationId xmlns:a16="http://schemas.microsoft.com/office/drawing/2014/main" id="{8C49F389-D4E0-D2D0-D0E3-FEDCB6012685}"/>
+            </a:ext>
+          </a:extLst>
+        </p:cNvPr>
+        <p:cNvGrpSpPr/>
+        <p:nvPr/>
+      </p:nvGrpSpPr>
+      <p:grpSpPr>
+        <a:xfrm>
+          <a:off x="0" y="0"/>
+          <a:ext cx="0" cy="0"/>
+          <a:chOff x="0" y="0"/>
+          <a:chExt cx="0" cy="0"/>
+        </a:xfrm>
+      </p:grpSpPr>
+      <p:sp>
+        <p:nvSpPr>
+          <p:cNvPr id="2" name="Folienbildplatzhalter 1">
+            <a:extLst>
+              <a:ext uri="{FF2B5EF4-FFF2-40B4-BE49-F238E27FC236}">
+                <a16:creationId xmlns:a16="http://schemas.microsoft.com/office/drawing/2014/main" id="{31C17418-FDE2-F315-1FCC-C0AE13826ED7}"/>
+              </a:ext>
+            </a:extLst>
+          </p:cNvPr>
+          <p:cNvSpPr>
+            <a:spLocks noGrp="1" noRot="1" noChangeAspect="1"/>
+          </p:cNvSpPr>
+          <p:nvPr>
+            <p:ph type="sldImg"/>
+          </p:nvPr>
+        </p:nvSpPr>
+        <p:spPr/>
+        <p:txBody>
+          <a:bodyPr/>
+          <a:lstStyle/>
+          <a:p>
+            <a:endParaRPr lang="de-DE"/>
+          </a:p>
+        </p:txBody>
+      </p:sp>
+      <p:sp>
+        <p:nvSpPr>
+          <p:cNvPr id="3" name="Notizenplatzhalter 2">
+            <a:extLst>
+              <a:ext uri="{FF2B5EF4-FFF2-40B4-BE49-F238E27FC236}">
+                <a16:creationId xmlns:a16="http://schemas.microsoft.com/office/drawing/2014/main" id="{72DD5A0F-089C-81AB-670E-7E39A76EBC0D}"/>
+              </a:ext>
+            </a:extLst>
+          </p:cNvPr>
+          <p:cNvSpPr>
+            <a:spLocks noGrp="1"/>
+          </p:cNvSpPr>
+          <p:nvPr>
+            <p:ph type="body" idx="1"/>
+          </p:nvPr>
+        </p:nvSpPr>
+        <p:spPr/>
+        <p:txBody>
+          <a:bodyPr/>
+          <a:lstStyle/>
+          <a:p>
+            <a:r>
+              <a:rPr lang="de-DE" dirty="0"/>
+              <a:t>T</a:t>
+            </a:r>
+          </a:p>
+          <a:p>
+            <a:endParaRPr lang="de-DE" dirty="0"/>
+          </a:p>
+        </p:txBody>
+      </p:sp>
+      <p:sp>
+        <p:nvSpPr>
+          <p:cNvPr id="4" name="Foliennummernplatzhalter 3">
+            <a:extLst>
+              <a:ext uri="{FF2B5EF4-FFF2-40B4-BE49-F238E27FC236}">
+                <a16:creationId xmlns:a16="http://schemas.microsoft.com/office/drawing/2014/main" id="{AA57F3D0-5F1F-FB96-9DEC-006699FAA684}"/>
+              </a:ext>
+            </a:extLst>
+          </p:cNvPr>
+          <p:cNvSpPr>
+            <a:spLocks noGrp="1"/>
+          </p:cNvSpPr>
+          <p:nvPr>
+            <p:ph type="sldNum" sz="quarter" idx="5"/>
+          </p:nvPr>
+        </p:nvSpPr>
+        <p:spPr/>
+        <p:txBody>
+          <a:bodyPr/>
+          <a:lstStyle/>
+          <a:p>
+            <a:fld id="{0492B7F2-6741-7346-B13A-366117EE2BBB}" type="slidenum">
+              <a:rPr lang="de-DE" smtClean="0"/>
+              <a:t>6</a:t>
+            </a:fld>
+            <a:endParaRPr lang="de-DE"/>
+          </a:p>
+        </p:txBody>
+      </p:sp>
+    </p:spTree>
+    <p:extLst>
+      <p:ext uri="{BB962C8B-B14F-4D97-AF65-F5344CB8AC3E}">
+        <p14:creationId xmlns:p14="http://schemas.microsoft.com/office/powerpoint/2010/main" val="2678451260"/>
+      </p:ext>
+    </p:extLst>
+  </p:cSld>
+  <p:clrMapOvr>
+    <a:masterClrMapping/>
+  </p:clrMapOvr>
+</p:notes>
+</file>
+
+<file path=ppt/notesSlides/notesSlide7.xml><?xml version="1.0" encoding="utf-8"?>
+<p:notes xmlns:a="http://schemas.openxmlformats.org/drawingml/2006/main" xmlns:r="http://schemas.openxmlformats.org/officeDocument/2006/relationships" xmlns:p="http://schemas.openxmlformats.org/presentationml/2006/main">
+  <p:cSld>
+    <p:spTree>
+      <p:nvGrpSpPr>
+        <p:cNvPr id="1" name=""/>
+        <p:cNvGrpSpPr/>
+        <p:nvPr/>
+      </p:nvGrpSpPr>
+      <p:grpSpPr>
+        <a:xfrm>
+          <a:off x="0" y="0"/>
+          <a:ext cx="0" cy="0"/>
+          <a:chOff x="0" y="0"/>
+          <a:chExt cx="0" cy="0"/>
+        </a:xfrm>
+      </p:grpSpPr>
+      <p:sp>
+        <p:nvSpPr>
+          <p:cNvPr id="2" name="Folienbildplatzhalter 1"/>
+          <p:cNvSpPr>
+            <a:spLocks noGrp="1" noRot="1" noChangeAspect="1"/>
+          </p:cNvSpPr>
+          <p:nvPr>
+            <p:ph type="sldImg"/>
+          </p:nvPr>
+        </p:nvSpPr>
+        <p:spPr/>
+      </p:sp>
+      <p:sp>
+        <p:nvSpPr>
+          <p:cNvPr id="3" name="Notizenplatzhalter 2"/>
+          <p:cNvSpPr>
+            <a:spLocks noGrp="1"/>
+          </p:cNvSpPr>
+          <p:nvPr>
+            <p:ph type="body" idx="1"/>
+          </p:nvPr>
+        </p:nvSpPr>
+        <p:spPr/>
+        <p:txBody>
+          <a:bodyPr/>
+          <a:lstStyle/>
+          <a:p>
+            <a:r>
+              <a:rPr lang="de-DE" dirty="0"/>
+              <a:t>T</a:t>
+            </a:r>
+          </a:p>
+          <a:p>
+            <a:endParaRPr lang="de-DE" dirty="0"/>
+          </a:p>
+        </p:txBody>
+      </p:sp>
+      <p:sp>
+        <p:nvSpPr>
+          <p:cNvPr id="4" name="Foliennummernplatzhalter 3"/>
+          <p:cNvSpPr>
+            <a:spLocks noGrp="1"/>
+          </p:cNvSpPr>
+          <p:nvPr>
+            <p:ph type="sldNum" sz="quarter" idx="5"/>
+          </p:nvPr>
+        </p:nvSpPr>
+        <p:spPr/>
+        <p:txBody>
+          <a:bodyPr/>
+          <a:lstStyle/>
+          <a:p>
+            <a:fld id="{0492B7F2-6741-7346-B13A-366117EE2BBB}" type="slidenum">
+              <a:rPr lang="de-DE" smtClean="0"/>
+              <a:t>7</a:t>
+            </a:fld>
+            <a:endParaRPr lang="de-DE"/>
+          </a:p>
+        </p:txBody>
+      </p:sp>
+    </p:spTree>
+    <p:extLst>
+      <p:ext uri="{BB962C8B-B14F-4D97-AF65-F5344CB8AC3E}">
+        <p14:creationId xmlns:p14="http://schemas.microsoft.com/office/powerpoint/2010/main" val="1783365533"/>
+      </p:ext>
+    </p:extLst>
+  </p:cSld>
+  <p:clrMapOvr>
+    <a:masterClrMapping/>
+  </p:clrMapOvr>
+</p:notes>
+</file>
+
+<file path=ppt/notesSlides/notesSlide8.xml><?xml version="1.0" encoding="utf-8"?>
+<p:notes xmlns:a="http://schemas.openxmlformats.org/drawingml/2006/main" xmlns:r="http://schemas.openxmlformats.org/officeDocument/2006/relationships" xmlns:p="http://schemas.openxmlformats.org/presentationml/2006/main">
+  <p:cSld>
+    <p:spTree>
+      <p:nvGrpSpPr>
+        <p:cNvPr id="1" name=""/>
+        <p:cNvGrpSpPr/>
+        <p:nvPr/>
+      </p:nvGrpSpPr>
+      <p:grpSpPr>
+        <a:xfrm>
+          <a:off x="0" y="0"/>
+          <a:ext cx="0" cy="0"/>
+          <a:chOff x="0" y="0"/>
+          <a:chExt cx="0" cy="0"/>
+        </a:xfrm>
+      </p:grpSpPr>
+      <p:sp>
+        <p:nvSpPr>
+          <p:cNvPr id="2" name="Folienbildplatzhalter 1"/>
+          <p:cNvSpPr>
+            <a:spLocks noGrp="1" noRot="1" noChangeAspect="1"/>
+          </p:cNvSpPr>
+          <p:nvPr>
+            <p:ph type="sldImg"/>
+          </p:nvPr>
+        </p:nvSpPr>
+        <p:spPr/>
+      </p:sp>
+      <p:sp>
+        <p:nvSpPr>
+          <p:cNvPr id="3" name="Notizenplatzhalter 2"/>
+          <p:cNvSpPr>
+            <a:spLocks noGrp="1"/>
+          </p:cNvSpPr>
+          <p:nvPr>
+            <p:ph type="body" idx="1"/>
+          </p:nvPr>
+        </p:nvSpPr>
+        <p:spPr/>
+        <p:txBody>
+          <a:bodyPr/>
+          <a:lstStyle/>
+          <a:p>
+            <a:r>
+              <a:rPr lang="de-DE" dirty="0"/>
+              <a:t>T</a:t>
+            </a:r>
+          </a:p>
+          <a:p>
+            <a:endParaRPr lang="de-DE" dirty="0"/>
+          </a:p>
+        </p:txBody>
+      </p:sp>
+      <p:sp>
+        <p:nvSpPr>
+          <p:cNvPr id="4" name="Foliennummernplatzhalter 3"/>
+          <p:cNvSpPr>
+            <a:spLocks noGrp="1"/>
+          </p:cNvSpPr>
+          <p:nvPr>
+            <p:ph type="sldNum" sz="quarter" idx="5"/>
+          </p:nvPr>
+        </p:nvSpPr>
+        <p:spPr/>
+        <p:txBody>
+          <a:bodyPr/>
+          <a:lstStyle/>
+          <a:p>
+            <a:fld id="{0492B7F2-6741-7346-B13A-366117EE2BBB}" type="slidenum">
+              <a:rPr lang="de-DE" smtClean="0"/>
+              <a:t>8</a:t>
+            </a:fld>
+            <a:endParaRPr lang="de-DE"/>
+          </a:p>
+        </p:txBody>
+      </p:sp>
+    </p:spTree>
+    <p:extLst>
+      <p:ext uri="{BB962C8B-B14F-4D97-AF65-F5344CB8AC3E}">
+        <p14:creationId xmlns:p14="http://schemas.microsoft.com/office/powerpoint/2010/main" val="3220427031"/>
+      </p:ext>
+    </p:extLst>
+  </p:cSld>
+  <p:clrMapOvr>
+    <a:masterClrMapping/>
+  </p:clrMapOvr>
+</p:notes>
+</file>
+
+<file path=ppt/notesSlides/notesSlide9.xml><?xml version="1.0" encoding="utf-8"?>
+<p:notes xmlns:a="http://schemas.openxmlformats.org/drawingml/2006/main" xmlns:r="http://schemas.openxmlformats.org/officeDocument/2006/relationships" xmlns:p="http://schemas.openxmlformats.org/presentationml/2006/main">
+  <p:cSld>
+    <p:spTree>
+      <p:nvGrpSpPr>
+        <p:cNvPr id="1" name="">
+          <a:extLst>
+            <a:ext uri="{FF2B5EF4-FFF2-40B4-BE49-F238E27FC236}">
+              <a16:creationId xmlns:a16="http://schemas.microsoft.com/office/drawing/2014/main" id="{7D3763EF-EA1A-0B8A-1379-0A6160E522A8}"/>
+            </a:ext>
+          </a:extLst>
+        </p:cNvPr>
+        <p:cNvGrpSpPr/>
+        <p:nvPr/>
+      </p:nvGrpSpPr>
+      <p:grpSpPr>
+        <a:xfrm>
+          <a:off x="0" y="0"/>
+          <a:ext cx="0" cy="0"/>
+          <a:chOff x="0" y="0"/>
+          <a:chExt cx="0" cy="0"/>
+        </a:xfrm>
+      </p:grpSpPr>
+      <p:sp>
+        <p:nvSpPr>
+          <p:cNvPr id="2" name="Folienbildplatzhalter 1">
+            <a:extLst>
+              <a:ext uri="{FF2B5EF4-FFF2-40B4-BE49-F238E27FC236}">
+                <a16:creationId xmlns:a16="http://schemas.microsoft.com/office/drawing/2014/main" id="{ED6D235D-AA7B-F048-6715-4D5C7A058148}"/>
+              </a:ext>
+            </a:extLst>
+          </p:cNvPr>
+          <p:cNvSpPr>
+            <a:spLocks noGrp="1" noRot="1" noChangeAspect="1"/>
+          </p:cNvSpPr>
+          <p:nvPr>
+            <p:ph type="sldImg"/>
+          </p:nvPr>
+        </p:nvSpPr>
+        <p:spPr/>
+        <p:txBody>
+          <a:bodyPr/>
+          <a:lstStyle/>
+          <a:p>
+            <a:endParaRPr lang="de-DE"/>
+          </a:p>
+        </p:txBody>
+      </p:sp>
+      <p:sp>
+        <p:nvSpPr>
+          <p:cNvPr id="3" name="Notizenplatzhalter 2">
+            <a:extLst>
+              <a:ext uri="{FF2B5EF4-FFF2-40B4-BE49-F238E27FC236}">
+                <a16:creationId xmlns:a16="http://schemas.microsoft.com/office/drawing/2014/main" id="{42AAE592-F1C0-8F4D-517A-D2570ED297B8}"/>
+              </a:ext>
+            </a:extLst>
+          </p:cNvPr>
+          <p:cNvSpPr>
+            <a:spLocks noGrp="1"/>
+          </p:cNvSpPr>
+          <p:nvPr>
+            <p:ph type="body" idx="1"/>
+          </p:nvPr>
+        </p:nvSpPr>
+        <p:spPr/>
+        <p:txBody>
+          <a:bodyPr/>
+          <a:lstStyle/>
+          <a:p>
+            <a:r>
+              <a:rPr lang="de-DE"/>
+              <a:t>(S)</a:t>
+            </a:r>
+            <a:endParaRPr lang="de-DE" dirty="0"/>
+          </a:p>
+        </p:txBody>
+      </p:sp>
+      <p:sp>
+        <p:nvSpPr>
+          <p:cNvPr id="4" name="Foliennummernplatzhalter 3">
+            <a:extLst>
+              <a:ext uri="{FF2B5EF4-FFF2-40B4-BE49-F238E27FC236}">
+                <a16:creationId xmlns:a16="http://schemas.microsoft.com/office/drawing/2014/main" id="{A438551F-788D-EDA4-E8B5-EFFC99D96854}"/>
+              </a:ext>
+            </a:extLst>
+          </p:cNvPr>
+          <p:cNvSpPr>
+            <a:spLocks noGrp="1"/>
+          </p:cNvSpPr>
+          <p:nvPr>
+            <p:ph type="sldNum" sz="quarter" idx="5"/>
+          </p:nvPr>
+        </p:nvSpPr>
+        <p:spPr/>
+        <p:txBody>
+          <a:bodyPr/>
+          <a:lstStyle/>
+          <a:p>
+            <a:fld id="{0492B7F2-6741-7346-B13A-366117EE2BBB}" type="slidenum">
+              <a:rPr lang="de-DE" smtClean="0"/>
+              <a:t>9</a:t>
+            </a:fld>
+            <a:endParaRPr lang="de-DE"/>
+          </a:p>
+        </p:txBody>
+      </p:sp>
+    </p:spTree>
+    <p:extLst>
+      <p:ext uri="{BB962C8B-B14F-4D97-AF65-F5344CB8AC3E}">
+        <p14:creationId xmlns:p14="http://schemas.microsoft.com/office/powerpoint/2010/main" val="1770632462"/>
       </p:ext>
     </p:extLst>
   </p:cSld>
@@ -4119,7 +5382,7 @@
           </p:nvPr>
         </p:nvPicPr>
         <p:blipFill rotWithShape="1">
-          <a:blip r:embed="rId2"/>
+          <a:blip r:embed="rId3"/>
           <a:srcRect t="33412" b="33339"/>
           <a:stretch>
             <a:fillRect/>
@@ -4344,7 +5607,7 @@
           </p:nvPr>
         </p:nvPicPr>
         <p:blipFill rotWithShape="1">
-          <a:blip r:embed="rId2"/>
+          <a:blip r:embed="rId3"/>
           <a:srcRect t="66831"/>
           <a:stretch>
             <a:fillRect/>
@@ -4615,7 +5878,7 @@
           <p:nvPr/>
         </p:nvPicPr>
         <p:blipFill>
-          <a:blip r:embed="rId2"/>
+          <a:blip r:embed="rId3"/>
           <a:srcRect t="-36" b="75054"/>
           <a:stretch>
             <a:fillRect/>
@@ -4823,7 +6086,7 @@
           <p:nvPr/>
         </p:nvPicPr>
         <p:blipFill>
-          <a:blip r:embed="rId2"/>
+          <a:blip r:embed="rId3"/>
           <a:srcRect l="67" t="74907" r="-67" b="111"/>
           <a:stretch>
             <a:fillRect/>
@@ -5034,7 +6297,7 @@
           <p:nvPr/>
         </p:nvPicPr>
         <p:blipFill>
-          <a:blip r:embed="rId2"/>
+          <a:blip r:embed="rId3"/>
           <a:srcRect t="49902" b="25116"/>
           <a:stretch>
             <a:fillRect/>
@@ -5419,7 +6682,7 @@
           <p:nvPr/>
         </p:nvPicPr>
         <p:blipFill>
-          <a:blip r:embed="rId2"/>
+          <a:blip r:embed="rId3"/>
           <a:srcRect t="75053" b="-35"/>
           <a:stretch>
             <a:fillRect/>
@@ -6615,6 +7878,13 @@
               <a:buFont typeface="Arial" panose="020B0604020202020204" pitchFamily="34" charset="0"/>
               <a:buChar char="•"/>
             </a:pPr>
+            <a:endParaRPr lang="de-DE" dirty="0"/>
+          </a:p>
+          <a:p>
+            <a:pPr>
+              <a:buFont typeface="Arial" panose="020B0604020202020204" pitchFamily="34" charset="0"/>
+              <a:buChar char="•"/>
+            </a:pPr>
             <a:r>
               <a:rPr lang="de-DE" dirty="0"/>
               <a:t>Automatische Klassifizierung beschädigter Zahnräder anhand von Merkmalen (Features)</a:t>
@@ -7267,7 +8537,7 @@
           <p:nvPr/>
         </p:nvPicPr>
         <p:blipFill>
-          <a:blip r:embed="rId2"/>
+          <a:blip r:embed="rId3"/>
           <a:stretch>
             <a:fillRect/>
           </a:stretch>
@@ -7696,7 +8966,7 @@
           </p:nvPr>
         </p:nvPicPr>
         <p:blipFill rotWithShape="1">
-          <a:blip r:embed="rId2"/>
+          <a:blip r:embed="rId3"/>
           <a:srcRect b="46888"/>
           <a:stretch>
             <a:fillRect/>
@@ -7913,7 +9183,7 @@
           </p:nvPr>
         </p:nvPicPr>
         <p:blipFill rotWithShape="1">
-          <a:blip r:embed="rId2"/>
+          <a:blip r:embed="rId3"/>
           <a:srcRect t="53112"/>
           <a:stretch>
             <a:fillRect/>

--- a/Task_2/Task2Powerpoint.pptx
+++ b/Task_2/Task2Powerpoint.pptx
@@ -273,7 +273,7 @@
           <a:p>
             <a:fld id="{75AB4CA9-CCE6-4DE5-84AD-E1F7B6CB5CBB}" type="datetimeFigureOut">
               <a:rPr lang="de-DE" smtClean="0"/>
-              <a:t>22.06.26</a:t>
+              <a:t>24.06.2026</a:t>
             </a:fld>
             <a:endParaRPr lang="de-DE"/>
           </a:p>
@@ -450,7 +450,7 @@
           <a:p>
             <a:fld id="{52D5829F-2F94-0B44-A96D-AE852A87AC61}" type="datetimeFigureOut">
               <a:rPr lang="de-DE" smtClean="0"/>
-              <a:t>22.06.26</a:t>
+              <a:t>24.06.2026</a:t>
             </a:fld>
             <a:endParaRPr lang="de-DE"/>
           </a:p>
@@ -763,7 +763,7 @@
           <a:p>
             <a:r>
               <a:rPr lang="de-DE" dirty="0"/>
-              <a:t>(S)</a:t>
+              <a:t>D</a:t>
             </a:r>
           </a:p>
           <a:p>
@@ -877,7 +877,7 @@
             </a:pPr>
             <a:r>
               <a:rPr lang="de-DE" dirty="0"/>
-              <a:t>(S)</a:t>
+              <a:t>T</a:t>
             </a:r>
           </a:p>
           <a:p>
@@ -1762,7 +1762,7 @@
           <a:p>
             <a:r>
               <a:rPr lang="de-DE" dirty="0"/>
-              <a:t>(S)</a:t>
+              <a:t>D</a:t>
             </a:r>
           </a:p>
         </p:txBody>
@@ -1849,7 +1849,7 @@
           <a:p>
             <a:r>
               <a:rPr lang="de-DE" dirty="0"/>
-              <a:t>(S)</a:t>
+              <a:t>D</a:t>
             </a:r>
           </a:p>
         </p:txBody>
@@ -1943,7 +1943,7 @@
           <a:p>
             <a:r>
               <a:rPr lang="de-DE" dirty="0"/>
-              <a:t>(D)</a:t>
+              <a:t>D</a:t>
             </a:r>
           </a:p>
           <a:p>
@@ -2118,7 +2118,7 @@
           <a:p>
             <a:r>
               <a:rPr lang="de-DE" dirty="0"/>
-              <a:t>(D)</a:t>
+              <a:t>D</a:t>
             </a:r>
           </a:p>
         </p:txBody>
@@ -2330,7 +2330,62 @@
             </a:r>
           </a:p>
           <a:p>
-            <a:endParaRPr lang="de-DE" dirty="0"/>
+            <a:pPr marL="171450" indent="-171450">
+              <a:buFontTx/>
+              <a:buChar char="-"/>
+            </a:pPr>
+            <a:r>
+              <a:rPr lang="de-DE" dirty="0"/>
+              <a:t>Lage der Mediane zueinander: wenn Mediane von Zahnrädern aus versch. </a:t>
+            </a:r>
+            <a:r>
+              <a:rPr lang="de-DE" dirty="0" err="1"/>
+              <a:t>klassen</a:t>
+            </a:r>
+            <a:r>
+              <a:rPr lang="de-DE" dirty="0"/>
+              <a:t> unterschiedlich stark sind hat dieses Merkmal einen indikativen Charakter  </a:t>
+            </a:r>
+            <a:br>
+              <a:rPr lang="de-DE" dirty="0"/>
+            </a:br>
+            <a:r>
+              <a:rPr lang="de-DE" dirty="0"/>
+              <a:t>- Überlappung: Boxen stark überlappen-&gt; einzelne Merkmal allein  nicht aussagekräftig genug für einfache Unterscheidung. In  KI-Anwendung mit anderen kombinieren- Größe der Boxen: </a:t>
+            </a:r>
+            <a:r>
+              <a:rPr lang="de-DE" dirty="0" err="1"/>
+              <a:t>stabilität</a:t>
+            </a:r>
+            <a:r>
+              <a:rPr lang="de-DE" dirty="0"/>
+              <a:t> von Merkmalen. Große Boxen -&gt; große Varianz, weniger sinnvoll für Klassifikation</a:t>
+            </a:r>
+            <a:br>
+              <a:rPr lang="de-DE" dirty="0"/>
+            </a:br>
+            <a:r>
+              <a:rPr lang="de-DE" dirty="0"/>
+              <a:t>- Ausreißer: auf Messfehler, Rauschen oder besondere Anomalien im Zahnrad hinweisen(die für eine KI als „Herausforderung“ oder „Indikator“ dienen </a:t>
+            </a:r>
+            <a:r>
+              <a:rPr lang="de-DE"/>
+              <a:t>können)</a:t>
+            </a:r>
+          </a:p>
+          <a:p>
+            <a:pPr marL="171450" indent="-171450">
+              <a:buFontTx/>
+              <a:buChar char="-"/>
+            </a:pPr>
+            <a:r>
+              <a:rPr lang="de-DE"/>
+              <a:t>=&gt; </a:t>
+            </a:r>
+            <a:r>
+              <a:rPr lang="de-DE" dirty="0"/>
+              <a:t>Zentral für Verständnis, nehmen trotzdem alle\man könnte gewichten</a:t>
+            </a:r>
           </a:p>
         </p:txBody>
       </p:sp>
@@ -2420,7 +2475,54 @@
             </a:r>
           </a:p>
           <a:p>
-            <a:endParaRPr lang="de-DE" dirty="0"/>
+            <a:pPr marL="171450" indent="-171450">
+              <a:buFontTx/>
+              <a:buChar char="-"/>
+            </a:pPr>
+            <a:r>
+              <a:rPr lang="de-DE" dirty="0"/>
+              <a:t>Lage der Mediane zueinander: wenn Mediane von Zahnrädern aus versch. </a:t>
+            </a:r>
+            <a:r>
+              <a:rPr lang="de-DE" dirty="0" err="1"/>
+              <a:t>klassen</a:t>
+            </a:r>
+            <a:r>
+              <a:rPr lang="de-DE" dirty="0"/>
+              <a:t> unterschiedlich stark sind hat dieses Merkmal einen indikativen Charakter  </a:t>
+            </a:r>
+            <a:br>
+              <a:rPr lang="de-DE" dirty="0"/>
+            </a:br>
+            <a:r>
+              <a:rPr lang="de-DE" dirty="0"/>
+              <a:t>- Überlappung: Boxen stark überlappen-&gt; einzelne Merkmal allein  nicht aussagekräftig genug für einfache Unterscheidung. In  KI-Anwendung mit anderen kombinieren- Größe der Boxen: </a:t>
+            </a:r>
+            <a:r>
+              <a:rPr lang="de-DE" dirty="0" err="1"/>
+              <a:t>stabilität</a:t>
+            </a:r>
+            <a:r>
+              <a:rPr lang="de-DE" dirty="0"/>
+              <a:t> von Merkmalen. Große Boxen -&gt; große Varianz, weniger sinnvoll für Klassifikation</a:t>
+            </a:r>
+            <a:br>
+              <a:rPr lang="de-DE" dirty="0"/>
+            </a:br>
+            <a:r>
+              <a:rPr lang="de-DE" dirty="0"/>
+              <a:t>- Ausreißer: auf Messfehler, Rauschen oder besondere Anomalien im Zahnrad hinweisen(die für eine KI als „Herausforderung“ oder „Indikator“ dienen können)</a:t>
+            </a:r>
+          </a:p>
+          <a:p>
+            <a:pPr marL="171450" indent="-171450">
+              <a:buFontTx/>
+              <a:buChar char="-"/>
+            </a:pPr>
+            <a:r>
+              <a:rPr lang="de-DE" dirty="0"/>
+              <a:t>=&gt; Zentral für Verständnis, nehmen trotzdem alle\man könnte gewichten</a:t>
+            </a:r>
           </a:p>
         </p:txBody>
       </p:sp>
@@ -2530,10 +2632,9 @@
           <a:lstStyle/>
           <a:p>
             <a:r>
-              <a:rPr lang="de-DE"/>
-              <a:t>(S)</a:t>
-            </a:r>
-            <a:endParaRPr lang="de-DE" dirty="0"/>
+              <a:rPr lang="de-DE" dirty="0"/>
+              <a:t>T</a:t>
+            </a:r>
           </a:p>
         </p:txBody>
       </p:sp>
@@ -9253,55 +9354,6 @@
               <a:t>Explorative Datenanalyse</a:t>
             </a:r>
             <a:endParaRPr lang="de-DE" dirty="0"/>
-          </a:p>
-        </p:txBody>
-      </p:sp>
-      <p:sp>
-        <p:nvSpPr>
-          <p:cNvPr id="6" name="Textfeld 5">
-            <a:extLst>
-              <a:ext uri="{FF2B5EF4-FFF2-40B4-BE49-F238E27FC236}">
-                <a16:creationId xmlns:a16="http://schemas.microsoft.com/office/drawing/2014/main" id="{DBCE15F3-9C3E-D3E2-9110-0C55D36695D8}"/>
-              </a:ext>
-            </a:extLst>
-          </p:cNvPr>
-          <p:cNvSpPr txBox="1"/>
-          <p:nvPr/>
-        </p:nvSpPr>
-        <p:spPr>
-          <a:xfrm>
-            <a:off x="625186" y="5486910"/>
-            <a:ext cx="10941627" cy="461665"/>
-          </a:xfrm>
-          <a:prstGeom prst="rect">
-            <a:avLst/>
-          </a:prstGeom>
-          <a:noFill/>
-        </p:spPr>
-        <p:txBody>
-          <a:bodyPr wrap="square" rtlCol="0">
-            <a:spAutoFit/>
-          </a:bodyPr>
-          <a:lstStyle/>
-          <a:p>
-            <a:r>
-              <a:rPr lang="de-DE" dirty="0">
-                <a:latin typeface="+mn-lt"/>
-              </a:rPr>
-              <a:t>Prüfen: </a:t>
-            </a:r>
-            <a:r>
-              <a:rPr lang="de-DE" dirty="0" err="1">
-                <a:latin typeface="+mn-lt"/>
-              </a:rPr>
-              <a:t>specture</a:t>
-            </a:r>
-            <a:r>
-              <a:rPr lang="de-DE" dirty="0">
-                <a:latin typeface="+mn-lt"/>
-              </a:rPr>
-              <a:t> Rolloff … (Tim)</a:t>
-            </a:r>
           </a:p>
         </p:txBody>
       </p:sp>

--- a/Task_2/Task2Powerpoint.pptx
+++ b/Task_2/Task2Powerpoint.pptx
@@ -2366,11 +2366,7 @@
             </a:br>
             <a:r>
               <a:rPr lang="de-DE" dirty="0"/>
-              <a:t>- Ausreißer: auf Messfehler, Rauschen oder besondere Anomalien im Zahnrad hinweisen(die für eine KI als „Herausforderung“ oder „Indikator“ dienen </a:t>
-            </a:r>
-            <a:r>
-              <a:rPr lang="de-DE"/>
-              <a:t>können)</a:t>
+              <a:t>- Ausreißer: auf Messfehler, Rauschen oder besondere Anomalien im Zahnrad hinweisen(die für eine KI als „Herausforderung“ oder „Indikator“ dienen können)</a:t>
             </a:r>
           </a:p>
           <a:p>
@@ -2379,12 +2375,8 @@
               <a:buChar char="-"/>
             </a:pPr>
             <a:r>
-              <a:rPr lang="de-DE"/>
-              <a:t>=&gt; </a:t>
-            </a:r>
-            <a:r>
               <a:rPr lang="de-DE" dirty="0"/>
-              <a:t>Zentral für Verständnis, nehmen trotzdem alle\man könnte gewichten</a:t>
+              <a:t>=&gt; Zentral für Verständnis, nehmen trotzdem alle\man könnte gewichten</a:t>
             </a:r>
           </a:p>
         </p:txBody>
@@ -6563,7 +6555,27 @@
             </a:pPr>
             <a:r>
               <a:rPr lang="de-DE" dirty="0"/>
-              <a:t>Die PCA-Darstellung der extrahierten Merkmale zeigt, dass Z05 klar separiert von den übrigen Zahnrädern liegt. Dies deutet darauf hin, dass sich dessen Signalcharakteristik signifikant unterscheidet. </a:t>
+              <a:t>PCA-Darstellung der extrahierten Merkmale zeigt</a:t>
+            </a:r>
+          </a:p>
+          <a:p>
+            <a:pPr lvl="1">
+              <a:buFont typeface="Arial" panose="020B0604020202020204" pitchFamily="34" charset="0"/>
+              <a:buChar char="•"/>
+            </a:pPr>
+            <a:r>
+              <a:rPr lang="de-DE" dirty="0"/>
+              <a:t>Z05 klar separiert von den übrigen Zahnrädern</a:t>
+            </a:r>
+          </a:p>
+          <a:p>
+            <a:pPr lvl="1">
+              <a:buFont typeface="Arial" panose="020B0604020202020204" pitchFamily="34" charset="0"/>
+              <a:buChar char="•"/>
+            </a:pPr>
+            <a:r>
+              <a:rPr lang="de-DE" dirty="0"/>
+              <a:t>Signalcharakteristik von Z05 unterscheidet sich signifikant von den anderen </a:t>
             </a:r>
           </a:p>
           <a:p>
@@ -6573,7 +6585,17 @@
             </a:pPr>
             <a:r>
               <a:rPr lang="de-DE" dirty="0"/>
-              <a:t>Damit konnten die Signale in eine Merkmalsform überführt werden, die sich grundsätzlich für eine automatisierte Klassifikation oder Anomalie Erkennung eignet.</a:t>
+              <a:t>Signale wurden in eine Merkmalsform überführt </a:t>
+            </a:r>
+          </a:p>
+          <a:p>
+            <a:pPr lvl="1">
+              <a:buFont typeface="Arial" panose="020B0604020202020204" pitchFamily="34" charset="0"/>
+              <a:buChar char="•"/>
+            </a:pPr>
+            <a:r>
+              <a:rPr lang="de-DE" dirty="0"/>
+              <a:t>Eignet sich für eine automatisierte Klassifikation oder Anomalie Erkennung</a:t>
             </a:r>
           </a:p>
         </p:txBody>

--- a/Task_2/Task2Powerpoint.pptx
+++ b/Task_2/Task2Powerpoint.pptx
@@ -273,7 +273,7 @@
           <a:p>
             <a:fld id="{75AB4CA9-CCE6-4DE5-84AD-E1F7B6CB5CBB}" type="datetimeFigureOut">
               <a:rPr lang="de-DE" smtClean="0"/>
-              <a:t>24.06.2026</a:t>
+              <a:t>25.06.2026</a:t>
             </a:fld>
             <a:endParaRPr lang="de-DE"/>
           </a:p>
@@ -450,7 +450,7 @@
           <a:p>
             <a:fld id="{52D5829F-2F94-0B44-A96D-AE852A87AC61}" type="datetimeFigureOut">
               <a:rPr lang="de-DE" smtClean="0"/>
-              <a:t>24.06.2026</a:t>
+              <a:t>25.06.2026</a:t>
             </a:fld>
             <a:endParaRPr lang="de-DE"/>
           </a:p>
@@ -7997,11 +7997,38 @@
           <a:bodyPr/>
           <a:lstStyle/>
           <a:p>
+            <a:pPr marL="0" indent="0">
+              <a:buNone/>
+            </a:pPr>
+            <a:r>
+              <a:rPr lang="de-DE" dirty="0"/>
+              <a:t>Generell:</a:t>
+            </a:r>
+          </a:p>
+          <a:p>
             <a:pPr>
               <a:buFont typeface="Arial" panose="020B0604020202020204" pitchFamily="34" charset="0"/>
               <a:buChar char="•"/>
             </a:pPr>
+            <a:r>
+              <a:rPr lang="de-DE" dirty="0"/>
+              <a:t>Automatische Klassifizierung beschädigter Zahnräder anhand von Merkmalen (Features)</a:t>
+            </a:r>
+          </a:p>
+          <a:p>
+            <a:pPr marL="0" indent="0">
+              <a:buNone/>
+            </a:pPr>
             <a:endParaRPr lang="de-DE" dirty="0"/>
+          </a:p>
+          <a:p>
+            <a:pPr marL="0" indent="0">
+              <a:buNone/>
+            </a:pPr>
+            <a:r>
+              <a:rPr lang="de-DE" dirty="0"/>
+              <a:t>In diesem Task:</a:t>
+            </a:r>
           </a:p>
           <a:p>
             <a:pPr>
@@ -8010,24 +8037,7 @@
             </a:pPr>
             <a:r>
               <a:rPr lang="de-DE" dirty="0"/>
-              <a:t>Automatische Klassifizierung beschädigter Zahnräder anhand von Merkmalen (Features)</a:t>
-            </a:r>
-          </a:p>
-          <a:p>
-            <a:pPr>
-              <a:buFont typeface="Arial" panose="020B0604020202020204" pitchFamily="34" charset="0"/>
-              <a:buChar char="•"/>
-            </a:pPr>
-            <a:endParaRPr lang="de-DE" dirty="0"/>
-          </a:p>
-          <a:p>
-            <a:pPr>
-              <a:buFont typeface="Arial" panose="020B0604020202020204" pitchFamily="34" charset="0"/>
-              <a:buChar char="•"/>
-            </a:pPr>
-            <a:r>
-              <a:rPr lang="de-DE" dirty="0"/>
-              <a:t>In diesem Task ist unser Ziel die Vorbereitung für die Automatisierung</a:t>
+              <a:t>ist unser Ziel die Vorbereitung für die Automatisierung</a:t>
             </a:r>
           </a:p>
         </p:txBody>
@@ -8206,7 +8216,7 @@
           <a:bodyPr/>
           <a:lstStyle/>
           <a:p>
-            <a:pPr algn="l" fontAlgn="base">
+            <a:pPr>
               <a:spcAft>
                 <a:spcPts val="300"/>
               </a:spcAft>
@@ -8214,14 +8224,10 @@
               <a:buChar char="•"/>
             </a:pPr>
             <a:r>
-              <a:rPr lang="de-DE" dirty="0"/>
-              <a:t>Gruppieren der Features</a:t>
-            </a:r>
-            <a:r>
               <a:rPr lang="de-DE" b="0" i="0" dirty="0">
                 <a:effectLst/>
               </a:rPr>
-              <a:t> </a:t>
+              <a:t>Zeitbereich: </a:t>
             </a:r>
           </a:p>
           <a:p>
@@ -8236,11 +8242,11 @@
               <a:rPr lang="de-DE" b="0" i="0" dirty="0">
                 <a:effectLst/>
               </a:rPr>
-              <a:t>Zeitbereich: RMS Energy, Zero Crossing Rate</a:t>
-            </a:r>
-          </a:p>
-          <a:p>
-            <a:pPr lvl="2">
+              <a:t>RMS Energy, Zero Crossing Rate</a:t>
+            </a:r>
+          </a:p>
+          <a:p>
+            <a:pPr>
               <a:spcAft>
                 <a:spcPts val="300"/>
               </a:spcAft>
@@ -8251,7 +8257,7 @@
               <a:rPr lang="de-DE" b="0" i="0" dirty="0">
                 <a:effectLst/>
               </a:rPr>
-              <a:t>Wie stark ist das Signal, wie viele schnelle Wechsel gibt es?</a:t>
+              <a:t>Frequenzbereich: </a:t>
             </a:r>
           </a:p>
           <a:p>
@@ -8263,15 +8269,21 @@
               <a:buChar char="•"/>
             </a:pPr>
             <a:r>
+              <a:rPr lang="de-DE" b="0" i="0" dirty="0" err="1">
+                <a:effectLst/>
+              </a:rPr>
+              <a:t>Spectral</a:t>
+            </a:r>
+            <a:r>
               <a:rPr lang="de-DE" b="0" i="0" dirty="0">
                 <a:effectLst/>
               </a:rPr>
-              <a:t>Frequenzbereich: Spectral Centroid, Bandwidth, Rolloff, Contrast </a:t>
+              <a:t> Centroid, Bandwidth, Rolloff, Contrast </a:t>
             </a:r>
             <a:endParaRPr lang="de-DE" dirty="0"/>
           </a:p>
           <a:p>
-            <a:pPr lvl="2">
+            <a:pPr>
               <a:spcAft>
                 <a:spcPts val="300"/>
               </a:spcAft>
@@ -8282,26 +8294,23 @@
               <a:rPr lang="de-DE" b="0" i="0" dirty="0">
                 <a:effectLst/>
               </a:rPr>
-              <a:t>Wo liegt Energie im Frequenzspektrum, wie breit/auffällig ist sie verteilt?</a:t>
-            </a:r>
-          </a:p>
-          <a:p>
-            <a:pPr lvl="1">
+              <a:t>MFCCs / Delta-MFCCs</a:t>
+            </a:r>
+          </a:p>
+          <a:p>
+            <a:pPr>
               <a:spcAft>
                 <a:spcPts val="300"/>
               </a:spcAft>
               <a:buFont typeface="Arial" panose="020B0604020202020204" pitchFamily="34" charset="0"/>
               <a:buChar char="•"/>
             </a:pPr>
-            <a:r>
-              <a:rPr lang="de-DE" b="0" i="0" dirty="0">
-                <a:effectLst/>
-              </a:rPr>
-              <a:t>MFCCs / Delta-MFCCs:</a:t>
-            </a:r>
-          </a:p>
-          <a:p>
-            <a:pPr lvl="2">
+            <a:endParaRPr lang="de-DE" b="0" i="0" dirty="0">
+              <a:effectLst/>
+            </a:endParaRPr>
+          </a:p>
+          <a:p>
+            <a:pPr>
               <a:spcAft>
                 <a:spcPts val="300"/>
               </a:spcAft>
@@ -8312,48 +8321,7 @@
               <a:rPr lang="de-DE" b="0" i="0" dirty="0">
                 <a:effectLst/>
               </a:rPr>
-              <a:t>Kompakte Beschreibung der spektralen Form und ihrer Veränderung.</a:t>
-            </a:r>
-          </a:p>
-          <a:p>
-            <a:pPr lvl="1">
-              <a:spcAft>
-                <a:spcPts val="300"/>
-              </a:spcAft>
-              <a:buFont typeface="Arial" panose="020B0604020202020204" pitchFamily="34" charset="0"/>
-              <a:buChar char="•"/>
-            </a:pPr>
-            <a:r>
-              <a:rPr lang="de-DE" b="0" i="0" dirty="0">
-                <a:effectLst/>
-              </a:rPr>
-              <a:t>Chroma:</a:t>
-            </a:r>
-          </a:p>
-          <a:p>
-            <a:pPr lvl="2">
-              <a:spcAft>
-                <a:spcPts val="300"/>
-              </a:spcAft>
-              <a:buFont typeface="Arial" panose="020B0604020202020204" pitchFamily="34" charset="0"/>
-              <a:buChar char="•"/>
-            </a:pPr>
-            <a:r>
-              <a:rPr lang="de-DE" b="0" i="0" dirty="0">
-                <a:effectLst/>
-              </a:rPr>
-              <a:t>Erfasst wiederkehrende spektrale Muster; bei technischen Signalen weniger intuitiv, </a:t>
-            </a:r>
-            <a:br>
-              <a:rPr lang="de-DE" b="0" i="0" dirty="0">
-                <a:effectLst/>
-              </a:rPr>
-            </a:br>
-            <a:r>
-              <a:rPr lang="de-DE" b="0" i="0" dirty="0">
-                <a:effectLst/>
-              </a:rPr>
-              <a:t>aber als Mustermerkmal nutzbar.</a:t>
+              <a:t>Chroma</a:t>
             </a:r>
           </a:p>
         </p:txBody>
